--- a/courseware/202609_ADS_W02_VM_Shell_DevEnv.pptx
+++ b/courseware/202609_ADS_W02_VM_Shell_DevEnv.pptx
@@ -4,37 +4,40 @@
   <p:sldMasterIdLst>
     <p:sldMasterId id="2147483648" r:id="rId1"/>
   </p:sldMasterIdLst>
+  <p:notesMasterIdLst>
+    <p:notesMasterId r:id="rId30"/>
+  </p:notesMasterIdLst>
   <p:sldIdLst>
-    <p:sldId id="256" r:id="rId7"/>
-    <p:sldId id="257" r:id="rId8"/>
-    <p:sldId id="258" r:id="rId9"/>
-    <p:sldId id="259" r:id="rId10"/>
-    <p:sldId id="260" r:id="rId11"/>
-    <p:sldId id="261" r:id="rId12"/>
-    <p:sldId id="262" r:id="rId13"/>
-    <p:sldId id="263" r:id="rId14"/>
-    <p:sldId id="264" r:id="rId15"/>
-    <p:sldId id="265" r:id="rId16"/>
-    <p:sldId id="266" r:id="rId17"/>
-    <p:sldId id="267" r:id="rId18"/>
-    <p:sldId id="268" r:id="rId19"/>
-    <p:sldId id="269" r:id="rId20"/>
-    <p:sldId id="270" r:id="rId21"/>
-    <p:sldId id="271" r:id="rId22"/>
-    <p:sldId id="272" r:id="rId23"/>
-    <p:sldId id="273" r:id="rId24"/>
-    <p:sldId id="274" r:id="rId25"/>
-    <p:sldId id="275" r:id="rId26"/>
-    <p:sldId id="276" r:id="rId27"/>
-    <p:sldId id="277" r:id="rId28"/>
-    <p:sldId id="278" r:id="rId29"/>
-    <p:sldId id="279" r:id="rId30"/>
-    <p:sldId id="280" r:id="rId31"/>
-    <p:sldId id="281" r:id="rId32"/>
-    <p:sldId id="282" r:id="rId33"/>
-    <p:sldId id="283" r:id="rId34"/>
+    <p:sldId id="256" r:id="rId2"/>
+    <p:sldId id="257" r:id="rId3"/>
+    <p:sldId id="258" r:id="rId4"/>
+    <p:sldId id="259" r:id="rId5"/>
+    <p:sldId id="260" r:id="rId6"/>
+    <p:sldId id="261" r:id="rId7"/>
+    <p:sldId id="262" r:id="rId8"/>
+    <p:sldId id="263" r:id="rId9"/>
+    <p:sldId id="264" r:id="rId10"/>
+    <p:sldId id="265" r:id="rId11"/>
+    <p:sldId id="266" r:id="rId12"/>
+    <p:sldId id="267" r:id="rId13"/>
+    <p:sldId id="268" r:id="rId14"/>
+    <p:sldId id="269" r:id="rId15"/>
+    <p:sldId id="270" r:id="rId16"/>
+    <p:sldId id="271" r:id="rId17"/>
+    <p:sldId id="272" r:id="rId18"/>
+    <p:sldId id="273" r:id="rId19"/>
+    <p:sldId id="274" r:id="rId20"/>
+    <p:sldId id="275" r:id="rId21"/>
+    <p:sldId id="276" r:id="rId22"/>
+    <p:sldId id="277" r:id="rId23"/>
+    <p:sldId id="278" r:id="rId24"/>
+    <p:sldId id="279" r:id="rId25"/>
+    <p:sldId id="280" r:id="rId26"/>
+    <p:sldId id="281" r:id="rId27"/>
+    <p:sldId id="282" r:id="rId28"/>
+    <p:sldId id="283" r:id="rId29"/>
   </p:sldIdLst>
-  <p:sldSz cx="12191695" cy="6858000" type="screen4x3"/>
+  <p:sldSz cx="12192000" cy="6858000"/>
   <p:notesSz cx="6858000" cy="9144000"/>
   <p:defaultTextStyle>
     <a:defPPr>
@@ -131,7 +134,457 @@
       </a:defRPr>
     </a:lvl9pPr>
   </p:defaultTextStyle>
+  <p:extLst>
+    <p:ext uri="{EFAFB233-063F-42B5-8137-9DF3F51BA10A}">
+      <p15:sldGuideLst xmlns:p15="http://schemas.microsoft.com/office/powerpoint/2012/main">
+        <p15:guide id="1" orient="horz" pos="2160">
+          <p15:clr>
+            <a:srgbClr val="A4A3A4"/>
+          </p15:clr>
+        </p15:guide>
+        <p15:guide id="2" pos="2880">
+          <p15:clr>
+            <a:srgbClr val="A4A3A4"/>
+          </p15:clr>
+        </p15:guide>
+      </p15:sldGuideLst>
+    </p:ext>
+  </p:extLst>
 </p:presentation>
+</file>
+
+<file path=ppt/notesMasters/notesMaster1.xml><?xml version="1.0" encoding="utf-8"?>
+<p:notesMaster xmlns:a="http://schemas.openxmlformats.org/drawingml/2006/main" xmlns:r="http://schemas.openxmlformats.org/officeDocument/2006/relationships" xmlns:p="http://schemas.openxmlformats.org/presentationml/2006/main">
+  <p:cSld>
+    <p:bg>
+      <p:bgRef idx="1001">
+        <a:schemeClr val="bg1"/>
+      </p:bgRef>
+    </p:bg>
+    <p:spTree>
+      <p:nvGrpSpPr>
+        <p:cNvPr id="1" name=""/>
+        <p:cNvGrpSpPr/>
+        <p:nvPr/>
+      </p:nvGrpSpPr>
+      <p:grpSpPr>
+        <a:xfrm>
+          <a:off x="0" y="0"/>
+          <a:ext cx="0" cy="0"/>
+          <a:chOff x="0" y="0"/>
+          <a:chExt cx="0" cy="0"/>
+        </a:xfrm>
+      </p:grpSpPr>
+      <p:sp>
+        <p:nvSpPr>
+          <p:cNvPr id="2" name="Header Placeholder 1"/>
+          <p:cNvSpPr>
+            <a:spLocks noGrp="1"/>
+          </p:cNvSpPr>
+          <p:nvPr>
+            <p:ph type="hdr" sz="quarter"/>
+          </p:nvPr>
+        </p:nvSpPr>
+        <p:spPr>
+          <a:xfrm>
+            <a:off x="0" y="0"/>
+            <a:ext cx="2971800" cy="458788"/>
+          </a:xfrm>
+          <a:prstGeom prst="rect">
+            <a:avLst/>
+          </a:prstGeom>
+        </p:spPr>
+        <p:txBody>
+          <a:bodyPr vert="horz" lIns="91440" tIns="45720" rIns="91440" bIns="45720" rtlCol="0"/>
+          <a:lstStyle>
+            <a:lvl1pPr algn="l">
+              <a:defRPr sz="1200"/>
+            </a:lvl1pPr>
+          </a:lstStyle>
+          <a:p>
+            <a:endParaRPr lang="en-CN"/>
+          </a:p>
+        </p:txBody>
+      </p:sp>
+      <p:sp>
+        <p:nvSpPr>
+          <p:cNvPr id="3" name="Date Placeholder 2"/>
+          <p:cNvSpPr>
+            <a:spLocks noGrp="1"/>
+          </p:cNvSpPr>
+          <p:nvPr>
+            <p:ph type="dt" idx="1"/>
+          </p:nvPr>
+        </p:nvSpPr>
+        <p:spPr>
+          <a:xfrm>
+            <a:off x="3884613" y="0"/>
+            <a:ext cx="2971800" cy="458788"/>
+          </a:xfrm>
+          <a:prstGeom prst="rect">
+            <a:avLst/>
+          </a:prstGeom>
+        </p:spPr>
+        <p:txBody>
+          <a:bodyPr vert="horz" lIns="91440" tIns="45720" rIns="91440" bIns="45720" rtlCol="0"/>
+          <a:lstStyle>
+            <a:lvl1pPr algn="r">
+              <a:defRPr sz="1200"/>
+            </a:lvl1pPr>
+          </a:lstStyle>
+          <a:p>
+            <a:fld id="{D839DCA1-B525-A448-A440-A84F477510AF}" type="datetimeFigureOut">
+              <a:rPr lang="en-CN" smtClean="0"/>
+              <a:t>2026/9/1</a:t>
+            </a:fld>
+            <a:endParaRPr lang="en-CN"/>
+          </a:p>
+        </p:txBody>
+      </p:sp>
+      <p:sp>
+        <p:nvSpPr>
+          <p:cNvPr id="4" name="Slide Image Placeholder 3"/>
+          <p:cNvSpPr>
+            <a:spLocks noGrp="1" noRot="1" noChangeAspect="1"/>
+          </p:cNvSpPr>
+          <p:nvPr>
+            <p:ph type="sldImg" idx="2"/>
+          </p:nvPr>
+        </p:nvSpPr>
+        <p:spPr>
+          <a:xfrm>
+            <a:off x="685800" y="1143000"/>
+            <a:ext cx="5486400" cy="3086100"/>
+          </a:xfrm>
+          <a:prstGeom prst="rect">
+            <a:avLst/>
+          </a:prstGeom>
+          <a:noFill/>
+          <a:ln w="12700">
+            <a:solidFill>
+              <a:prstClr val="black"/>
+            </a:solidFill>
+          </a:ln>
+        </p:spPr>
+        <p:txBody>
+          <a:bodyPr vert="horz" lIns="91440" tIns="45720" rIns="91440" bIns="45720" rtlCol="0" anchor="ctr"/>
+          <a:lstStyle/>
+          <a:p>
+            <a:endParaRPr lang="en-CN"/>
+          </a:p>
+        </p:txBody>
+      </p:sp>
+      <p:sp>
+        <p:nvSpPr>
+          <p:cNvPr id="5" name="Notes Placeholder 4"/>
+          <p:cNvSpPr>
+            <a:spLocks noGrp="1"/>
+          </p:cNvSpPr>
+          <p:nvPr>
+            <p:ph type="body" sz="quarter" idx="3"/>
+          </p:nvPr>
+        </p:nvSpPr>
+        <p:spPr>
+          <a:xfrm>
+            <a:off x="685800" y="4400550"/>
+            <a:ext cx="5486400" cy="3600450"/>
+          </a:xfrm>
+          <a:prstGeom prst="rect">
+            <a:avLst/>
+          </a:prstGeom>
+        </p:spPr>
+        <p:txBody>
+          <a:bodyPr vert="horz" lIns="91440" tIns="45720" rIns="91440" bIns="45720" rtlCol="0"/>
+          <a:lstStyle/>
+          <a:p>
+            <a:pPr lvl="0"/>
+            <a:r>
+              <a:rPr lang="en-US"/>
+              <a:t>Click to edit Master text styles</a:t>
+            </a:r>
+          </a:p>
+          <a:p>
+            <a:pPr lvl="1"/>
+            <a:r>
+              <a:rPr lang="en-US"/>
+              <a:t>Second level</a:t>
+            </a:r>
+          </a:p>
+          <a:p>
+            <a:pPr lvl="2"/>
+            <a:r>
+              <a:rPr lang="en-US"/>
+              <a:t>Third level</a:t>
+            </a:r>
+          </a:p>
+          <a:p>
+            <a:pPr lvl="3"/>
+            <a:r>
+              <a:rPr lang="en-US"/>
+              <a:t>Fourth level</a:t>
+            </a:r>
+          </a:p>
+          <a:p>
+            <a:pPr lvl="4"/>
+            <a:r>
+              <a:rPr lang="en-US"/>
+              <a:t>Fifth level</a:t>
+            </a:r>
+            <a:endParaRPr lang="en-CN"/>
+          </a:p>
+        </p:txBody>
+      </p:sp>
+      <p:sp>
+        <p:nvSpPr>
+          <p:cNvPr id="6" name="Footer Placeholder 5"/>
+          <p:cNvSpPr>
+            <a:spLocks noGrp="1"/>
+          </p:cNvSpPr>
+          <p:nvPr>
+            <p:ph type="ftr" sz="quarter" idx="4"/>
+          </p:nvPr>
+        </p:nvSpPr>
+        <p:spPr>
+          <a:xfrm>
+            <a:off x="0" y="8685213"/>
+            <a:ext cx="2971800" cy="458787"/>
+          </a:xfrm>
+          <a:prstGeom prst="rect">
+            <a:avLst/>
+          </a:prstGeom>
+        </p:spPr>
+        <p:txBody>
+          <a:bodyPr vert="horz" lIns="91440" tIns="45720" rIns="91440" bIns="45720" rtlCol="0" anchor="b"/>
+          <a:lstStyle>
+            <a:lvl1pPr algn="l">
+              <a:defRPr sz="1200"/>
+            </a:lvl1pPr>
+          </a:lstStyle>
+          <a:p>
+            <a:endParaRPr lang="en-CN"/>
+          </a:p>
+        </p:txBody>
+      </p:sp>
+      <p:sp>
+        <p:nvSpPr>
+          <p:cNvPr id="7" name="Slide Number Placeholder 6"/>
+          <p:cNvSpPr>
+            <a:spLocks noGrp="1"/>
+          </p:cNvSpPr>
+          <p:nvPr>
+            <p:ph type="sldNum" sz="quarter" idx="5"/>
+          </p:nvPr>
+        </p:nvSpPr>
+        <p:spPr>
+          <a:xfrm>
+            <a:off x="3884613" y="8685213"/>
+            <a:ext cx="2971800" cy="458787"/>
+          </a:xfrm>
+          <a:prstGeom prst="rect">
+            <a:avLst/>
+          </a:prstGeom>
+        </p:spPr>
+        <p:txBody>
+          <a:bodyPr vert="horz" lIns="91440" tIns="45720" rIns="91440" bIns="45720" rtlCol="0" anchor="b"/>
+          <a:lstStyle>
+            <a:lvl1pPr algn="r">
+              <a:defRPr sz="1200"/>
+            </a:lvl1pPr>
+          </a:lstStyle>
+          <a:p>
+            <a:fld id="{4464E671-522B-C74D-9CE6-E69A55A85D6F}" type="slidenum">
+              <a:rPr lang="en-CN" smtClean="0"/>
+              <a:t>‹#›</a:t>
+            </a:fld>
+            <a:endParaRPr lang="en-CN"/>
+          </a:p>
+        </p:txBody>
+      </p:sp>
+    </p:spTree>
+    <p:extLst>
+      <p:ext uri="{BB962C8B-B14F-4D97-AF65-F5344CB8AC3E}">
+        <p14:creationId xmlns:p14="http://schemas.microsoft.com/office/powerpoint/2010/main" val="1215036054"/>
+      </p:ext>
+    </p:extLst>
+  </p:cSld>
+  <p:clrMap bg1="lt1" tx1="dk1" bg2="lt2" tx2="dk2" accent1="accent1" accent2="accent2" accent3="accent3" accent4="accent4" accent5="accent5" accent6="accent6" hlink="hlink" folHlink="folHlink"/>
+  <p:notesStyle>
+    <a:lvl1pPr marL="0" algn="l" defTabSz="914400" rtl="0" eaLnBrk="1" latinLnBrk="0" hangingPunct="1">
+      <a:defRPr sz="1200" kern="1200">
+        <a:solidFill>
+          <a:schemeClr val="tx1"/>
+        </a:solidFill>
+        <a:latin typeface="+mn-lt"/>
+        <a:ea typeface="+mn-ea"/>
+        <a:cs typeface="+mn-cs"/>
+      </a:defRPr>
+    </a:lvl1pPr>
+    <a:lvl2pPr marL="457200" algn="l" defTabSz="914400" rtl="0" eaLnBrk="1" latinLnBrk="0" hangingPunct="1">
+      <a:defRPr sz="1200" kern="1200">
+        <a:solidFill>
+          <a:schemeClr val="tx1"/>
+        </a:solidFill>
+        <a:latin typeface="+mn-lt"/>
+        <a:ea typeface="+mn-ea"/>
+        <a:cs typeface="+mn-cs"/>
+      </a:defRPr>
+    </a:lvl2pPr>
+    <a:lvl3pPr marL="914400" algn="l" defTabSz="914400" rtl="0" eaLnBrk="1" latinLnBrk="0" hangingPunct="1">
+      <a:defRPr sz="1200" kern="1200">
+        <a:solidFill>
+          <a:schemeClr val="tx1"/>
+        </a:solidFill>
+        <a:latin typeface="+mn-lt"/>
+        <a:ea typeface="+mn-ea"/>
+        <a:cs typeface="+mn-cs"/>
+      </a:defRPr>
+    </a:lvl3pPr>
+    <a:lvl4pPr marL="1371600" algn="l" defTabSz="914400" rtl="0" eaLnBrk="1" latinLnBrk="0" hangingPunct="1">
+      <a:defRPr sz="1200" kern="1200">
+        <a:solidFill>
+          <a:schemeClr val="tx1"/>
+        </a:solidFill>
+        <a:latin typeface="+mn-lt"/>
+        <a:ea typeface="+mn-ea"/>
+        <a:cs typeface="+mn-cs"/>
+      </a:defRPr>
+    </a:lvl4pPr>
+    <a:lvl5pPr marL="1828800" algn="l" defTabSz="914400" rtl="0" eaLnBrk="1" latinLnBrk="0" hangingPunct="1">
+      <a:defRPr sz="1200" kern="1200">
+        <a:solidFill>
+          <a:schemeClr val="tx1"/>
+        </a:solidFill>
+        <a:latin typeface="+mn-lt"/>
+        <a:ea typeface="+mn-ea"/>
+        <a:cs typeface="+mn-cs"/>
+      </a:defRPr>
+    </a:lvl5pPr>
+    <a:lvl6pPr marL="2286000" algn="l" defTabSz="914400" rtl="0" eaLnBrk="1" latinLnBrk="0" hangingPunct="1">
+      <a:defRPr sz="1200" kern="1200">
+        <a:solidFill>
+          <a:schemeClr val="tx1"/>
+        </a:solidFill>
+        <a:latin typeface="+mn-lt"/>
+        <a:ea typeface="+mn-ea"/>
+        <a:cs typeface="+mn-cs"/>
+      </a:defRPr>
+    </a:lvl6pPr>
+    <a:lvl7pPr marL="2743200" algn="l" defTabSz="914400" rtl="0" eaLnBrk="1" latinLnBrk="0" hangingPunct="1">
+      <a:defRPr sz="1200" kern="1200">
+        <a:solidFill>
+          <a:schemeClr val="tx1"/>
+        </a:solidFill>
+        <a:latin typeface="+mn-lt"/>
+        <a:ea typeface="+mn-ea"/>
+        <a:cs typeface="+mn-cs"/>
+      </a:defRPr>
+    </a:lvl7pPr>
+    <a:lvl8pPr marL="3200400" algn="l" defTabSz="914400" rtl="0" eaLnBrk="1" latinLnBrk="0" hangingPunct="1">
+      <a:defRPr sz="1200" kern="1200">
+        <a:solidFill>
+          <a:schemeClr val="tx1"/>
+        </a:solidFill>
+        <a:latin typeface="+mn-lt"/>
+        <a:ea typeface="+mn-ea"/>
+        <a:cs typeface="+mn-cs"/>
+      </a:defRPr>
+    </a:lvl8pPr>
+    <a:lvl9pPr marL="3657600" algn="l" defTabSz="914400" rtl="0" eaLnBrk="1" latinLnBrk="0" hangingPunct="1">
+      <a:defRPr sz="1200" kern="1200">
+        <a:solidFill>
+          <a:schemeClr val="tx1"/>
+        </a:solidFill>
+        <a:latin typeface="+mn-lt"/>
+        <a:ea typeface="+mn-ea"/>
+        <a:cs typeface="+mn-cs"/>
+      </a:defRPr>
+    </a:lvl9pPr>
+  </p:notesStyle>
+</p:notesMaster>
+</file>
+
+<file path=ppt/notesSlides/notesSlide1.xml><?xml version="1.0" encoding="utf-8"?>
+<p:notes xmlns:a="http://schemas.openxmlformats.org/drawingml/2006/main" xmlns:r="http://schemas.openxmlformats.org/officeDocument/2006/relationships" xmlns:p="http://schemas.openxmlformats.org/presentationml/2006/main">
+  <p:cSld>
+    <p:spTree>
+      <p:nvGrpSpPr>
+        <p:cNvPr id="1" name=""/>
+        <p:cNvGrpSpPr/>
+        <p:nvPr/>
+      </p:nvGrpSpPr>
+      <p:grpSpPr>
+        <a:xfrm>
+          <a:off x="0" y="0"/>
+          <a:ext cx="0" cy="0"/>
+          <a:chOff x="0" y="0"/>
+          <a:chExt cx="0" cy="0"/>
+        </a:xfrm>
+      </p:grpSpPr>
+      <p:sp>
+        <p:nvSpPr>
+          <p:cNvPr id="2" name="Slide Image Placeholder 1"/>
+          <p:cNvSpPr>
+            <a:spLocks noGrp="1" noRot="1" noChangeAspect="1"/>
+          </p:cNvSpPr>
+          <p:nvPr>
+            <p:ph type="sldImg"/>
+          </p:nvPr>
+        </p:nvSpPr>
+        <p:spPr/>
+      </p:sp>
+      <p:sp>
+        <p:nvSpPr>
+          <p:cNvPr id="3" name="Notes Placeholder 2"/>
+          <p:cNvSpPr>
+            <a:spLocks noGrp="1"/>
+          </p:cNvSpPr>
+          <p:nvPr>
+            <p:ph type="body" idx="1"/>
+          </p:nvPr>
+        </p:nvSpPr>
+        <p:spPr/>
+        <p:txBody>
+          <a:bodyPr/>
+          <a:lstStyle/>
+          <a:p>
+            <a:endParaRPr lang="en-CN" dirty="0"/>
+          </a:p>
+        </p:txBody>
+      </p:sp>
+      <p:sp>
+        <p:nvSpPr>
+          <p:cNvPr id="4" name="Slide Number Placeholder 3"/>
+          <p:cNvSpPr>
+            <a:spLocks noGrp="1"/>
+          </p:cNvSpPr>
+          <p:nvPr>
+            <p:ph type="sldNum" sz="quarter" idx="5"/>
+          </p:nvPr>
+        </p:nvSpPr>
+        <p:spPr/>
+        <p:txBody>
+          <a:bodyPr/>
+          <a:lstStyle/>
+          <a:p>
+            <a:fld id="{4464E671-522B-C74D-9CE6-E69A55A85D6F}" type="slidenum">
+              <a:rPr lang="en-CN" smtClean="0"/>
+              <a:t>18</a:t>
+            </a:fld>
+            <a:endParaRPr lang="en-CN"/>
+          </a:p>
+        </p:txBody>
+      </p:sp>
+    </p:spTree>
+    <p:extLst>
+      <p:ext uri="{BB962C8B-B14F-4D97-AF65-F5344CB8AC3E}">
+        <p14:creationId xmlns:p14="http://schemas.microsoft.com/office/powerpoint/2010/main" val="89398029"/>
+      </p:ext>
+    </p:extLst>
+  </p:cSld>
+  <p:clrMapOvr>
+    <a:masterClrMapping/>
+  </p:clrMapOvr>
+</p:notes>
 </file>
 
 <file path=ppt/slideLayouts/slideLayout1.xml><?xml version="1.0" encoding="utf-8"?>
@@ -172,10 +625,9 @@
           <a:lstStyle/>
           <a:p>
             <a:r>
-              <a:rPr lang="en-US" smtClean="0"/>
+              <a:rPr lang="en-US"/>
               <a:t>Click to edit Master title style</a:t>
             </a:r>
-            <a:endParaRPr lang="en-US"/>
           </a:p>
         </p:txBody>
       </p:sp>
@@ -291,10 +743,9 @@
           </a:lstStyle>
           <a:p>
             <a:r>
-              <a:rPr lang="en-US" smtClean="0"/>
+              <a:rPr lang="en-US"/>
               <a:t>Click to edit Master subtitle style</a:t>
             </a:r>
-            <a:endParaRPr lang="en-US"/>
           </a:p>
         </p:txBody>
       </p:sp>
@@ -315,7 +766,7 @@
           <a:p>
             <a:fld id="{5BCAD085-E8A6-8845-BD4E-CB4CCA059FC4}" type="datetimeFigureOut">
               <a:rPr lang="en-US" smtClean="0"/>
-              <a:t>1/27/13</a:t>
+              <a:t>9/1/26</a:t>
             </a:fld>
             <a:endParaRPr lang="en-US"/>
           </a:p>
@@ -409,10 +860,9 @@
           <a:lstStyle/>
           <a:p>
             <a:r>
-              <a:rPr lang="en-US" smtClean="0"/>
+              <a:rPr lang="en-US"/>
               <a:t>Click to edit Master title style</a:t>
             </a:r>
-            <a:endParaRPr lang="en-US"/>
           </a:p>
         </p:txBody>
       </p:sp>
@@ -433,38 +883,37 @@
           <a:p>
             <a:pPr lvl="0"/>
             <a:r>
-              <a:rPr lang="en-US" smtClean="0"/>
+              <a:rPr lang="en-US"/>
               <a:t>Click to edit Master text styles</a:t>
             </a:r>
           </a:p>
           <a:p>
             <a:pPr lvl="1"/>
             <a:r>
-              <a:rPr lang="en-US" smtClean="0"/>
+              <a:rPr lang="en-US"/>
               <a:t>Second level</a:t>
             </a:r>
           </a:p>
           <a:p>
             <a:pPr lvl="2"/>
             <a:r>
-              <a:rPr lang="en-US" smtClean="0"/>
+              <a:rPr lang="en-US"/>
               <a:t>Third level</a:t>
             </a:r>
           </a:p>
           <a:p>
             <a:pPr lvl="3"/>
             <a:r>
-              <a:rPr lang="en-US" smtClean="0"/>
+              <a:rPr lang="en-US"/>
               <a:t>Fourth level</a:t>
             </a:r>
           </a:p>
           <a:p>
             <a:pPr lvl="4"/>
             <a:r>
-              <a:rPr lang="en-US" smtClean="0"/>
+              <a:rPr lang="en-US"/>
               <a:t>Fifth level</a:t>
             </a:r>
-            <a:endParaRPr lang="en-US"/>
           </a:p>
         </p:txBody>
       </p:sp>
@@ -485,7 +934,7 @@
           <a:p>
             <a:fld id="{5BCAD085-E8A6-8845-BD4E-CB4CCA059FC4}" type="datetimeFigureOut">
               <a:rPr lang="en-US" smtClean="0"/>
-              <a:t>1/27/13</a:t>
+              <a:t>9/1/26</a:t>
             </a:fld>
             <a:endParaRPr lang="en-US"/>
           </a:p>
@@ -584,10 +1033,9 @@
           <a:lstStyle/>
           <a:p>
             <a:r>
-              <a:rPr lang="en-US" smtClean="0"/>
+              <a:rPr lang="en-US"/>
               <a:t>Click to edit Master title style</a:t>
             </a:r>
-            <a:endParaRPr lang="en-US"/>
           </a:p>
         </p:txBody>
       </p:sp>
@@ -613,38 +1061,37 @@
           <a:p>
             <a:pPr lvl="0"/>
             <a:r>
-              <a:rPr lang="en-US" smtClean="0"/>
+              <a:rPr lang="en-US"/>
               <a:t>Click to edit Master text styles</a:t>
             </a:r>
           </a:p>
           <a:p>
             <a:pPr lvl="1"/>
             <a:r>
-              <a:rPr lang="en-US" smtClean="0"/>
+              <a:rPr lang="en-US"/>
               <a:t>Second level</a:t>
             </a:r>
           </a:p>
           <a:p>
             <a:pPr lvl="2"/>
             <a:r>
-              <a:rPr lang="en-US" smtClean="0"/>
+              <a:rPr lang="en-US"/>
               <a:t>Third level</a:t>
             </a:r>
           </a:p>
           <a:p>
             <a:pPr lvl="3"/>
             <a:r>
-              <a:rPr lang="en-US" smtClean="0"/>
+              <a:rPr lang="en-US"/>
               <a:t>Fourth level</a:t>
             </a:r>
           </a:p>
           <a:p>
             <a:pPr lvl="4"/>
             <a:r>
-              <a:rPr lang="en-US" smtClean="0"/>
+              <a:rPr lang="en-US"/>
               <a:t>Fifth level</a:t>
             </a:r>
-            <a:endParaRPr lang="en-US"/>
           </a:p>
         </p:txBody>
       </p:sp>
@@ -665,7 +1112,7 @@
           <a:p>
             <a:fld id="{5BCAD085-E8A6-8845-BD4E-CB4CCA059FC4}" type="datetimeFigureOut">
               <a:rPr lang="en-US" smtClean="0"/>
-              <a:t>1/27/13</a:t>
+              <a:t>9/1/26</a:t>
             </a:fld>
             <a:endParaRPr lang="en-US"/>
           </a:p>
@@ -759,10 +1206,9 @@
           <a:lstStyle/>
           <a:p>
             <a:r>
-              <a:rPr lang="en-US" smtClean="0"/>
+              <a:rPr lang="en-US"/>
               <a:t>Click to edit Master title style</a:t>
             </a:r>
-            <a:endParaRPr lang="en-US"/>
           </a:p>
         </p:txBody>
       </p:sp>
@@ -783,38 +1229,37 @@
           <a:p>
             <a:pPr lvl="0"/>
             <a:r>
-              <a:rPr lang="en-US" smtClean="0"/>
+              <a:rPr lang="en-US"/>
               <a:t>Click to edit Master text styles</a:t>
             </a:r>
           </a:p>
           <a:p>
             <a:pPr lvl="1"/>
             <a:r>
-              <a:rPr lang="en-US" smtClean="0"/>
+              <a:rPr lang="en-US"/>
               <a:t>Second level</a:t>
             </a:r>
           </a:p>
           <a:p>
             <a:pPr lvl="2"/>
             <a:r>
-              <a:rPr lang="en-US" smtClean="0"/>
+              <a:rPr lang="en-US"/>
               <a:t>Third level</a:t>
             </a:r>
           </a:p>
           <a:p>
             <a:pPr lvl="3"/>
             <a:r>
-              <a:rPr lang="en-US" smtClean="0"/>
+              <a:rPr lang="en-US"/>
               <a:t>Fourth level</a:t>
             </a:r>
           </a:p>
           <a:p>
             <a:pPr lvl="4"/>
             <a:r>
-              <a:rPr lang="en-US" smtClean="0"/>
+              <a:rPr lang="en-US"/>
               <a:t>Fifth level</a:t>
             </a:r>
-            <a:endParaRPr lang="en-US"/>
           </a:p>
         </p:txBody>
       </p:sp>
@@ -835,7 +1280,7 @@
           <a:p>
             <a:fld id="{5BCAD085-E8A6-8845-BD4E-CB4CCA059FC4}" type="datetimeFigureOut">
               <a:rPr lang="en-US" smtClean="0"/>
-              <a:t>1/27/13</a:t>
+              <a:t>9/1/26</a:t>
             </a:fld>
             <a:endParaRPr lang="en-US"/>
           </a:p>
@@ -938,10 +1383,9 @@
           </a:lstStyle>
           <a:p>
             <a:r>
-              <a:rPr lang="en-US" smtClean="0"/>
+              <a:rPr lang="en-US"/>
               <a:t>Click to edit Master title style</a:t>
             </a:r>
-            <a:endParaRPr lang="en-US"/>
           </a:p>
         </p:txBody>
       </p:sp>
@@ -1058,7 +1502,7 @@
           <a:p>
             <a:pPr lvl="0"/>
             <a:r>
-              <a:rPr lang="en-US" smtClean="0"/>
+              <a:rPr lang="en-US"/>
               <a:t>Click to edit Master text styles</a:t>
             </a:r>
           </a:p>
@@ -1081,7 +1525,7 @@
           <a:p>
             <a:fld id="{5BCAD085-E8A6-8845-BD4E-CB4CCA059FC4}" type="datetimeFigureOut">
               <a:rPr lang="en-US" smtClean="0"/>
-              <a:t>1/27/13</a:t>
+              <a:t>9/1/26</a:t>
             </a:fld>
             <a:endParaRPr lang="en-US"/>
           </a:p>
@@ -1175,10 +1619,9 @@
           <a:lstStyle/>
           <a:p>
             <a:r>
-              <a:rPr lang="en-US" smtClean="0"/>
+              <a:rPr lang="en-US"/>
               <a:t>Click to edit Master title style</a:t>
             </a:r>
-            <a:endParaRPr lang="en-US"/>
           </a:p>
         </p:txBody>
       </p:sp>
@@ -1232,38 +1675,37 @@
           <a:p>
             <a:pPr lvl="0"/>
             <a:r>
-              <a:rPr lang="en-US" smtClean="0"/>
+              <a:rPr lang="en-US"/>
               <a:t>Click to edit Master text styles</a:t>
             </a:r>
           </a:p>
           <a:p>
             <a:pPr lvl="1"/>
             <a:r>
-              <a:rPr lang="en-US" smtClean="0"/>
+              <a:rPr lang="en-US"/>
               <a:t>Second level</a:t>
             </a:r>
           </a:p>
           <a:p>
             <a:pPr lvl="2"/>
             <a:r>
-              <a:rPr lang="en-US" smtClean="0"/>
+              <a:rPr lang="en-US"/>
               <a:t>Third level</a:t>
             </a:r>
           </a:p>
           <a:p>
             <a:pPr lvl="3"/>
             <a:r>
-              <a:rPr lang="en-US" smtClean="0"/>
+              <a:rPr lang="en-US"/>
               <a:t>Fourth level</a:t>
             </a:r>
           </a:p>
           <a:p>
             <a:pPr lvl="4"/>
             <a:r>
-              <a:rPr lang="en-US" smtClean="0"/>
+              <a:rPr lang="en-US"/>
               <a:t>Fifth level</a:t>
             </a:r>
-            <a:endParaRPr lang="en-US"/>
           </a:p>
         </p:txBody>
       </p:sp>
@@ -1317,38 +1759,37 @@
           <a:p>
             <a:pPr lvl="0"/>
             <a:r>
-              <a:rPr lang="en-US" smtClean="0"/>
+              <a:rPr lang="en-US"/>
               <a:t>Click to edit Master text styles</a:t>
             </a:r>
           </a:p>
           <a:p>
             <a:pPr lvl="1"/>
             <a:r>
-              <a:rPr lang="en-US" smtClean="0"/>
+              <a:rPr lang="en-US"/>
               <a:t>Second level</a:t>
             </a:r>
           </a:p>
           <a:p>
             <a:pPr lvl="2"/>
             <a:r>
-              <a:rPr lang="en-US" smtClean="0"/>
+              <a:rPr lang="en-US"/>
               <a:t>Third level</a:t>
             </a:r>
           </a:p>
           <a:p>
             <a:pPr lvl="3"/>
             <a:r>
-              <a:rPr lang="en-US" smtClean="0"/>
+              <a:rPr lang="en-US"/>
               <a:t>Fourth level</a:t>
             </a:r>
           </a:p>
           <a:p>
             <a:pPr lvl="4"/>
             <a:r>
-              <a:rPr lang="en-US" smtClean="0"/>
+              <a:rPr lang="en-US"/>
               <a:t>Fifth level</a:t>
             </a:r>
-            <a:endParaRPr lang="en-US"/>
           </a:p>
         </p:txBody>
       </p:sp>
@@ -1369,7 +1810,7 @@
           <a:p>
             <a:fld id="{5BCAD085-E8A6-8845-BD4E-CB4CCA059FC4}" type="datetimeFigureOut">
               <a:rPr lang="en-US" smtClean="0"/>
-              <a:t>1/27/13</a:t>
+              <a:t>9/1/26</a:t>
             </a:fld>
             <a:endParaRPr lang="en-US"/>
           </a:p>
@@ -1467,10 +1908,9 @@
           </a:lstStyle>
           <a:p>
             <a:r>
-              <a:rPr lang="en-US" smtClean="0"/>
+              <a:rPr lang="en-US"/>
               <a:t>Click to edit Master title style</a:t>
             </a:r>
-            <a:endParaRPr lang="en-US"/>
           </a:p>
         </p:txBody>
       </p:sp>
@@ -1533,7 +1973,7 @@
           <a:p>
             <a:pPr lvl="0"/>
             <a:r>
-              <a:rPr lang="en-US" smtClean="0"/>
+              <a:rPr lang="en-US"/>
               <a:t>Click to edit Master text styles</a:t>
             </a:r>
           </a:p>
@@ -1589,38 +2029,37 @@
           <a:p>
             <a:pPr lvl="0"/>
             <a:r>
-              <a:rPr lang="en-US" smtClean="0"/>
+              <a:rPr lang="en-US"/>
               <a:t>Click to edit Master text styles</a:t>
             </a:r>
           </a:p>
           <a:p>
             <a:pPr lvl="1"/>
             <a:r>
-              <a:rPr lang="en-US" smtClean="0"/>
+              <a:rPr lang="en-US"/>
               <a:t>Second level</a:t>
             </a:r>
           </a:p>
           <a:p>
             <a:pPr lvl="2"/>
             <a:r>
-              <a:rPr lang="en-US" smtClean="0"/>
+              <a:rPr lang="en-US"/>
               <a:t>Third level</a:t>
             </a:r>
           </a:p>
           <a:p>
             <a:pPr lvl="3"/>
             <a:r>
-              <a:rPr lang="en-US" smtClean="0"/>
+              <a:rPr lang="en-US"/>
               <a:t>Fourth level</a:t>
             </a:r>
           </a:p>
           <a:p>
             <a:pPr lvl="4"/>
             <a:r>
-              <a:rPr lang="en-US" smtClean="0"/>
+              <a:rPr lang="en-US"/>
               <a:t>Fifth level</a:t>
             </a:r>
-            <a:endParaRPr lang="en-US"/>
           </a:p>
         </p:txBody>
       </p:sp>
@@ -1683,7 +2122,7 @@
           <a:p>
             <a:pPr lvl="0"/>
             <a:r>
-              <a:rPr lang="en-US" smtClean="0"/>
+              <a:rPr lang="en-US"/>
               <a:t>Click to edit Master text styles</a:t>
             </a:r>
           </a:p>
@@ -1739,38 +2178,37 @@
           <a:p>
             <a:pPr lvl="0"/>
             <a:r>
-              <a:rPr lang="en-US" smtClean="0"/>
+              <a:rPr lang="en-US"/>
               <a:t>Click to edit Master text styles</a:t>
             </a:r>
           </a:p>
           <a:p>
             <a:pPr lvl="1"/>
             <a:r>
-              <a:rPr lang="en-US" smtClean="0"/>
+              <a:rPr lang="en-US"/>
               <a:t>Second level</a:t>
             </a:r>
           </a:p>
           <a:p>
             <a:pPr lvl="2"/>
             <a:r>
-              <a:rPr lang="en-US" smtClean="0"/>
+              <a:rPr lang="en-US"/>
               <a:t>Third level</a:t>
             </a:r>
           </a:p>
           <a:p>
             <a:pPr lvl="3"/>
             <a:r>
-              <a:rPr lang="en-US" smtClean="0"/>
+              <a:rPr lang="en-US"/>
               <a:t>Fourth level</a:t>
             </a:r>
           </a:p>
           <a:p>
             <a:pPr lvl="4"/>
             <a:r>
-              <a:rPr lang="en-US" smtClean="0"/>
+              <a:rPr lang="en-US"/>
               <a:t>Fifth level</a:t>
             </a:r>
-            <a:endParaRPr lang="en-US"/>
           </a:p>
         </p:txBody>
       </p:sp>
@@ -1791,7 +2229,7 @@
           <a:p>
             <a:fld id="{5BCAD085-E8A6-8845-BD4E-CB4CCA059FC4}" type="datetimeFigureOut">
               <a:rPr lang="en-US" smtClean="0"/>
-              <a:t>1/27/13</a:t>
+              <a:t>9/1/26</a:t>
             </a:fld>
             <a:endParaRPr lang="en-US"/>
           </a:p>
@@ -1885,10 +2323,9 @@
           <a:lstStyle/>
           <a:p>
             <a:r>
-              <a:rPr lang="en-US" smtClean="0"/>
+              <a:rPr lang="en-US"/>
               <a:t>Click to edit Master title style</a:t>
             </a:r>
-            <a:endParaRPr lang="en-US"/>
           </a:p>
         </p:txBody>
       </p:sp>
@@ -1909,7 +2346,7 @@
           <a:p>
             <a:fld id="{5BCAD085-E8A6-8845-BD4E-CB4CCA059FC4}" type="datetimeFigureOut">
               <a:rPr lang="en-US" smtClean="0"/>
-              <a:t>1/27/13</a:t>
+              <a:t>9/1/26</a:t>
             </a:fld>
             <a:endParaRPr lang="en-US"/>
           </a:p>
@@ -2004,7 +2441,7 @@
           <a:p>
             <a:fld id="{5BCAD085-E8A6-8845-BD4E-CB4CCA059FC4}" type="datetimeFigureOut">
               <a:rPr lang="en-US" smtClean="0"/>
-              <a:t>1/27/13</a:t>
+              <a:t>9/1/26</a:t>
             </a:fld>
             <a:endParaRPr lang="en-US"/>
           </a:p>
@@ -2107,10 +2544,9 @@
           </a:lstStyle>
           <a:p>
             <a:r>
-              <a:rPr lang="en-US" smtClean="0"/>
+              <a:rPr lang="en-US"/>
               <a:t>Click to edit Master title style</a:t>
             </a:r>
-            <a:endParaRPr lang="en-US"/>
           </a:p>
         </p:txBody>
       </p:sp>
@@ -2164,38 +2600,37 @@
           <a:p>
             <a:pPr lvl="0"/>
             <a:r>
-              <a:rPr lang="en-US" smtClean="0"/>
+              <a:rPr lang="en-US"/>
               <a:t>Click to edit Master text styles</a:t>
             </a:r>
           </a:p>
           <a:p>
             <a:pPr lvl="1"/>
             <a:r>
-              <a:rPr lang="en-US" smtClean="0"/>
+              <a:rPr lang="en-US"/>
               <a:t>Second level</a:t>
             </a:r>
           </a:p>
           <a:p>
             <a:pPr lvl="2"/>
             <a:r>
-              <a:rPr lang="en-US" smtClean="0"/>
+              <a:rPr lang="en-US"/>
               <a:t>Third level</a:t>
             </a:r>
           </a:p>
           <a:p>
             <a:pPr lvl="3"/>
             <a:r>
-              <a:rPr lang="en-US" smtClean="0"/>
+              <a:rPr lang="en-US"/>
               <a:t>Fourth level</a:t>
             </a:r>
           </a:p>
           <a:p>
             <a:pPr lvl="4"/>
             <a:r>
-              <a:rPr lang="en-US" smtClean="0"/>
+              <a:rPr lang="en-US"/>
               <a:t>Fifth level</a:t>
             </a:r>
-            <a:endParaRPr lang="en-US"/>
           </a:p>
         </p:txBody>
       </p:sp>
@@ -2258,7 +2693,7 @@
           <a:p>
             <a:pPr lvl="0"/>
             <a:r>
-              <a:rPr lang="en-US" smtClean="0"/>
+              <a:rPr lang="en-US"/>
               <a:t>Click to edit Master text styles</a:t>
             </a:r>
           </a:p>
@@ -2281,7 +2716,7 @@
           <a:p>
             <a:fld id="{5BCAD085-E8A6-8845-BD4E-CB4CCA059FC4}" type="datetimeFigureOut">
               <a:rPr lang="en-US" smtClean="0"/>
-              <a:t>1/27/13</a:t>
+              <a:t>9/1/26</a:t>
             </a:fld>
             <a:endParaRPr lang="en-US"/>
           </a:p>
@@ -2384,10 +2819,9 @@
           </a:lstStyle>
           <a:p>
             <a:r>
-              <a:rPr lang="en-US" smtClean="0"/>
+              <a:rPr lang="en-US"/>
               <a:t>Click to edit Master title style</a:t>
             </a:r>
-            <a:endParaRPr lang="en-US"/>
           </a:p>
         </p:txBody>
       </p:sp>
@@ -2511,7 +2945,7 @@
           <a:p>
             <a:pPr lvl="0"/>
             <a:r>
-              <a:rPr lang="en-US" smtClean="0"/>
+              <a:rPr lang="en-US"/>
               <a:t>Click to edit Master text styles</a:t>
             </a:r>
           </a:p>
@@ -2534,7 +2968,7 @@
           <a:p>
             <a:fld id="{5BCAD085-E8A6-8845-BD4E-CB4CCA059FC4}" type="datetimeFigureOut">
               <a:rPr lang="en-US" smtClean="0"/>
-              <a:t>1/27/13</a:t>
+              <a:t>9/1/26</a:t>
             </a:fld>
             <a:endParaRPr lang="en-US"/>
           </a:p>
@@ -2643,10 +3077,9 @@
           <a:lstStyle/>
           <a:p>
             <a:r>
-              <a:rPr lang="en-US" smtClean="0"/>
+              <a:rPr lang="en-US"/>
               <a:t>Click to edit Master title style</a:t>
             </a:r>
-            <a:endParaRPr lang="en-US"/>
           </a:p>
         </p:txBody>
       </p:sp>
@@ -2677,38 +3110,37 @@
           <a:p>
             <a:pPr lvl="0"/>
             <a:r>
-              <a:rPr lang="en-US" smtClean="0"/>
+              <a:rPr lang="en-US"/>
               <a:t>Click to edit Master text styles</a:t>
             </a:r>
           </a:p>
           <a:p>
             <a:pPr lvl="1"/>
             <a:r>
-              <a:rPr lang="en-US" smtClean="0"/>
+              <a:rPr lang="en-US"/>
               <a:t>Second level</a:t>
             </a:r>
           </a:p>
           <a:p>
             <a:pPr lvl="2"/>
             <a:r>
-              <a:rPr lang="en-US" smtClean="0"/>
+              <a:rPr lang="en-US"/>
               <a:t>Third level</a:t>
             </a:r>
           </a:p>
           <a:p>
             <a:pPr lvl="3"/>
             <a:r>
-              <a:rPr lang="en-US" smtClean="0"/>
+              <a:rPr lang="en-US"/>
               <a:t>Fourth level</a:t>
             </a:r>
           </a:p>
           <a:p>
             <a:pPr lvl="4"/>
             <a:r>
-              <a:rPr lang="en-US" smtClean="0"/>
+              <a:rPr lang="en-US"/>
               <a:t>Fifth level</a:t>
             </a:r>
-            <a:endParaRPr lang="en-US"/>
           </a:p>
         </p:txBody>
       </p:sp>
@@ -2747,7 +3179,7 @@
           <a:p>
             <a:fld id="{5BCAD085-E8A6-8845-BD4E-CB4CCA059FC4}" type="datetimeFigureOut">
               <a:rPr lang="en-US" smtClean="0"/>
-              <a:t>1/27/13</a:t>
+              <a:t>9/1/26</a:t>
             </a:fld>
             <a:endParaRPr lang="en-US"/>
           </a:p>
@@ -3106,7 +3538,7 @@
 </file>
 
 <file path=ppt/slides/slide1.xml><?xml version="1.0" encoding="utf-8"?>
-<p:sld xmlns:a="http://schemas.openxmlformats.org/drawingml/2006/main" xmlns:p="http://schemas.openxmlformats.org/presentationml/2006/main" xmlns:r="http://schemas.openxmlformats.org/officeDocument/2006/relationships">
+<p:sld xmlns:a="http://schemas.openxmlformats.org/drawingml/2006/main" xmlns:r="http://schemas.openxmlformats.org/officeDocument/2006/relationships" xmlns:p="http://schemas.openxmlformats.org/presentationml/2006/main">
   <p:cSld>
     <p:spTree>
       <p:nvGrpSpPr>
@@ -3114,7 +3546,14 @@
         <p:cNvGrpSpPr/>
         <p:nvPr/>
       </p:nvGrpSpPr>
-      <p:grpSpPr/>
+      <p:grpSpPr>
+        <a:xfrm>
+          <a:off x="0" y="0"/>
+          <a:ext cx="0" cy="0"/>
+          <a:chOff x="0" y="0"/>
+          <a:chExt cx="0" cy="0"/>
+        </a:xfrm>
+      </p:grpSpPr>
       <p:sp>
         <p:nvSpPr>
           <p:cNvPr id="2" name="Rectangle 1"/>
@@ -3156,6 +3595,7 @@
           <a:lstStyle/>
           <a:p>
             <a:pPr algn="ctr"/>
+            <a:endParaRPr/>
           </a:p>
         </p:txBody>
       </p:sp>
@@ -3200,6 +3640,7 @@
           <a:lstStyle/>
           <a:p>
             <a:pPr algn="ctr"/>
+            <a:endParaRPr/>
           </a:p>
         </p:txBody>
       </p:sp>
@@ -3220,7 +3661,7 @@
           <a:noFill/>
         </p:spPr>
         <p:txBody>
-          <a:bodyPr wrap="square" lIns="0" rIns="0" tIns="0" bIns="0">
+          <a:bodyPr wrap="square" lIns="0" tIns="0" rIns="0" bIns="0">
             <a:noAutofit/>
           </a:bodyPr>
           <a:lstStyle/>
@@ -3283,7 +3724,7 @@
           <a:noFill/>
         </p:spPr>
         <p:txBody>
-          <a:bodyPr wrap="square" lIns="0" rIns="0" tIns="0" bIns="0">
+          <a:bodyPr wrap="square" lIns="0" tIns="0" rIns="0" bIns="0">
             <a:noAutofit/>
           </a:bodyPr>
           <a:lstStyle/>
@@ -3338,7 +3779,7 @@
 </file>
 
 <file path=ppt/slides/slide10.xml><?xml version="1.0" encoding="utf-8"?>
-<p:sld xmlns:a="http://schemas.openxmlformats.org/drawingml/2006/main" xmlns:p="http://schemas.openxmlformats.org/presentationml/2006/main" xmlns:r="http://schemas.openxmlformats.org/officeDocument/2006/relationships">
+<p:sld xmlns:a="http://schemas.openxmlformats.org/drawingml/2006/main" xmlns:r="http://schemas.openxmlformats.org/officeDocument/2006/relationships" xmlns:p="http://schemas.openxmlformats.org/presentationml/2006/main">
   <p:cSld>
     <p:spTree>
       <p:nvGrpSpPr>
@@ -3346,7 +3787,14 @@
         <p:cNvGrpSpPr/>
         <p:nvPr/>
       </p:nvGrpSpPr>
-      <p:grpSpPr/>
+      <p:grpSpPr>
+        <a:xfrm>
+          <a:off x="0" y="0"/>
+          <a:ext cx="0" cy="0"/>
+          <a:chOff x="0" y="0"/>
+          <a:chExt cx="0" cy="0"/>
+        </a:xfrm>
+      </p:grpSpPr>
       <p:sp>
         <p:nvSpPr>
           <p:cNvPr id="2" name="TextBox 1"/>
@@ -3364,7 +3812,7 @@
           <a:noFill/>
         </p:spPr>
         <p:txBody>
-          <a:bodyPr wrap="square" lIns="0" rIns="0" tIns="0" bIns="0">
+          <a:bodyPr wrap="square" lIns="0" tIns="0" rIns="0" bIns="0">
             <a:noAutofit/>
           </a:bodyPr>
           <a:lstStyle/>
@@ -3431,6 +3879,7 @@
           <a:lstStyle/>
           <a:p>
             <a:pPr algn="ctr"/>
+            <a:endParaRPr/>
           </a:p>
         </p:txBody>
       </p:sp>
@@ -3451,7 +3900,7 @@
           <a:noFill/>
         </p:spPr>
         <p:txBody>
-          <a:bodyPr wrap="square" lIns="0" rIns="0" tIns="0" bIns="0">
+          <a:bodyPr wrap="square" lIns="0" tIns="0" rIns="0" bIns="0">
             <a:noAutofit/>
           </a:bodyPr>
           <a:lstStyle/>
@@ -3681,7 +4130,7 @@
           <a:noFill/>
         </p:spPr>
         <p:txBody>
-          <a:bodyPr wrap="square" lIns="0" rIns="0" tIns="0" bIns="0">
+          <a:bodyPr wrap="square" lIns="0" tIns="0" rIns="0" bIns="0">
             <a:noAutofit/>
           </a:bodyPr>
           <a:lstStyle/>
@@ -3724,7 +4173,7 @@
           <a:noFill/>
         </p:spPr>
         <p:txBody>
-          <a:bodyPr wrap="square" lIns="0" rIns="0" tIns="0" bIns="0">
+          <a:bodyPr wrap="square" lIns="0" tIns="0" rIns="0" bIns="0">
             <a:noAutofit/>
           </a:bodyPr>
           <a:lstStyle/>
@@ -3759,7 +4208,7 @@
 </file>
 
 <file path=ppt/slides/slide11.xml><?xml version="1.0" encoding="utf-8"?>
-<p:sld xmlns:a="http://schemas.openxmlformats.org/drawingml/2006/main" xmlns:p="http://schemas.openxmlformats.org/presentationml/2006/main" xmlns:r="http://schemas.openxmlformats.org/officeDocument/2006/relationships">
+<p:sld xmlns:a="http://schemas.openxmlformats.org/drawingml/2006/main" xmlns:r="http://schemas.openxmlformats.org/officeDocument/2006/relationships" xmlns:p="http://schemas.openxmlformats.org/presentationml/2006/main">
   <p:cSld>
     <p:spTree>
       <p:nvGrpSpPr>
@@ -3767,7 +4216,14 @@
         <p:cNvGrpSpPr/>
         <p:nvPr/>
       </p:nvGrpSpPr>
-      <p:grpSpPr/>
+      <p:grpSpPr>
+        <a:xfrm>
+          <a:off x="0" y="0"/>
+          <a:ext cx="0" cy="0"/>
+          <a:chOff x="0" y="0"/>
+          <a:chExt cx="0" cy="0"/>
+        </a:xfrm>
+      </p:grpSpPr>
       <p:sp>
         <p:nvSpPr>
           <p:cNvPr id="2" name="TextBox 1"/>
@@ -3785,7 +4241,7 @@
           <a:noFill/>
         </p:spPr>
         <p:txBody>
-          <a:bodyPr wrap="square" lIns="0" rIns="0" tIns="0" bIns="0">
+          <a:bodyPr wrap="square" lIns="0" tIns="0" rIns="0" bIns="0">
             <a:noAutofit/>
           </a:bodyPr>
           <a:lstStyle/>
@@ -3852,6 +4308,7 @@
           <a:lstStyle/>
           <a:p>
             <a:pPr algn="ctr"/>
+            <a:endParaRPr/>
           </a:p>
         </p:txBody>
       </p:sp>
@@ -3874,14 +4331,32 @@
                 <a:tableStyleId>{5C22544A-7EE6-4342-B048-85BDC9FD1C3A}</a:tableStyleId>
               </a:tblPr>
               <a:tblGrid>
-                <a:gridCol w="2975809"/>
-                <a:gridCol w="2772913"/>
-                <a:gridCol w="5309115"/>
+                <a:gridCol w="2975809">
+                  <a:extLst>
+                    <a:ext uri="{9D8B030D-6E8A-4147-A177-3AD203B41FA5}">
+                      <a16:colId xmlns:a16="http://schemas.microsoft.com/office/drawing/2014/main" val="20000"/>
+                    </a:ext>
+                  </a:extLst>
+                </a:gridCol>
+                <a:gridCol w="2772913">
+                  <a:extLst>
+                    <a:ext uri="{9D8B030D-6E8A-4147-A177-3AD203B41FA5}">
+                      <a16:colId xmlns:a16="http://schemas.microsoft.com/office/drawing/2014/main" val="20001"/>
+                    </a:ext>
+                  </a:extLst>
+                </a:gridCol>
+                <a:gridCol w="5309115">
+                  <a:extLst>
+                    <a:ext uri="{9D8B030D-6E8A-4147-A177-3AD203B41FA5}">
+                      <a16:colId xmlns:a16="http://schemas.microsoft.com/office/drawing/2014/main" val="20002"/>
+                    </a:ext>
+                  </a:extLst>
+                </a:gridCol>
               </a:tblGrid>
               <a:tr h="439420">
                 <a:tc>
                   <a:txBody>
-                    <a:bodyPr wrap="square"/>
+                    <a:bodyPr/>
                     <a:lstStyle/>
                     <a:p>
                       <a:pPr algn="l">
@@ -3915,7 +4390,7 @@
                 </a:tc>
                 <a:tc>
                   <a:txBody>
-                    <a:bodyPr wrap="square"/>
+                    <a:bodyPr/>
                     <a:lstStyle/>
                     <a:p>
                       <a:pPr algn="l">
@@ -3949,7 +4424,7 @@
                 </a:tc>
                 <a:tc>
                   <a:txBody>
-                    <a:bodyPr wrap="square"/>
+                    <a:bodyPr/>
                     <a:lstStyle/>
                     <a:p>
                       <a:pPr algn="l">
@@ -3981,11 +4456,16 @@
                     </a:solidFill>
                   </a:tcPr>
                 </a:tc>
+                <a:extLst>
+                  <a:ext uri="{0D108BD9-81ED-4DB2-BD59-A6C34878D82A}">
+                    <a16:rowId xmlns:a16="http://schemas.microsoft.com/office/drawing/2014/main" val="10000"/>
+                  </a:ext>
+                </a:extLst>
               </a:tr>
               <a:tr h="713740">
                 <a:tc>
                   <a:txBody>
-                    <a:bodyPr wrap="square"/>
+                    <a:bodyPr/>
                     <a:lstStyle/>
                     <a:p>
                       <a:pPr algn="l">
@@ -4019,7 +4499,7 @@
                 </a:tc>
                 <a:tc>
                   <a:txBody>
-                    <a:bodyPr wrap="square"/>
+                    <a:bodyPr/>
                     <a:lstStyle/>
                     <a:p>
                       <a:pPr algn="l">
@@ -4053,7 +4533,7 @@
                 </a:tc>
                 <a:tc>
                   <a:txBody>
-                    <a:bodyPr wrap="square"/>
+                    <a:bodyPr/>
                     <a:lstStyle/>
                     <a:p>
                       <a:pPr algn="l">
@@ -4085,11 +4565,16 @@
                     </a:solidFill>
                   </a:tcPr>
                 </a:tc>
+                <a:extLst>
+                  <a:ext uri="{0D108BD9-81ED-4DB2-BD59-A6C34878D82A}">
+                    <a16:rowId xmlns:a16="http://schemas.microsoft.com/office/drawing/2014/main" val="10001"/>
+                  </a:ext>
+                </a:extLst>
               </a:tr>
               <a:tr h="439420">
                 <a:tc>
                   <a:txBody>
-                    <a:bodyPr wrap="square"/>
+                    <a:bodyPr/>
                     <a:lstStyle/>
                     <a:p>
                       <a:pPr algn="l">
@@ -4123,7 +4608,7 @@
                 </a:tc>
                 <a:tc>
                   <a:txBody>
-                    <a:bodyPr wrap="square"/>
+                    <a:bodyPr/>
                     <a:lstStyle/>
                     <a:p>
                       <a:pPr algn="l">
@@ -4157,7 +4642,7 @@
                 </a:tc>
                 <a:tc>
                   <a:txBody>
-                    <a:bodyPr wrap="square"/>
+                    <a:bodyPr/>
                     <a:lstStyle/>
                     <a:p>
                       <a:pPr algn="l">
@@ -4189,11 +4674,16 @@
                     </a:solidFill>
                   </a:tcPr>
                 </a:tc>
+                <a:extLst>
+                  <a:ext uri="{0D108BD9-81ED-4DB2-BD59-A6C34878D82A}">
+                    <a16:rowId xmlns:a16="http://schemas.microsoft.com/office/drawing/2014/main" val="10002"/>
+                  </a:ext>
+                </a:extLst>
               </a:tr>
               <a:tr h="439420">
                 <a:tc>
                   <a:txBody>
-                    <a:bodyPr wrap="square"/>
+                    <a:bodyPr/>
                     <a:lstStyle/>
                     <a:p>
                       <a:pPr algn="l">
@@ -4227,7 +4717,7 @@
                 </a:tc>
                 <a:tc>
                   <a:txBody>
-                    <a:bodyPr wrap="square"/>
+                    <a:bodyPr/>
                     <a:lstStyle/>
                     <a:p>
                       <a:pPr algn="l">
@@ -4261,7 +4751,7 @@
                 </a:tc>
                 <a:tc>
                   <a:txBody>
-                    <a:bodyPr wrap="square"/>
+                    <a:bodyPr/>
                     <a:lstStyle/>
                     <a:p>
                       <a:pPr algn="l">
@@ -4293,11 +4783,16 @@
                     </a:solidFill>
                   </a:tcPr>
                 </a:tc>
+                <a:extLst>
+                  <a:ext uri="{0D108BD9-81ED-4DB2-BD59-A6C34878D82A}">
+                    <a16:rowId xmlns:a16="http://schemas.microsoft.com/office/drawing/2014/main" val="10003"/>
+                  </a:ext>
+                </a:extLst>
               </a:tr>
               <a:tr h="713740">
                 <a:tc>
                   <a:txBody>
-                    <a:bodyPr wrap="square"/>
+                    <a:bodyPr/>
                     <a:lstStyle/>
                     <a:p>
                       <a:pPr algn="l">
@@ -4331,7 +4826,7 @@
                 </a:tc>
                 <a:tc>
                   <a:txBody>
-                    <a:bodyPr wrap="square"/>
+                    <a:bodyPr/>
                     <a:lstStyle/>
                     <a:p>
                       <a:pPr algn="l">
@@ -4365,7 +4860,7 @@
                 </a:tc>
                 <a:tc>
                   <a:txBody>
-                    <a:bodyPr wrap="square"/>
+                    <a:bodyPr/>
                     <a:lstStyle/>
                     <a:p>
                       <a:pPr algn="l">
@@ -4397,11 +4892,16 @@
                     </a:solidFill>
                   </a:tcPr>
                 </a:tc>
+                <a:extLst>
+                  <a:ext uri="{0D108BD9-81ED-4DB2-BD59-A6C34878D82A}">
+                    <a16:rowId xmlns:a16="http://schemas.microsoft.com/office/drawing/2014/main" val="10004"/>
+                  </a:ext>
+                </a:extLst>
               </a:tr>
               <a:tr h="439420">
                 <a:tc>
                   <a:txBody>
-                    <a:bodyPr wrap="square"/>
+                    <a:bodyPr/>
                     <a:lstStyle/>
                     <a:p>
                       <a:pPr algn="l">
@@ -4435,7 +4935,7 @@
                 </a:tc>
                 <a:tc>
                   <a:txBody>
-                    <a:bodyPr wrap="square"/>
+                    <a:bodyPr/>
                     <a:lstStyle/>
                     <a:p>
                       <a:pPr algn="l">
@@ -4469,7 +4969,7 @@
                 </a:tc>
                 <a:tc>
                   <a:txBody>
-                    <a:bodyPr wrap="square"/>
+                    <a:bodyPr/>
                     <a:lstStyle/>
                     <a:p>
                       <a:pPr algn="l">
@@ -4501,6 +5001,11 @@
                     </a:solidFill>
                   </a:tcPr>
                 </a:tc>
+                <a:extLst>
+                  <a:ext uri="{0D108BD9-81ED-4DB2-BD59-A6C34878D82A}">
+                    <a16:rowId xmlns:a16="http://schemas.microsoft.com/office/drawing/2014/main" val="10005"/>
+                  </a:ext>
+                </a:extLst>
               </a:tr>
             </a:tbl>
           </a:graphicData>
@@ -4523,7 +5028,7 @@
           <a:noFill/>
         </p:spPr>
         <p:txBody>
-          <a:bodyPr wrap="square" lIns="0" rIns="0" tIns="0" bIns="0">
+          <a:bodyPr wrap="square" lIns="0" tIns="0" rIns="0" bIns="0">
             <a:noAutofit/>
           </a:bodyPr>
           <a:lstStyle/>
@@ -4566,7 +5071,7 @@
           <a:noFill/>
         </p:spPr>
         <p:txBody>
-          <a:bodyPr wrap="square" lIns="0" rIns="0" tIns="0" bIns="0">
+          <a:bodyPr wrap="square" lIns="0" tIns="0" rIns="0" bIns="0">
             <a:noAutofit/>
           </a:bodyPr>
           <a:lstStyle/>
@@ -4601,7 +5106,7 @@
 </file>
 
 <file path=ppt/slides/slide12.xml><?xml version="1.0" encoding="utf-8"?>
-<p:sld xmlns:a="http://schemas.openxmlformats.org/drawingml/2006/main" xmlns:p="http://schemas.openxmlformats.org/presentationml/2006/main" xmlns:r="http://schemas.openxmlformats.org/officeDocument/2006/relationships">
+<p:sld xmlns:a="http://schemas.openxmlformats.org/drawingml/2006/main" xmlns:r="http://schemas.openxmlformats.org/officeDocument/2006/relationships" xmlns:p="http://schemas.openxmlformats.org/presentationml/2006/main">
   <p:cSld>
     <p:spTree>
       <p:nvGrpSpPr>
@@ -4609,7 +5114,14 @@
         <p:cNvGrpSpPr/>
         <p:nvPr/>
       </p:nvGrpSpPr>
-      <p:grpSpPr/>
+      <p:grpSpPr>
+        <a:xfrm>
+          <a:off x="0" y="0"/>
+          <a:ext cx="0" cy="0"/>
+          <a:chOff x="0" y="0"/>
+          <a:chExt cx="0" cy="0"/>
+        </a:xfrm>
+      </p:grpSpPr>
       <p:sp>
         <p:nvSpPr>
           <p:cNvPr id="2" name="TextBox 1"/>
@@ -4627,7 +5139,7 @@
           <a:noFill/>
         </p:spPr>
         <p:txBody>
-          <a:bodyPr wrap="square" lIns="0" rIns="0" tIns="0" bIns="0">
+          <a:bodyPr wrap="square" lIns="0" tIns="0" rIns="0" bIns="0">
             <a:noAutofit/>
           </a:bodyPr>
           <a:lstStyle/>
@@ -4694,6 +5206,7 @@
           <a:lstStyle/>
           <a:p>
             <a:pPr algn="ctr"/>
+            <a:endParaRPr/>
           </a:p>
         </p:txBody>
       </p:sp>
@@ -4716,14 +5229,32 @@
                 <a:tableStyleId>{5C22544A-7EE6-4342-B048-85BDC9FD1C3A}</a:tableStyleId>
               </a:tblPr>
               <a:tblGrid>
-                <a:gridCol w="2507963"/>
-                <a:gridCol w="2279966"/>
-                <a:gridCol w="6269908"/>
+                <a:gridCol w="2507963">
+                  <a:extLst>
+                    <a:ext uri="{9D8B030D-6E8A-4147-A177-3AD203B41FA5}">
+                      <a16:colId xmlns:a16="http://schemas.microsoft.com/office/drawing/2014/main" val="20000"/>
+                    </a:ext>
+                  </a:extLst>
+                </a:gridCol>
+                <a:gridCol w="2279966">
+                  <a:extLst>
+                    <a:ext uri="{9D8B030D-6E8A-4147-A177-3AD203B41FA5}">
+                      <a16:colId xmlns:a16="http://schemas.microsoft.com/office/drawing/2014/main" val="20001"/>
+                    </a:ext>
+                  </a:extLst>
+                </a:gridCol>
+                <a:gridCol w="6269908">
+                  <a:extLst>
+                    <a:ext uri="{9D8B030D-6E8A-4147-A177-3AD203B41FA5}">
+                      <a16:colId xmlns:a16="http://schemas.microsoft.com/office/drawing/2014/main" val="20002"/>
+                    </a:ext>
+                  </a:extLst>
+                </a:gridCol>
               </a:tblGrid>
               <a:tr h="439420">
                 <a:tc>
                   <a:txBody>
-                    <a:bodyPr wrap="square"/>
+                    <a:bodyPr/>
                     <a:lstStyle/>
                     <a:p>
                       <a:pPr algn="l">
@@ -4757,7 +5288,7 @@
                 </a:tc>
                 <a:tc>
                   <a:txBody>
-                    <a:bodyPr wrap="square"/>
+                    <a:bodyPr/>
                     <a:lstStyle/>
                     <a:p>
                       <a:pPr algn="l">
@@ -4791,7 +5322,7 @@
                 </a:tc>
                 <a:tc>
                   <a:txBody>
-                    <a:bodyPr wrap="square"/>
+                    <a:bodyPr/>
                     <a:lstStyle/>
                     <a:p>
                       <a:pPr algn="l">
@@ -4823,11 +5354,16 @@
                     </a:solidFill>
                   </a:tcPr>
                 </a:tc>
+                <a:extLst>
+                  <a:ext uri="{0D108BD9-81ED-4DB2-BD59-A6C34878D82A}">
+                    <a16:rowId xmlns:a16="http://schemas.microsoft.com/office/drawing/2014/main" val="10000"/>
+                  </a:ext>
+                </a:extLst>
               </a:tr>
               <a:tr h="439420">
                 <a:tc>
                   <a:txBody>
-                    <a:bodyPr wrap="square"/>
+                    <a:bodyPr/>
                     <a:lstStyle/>
                     <a:p>
                       <a:pPr algn="l">
@@ -4861,7 +5397,7 @@
                 </a:tc>
                 <a:tc>
                   <a:txBody>
-                    <a:bodyPr wrap="square"/>
+                    <a:bodyPr/>
                     <a:lstStyle/>
                     <a:p>
                       <a:pPr algn="l">
@@ -4895,7 +5431,7 @@
                 </a:tc>
                 <a:tc>
                   <a:txBody>
-                    <a:bodyPr wrap="square"/>
+                    <a:bodyPr/>
                     <a:lstStyle/>
                     <a:p>
                       <a:pPr algn="l">
@@ -4927,11 +5463,16 @@
                     </a:solidFill>
                   </a:tcPr>
                 </a:tc>
+                <a:extLst>
+                  <a:ext uri="{0D108BD9-81ED-4DB2-BD59-A6C34878D82A}">
+                    <a16:rowId xmlns:a16="http://schemas.microsoft.com/office/drawing/2014/main" val="10001"/>
+                  </a:ext>
+                </a:extLst>
               </a:tr>
               <a:tr h="439420">
                 <a:tc>
                   <a:txBody>
-                    <a:bodyPr wrap="square"/>
+                    <a:bodyPr/>
                     <a:lstStyle/>
                     <a:p>
                       <a:pPr algn="l">
@@ -4965,7 +5506,7 @@
                 </a:tc>
                 <a:tc>
                   <a:txBody>
-                    <a:bodyPr wrap="square"/>
+                    <a:bodyPr/>
                     <a:lstStyle/>
                     <a:p>
                       <a:pPr algn="l">
@@ -4999,7 +5540,7 @@
                 </a:tc>
                 <a:tc>
                   <a:txBody>
-                    <a:bodyPr wrap="square"/>
+                    <a:bodyPr/>
                     <a:lstStyle/>
                     <a:p>
                       <a:pPr algn="l">
@@ -5031,11 +5572,16 @@
                     </a:solidFill>
                   </a:tcPr>
                 </a:tc>
+                <a:extLst>
+                  <a:ext uri="{0D108BD9-81ED-4DB2-BD59-A6C34878D82A}">
+                    <a16:rowId xmlns:a16="http://schemas.microsoft.com/office/drawing/2014/main" val="10002"/>
+                  </a:ext>
+                </a:extLst>
               </a:tr>
               <a:tr h="439420">
                 <a:tc>
                   <a:txBody>
-                    <a:bodyPr wrap="square"/>
+                    <a:bodyPr/>
                     <a:lstStyle/>
                     <a:p>
                       <a:pPr algn="l">
@@ -5069,7 +5615,7 @@
                 </a:tc>
                 <a:tc>
                   <a:txBody>
-                    <a:bodyPr wrap="square"/>
+                    <a:bodyPr/>
                     <a:lstStyle/>
                     <a:p>
                       <a:pPr algn="l">
@@ -5103,7 +5649,7 @@
                 </a:tc>
                 <a:tc>
                   <a:txBody>
-                    <a:bodyPr wrap="square"/>
+                    <a:bodyPr/>
                     <a:lstStyle/>
                     <a:p>
                       <a:pPr algn="l">
@@ -5135,11 +5681,16 @@
                     </a:solidFill>
                   </a:tcPr>
                 </a:tc>
+                <a:extLst>
+                  <a:ext uri="{0D108BD9-81ED-4DB2-BD59-A6C34878D82A}">
+                    <a16:rowId xmlns:a16="http://schemas.microsoft.com/office/drawing/2014/main" val="10003"/>
+                  </a:ext>
+                </a:extLst>
               </a:tr>
               <a:tr h="439420">
                 <a:tc>
                   <a:txBody>
-                    <a:bodyPr wrap="square"/>
+                    <a:bodyPr/>
                     <a:lstStyle/>
                     <a:p>
                       <a:pPr algn="l">
@@ -5173,7 +5724,7 @@
                 </a:tc>
                 <a:tc>
                   <a:txBody>
-                    <a:bodyPr wrap="square"/>
+                    <a:bodyPr/>
                     <a:lstStyle/>
                     <a:p>
                       <a:pPr algn="l">
@@ -5207,7 +5758,7 @@
                 </a:tc>
                 <a:tc>
                   <a:txBody>
-                    <a:bodyPr wrap="square"/>
+                    <a:bodyPr/>
                     <a:lstStyle/>
                     <a:p>
                       <a:pPr algn="l">
@@ -5239,11 +5790,16 @@
                     </a:solidFill>
                   </a:tcPr>
                 </a:tc>
+                <a:extLst>
+                  <a:ext uri="{0D108BD9-81ED-4DB2-BD59-A6C34878D82A}">
+                    <a16:rowId xmlns:a16="http://schemas.microsoft.com/office/drawing/2014/main" val="10004"/>
+                  </a:ext>
+                </a:extLst>
               </a:tr>
               <a:tr h="439420">
                 <a:tc>
                   <a:txBody>
-                    <a:bodyPr wrap="square"/>
+                    <a:bodyPr/>
                     <a:lstStyle/>
                     <a:p>
                       <a:pPr algn="l">
@@ -5277,7 +5833,7 @@
                 </a:tc>
                 <a:tc>
                   <a:txBody>
-                    <a:bodyPr wrap="square"/>
+                    <a:bodyPr/>
                     <a:lstStyle/>
                     <a:p>
                       <a:pPr algn="l">
@@ -5311,7 +5867,7 @@
                 </a:tc>
                 <a:tc>
                   <a:txBody>
-                    <a:bodyPr wrap="square"/>
+                    <a:bodyPr/>
                     <a:lstStyle/>
                     <a:p>
                       <a:pPr algn="l">
@@ -5343,6 +5899,11 @@
                     </a:solidFill>
                   </a:tcPr>
                 </a:tc>
+                <a:extLst>
+                  <a:ext uri="{0D108BD9-81ED-4DB2-BD59-A6C34878D82A}">
+                    <a16:rowId xmlns:a16="http://schemas.microsoft.com/office/drawing/2014/main" val="10005"/>
+                  </a:ext>
+                </a:extLst>
               </a:tr>
             </a:tbl>
           </a:graphicData>
@@ -5365,7 +5926,7 @@
           <a:noFill/>
         </p:spPr>
         <p:txBody>
-          <a:bodyPr wrap="square" lIns="0" rIns="0" tIns="0" bIns="0">
+          <a:bodyPr wrap="square" lIns="0" tIns="0" rIns="0" bIns="0">
             <a:noAutofit/>
           </a:bodyPr>
           <a:lstStyle/>
@@ -5408,7 +5969,7 @@
           <a:noFill/>
         </p:spPr>
         <p:txBody>
-          <a:bodyPr wrap="square" lIns="0" rIns="0" tIns="0" bIns="0">
+          <a:bodyPr wrap="square" lIns="0" tIns="0" rIns="0" bIns="0">
             <a:noAutofit/>
           </a:bodyPr>
           <a:lstStyle/>
@@ -5451,7 +6012,7 @@
           <a:noFill/>
         </p:spPr>
         <p:txBody>
-          <a:bodyPr wrap="square" lIns="0" rIns="0" tIns="0" bIns="0">
+          <a:bodyPr wrap="square" lIns="0" tIns="0" rIns="0" bIns="0">
             <a:noAutofit/>
           </a:bodyPr>
           <a:lstStyle/>
@@ -5486,7 +6047,7 @@
 </file>
 
 <file path=ppt/slides/slide13.xml><?xml version="1.0" encoding="utf-8"?>
-<p:sld xmlns:a="http://schemas.openxmlformats.org/drawingml/2006/main" xmlns:p="http://schemas.openxmlformats.org/presentationml/2006/main" xmlns:r="http://schemas.openxmlformats.org/officeDocument/2006/relationships">
+<p:sld xmlns:a="http://schemas.openxmlformats.org/drawingml/2006/main" xmlns:r="http://schemas.openxmlformats.org/officeDocument/2006/relationships" xmlns:p="http://schemas.openxmlformats.org/presentationml/2006/main">
   <p:cSld>
     <p:spTree>
       <p:nvGrpSpPr>
@@ -5494,7 +6055,14 @@
         <p:cNvGrpSpPr/>
         <p:nvPr/>
       </p:nvGrpSpPr>
-      <p:grpSpPr/>
+      <p:grpSpPr>
+        <a:xfrm>
+          <a:off x="0" y="0"/>
+          <a:ext cx="0" cy="0"/>
+          <a:chOff x="0" y="0"/>
+          <a:chExt cx="0" cy="0"/>
+        </a:xfrm>
+      </p:grpSpPr>
       <p:sp>
         <p:nvSpPr>
           <p:cNvPr id="2" name="TextBox 1"/>
@@ -5512,7 +6080,7 @@
           <a:noFill/>
         </p:spPr>
         <p:txBody>
-          <a:bodyPr wrap="square" lIns="0" rIns="0" tIns="0" bIns="0">
+          <a:bodyPr wrap="square" lIns="0" tIns="0" rIns="0" bIns="0">
             <a:noAutofit/>
           </a:bodyPr>
           <a:lstStyle/>
@@ -5579,6 +6147,7 @@
           <a:lstStyle/>
           <a:p>
             <a:pPr algn="ctr"/>
+            <a:endParaRPr/>
           </a:p>
         </p:txBody>
       </p:sp>
@@ -5599,7 +6168,7 @@
           <a:noFill/>
         </p:spPr>
         <p:txBody>
-          <a:bodyPr wrap="square" lIns="0" rIns="0" tIns="0" bIns="0">
+          <a:bodyPr wrap="square" lIns="0" tIns="0" rIns="0" bIns="0">
             <a:noAutofit/>
           </a:bodyPr>
           <a:lstStyle/>
@@ -5829,7 +6398,7 @@
           <a:noFill/>
         </p:spPr>
         <p:txBody>
-          <a:bodyPr wrap="square" lIns="0" rIns="0" tIns="0" bIns="0">
+          <a:bodyPr wrap="square" lIns="0" tIns="0" rIns="0" bIns="0">
             <a:noAutofit/>
           </a:bodyPr>
           <a:lstStyle/>
@@ -5872,7 +6441,7 @@
           <a:noFill/>
         </p:spPr>
         <p:txBody>
-          <a:bodyPr wrap="square" lIns="0" rIns="0" tIns="0" bIns="0">
+          <a:bodyPr wrap="square" lIns="0" tIns="0" rIns="0" bIns="0">
             <a:noAutofit/>
           </a:bodyPr>
           <a:lstStyle/>
@@ -5907,7 +6476,7 @@
 </file>
 
 <file path=ppt/slides/slide14.xml><?xml version="1.0" encoding="utf-8"?>
-<p:sld xmlns:a="http://schemas.openxmlformats.org/drawingml/2006/main" xmlns:p="http://schemas.openxmlformats.org/presentationml/2006/main" xmlns:r="http://schemas.openxmlformats.org/officeDocument/2006/relationships">
+<p:sld xmlns:a="http://schemas.openxmlformats.org/drawingml/2006/main" xmlns:r="http://schemas.openxmlformats.org/officeDocument/2006/relationships" xmlns:p="http://schemas.openxmlformats.org/presentationml/2006/main">
   <p:cSld>
     <p:spTree>
       <p:nvGrpSpPr>
@@ -5915,7 +6484,14 @@
         <p:cNvGrpSpPr/>
         <p:nvPr/>
       </p:nvGrpSpPr>
-      <p:grpSpPr/>
+      <p:grpSpPr>
+        <a:xfrm>
+          <a:off x="0" y="0"/>
+          <a:ext cx="0" cy="0"/>
+          <a:chOff x="0" y="0"/>
+          <a:chExt cx="0" cy="0"/>
+        </a:xfrm>
+      </p:grpSpPr>
       <p:sp>
         <p:nvSpPr>
           <p:cNvPr id="2" name="TextBox 1"/>
@@ -5933,7 +6509,7 @@
           <a:noFill/>
         </p:spPr>
         <p:txBody>
-          <a:bodyPr wrap="square" lIns="0" rIns="0" tIns="0" bIns="0">
+          <a:bodyPr wrap="square" lIns="0" tIns="0" rIns="0" bIns="0">
             <a:noAutofit/>
           </a:bodyPr>
           <a:lstStyle/>
@@ -6000,6 +6576,7 @@
           <a:lstStyle/>
           <a:p>
             <a:pPr algn="ctr"/>
+            <a:endParaRPr/>
           </a:p>
         </p:txBody>
       </p:sp>
@@ -6046,6 +6623,7 @@
           <a:lstStyle/>
           <a:p>
             <a:pPr algn="ctr"/>
+            <a:endParaRPr/>
           </a:p>
         </p:txBody>
       </p:sp>
@@ -6066,7 +6644,7 @@
           <a:noFill/>
         </p:spPr>
         <p:txBody>
-          <a:bodyPr wrap="square" lIns="0" rIns="0" tIns="0" bIns="0">
+          <a:bodyPr wrap="square" lIns="0" tIns="0" rIns="0" bIns="0">
             <a:noAutofit/>
           </a:bodyPr>
           <a:lstStyle/>
@@ -6204,7 +6782,7 @@
           <a:noFill/>
         </p:spPr>
         <p:txBody>
-          <a:bodyPr wrap="square" lIns="0" rIns="0" tIns="0" bIns="0">
+          <a:bodyPr wrap="square" lIns="0" tIns="0" rIns="0" bIns="0">
             <a:noAutofit/>
           </a:bodyPr>
           <a:lstStyle/>
@@ -6247,7 +6825,7 @@
           <a:noFill/>
         </p:spPr>
         <p:txBody>
-          <a:bodyPr wrap="square" lIns="0" rIns="0" tIns="0" bIns="0">
+          <a:bodyPr wrap="square" lIns="0" tIns="0" rIns="0" bIns="0">
             <a:noAutofit/>
           </a:bodyPr>
           <a:lstStyle/>
@@ -6290,7 +6868,7 @@
           <a:noFill/>
         </p:spPr>
         <p:txBody>
-          <a:bodyPr wrap="square" lIns="0" rIns="0" tIns="0" bIns="0">
+          <a:bodyPr wrap="square" lIns="0" tIns="0" rIns="0" bIns="0">
             <a:noAutofit/>
           </a:bodyPr>
           <a:lstStyle/>
@@ -6325,7 +6903,7 @@
 </file>
 
 <file path=ppt/slides/slide15.xml><?xml version="1.0" encoding="utf-8"?>
-<p:sld xmlns:a="http://schemas.openxmlformats.org/drawingml/2006/main" xmlns:p="http://schemas.openxmlformats.org/presentationml/2006/main" xmlns:r="http://schemas.openxmlformats.org/officeDocument/2006/relationships">
+<p:sld xmlns:a="http://schemas.openxmlformats.org/drawingml/2006/main" xmlns:r="http://schemas.openxmlformats.org/officeDocument/2006/relationships" xmlns:p="http://schemas.openxmlformats.org/presentationml/2006/main">
   <p:cSld>
     <p:spTree>
       <p:nvGrpSpPr>
@@ -6333,7 +6911,14 @@
         <p:cNvGrpSpPr/>
         <p:nvPr/>
       </p:nvGrpSpPr>
-      <p:grpSpPr/>
+      <p:grpSpPr>
+        <a:xfrm>
+          <a:off x="0" y="0"/>
+          <a:ext cx="0" cy="0"/>
+          <a:chOff x="0" y="0"/>
+          <a:chExt cx="0" cy="0"/>
+        </a:xfrm>
+      </p:grpSpPr>
       <p:sp>
         <p:nvSpPr>
           <p:cNvPr id="2" name="TextBox 1"/>
@@ -6351,7 +6936,7 @@
           <a:noFill/>
         </p:spPr>
         <p:txBody>
-          <a:bodyPr wrap="square" lIns="0" rIns="0" tIns="0" bIns="0">
+          <a:bodyPr wrap="square" lIns="0" tIns="0" rIns="0" bIns="0">
             <a:noAutofit/>
           </a:bodyPr>
           <a:lstStyle/>
@@ -6418,6 +7003,7 @@
           <a:lstStyle/>
           <a:p>
             <a:pPr algn="ctr"/>
+            <a:endParaRPr/>
           </a:p>
         </p:txBody>
       </p:sp>
@@ -6440,13 +7026,25 @@
                 <a:tableStyleId>{5C22544A-7EE6-4342-B048-85BDC9FD1C3A}</a:tableStyleId>
               </a:tblPr>
               <a:tblGrid>
-                <a:gridCol w="2986159"/>
-                <a:gridCol w="8071679"/>
+                <a:gridCol w="2986159">
+                  <a:extLst>
+                    <a:ext uri="{9D8B030D-6E8A-4147-A177-3AD203B41FA5}">
+                      <a16:colId xmlns:a16="http://schemas.microsoft.com/office/drawing/2014/main" val="20000"/>
+                    </a:ext>
+                  </a:extLst>
+                </a:gridCol>
+                <a:gridCol w="8071679">
+                  <a:extLst>
+                    <a:ext uri="{9D8B030D-6E8A-4147-A177-3AD203B41FA5}">
+                      <a16:colId xmlns:a16="http://schemas.microsoft.com/office/drawing/2014/main" val="20001"/>
+                    </a:ext>
+                  </a:extLst>
+                </a:gridCol>
               </a:tblGrid>
               <a:tr h="439420">
                 <a:tc>
                   <a:txBody>
-                    <a:bodyPr wrap="square"/>
+                    <a:bodyPr/>
                     <a:lstStyle/>
                     <a:p>
                       <a:pPr algn="l">
@@ -6480,7 +7078,7 @@
                 </a:tc>
                 <a:tc>
                   <a:txBody>
-                    <a:bodyPr wrap="square"/>
+                    <a:bodyPr/>
                     <a:lstStyle/>
                     <a:p>
                       <a:pPr algn="l">
@@ -6512,11 +7110,16 @@
                     </a:solidFill>
                   </a:tcPr>
                 </a:tc>
+                <a:extLst>
+                  <a:ext uri="{0D108BD9-81ED-4DB2-BD59-A6C34878D82A}">
+                    <a16:rowId xmlns:a16="http://schemas.microsoft.com/office/drawing/2014/main" val="10000"/>
+                  </a:ext>
+                </a:extLst>
               </a:tr>
               <a:tr h="439420">
                 <a:tc>
                   <a:txBody>
-                    <a:bodyPr wrap="square"/>
+                    <a:bodyPr/>
                     <a:lstStyle/>
                     <a:p>
                       <a:pPr algn="l">
@@ -6550,7 +7153,7 @@
                 </a:tc>
                 <a:tc>
                   <a:txBody>
-                    <a:bodyPr wrap="square"/>
+                    <a:bodyPr/>
                     <a:lstStyle/>
                     <a:p>
                       <a:pPr algn="l">
@@ -6582,11 +7185,16 @@
                     </a:solidFill>
                   </a:tcPr>
                 </a:tc>
+                <a:extLst>
+                  <a:ext uri="{0D108BD9-81ED-4DB2-BD59-A6C34878D82A}">
+                    <a16:rowId xmlns:a16="http://schemas.microsoft.com/office/drawing/2014/main" val="10001"/>
+                  </a:ext>
+                </a:extLst>
               </a:tr>
               <a:tr h="439420">
                 <a:tc>
                   <a:txBody>
-                    <a:bodyPr wrap="square"/>
+                    <a:bodyPr/>
                     <a:lstStyle/>
                     <a:p>
                       <a:pPr algn="l">
@@ -6620,7 +7228,7 @@
                 </a:tc>
                 <a:tc>
                   <a:txBody>
-                    <a:bodyPr wrap="square"/>
+                    <a:bodyPr/>
                     <a:lstStyle/>
                     <a:p>
                       <a:pPr algn="l">
@@ -6652,11 +7260,16 @@
                     </a:solidFill>
                   </a:tcPr>
                 </a:tc>
+                <a:extLst>
+                  <a:ext uri="{0D108BD9-81ED-4DB2-BD59-A6C34878D82A}">
+                    <a16:rowId xmlns:a16="http://schemas.microsoft.com/office/drawing/2014/main" val="10002"/>
+                  </a:ext>
+                </a:extLst>
               </a:tr>
               <a:tr h="439420">
                 <a:tc>
                   <a:txBody>
-                    <a:bodyPr wrap="square"/>
+                    <a:bodyPr/>
                     <a:lstStyle/>
                     <a:p>
                       <a:pPr algn="l">
@@ -6690,7 +7303,7 @@
                 </a:tc>
                 <a:tc>
                   <a:txBody>
-                    <a:bodyPr wrap="square"/>
+                    <a:bodyPr/>
                     <a:lstStyle/>
                     <a:p>
                       <a:pPr algn="l">
@@ -6722,11 +7335,16 @@
                     </a:solidFill>
                   </a:tcPr>
                 </a:tc>
+                <a:extLst>
+                  <a:ext uri="{0D108BD9-81ED-4DB2-BD59-A6C34878D82A}">
+                    <a16:rowId xmlns:a16="http://schemas.microsoft.com/office/drawing/2014/main" val="10003"/>
+                  </a:ext>
+                </a:extLst>
               </a:tr>
               <a:tr h="439420">
                 <a:tc>
                   <a:txBody>
-                    <a:bodyPr wrap="square"/>
+                    <a:bodyPr/>
                     <a:lstStyle/>
                     <a:p>
                       <a:pPr algn="l">
@@ -6760,7 +7378,7 @@
                 </a:tc>
                 <a:tc>
                   <a:txBody>
-                    <a:bodyPr wrap="square"/>
+                    <a:bodyPr/>
                     <a:lstStyle/>
                     <a:p>
                       <a:pPr algn="l">
@@ -6792,11 +7410,16 @@
                     </a:solidFill>
                   </a:tcPr>
                 </a:tc>
+                <a:extLst>
+                  <a:ext uri="{0D108BD9-81ED-4DB2-BD59-A6C34878D82A}">
+                    <a16:rowId xmlns:a16="http://schemas.microsoft.com/office/drawing/2014/main" val="10004"/>
+                  </a:ext>
+                </a:extLst>
               </a:tr>
               <a:tr h="439420">
                 <a:tc>
                   <a:txBody>
-                    <a:bodyPr wrap="square"/>
+                    <a:bodyPr/>
                     <a:lstStyle/>
                     <a:p>
                       <a:pPr algn="l">
@@ -6830,7 +7453,7 @@
                 </a:tc>
                 <a:tc>
                   <a:txBody>
-                    <a:bodyPr wrap="square"/>
+                    <a:bodyPr/>
                     <a:lstStyle/>
                     <a:p>
                       <a:pPr algn="l">
@@ -6862,6 +7485,11 @@
                     </a:solidFill>
                   </a:tcPr>
                 </a:tc>
+                <a:extLst>
+                  <a:ext uri="{0D108BD9-81ED-4DB2-BD59-A6C34878D82A}">
+                    <a16:rowId xmlns:a16="http://schemas.microsoft.com/office/drawing/2014/main" val="10005"/>
+                  </a:ext>
+                </a:extLst>
               </a:tr>
             </a:tbl>
           </a:graphicData>
@@ -6884,7 +7512,7 @@
           <a:noFill/>
         </p:spPr>
         <p:txBody>
-          <a:bodyPr wrap="square" lIns="0" rIns="0" tIns="0" bIns="0">
+          <a:bodyPr wrap="square" lIns="0" tIns="0" rIns="0" bIns="0">
             <a:noAutofit/>
           </a:bodyPr>
           <a:lstStyle/>
@@ -6927,7 +7555,7 @@
           <a:noFill/>
         </p:spPr>
         <p:txBody>
-          <a:bodyPr wrap="square" lIns="0" rIns="0" tIns="0" bIns="0">
+          <a:bodyPr wrap="square" lIns="0" tIns="0" rIns="0" bIns="0">
             <a:noAutofit/>
           </a:bodyPr>
           <a:lstStyle/>
@@ -6962,7 +7590,7 @@
 </file>
 
 <file path=ppt/slides/slide16.xml><?xml version="1.0" encoding="utf-8"?>
-<p:sld xmlns:a="http://schemas.openxmlformats.org/drawingml/2006/main" xmlns:p="http://schemas.openxmlformats.org/presentationml/2006/main" xmlns:r="http://schemas.openxmlformats.org/officeDocument/2006/relationships">
+<p:sld xmlns:a="http://schemas.openxmlformats.org/drawingml/2006/main" xmlns:r="http://schemas.openxmlformats.org/officeDocument/2006/relationships" xmlns:p="http://schemas.openxmlformats.org/presentationml/2006/main">
   <p:cSld>
     <p:spTree>
       <p:nvGrpSpPr>
@@ -6970,7 +7598,14 @@
         <p:cNvGrpSpPr/>
         <p:nvPr/>
       </p:nvGrpSpPr>
-      <p:grpSpPr/>
+      <p:grpSpPr>
+        <a:xfrm>
+          <a:off x="0" y="0"/>
+          <a:ext cx="0" cy="0"/>
+          <a:chOff x="0" y="0"/>
+          <a:chExt cx="0" cy="0"/>
+        </a:xfrm>
+      </p:grpSpPr>
       <p:sp>
         <p:nvSpPr>
           <p:cNvPr id="2" name="Rectangle 1"/>
@@ -7012,6 +7647,7 @@
           <a:lstStyle/>
           <a:p>
             <a:pPr algn="ctr"/>
+            <a:endParaRPr/>
           </a:p>
         </p:txBody>
       </p:sp>
@@ -7056,6 +7692,7 @@
           <a:lstStyle/>
           <a:p>
             <a:pPr algn="ctr"/>
+            <a:endParaRPr/>
           </a:p>
         </p:txBody>
       </p:sp>
@@ -7076,7 +7713,7 @@
           <a:noFill/>
         </p:spPr>
         <p:txBody>
-          <a:bodyPr wrap="square" lIns="0" rIns="0" tIns="0" bIns="0">
+          <a:bodyPr wrap="square" lIns="0" tIns="0" rIns="0" bIns="0">
             <a:noAutofit/>
           </a:bodyPr>
           <a:lstStyle/>
@@ -7131,7 +7768,7 @@
 </file>
 
 <file path=ppt/slides/slide17.xml><?xml version="1.0" encoding="utf-8"?>
-<p:sld xmlns:a="http://schemas.openxmlformats.org/drawingml/2006/main" xmlns:p="http://schemas.openxmlformats.org/presentationml/2006/main" xmlns:r="http://schemas.openxmlformats.org/officeDocument/2006/relationships">
+<p:sld xmlns:a="http://schemas.openxmlformats.org/drawingml/2006/main" xmlns:r="http://schemas.openxmlformats.org/officeDocument/2006/relationships" xmlns:p="http://schemas.openxmlformats.org/presentationml/2006/main">
   <p:cSld>
     <p:spTree>
       <p:nvGrpSpPr>
@@ -7139,7 +7776,14 @@
         <p:cNvGrpSpPr/>
         <p:nvPr/>
       </p:nvGrpSpPr>
-      <p:grpSpPr/>
+      <p:grpSpPr>
+        <a:xfrm>
+          <a:off x="0" y="0"/>
+          <a:ext cx="0" cy="0"/>
+          <a:chOff x="0" y="0"/>
+          <a:chExt cx="0" cy="0"/>
+        </a:xfrm>
+      </p:grpSpPr>
       <p:sp>
         <p:nvSpPr>
           <p:cNvPr id="2" name="TextBox 1"/>
@@ -7157,7 +7801,7 @@
           <a:noFill/>
         </p:spPr>
         <p:txBody>
-          <a:bodyPr wrap="square" lIns="0" rIns="0" tIns="0" bIns="0">
+          <a:bodyPr wrap="square" lIns="0" tIns="0" rIns="0" bIns="0">
             <a:noAutofit/>
           </a:bodyPr>
           <a:lstStyle/>
@@ -7224,6 +7868,7 @@
           <a:lstStyle/>
           <a:p>
             <a:pPr algn="ctr"/>
+            <a:endParaRPr/>
           </a:p>
         </p:txBody>
       </p:sp>
@@ -7270,6 +7915,7 @@
           <a:lstStyle/>
           <a:p>
             <a:pPr algn="ctr"/>
+            <a:endParaRPr/>
           </a:p>
         </p:txBody>
       </p:sp>
@@ -7290,7 +7936,7 @@
           <a:noFill/>
         </p:spPr>
         <p:txBody>
-          <a:bodyPr wrap="square" lIns="0" rIns="0" tIns="0" bIns="0">
+          <a:bodyPr wrap="square" lIns="0" tIns="0" rIns="0" bIns="0">
             <a:noAutofit/>
           </a:bodyPr>
           <a:lstStyle/>
@@ -7520,7 +8166,7 @@
           <a:noFill/>
         </p:spPr>
         <p:txBody>
-          <a:bodyPr wrap="square" lIns="0" rIns="0" tIns="0" bIns="0">
+          <a:bodyPr wrap="square" lIns="0" tIns="0" rIns="0" bIns="0">
             <a:noAutofit/>
           </a:bodyPr>
           <a:lstStyle/>
@@ -7563,7 +8209,7 @@
           <a:noFill/>
         </p:spPr>
         <p:txBody>
-          <a:bodyPr wrap="square" lIns="0" rIns="0" tIns="0" bIns="0">
+          <a:bodyPr wrap="square" lIns="0" tIns="0" rIns="0" bIns="0">
             <a:noAutofit/>
           </a:bodyPr>
           <a:lstStyle/>
@@ -7606,7 +8252,7 @@
           <a:noFill/>
         </p:spPr>
         <p:txBody>
-          <a:bodyPr wrap="square" lIns="0" rIns="0" tIns="0" bIns="0">
+          <a:bodyPr wrap="square" lIns="0" tIns="0" rIns="0" bIns="0">
             <a:noAutofit/>
           </a:bodyPr>
           <a:lstStyle/>
@@ -7641,7 +8287,7 @@
 </file>
 
 <file path=ppt/slides/slide18.xml><?xml version="1.0" encoding="utf-8"?>
-<p:sld xmlns:a="http://schemas.openxmlformats.org/drawingml/2006/main" xmlns:p="http://schemas.openxmlformats.org/presentationml/2006/main" xmlns:r="http://schemas.openxmlformats.org/officeDocument/2006/relationships">
+<p:sld xmlns:a="http://schemas.openxmlformats.org/drawingml/2006/main" xmlns:r="http://schemas.openxmlformats.org/officeDocument/2006/relationships" xmlns:p="http://schemas.openxmlformats.org/presentationml/2006/main">
   <p:cSld>
     <p:spTree>
       <p:nvGrpSpPr>
@@ -7649,7 +8295,14 @@
         <p:cNvGrpSpPr/>
         <p:nvPr/>
       </p:nvGrpSpPr>
-      <p:grpSpPr/>
+      <p:grpSpPr>
+        <a:xfrm>
+          <a:off x="0" y="0"/>
+          <a:ext cx="0" cy="0"/>
+          <a:chOff x="0" y="0"/>
+          <a:chExt cx="0" cy="0"/>
+        </a:xfrm>
+      </p:grpSpPr>
       <p:sp>
         <p:nvSpPr>
           <p:cNvPr id="2" name="TextBox 1"/>
@@ -7667,7 +8320,7 @@
           <a:noFill/>
         </p:spPr>
         <p:txBody>
-          <a:bodyPr wrap="square" lIns="0" rIns="0" tIns="0" bIns="0">
+          <a:bodyPr wrap="square" lIns="0" tIns="0" rIns="0" bIns="0">
             <a:noAutofit/>
           </a:bodyPr>
           <a:lstStyle/>
@@ -7734,6 +8387,7 @@
           <a:lstStyle/>
           <a:p>
             <a:pPr algn="ctr"/>
+            <a:endParaRPr/>
           </a:p>
         </p:txBody>
       </p:sp>
@@ -7754,7 +8408,7 @@
           <a:noFill/>
         </p:spPr>
         <p:txBody>
-          <a:bodyPr wrap="square" lIns="0" rIns="0" tIns="0" bIns="0">
+          <a:bodyPr wrap="square" lIns="0" tIns="0" rIns="0" bIns="0">
             <a:noAutofit/>
           </a:bodyPr>
           <a:lstStyle/>
@@ -7771,7 +8425,7 @@
               </a:spcAft>
             </a:pPr>
             <a:r>
-              <a:rPr sz="2000" b="0" i="0">
+              <a:rPr sz="2000" b="0" i="0" dirty="0">
                 <a:solidFill>
                   <a:srgbClr val="242A33"/>
                 </a:solidFill>
@@ -7781,7 +8435,7 @@
               <a:t>•  </a:t>
             </a:r>
             <a:r>
-              <a:rPr sz="2000" b="1" i="0">
+              <a:rPr sz="2000" b="1" i="0" dirty="0" err="1">
                 <a:solidFill>
                   <a:srgbClr val="12395B"/>
                 </a:solidFill>
@@ -7791,18 +8445,85 @@
               <a:t>调试器</a:t>
             </a:r>
             <a:r>
-              <a:rPr sz="2000" b="0" i="0">
+              <a:rPr sz="2000" b="0" i="0" dirty="0" err="1">
                 <a:solidFill>
                   <a:srgbClr val="242A33"/>
                 </a:solidFill>
                 <a:latin typeface="Segoe UI"/>
                 <a:ea typeface="微软雅黑"/>
               </a:rPr>
-              <a:t>：行号左侧打断点 → Debug → 单步 F8 / 步入 F7 / 看变量</a:t>
-            </a:r>
-          </a:p>
-          <a:p>
-            <a:pPr algn="l" lvl="1">
+              <a:t>：行号左侧打断点</a:t>
+            </a:r>
+            <a:r>
+              <a:rPr sz="2000" b="0" i="0" dirty="0">
+                <a:solidFill>
+                  <a:srgbClr val="242A33"/>
+                </a:solidFill>
+                <a:latin typeface="Segoe UI"/>
+                <a:ea typeface="微软雅黑"/>
+              </a:rPr>
+              <a:t> → Debug → </a:t>
+            </a:r>
+            <a:r>
+              <a:rPr sz="2000" b="0" i="0" dirty="0" err="1">
+                <a:solidFill>
+                  <a:srgbClr val="242A33"/>
+                </a:solidFill>
+                <a:latin typeface="Segoe UI"/>
+                <a:ea typeface="微软雅黑"/>
+              </a:rPr>
+              <a:t>单步</a:t>
+            </a:r>
+            <a:r>
+              <a:rPr sz="2000" b="0" i="0" dirty="0">
+                <a:solidFill>
+                  <a:srgbClr val="242A33"/>
+                </a:solidFill>
+                <a:latin typeface="Segoe UI"/>
+                <a:ea typeface="微软雅黑"/>
+              </a:rPr>
+              <a:t> F8 / </a:t>
+            </a:r>
+            <a:r>
+              <a:rPr sz="2000" b="0" i="0" dirty="0" err="1">
+                <a:solidFill>
+                  <a:srgbClr val="242A33"/>
+                </a:solidFill>
+                <a:latin typeface="Segoe UI"/>
+                <a:ea typeface="微软雅黑"/>
+              </a:rPr>
+              <a:t>步入</a:t>
+            </a:r>
+            <a:r>
+              <a:rPr sz="2000" b="0" i="0" dirty="0">
+                <a:solidFill>
+                  <a:srgbClr val="242A33"/>
+                </a:solidFill>
+                <a:latin typeface="Segoe UI"/>
+                <a:ea typeface="微软雅黑"/>
+              </a:rPr>
+              <a:t> F7 / </a:t>
+            </a:r>
+            <a:r>
+              <a:rPr sz="2000" b="0" i="0" dirty="0" err="1">
+                <a:solidFill>
+                  <a:srgbClr val="242A33"/>
+                </a:solidFill>
+                <a:latin typeface="Segoe UI"/>
+                <a:ea typeface="微软雅黑"/>
+              </a:rPr>
+              <a:t>看变量</a:t>
+            </a:r>
+            <a:endParaRPr sz="2000" b="0" i="0" dirty="0">
+              <a:solidFill>
+                <a:srgbClr val="242A33"/>
+              </a:solidFill>
+              <a:latin typeface="Segoe UI"/>
+              <a:ea typeface="微软雅黑"/>
+            </a:endParaRPr>
+          </a:p>
+          <a:p>
+            <a:pPr lvl="1" algn="l">
               <a:lnSpc>
                 <a:spcPct val="130000"/>
               </a:lnSpc>
@@ -7814,17 +8535,37 @@
               </a:spcAft>
             </a:pPr>
             <a:r>
-              <a:rPr sz="1639" b="0" i="0">
+              <a:rPr sz="1639" b="0" i="0" dirty="0">
                 <a:solidFill>
                   <a:srgbClr val="6B7582"/>
                 </a:solidFill>
                 <a:latin typeface="Segoe UI"/>
                 <a:ea typeface="微软雅黑"/>
               </a:rPr>
-              <a:t>·  不会用调试器就只能靠 </a:t>
-            </a:r>
-            <a:r>
-              <a:rPr sz="1541" b="0" i="0">
+              <a:t>·  </a:t>
+            </a:r>
+            <a:r>
+              <a:rPr sz="1639" b="0" i="0" dirty="0" err="1">
+                <a:solidFill>
+                  <a:srgbClr val="6B7582"/>
+                </a:solidFill>
+                <a:latin typeface="Segoe UI"/>
+                <a:ea typeface="微软雅黑"/>
+              </a:rPr>
+              <a:t>不会用调试器就只能靠</a:t>
+            </a:r>
+            <a:r>
+              <a:rPr sz="1639" b="0" i="0" dirty="0">
+                <a:solidFill>
+                  <a:srgbClr val="6B7582"/>
+                </a:solidFill>
+                <a:latin typeface="Segoe UI"/>
+                <a:ea typeface="微软雅黑"/>
+              </a:rPr>
+              <a:t> </a:t>
+            </a:r>
+            <a:r>
+              <a:rPr sz="1541" b="0" i="0" dirty="0">
                 <a:solidFill>
                   <a:srgbClr val="6B7582"/>
                 </a:solidFill>
@@ -7834,30 +8575,44 @@
               <a:t>print</a:t>
             </a:r>
             <a:r>
-              <a:rPr sz="1639" b="0" i="0">
+              <a:rPr sz="1639" b="0" i="0" dirty="0">
                 <a:solidFill>
                   <a:srgbClr val="6B7582"/>
                 </a:solidFill>
                 <a:latin typeface="Segoe UI"/>
                 <a:ea typeface="微软雅黑"/>
               </a:rPr>
-              <a:t> 猜，效率差一个数量级</a:t>
-            </a:r>
-          </a:p>
-          <a:p>
-            <a:pPr algn="l">
+              <a:t> </a:t>
+            </a:r>
+            <a:r>
+              <a:rPr sz="1639" b="0" i="0" dirty="0" err="1">
+                <a:solidFill>
+                  <a:srgbClr val="6B7582"/>
+                </a:solidFill>
+                <a:latin typeface="Segoe UI"/>
+                <a:ea typeface="微软雅黑"/>
+              </a:rPr>
+              <a:t>猜，效率差一个数量级</a:t>
+            </a:r>
+            <a:endParaRPr sz="1639" b="0" i="0" dirty="0">
+              <a:solidFill>
+                <a:srgbClr val="6B7582"/>
+              </a:solidFill>
+              <a:latin typeface="Segoe UI"/>
+              <a:ea typeface="微软雅黑"/>
+            </a:endParaRPr>
+          </a:p>
+          <a:p>
+            <a:pPr>
               <a:lnSpc>
                 <a:spcPct val="132000"/>
               </a:lnSpc>
-              <a:spcBef>
-                <a:spcPts val="0"/>
-              </a:spcBef>
               <a:spcAft>
                 <a:spcPts val="1240"/>
               </a:spcAft>
             </a:pPr>
             <a:r>
-              <a:rPr sz="2000" b="0" i="0">
+              <a:rPr sz="2000" b="0" i="0" dirty="0">
                 <a:solidFill>
                   <a:srgbClr val="242A33"/>
                 </a:solidFill>
@@ -7867,91 +8622,269 @@
               <a:t>•  </a:t>
             </a:r>
             <a:r>
-              <a:rPr sz="2000" b="1" i="0">
+              <a:rPr lang="en-CN" sz="2000" b="1" dirty="0">
                 <a:solidFill>
                   <a:srgbClr val="12395B"/>
                 </a:solidFill>
                 <a:latin typeface="Segoe UI"/>
                 <a:ea typeface="微软雅黑"/>
               </a:rPr>
-              <a:t>重定向输入</a:t>
-            </a:r>
-            <a:r>
-              <a:rPr sz="2000" b="0" i="0">
-                <a:solidFill>
-                  <a:srgbClr val="242A33"/>
+              <a:t>直接</a:t>
+            </a:r>
+            <a:r>
+              <a:rPr sz="2000" b="1" i="0" dirty="0" err="1">
+                <a:solidFill>
+                  <a:srgbClr val="12395B"/>
                 </a:solidFill>
                 <a:latin typeface="Segoe UI"/>
                 <a:ea typeface="微软雅黑"/>
               </a:rPr>
-              <a:t>：Run/Debug Configurations → 勾选 "Redirect input from"</a:t>
-            </a:r>
-          </a:p>
-          <a:p>
-            <a:pPr algn="l" lvl="1">
-              <a:lnSpc>
-                <a:spcPct val="130000"/>
-              </a:lnSpc>
-              <a:spcBef>
-                <a:spcPts val="0"/>
-              </a:spcBef>
-              <a:spcAft>
-                <a:spcPts val="892"/>
-              </a:spcAft>
-            </a:pPr>
-            <a:r>
-              <a:rPr sz="1639" b="0" i="0">
-                <a:solidFill>
-                  <a:srgbClr val="6B7582"/>
+              <a:t>输入</a:t>
+            </a:r>
+            <a:r>
+              <a:rPr sz="2000" b="0" i="0" dirty="0">
+                <a:solidFill>
+                  <a:srgbClr val="242A33"/>
                 </a:solidFill>
                 <a:latin typeface="Segoe UI"/>
                 <a:ea typeface="微软雅黑"/>
               </a:rPr>
-              <a:t>·  这样在 IDE 里也能直接喂样例</a:t>
-            </a:r>
-          </a:p>
-          <a:p>
-            <a:pPr algn="l">
+              <a:t>：</a:t>
+            </a:r>
+            <a:r>
+              <a:rPr lang="zh-CN" altLang="en-US" sz="2000" dirty="0">
+                <a:solidFill>
+                  <a:srgbClr val="242A33"/>
+                </a:solidFill>
+                <a:latin typeface="Segoe UI"/>
+                <a:ea typeface="微软雅黑"/>
+              </a:rPr>
+              <a:t> 右上角选择 </a:t>
+            </a:r>
+            <a:r>
+              <a:rPr lang="en-US" sz="2000" dirty="0">
+                <a:solidFill>
+                  <a:srgbClr val="242A33"/>
+                </a:solidFill>
+                <a:latin typeface="Segoe UI"/>
+                <a:ea typeface="微软雅黑"/>
+              </a:rPr>
+              <a:t>Current File，</a:t>
+            </a:r>
+            <a:r>
+              <a:rPr lang="zh-CN" altLang="en-US" sz="2000" dirty="0">
+                <a:solidFill>
+                  <a:srgbClr val="242A33"/>
+                </a:solidFill>
+                <a:latin typeface="Segoe UI"/>
+                <a:ea typeface="微软雅黑"/>
+              </a:rPr>
+              <a:t>点击运行 ▶；程序执行到 </a:t>
+            </a:r>
+            <a:r>
+              <a:rPr lang="en-US" sz="2000" dirty="0">
+                <a:solidFill>
+                  <a:srgbClr val="242A33"/>
+                </a:solidFill>
+                <a:latin typeface="Segoe UI"/>
+                <a:ea typeface="微软雅黑"/>
+              </a:rPr>
+              <a:t>input() </a:t>
+            </a:r>
+            <a:r>
+              <a:rPr lang="zh-CN" altLang="en-US" sz="2000" dirty="0">
+                <a:solidFill>
+                  <a:srgbClr val="242A33"/>
+                </a:solidFill>
+                <a:latin typeface="Segoe UI"/>
+                <a:ea typeface="微软雅黑"/>
+              </a:rPr>
+              <a:t>时，在下方 </a:t>
+            </a:r>
+            <a:r>
+              <a:rPr lang="en-US" sz="2000" dirty="0">
+                <a:solidFill>
+                  <a:srgbClr val="242A33"/>
+                </a:solidFill>
+                <a:latin typeface="Segoe UI"/>
+                <a:ea typeface="微软雅黑"/>
+              </a:rPr>
+              <a:t>Run </a:t>
+            </a:r>
+            <a:r>
+              <a:rPr lang="zh-CN" altLang="en-US" sz="2000" dirty="0">
+                <a:solidFill>
+                  <a:srgbClr val="242A33"/>
+                </a:solidFill>
+                <a:latin typeface="Segoe UI"/>
+                <a:ea typeface="微软雅黑"/>
+              </a:rPr>
+              <a:t>窗口直接输入数据并按回车。 </a:t>
+            </a:r>
+            <a:endParaRPr lang="en-US" altLang="zh-CN" sz="2000" dirty="0">
+              <a:solidFill>
+                <a:srgbClr val="242A33"/>
+              </a:solidFill>
+              <a:latin typeface="Segoe UI"/>
+              <a:ea typeface="微软雅黑"/>
+            </a:endParaRPr>
+          </a:p>
+          <a:p>
+            <a:pPr>
               <a:lnSpc>
                 <a:spcPct val="132000"/>
               </a:lnSpc>
-              <a:spcBef>
-                <a:spcPts val="0"/>
-              </a:spcBef>
               <a:spcAft>
                 <a:spcPts val="1240"/>
               </a:spcAft>
             </a:pPr>
             <a:r>
-              <a:rPr sz="2000" b="0" i="0">
+              <a:rPr lang="en-US" sz="2000" b="0" i="0" dirty="0">
                 <a:solidFill>
                   <a:srgbClr val="242A33"/>
                 </a:solidFill>
                 <a:latin typeface="Segoe UI"/>
                 <a:ea typeface="微软雅黑"/>
               </a:rPr>
-              <a:t>•  在线可视化 </a:t>
-            </a:r>
-            <a:r>
-              <a:rPr sz="2000" b="1" i="0">
-                <a:solidFill>
-                  <a:srgbClr val="12395B"/>
+              <a:t>	</a:t>
+            </a:r>
+            <a:r>
+              <a:rPr sz="1639" b="0" i="0" dirty="0">
+                <a:solidFill>
+                  <a:srgbClr val="6B7582"/>
                 </a:solidFill>
                 <a:latin typeface="Segoe UI"/>
                 <a:ea typeface="微软雅黑"/>
               </a:rPr>
-              <a:t>pythontutor.com</a:t>
-            </a:r>
-            <a:r>
-              <a:rPr sz="2000" b="0" i="0">
-                <a:solidFill>
-                  <a:srgbClr val="242A33"/>
+              <a:t>· </a:t>
+            </a:r>
+            <a:r>
+              <a:rPr lang="zh-CN" altLang="en-US" sz="1639" b="0" i="0" dirty="0">
+                <a:solidFill>
+                  <a:srgbClr val="6B7582"/>
                 </a:solidFill>
                 <a:latin typeface="Segoe UI"/>
                 <a:ea typeface="微软雅黑"/>
               </a:rPr>
-              <a:t> —— 第 8 周讲递归时理解栈帧最快的工具</a:t>
-            </a:r>
+              <a:t> </a:t>
+            </a:r>
+            <a:r>
+              <a:rPr lang="zh-CN" altLang="en-US" sz="1639" dirty="0">
+                <a:solidFill>
+                  <a:srgbClr val="6B7582"/>
+                </a:solidFill>
+                <a:latin typeface="Segoe UI"/>
+                <a:ea typeface="微软雅黑"/>
+              </a:rPr>
+              <a:t>适合课堂练习和临时测试，无需配置运行参数 。</a:t>
+            </a:r>
+            <a:endParaRPr sz="1639" b="0" i="0" dirty="0">
+              <a:solidFill>
+                <a:srgbClr val="6B7582"/>
+              </a:solidFill>
+              <a:latin typeface="Segoe UI"/>
+              <a:ea typeface="微软雅黑"/>
+            </a:endParaRPr>
+          </a:p>
+          <a:p>
+            <a:pPr algn="l">
+              <a:lnSpc>
+                <a:spcPct val="132000"/>
+              </a:lnSpc>
+              <a:spcBef>
+                <a:spcPts val="0"/>
+              </a:spcBef>
+              <a:spcAft>
+                <a:spcPts val="1240"/>
+              </a:spcAft>
+            </a:pPr>
+            <a:r>
+              <a:rPr sz="2000" b="0" i="0" dirty="0">
+                <a:solidFill>
+                  <a:srgbClr val="242A33"/>
+                </a:solidFill>
+                <a:latin typeface="Segoe UI"/>
+                <a:ea typeface="微软雅黑"/>
+              </a:rPr>
+              <a:t>•  </a:t>
+            </a:r>
+            <a:r>
+              <a:rPr sz="2000" b="0" i="0" dirty="0" err="1">
+                <a:solidFill>
+                  <a:srgbClr val="242A33"/>
+                </a:solidFill>
+                <a:latin typeface="Segoe UI"/>
+                <a:ea typeface="微软雅黑"/>
+              </a:rPr>
+              <a:t>在线可视化</a:t>
+            </a:r>
+            <a:r>
+              <a:rPr sz="2000" b="0" i="0" dirty="0">
+                <a:solidFill>
+                  <a:srgbClr val="242A33"/>
+                </a:solidFill>
+                <a:latin typeface="Segoe UI"/>
+                <a:ea typeface="微软雅黑"/>
+              </a:rPr>
+              <a:t> </a:t>
+            </a:r>
+            <a:r>
+              <a:rPr sz="2000" b="1" i="0" dirty="0" err="1">
+                <a:solidFill>
+                  <a:srgbClr val="12395B"/>
+                </a:solidFill>
+                <a:latin typeface="Segoe UI"/>
+                <a:ea typeface="微软雅黑"/>
+              </a:rPr>
+              <a:t>pythontutor.com</a:t>
+            </a:r>
+            <a:r>
+              <a:rPr sz="2000" b="0" i="0" dirty="0">
+                <a:solidFill>
+                  <a:srgbClr val="242A33"/>
+                </a:solidFill>
+                <a:latin typeface="Segoe UI"/>
+                <a:ea typeface="微软雅黑"/>
+              </a:rPr>
+              <a:t> —— </a:t>
+            </a:r>
+            <a:r>
+              <a:rPr sz="2000" b="0" i="0" dirty="0" err="1">
+                <a:solidFill>
+                  <a:srgbClr val="242A33"/>
+                </a:solidFill>
+                <a:latin typeface="Segoe UI"/>
+                <a:ea typeface="微软雅黑"/>
+              </a:rPr>
+              <a:t>第</a:t>
+            </a:r>
+            <a:r>
+              <a:rPr sz="2000" b="0" i="0" dirty="0">
+                <a:solidFill>
+                  <a:srgbClr val="242A33"/>
+                </a:solidFill>
+                <a:latin typeface="Segoe UI"/>
+                <a:ea typeface="微软雅黑"/>
+              </a:rPr>
+              <a:t> 8 </a:t>
+            </a:r>
+            <a:r>
+              <a:rPr sz="2000" b="0" i="0" dirty="0" err="1">
+                <a:solidFill>
+                  <a:srgbClr val="242A33"/>
+                </a:solidFill>
+                <a:latin typeface="Segoe UI"/>
+                <a:ea typeface="微软雅黑"/>
+              </a:rPr>
+              <a:t>周讲递归时理解栈帧最快的工具</a:t>
+            </a:r>
+            <a:endParaRPr sz="2000" b="0" i="0" dirty="0">
+              <a:solidFill>
+                <a:srgbClr val="242A33"/>
+              </a:solidFill>
+              <a:latin typeface="Segoe UI"/>
+              <a:ea typeface="微软雅黑"/>
+            </a:endParaRPr>
           </a:p>
         </p:txBody>
       </p:sp>
@@ -7972,7 +8905,7 @@
           <a:noFill/>
         </p:spPr>
         <p:txBody>
-          <a:bodyPr wrap="square" lIns="0" rIns="0" tIns="0" bIns="0">
+          <a:bodyPr wrap="square" lIns="0" tIns="0" rIns="0" bIns="0">
             <a:noAutofit/>
           </a:bodyPr>
           <a:lstStyle/>
@@ -8015,7 +8948,7 @@
           <a:noFill/>
         </p:spPr>
         <p:txBody>
-          <a:bodyPr wrap="square" lIns="0" rIns="0" tIns="0" bIns="0">
+          <a:bodyPr wrap="square" lIns="0" tIns="0" rIns="0" bIns="0">
             <a:noAutofit/>
           </a:bodyPr>
           <a:lstStyle/>
@@ -8050,7 +8983,7 @@
 </file>
 
 <file path=ppt/slides/slide19.xml><?xml version="1.0" encoding="utf-8"?>
-<p:sld xmlns:a="http://schemas.openxmlformats.org/drawingml/2006/main" xmlns:p="http://schemas.openxmlformats.org/presentationml/2006/main" xmlns:r="http://schemas.openxmlformats.org/officeDocument/2006/relationships">
+<p:sld xmlns:a="http://schemas.openxmlformats.org/drawingml/2006/main" xmlns:r="http://schemas.openxmlformats.org/officeDocument/2006/relationships" xmlns:p="http://schemas.openxmlformats.org/presentationml/2006/main">
   <p:cSld>
     <p:spTree>
       <p:nvGrpSpPr>
@@ -8058,7 +8991,14 @@
         <p:cNvGrpSpPr/>
         <p:nvPr/>
       </p:nvGrpSpPr>
-      <p:grpSpPr/>
+      <p:grpSpPr>
+        <a:xfrm>
+          <a:off x="0" y="0"/>
+          <a:ext cx="0" cy="0"/>
+          <a:chOff x="0" y="0"/>
+          <a:chExt cx="0" cy="0"/>
+        </a:xfrm>
+      </p:grpSpPr>
       <p:sp>
         <p:nvSpPr>
           <p:cNvPr id="2" name="Rectangle 1"/>
@@ -8100,6 +9040,7 @@
           <a:lstStyle/>
           <a:p>
             <a:pPr algn="ctr"/>
+            <a:endParaRPr/>
           </a:p>
         </p:txBody>
       </p:sp>
@@ -8144,6 +9085,7 @@
           <a:lstStyle/>
           <a:p>
             <a:pPr algn="ctr"/>
+            <a:endParaRPr/>
           </a:p>
         </p:txBody>
       </p:sp>
@@ -8164,7 +9106,7 @@
           <a:noFill/>
         </p:spPr>
         <p:txBody>
-          <a:bodyPr wrap="square" lIns="0" rIns="0" tIns="0" bIns="0">
+          <a:bodyPr wrap="square" lIns="0" tIns="0" rIns="0" bIns="0">
             <a:noAutofit/>
           </a:bodyPr>
           <a:lstStyle/>
@@ -8219,7 +9161,7 @@
 </file>
 
 <file path=ppt/slides/slide2.xml><?xml version="1.0" encoding="utf-8"?>
-<p:sld xmlns:a="http://schemas.openxmlformats.org/drawingml/2006/main" xmlns:p="http://schemas.openxmlformats.org/presentationml/2006/main" xmlns:r="http://schemas.openxmlformats.org/officeDocument/2006/relationships">
+<p:sld xmlns:a="http://schemas.openxmlformats.org/drawingml/2006/main" xmlns:r="http://schemas.openxmlformats.org/officeDocument/2006/relationships" xmlns:p="http://schemas.openxmlformats.org/presentationml/2006/main">
   <p:cSld>
     <p:spTree>
       <p:nvGrpSpPr>
@@ -8227,7 +9169,14 @@
         <p:cNvGrpSpPr/>
         <p:nvPr/>
       </p:nvGrpSpPr>
-      <p:grpSpPr/>
+      <p:grpSpPr>
+        <a:xfrm>
+          <a:off x="0" y="0"/>
+          <a:ext cx="0" cy="0"/>
+          <a:chOff x="0" y="0"/>
+          <a:chExt cx="0" cy="0"/>
+        </a:xfrm>
+      </p:grpSpPr>
       <p:sp>
         <p:nvSpPr>
           <p:cNvPr id="2" name="TextBox 1"/>
@@ -8245,7 +9194,7 @@
           <a:noFill/>
         </p:spPr>
         <p:txBody>
-          <a:bodyPr wrap="square" lIns="0" rIns="0" tIns="0" bIns="0">
+          <a:bodyPr wrap="square" lIns="0" tIns="0" rIns="0" bIns="0">
             <a:noAutofit/>
           </a:bodyPr>
           <a:lstStyle/>
@@ -8312,6 +9261,7 @@
           <a:lstStyle/>
           <a:p>
             <a:pPr algn="ctr"/>
+            <a:endParaRPr/>
           </a:p>
         </p:txBody>
       </p:sp>
@@ -8332,7 +9282,7 @@
           <a:noFill/>
         </p:spPr>
         <p:txBody>
-          <a:bodyPr wrap="square" lIns="0" rIns="0" tIns="0" bIns="0">
+          <a:bodyPr wrap="square" lIns="0" tIns="0" rIns="0" bIns="0">
             <a:noAutofit/>
           </a:bodyPr>
           <a:lstStyle/>
@@ -8484,7 +9434,7 @@
           <a:noFill/>
         </p:spPr>
         <p:txBody>
-          <a:bodyPr wrap="square" lIns="0" rIns="0" tIns="0" bIns="0">
+          <a:bodyPr wrap="square" lIns="0" tIns="0" rIns="0" bIns="0">
             <a:noAutofit/>
           </a:bodyPr>
           <a:lstStyle/>
@@ -8527,7 +9477,7 @@
           <a:noFill/>
         </p:spPr>
         <p:txBody>
-          <a:bodyPr wrap="square" lIns="0" rIns="0" tIns="0" bIns="0">
+          <a:bodyPr wrap="square" lIns="0" tIns="0" rIns="0" bIns="0">
             <a:noAutofit/>
           </a:bodyPr>
           <a:lstStyle/>
@@ -8562,7 +9512,7 @@
 </file>
 
 <file path=ppt/slides/slide20.xml><?xml version="1.0" encoding="utf-8"?>
-<p:sld xmlns:a="http://schemas.openxmlformats.org/drawingml/2006/main" xmlns:p="http://schemas.openxmlformats.org/presentationml/2006/main" xmlns:r="http://schemas.openxmlformats.org/officeDocument/2006/relationships">
+<p:sld xmlns:a="http://schemas.openxmlformats.org/drawingml/2006/main" xmlns:r="http://schemas.openxmlformats.org/officeDocument/2006/relationships" xmlns:p="http://schemas.openxmlformats.org/presentationml/2006/main">
   <p:cSld>
     <p:spTree>
       <p:nvGrpSpPr>
@@ -8570,7 +9520,14 @@
         <p:cNvGrpSpPr/>
         <p:nvPr/>
       </p:nvGrpSpPr>
-      <p:grpSpPr/>
+      <p:grpSpPr>
+        <a:xfrm>
+          <a:off x="0" y="0"/>
+          <a:ext cx="0" cy="0"/>
+          <a:chOff x="0" y="0"/>
+          <a:chExt cx="0" cy="0"/>
+        </a:xfrm>
+      </p:grpSpPr>
       <p:sp>
         <p:nvSpPr>
           <p:cNvPr id="2" name="TextBox 1"/>
@@ -8588,7 +9545,7 @@
           <a:noFill/>
         </p:spPr>
         <p:txBody>
-          <a:bodyPr wrap="square" lIns="0" rIns="0" tIns="0" bIns="0">
+          <a:bodyPr wrap="square" lIns="0" tIns="0" rIns="0" bIns="0">
             <a:noAutofit/>
           </a:bodyPr>
           <a:lstStyle/>
@@ -8655,6 +9612,7 @@
           <a:lstStyle/>
           <a:p>
             <a:pPr algn="ctr"/>
+            <a:endParaRPr/>
           </a:p>
         </p:txBody>
       </p:sp>
@@ -8701,6 +9659,7 @@
           <a:lstStyle/>
           <a:p>
             <a:pPr algn="ctr"/>
+            <a:endParaRPr/>
           </a:p>
         </p:txBody>
       </p:sp>
@@ -8721,7 +9680,7 @@
           <a:noFill/>
         </p:spPr>
         <p:txBody>
-          <a:bodyPr wrap="square" lIns="0" rIns="0" tIns="0" bIns="0">
+          <a:bodyPr wrap="square" lIns="0" tIns="0" rIns="0" bIns="0">
             <a:noAutofit/>
           </a:bodyPr>
           <a:lstStyle/>
@@ -8928,7 +9887,7 @@
           <a:noFill/>
         </p:spPr>
         <p:txBody>
-          <a:bodyPr wrap="square" lIns="0" rIns="0" tIns="0" bIns="0">
+          <a:bodyPr wrap="square" lIns="0" tIns="0" rIns="0" bIns="0">
             <a:noAutofit/>
           </a:bodyPr>
           <a:lstStyle/>
@@ -8971,7 +9930,7 @@
           <a:noFill/>
         </p:spPr>
         <p:txBody>
-          <a:bodyPr wrap="square" lIns="0" rIns="0" tIns="0" bIns="0">
+          <a:bodyPr wrap="square" lIns="0" tIns="0" rIns="0" bIns="0">
             <a:noAutofit/>
           </a:bodyPr>
           <a:lstStyle/>
@@ -9006,7 +9965,7 @@
 </file>
 
 <file path=ppt/slides/slide21.xml><?xml version="1.0" encoding="utf-8"?>
-<p:sld xmlns:a="http://schemas.openxmlformats.org/drawingml/2006/main" xmlns:p="http://schemas.openxmlformats.org/presentationml/2006/main" xmlns:r="http://schemas.openxmlformats.org/officeDocument/2006/relationships">
+<p:sld xmlns:a="http://schemas.openxmlformats.org/drawingml/2006/main" xmlns:r="http://schemas.openxmlformats.org/officeDocument/2006/relationships" xmlns:p="http://schemas.openxmlformats.org/presentationml/2006/main">
   <p:cSld>
     <p:spTree>
       <p:nvGrpSpPr>
@@ -9014,7 +9973,14 @@
         <p:cNvGrpSpPr/>
         <p:nvPr/>
       </p:nvGrpSpPr>
-      <p:grpSpPr/>
+      <p:grpSpPr>
+        <a:xfrm>
+          <a:off x="0" y="0"/>
+          <a:ext cx="0" cy="0"/>
+          <a:chOff x="0" y="0"/>
+          <a:chExt cx="0" cy="0"/>
+        </a:xfrm>
+      </p:grpSpPr>
       <p:sp>
         <p:nvSpPr>
           <p:cNvPr id="2" name="TextBox 1"/>
@@ -9032,7 +9998,7 @@
           <a:noFill/>
         </p:spPr>
         <p:txBody>
-          <a:bodyPr wrap="square" lIns="0" rIns="0" tIns="0" bIns="0">
+          <a:bodyPr wrap="square" lIns="0" tIns="0" rIns="0" bIns="0">
             <a:noAutofit/>
           </a:bodyPr>
           <a:lstStyle/>
@@ -9099,6 +10065,7 @@
           <a:lstStyle/>
           <a:p>
             <a:pPr algn="ctr"/>
+            <a:endParaRPr/>
           </a:p>
         </p:txBody>
       </p:sp>
@@ -9145,6 +10112,7 @@
           <a:lstStyle/>
           <a:p>
             <a:pPr algn="ctr"/>
+            <a:endParaRPr/>
           </a:p>
         </p:txBody>
       </p:sp>
@@ -9165,7 +10133,7 @@
           <a:noFill/>
         </p:spPr>
         <p:txBody>
-          <a:bodyPr wrap="square" lIns="0" rIns="0" tIns="0" bIns="0">
+          <a:bodyPr wrap="square" lIns="0" tIns="0" rIns="0" bIns="0">
             <a:noAutofit/>
           </a:bodyPr>
           <a:lstStyle/>
@@ -9487,7 +10455,7 @@
           <a:noFill/>
         </p:spPr>
         <p:txBody>
-          <a:bodyPr wrap="square" lIns="0" rIns="0" tIns="0" bIns="0">
+          <a:bodyPr wrap="square" lIns="0" tIns="0" rIns="0" bIns="0">
             <a:noAutofit/>
           </a:bodyPr>
           <a:lstStyle/>
@@ -9530,7 +10498,7 @@
           <a:noFill/>
         </p:spPr>
         <p:txBody>
-          <a:bodyPr wrap="square" lIns="0" rIns="0" tIns="0" bIns="0">
+          <a:bodyPr wrap="square" lIns="0" tIns="0" rIns="0" bIns="0">
             <a:noAutofit/>
           </a:bodyPr>
           <a:lstStyle/>
@@ -9573,7 +10541,7 @@
           <a:noFill/>
         </p:spPr>
         <p:txBody>
-          <a:bodyPr wrap="square" lIns="0" rIns="0" tIns="0" bIns="0">
+          <a:bodyPr wrap="square" lIns="0" tIns="0" rIns="0" bIns="0">
             <a:noAutofit/>
           </a:bodyPr>
           <a:lstStyle/>
@@ -9608,7 +10576,7 @@
 </file>
 
 <file path=ppt/slides/slide22.xml><?xml version="1.0" encoding="utf-8"?>
-<p:sld xmlns:a="http://schemas.openxmlformats.org/drawingml/2006/main" xmlns:p="http://schemas.openxmlformats.org/presentationml/2006/main" xmlns:r="http://schemas.openxmlformats.org/officeDocument/2006/relationships">
+<p:sld xmlns:a="http://schemas.openxmlformats.org/drawingml/2006/main" xmlns:r="http://schemas.openxmlformats.org/officeDocument/2006/relationships" xmlns:p="http://schemas.openxmlformats.org/presentationml/2006/main">
   <p:cSld>
     <p:spTree>
       <p:nvGrpSpPr>
@@ -9616,7 +10584,14 @@
         <p:cNvGrpSpPr/>
         <p:nvPr/>
       </p:nvGrpSpPr>
-      <p:grpSpPr/>
+      <p:grpSpPr>
+        <a:xfrm>
+          <a:off x="0" y="0"/>
+          <a:ext cx="0" cy="0"/>
+          <a:chOff x="0" y="0"/>
+          <a:chExt cx="0" cy="0"/>
+        </a:xfrm>
+      </p:grpSpPr>
       <p:sp>
         <p:nvSpPr>
           <p:cNvPr id="2" name="TextBox 1"/>
@@ -9634,7 +10609,7 @@
           <a:noFill/>
         </p:spPr>
         <p:txBody>
-          <a:bodyPr wrap="square" lIns="0" rIns="0" tIns="0" bIns="0">
+          <a:bodyPr wrap="square" lIns="0" tIns="0" rIns="0" bIns="0">
             <a:noAutofit/>
           </a:bodyPr>
           <a:lstStyle/>
@@ -9701,6 +10676,7 @@
           <a:lstStyle/>
           <a:p>
             <a:pPr algn="ctr"/>
+            <a:endParaRPr/>
           </a:p>
         </p:txBody>
       </p:sp>
@@ -9747,6 +10723,7 @@
           <a:lstStyle/>
           <a:p>
             <a:pPr algn="ctr"/>
+            <a:endParaRPr/>
           </a:p>
         </p:txBody>
       </p:sp>
@@ -9767,7 +10744,7 @@
           <a:noFill/>
         </p:spPr>
         <p:txBody>
-          <a:bodyPr wrap="square" lIns="0" rIns="0" tIns="0" bIns="0">
+          <a:bodyPr wrap="square" lIns="0" tIns="0" rIns="0" bIns="0">
             <a:noAutofit/>
           </a:bodyPr>
           <a:lstStyle/>
@@ -9928,7 +10905,7 @@
           <a:noFill/>
         </p:spPr>
         <p:txBody>
-          <a:bodyPr wrap="square" lIns="0" rIns="0" tIns="0" bIns="0">
+          <a:bodyPr wrap="square" lIns="0" tIns="0" rIns="0" bIns="0">
             <a:noAutofit/>
           </a:bodyPr>
           <a:lstStyle/>
@@ -9971,7 +10948,7 @@
           <a:noFill/>
         </p:spPr>
         <p:txBody>
-          <a:bodyPr wrap="square" lIns="0" rIns="0" tIns="0" bIns="0">
+          <a:bodyPr wrap="square" lIns="0" tIns="0" rIns="0" bIns="0">
             <a:noAutofit/>
           </a:bodyPr>
           <a:lstStyle/>
@@ -10014,7 +10991,7 @@
           <a:noFill/>
         </p:spPr>
         <p:txBody>
-          <a:bodyPr wrap="square" lIns="0" rIns="0" tIns="0" bIns="0">
+          <a:bodyPr wrap="square" lIns="0" tIns="0" rIns="0" bIns="0">
             <a:noAutofit/>
           </a:bodyPr>
           <a:lstStyle/>
@@ -10049,7 +11026,7 @@
 </file>
 
 <file path=ppt/slides/slide23.xml><?xml version="1.0" encoding="utf-8"?>
-<p:sld xmlns:a="http://schemas.openxmlformats.org/drawingml/2006/main" xmlns:p="http://schemas.openxmlformats.org/presentationml/2006/main" xmlns:r="http://schemas.openxmlformats.org/officeDocument/2006/relationships">
+<p:sld xmlns:a="http://schemas.openxmlformats.org/drawingml/2006/main" xmlns:r="http://schemas.openxmlformats.org/officeDocument/2006/relationships" xmlns:p="http://schemas.openxmlformats.org/presentationml/2006/main">
   <p:cSld>
     <p:spTree>
       <p:nvGrpSpPr>
@@ -10057,7 +11034,14 @@
         <p:cNvGrpSpPr/>
         <p:nvPr/>
       </p:nvGrpSpPr>
-      <p:grpSpPr/>
+      <p:grpSpPr>
+        <a:xfrm>
+          <a:off x="0" y="0"/>
+          <a:ext cx="0" cy="0"/>
+          <a:chOff x="0" y="0"/>
+          <a:chExt cx="0" cy="0"/>
+        </a:xfrm>
+      </p:grpSpPr>
       <p:sp>
         <p:nvSpPr>
           <p:cNvPr id="2" name="TextBox 1"/>
@@ -10075,7 +11059,7 @@
           <a:noFill/>
         </p:spPr>
         <p:txBody>
-          <a:bodyPr wrap="square" lIns="0" rIns="0" tIns="0" bIns="0">
+          <a:bodyPr wrap="square" lIns="0" tIns="0" rIns="0" bIns="0">
             <a:noAutofit/>
           </a:bodyPr>
           <a:lstStyle/>
@@ -10142,6 +11126,7 @@
           <a:lstStyle/>
           <a:p>
             <a:pPr algn="ctr"/>
+            <a:endParaRPr/>
           </a:p>
         </p:txBody>
       </p:sp>
@@ -10188,6 +11173,7 @@
           <a:lstStyle/>
           <a:p>
             <a:pPr algn="ctr"/>
+            <a:endParaRPr/>
           </a:p>
         </p:txBody>
       </p:sp>
@@ -10208,7 +11194,7 @@
           <a:noFill/>
         </p:spPr>
         <p:txBody>
-          <a:bodyPr wrap="square" lIns="0" rIns="0" tIns="0" bIns="0">
+          <a:bodyPr wrap="square" lIns="0" tIns="0" rIns="0" bIns="0">
             <a:noAutofit/>
           </a:bodyPr>
           <a:lstStyle/>
@@ -10484,7 +11470,7 @@
           <a:noFill/>
         </p:spPr>
         <p:txBody>
-          <a:bodyPr wrap="square" lIns="0" rIns="0" tIns="0" bIns="0">
+          <a:bodyPr wrap="square" lIns="0" tIns="0" rIns="0" bIns="0">
             <a:noAutofit/>
           </a:bodyPr>
           <a:lstStyle/>
@@ -10527,7 +11513,7 @@
           <a:noFill/>
         </p:spPr>
         <p:txBody>
-          <a:bodyPr wrap="square" lIns="0" rIns="0" tIns="0" bIns="0">
+          <a:bodyPr wrap="square" lIns="0" tIns="0" rIns="0" bIns="0">
             <a:noAutofit/>
           </a:bodyPr>
           <a:lstStyle/>
@@ -10570,7 +11556,7 @@
           <a:noFill/>
         </p:spPr>
         <p:txBody>
-          <a:bodyPr wrap="square" lIns="0" rIns="0" tIns="0" bIns="0">
+          <a:bodyPr wrap="square" lIns="0" tIns="0" rIns="0" bIns="0">
             <a:noAutofit/>
           </a:bodyPr>
           <a:lstStyle/>
@@ -10605,7 +11591,7 @@
 </file>
 
 <file path=ppt/slides/slide24.xml><?xml version="1.0" encoding="utf-8"?>
-<p:sld xmlns:a="http://schemas.openxmlformats.org/drawingml/2006/main" xmlns:p="http://schemas.openxmlformats.org/presentationml/2006/main" xmlns:r="http://schemas.openxmlformats.org/officeDocument/2006/relationships">
+<p:sld xmlns:a="http://schemas.openxmlformats.org/drawingml/2006/main" xmlns:r="http://schemas.openxmlformats.org/officeDocument/2006/relationships" xmlns:p="http://schemas.openxmlformats.org/presentationml/2006/main">
   <p:cSld>
     <p:spTree>
       <p:nvGrpSpPr>
@@ -10613,7 +11599,14 @@
         <p:cNvGrpSpPr/>
         <p:nvPr/>
       </p:nvGrpSpPr>
-      <p:grpSpPr/>
+      <p:grpSpPr>
+        <a:xfrm>
+          <a:off x="0" y="0"/>
+          <a:ext cx="0" cy="0"/>
+          <a:chOff x="0" y="0"/>
+          <a:chExt cx="0" cy="0"/>
+        </a:xfrm>
+      </p:grpSpPr>
       <p:sp>
         <p:nvSpPr>
           <p:cNvPr id="2" name="TextBox 1"/>
@@ -10631,7 +11624,7 @@
           <a:noFill/>
         </p:spPr>
         <p:txBody>
-          <a:bodyPr wrap="square" lIns="0" rIns="0" tIns="0" bIns="0">
+          <a:bodyPr wrap="square" lIns="0" tIns="0" rIns="0" bIns="0">
             <a:noAutofit/>
           </a:bodyPr>
           <a:lstStyle/>
@@ -10698,6 +11691,7 @@
           <a:lstStyle/>
           <a:p>
             <a:pPr algn="ctr"/>
+            <a:endParaRPr/>
           </a:p>
         </p:txBody>
       </p:sp>
@@ -10744,6 +11738,7 @@
           <a:lstStyle/>
           <a:p>
             <a:pPr algn="ctr"/>
+            <a:endParaRPr/>
           </a:p>
         </p:txBody>
       </p:sp>
@@ -10764,7 +11759,7 @@
           <a:noFill/>
         </p:spPr>
         <p:txBody>
-          <a:bodyPr wrap="square" lIns="0" rIns="0" tIns="0" bIns="0">
+          <a:bodyPr wrap="square" lIns="0" tIns="0" rIns="0" bIns="0">
             <a:noAutofit/>
           </a:bodyPr>
           <a:lstStyle/>
@@ -11201,7 +12196,7 @@
           <a:noFill/>
         </p:spPr>
         <p:txBody>
-          <a:bodyPr wrap="square" lIns="0" rIns="0" tIns="0" bIns="0">
+          <a:bodyPr wrap="square" lIns="0" tIns="0" rIns="0" bIns="0">
             <a:noAutofit/>
           </a:bodyPr>
           <a:lstStyle/>
@@ -11244,7 +12239,7 @@
           <a:noFill/>
         </p:spPr>
         <p:txBody>
-          <a:bodyPr wrap="square" lIns="0" rIns="0" tIns="0" bIns="0">
+          <a:bodyPr wrap="square" lIns="0" tIns="0" rIns="0" bIns="0">
             <a:noAutofit/>
           </a:bodyPr>
           <a:lstStyle/>
@@ -11287,7 +12282,7 @@
           <a:noFill/>
         </p:spPr>
         <p:txBody>
-          <a:bodyPr wrap="square" lIns="0" rIns="0" tIns="0" bIns="0">
+          <a:bodyPr wrap="square" lIns="0" tIns="0" rIns="0" bIns="0">
             <a:noAutofit/>
           </a:bodyPr>
           <a:lstStyle/>
@@ -11322,7 +12317,7 @@
 </file>
 
 <file path=ppt/slides/slide25.xml><?xml version="1.0" encoding="utf-8"?>
-<p:sld xmlns:a="http://schemas.openxmlformats.org/drawingml/2006/main" xmlns:p="http://schemas.openxmlformats.org/presentationml/2006/main" xmlns:r="http://schemas.openxmlformats.org/officeDocument/2006/relationships">
+<p:sld xmlns:a="http://schemas.openxmlformats.org/drawingml/2006/main" xmlns:r="http://schemas.openxmlformats.org/officeDocument/2006/relationships" xmlns:p="http://schemas.openxmlformats.org/presentationml/2006/main">
   <p:cSld>
     <p:spTree>
       <p:nvGrpSpPr>
@@ -11330,7 +12325,14 @@
         <p:cNvGrpSpPr/>
         <p:nvPr/>
       </p:nvGrpSpPr>
-      <p:grpSpPr/>
+      <p:grpSpPr>
+        <a:xfrm>
+          <a:off x="0" y="0"/>
+          <a:ext cx="0" cy="0"/>
+          <a:chOff x="0" y="0"/>
+          <a:chExt cx="0" cy="0"/>
+        </a:xfrm>
+      </p:grpSpPr>
       <p:sp>
         <p:nvSpPr>
           <p:cNvPr id="2" name="TextBox 1"/>
@@ -11348,7 +12350,7 @@
           <a:noFill/>
         </p:spPr>
         <p:txBody>
-          <a:bodyPr wrap="square" lIns="0" rIns="0" tIns="0" bIns="0">
+          <a:bodyPr wrap="square" lIns="0" tIns="0" rIns="0" bIns="0">
             <a:noAutofit/>
           </a:bodyPr>
           <a:lstStyle/>
@@ -11415,6 +12417,7 @@
           <a:lstStyle/>
           <a:p>
             <a:pPr algn="ctr"/>
+            <a:endParaRPr/>
           </a:p>
         </p:txBody>
       </p:sp>
@@ -11435,7 +12438,7 @@
           <a:noFill/>
         </p:spPr>
         <p:txBody>
-          <a:bodyPr wrap="square" lIns="0" rIns="0" tIns="0" bIns="0">
+          <a:bodyPr wrap="square" lIns="0" tIns="0" rIns="0" bIns="0">
             <a:noAutofit/>
           </a:bodyPr>
           <a:lstStyle/>
@@ -11703,7 +12706,7 @@
           <a:noFill/>
         </p:spPr>
         <p:txBody>
-          <a:bodyPr wrap="square" lIns="0" rIns="0" tIns="0" bIns="0">
+          <a:bodyPr wrap="square" lIns="0" tIns="0" rIns="0" bIns="0">
             <a:noAutofit/>
           </a:bodyPr>
           <a:lstStyle/>
@@ -11746,7 +12749,7 @@
           <a:noFill/>
         </p:spPr>
         <p:txBody>
-          <a:bodyPr wrap="square" lIns="0" rIns="0" tIns="0" bIns="0">
+          <a:bodyPr wrap="square" lIns="0" tIns="0" rIns="0" bIns="0">
             <a:noAutofit/>
           </a:bodyPr>
           <a:lstStyle/>
@@ -11781,7 +12784,7 @@
 </file>
 
 <file path=ppt/slides/slide26.xml><?xml version="1.0" encoding="utf-8"?>
-<p:sld xmlns:a="http://schemas.openxmlformats.org/drawingml/2006/main" xmlns:p="http://schemas.openxmlformats.org/presentationml/2006/main" xmlns:r="http://schemas.openxmlformats.org/officeDocument/2006/relationships">
+<p:sld xmlns:a="http://schemas.openxmlformats.org/drawingml/2006/main" xmlns:r="http://schemas.openxmlformats.org/officeDocument/2006/relationships" xmlns:p="http://schemas.openxmlformats.org/presentationml/2006/main">
   <p:cSld>
     <p:spTree>
       <p:nvGrpSpPr>
@@ -11789,7 +12792,14 @@
         <p:cNvGrpSpPr/>
         <p:nvPr/>
       </p:nvGrpSpPr>
-      <p:grpSpPr/>
+      <p:grpSpPr>
+        <a:xfrm>
+          <a:off x="0" y="0"/>
+          <a:ext cx="0" cy="0"/>
+          <a:chOff x="0" y="0"/>
+          <a:chExt cx="0" cy="0"/>
+        </a:xfrm>
+      </p:grpSpPr>
       <p:sp>
         <p:nvSpPr>
           <p:cNvPr id="2" name="TextBox 1"/>
@@ -11807,7 +12817,7 @@
           <a:noFill/>
         </p:spPr>
         <p:txBody>
-          <a:bodyPr wrap="square" lIns="0" rIns="0" tIns="0" bIns="0">
+          <a:bodyPr wrap="square" lIns="0" tIns="0" rIns="0" bIns="0">
             <a:noAutofit/>
           </a:bodyPr>
           <a:lstStyle/>
@@ -11874,6 +12884,7 @@
           <a:lstStyle/>
           <a:p>
             <a:pPr algn="ctr"/>
+            <a:endParaRPr/>
           </a:p>
         </p:txBody>
       </p:sp>
@@ -11896,15 +12907,39 @@
                 <a:tableStyleId>{5C22544A-7EE6-4342-B048-85BDC9FD1C3A}</a:tableStyleId>
               </a:tblPr>
               <a:tblGrid>
-                <a:gridCol w="1988662"/>
-                <a:gridCol w="3977325"/>
-                <a:gridCol w="1748274"/>
-                <a:gridCol w="3343575"/>
+                <a:gridCol w="1988662">
+                  <a:extLst>
+                    <a:ext uri="{9D8B030D-6E8A-4147-A177-3AD203B41FA5}">
+                      <a16:colId xmlns:a16="http://schemas.microsoft.com/office/drawing/2014/main" val="20000"/>
+                    </a:ext>
+                  </a:extLst>
+                </a:gridCol>
+                <a:gridCol w="3977325">
+                  <a:extLst>
+                    <a:ext uri="{9D8B030D-6E8A-4147-A177-3AD203B41FA5}">
+                      <a16:colId xmlns:a16="http://schemas.microsoft.com/office/drawing/2014/main" val="20001"/>
+                    </a:ext>
+                  </a:extLst>
+                </a:gridCol>
+                <a:gridCol w="1748274">
+                  <a:extLst>
+                    <a:ext uri="{9D8B030D-6E8A-4147-A177-3AD203B41FA5}">
+                      <a16:colId xmlns:a16="http://schemas.microsoft.com/office/drawing/2014/main" val="20002"/>
+                    </a:ext>
+                  </a:extLst>
+                </a:gridCol>
+                <a:gridCol w="3343575">
+                  <a:extLst>
+                    <a:ext uri="{9D8B030D-6E8A-4147-A177-3AD203B41FA5}">
+                      <a16:colId xmlns:a16="http://schemas.microsoft.com/office/drawing/2014/main" val="20003"/>
+                    </a:ext>
+                  </a:extLst>
+                </a:gridCol>
               </a:tblGrid>
               <a:tr h="439420">
                 <a:tc>
                   <a:txBody>
-                    <a:bodyPr wrap="square"/>
+                    <a:bodyPr/>
                     <a:lstStyle/>
                     <a:p>
                       <a:pPr algn="l">
@@ -11938,7 +12973,7 @@
                 </a:tc>
                 <a:tc>
                   <a:txBody>
-                    <a:bodyPr wrap="square"/>
+                    <a:bodyPr/>
                     <a:lstStyle/>
                     <a:p>
                       <a:pPr algn="l">
@@ -11972,7 +13007,7 @@
                 </a:tc>
                 <a:tc>
                   <a:txBody>
-                    <a:bodyPr wrap="square"/>
+                    <a:bodyPr/>
                     <a:lstStyle/>
                     <a:p>
                       <a:pPr algn="l">
@@ -12006,7 +13041,7 @@
                 </a:tc>
                 <a:tc>
                   <a:txBody>
-                    <a:bodyPr wrap="square"/>
+                    <a:bodyPr/>
                     <a:lstStyle/>
                     <a:p>
                       <a:pPr algn="l">
@@ -12038,11 +13073,16 @@
                     </a:solidFill>
                   </a:tcPr>
                 </a:tc>
+                <a:extLst>
+                  <a:ext uri="{0D108BD9-81ED-4DB2-BD59-A6C34878D82A}">
+                    <a16:rowId xmlns:a16="http://schemas.microsoft.com/office/drawing/2014/main" val="10000"/>
+                  </a:ext>
+                </a:extLst>
               </a:tr>
               <a:tr h="439420">
                 <a:tc>
                   <a:txBody>
-                    <a:bodyPr wrap="square"/>
+                    <a:bodyPr/>
                     <a:lstStyle/>
                     <a:p>
                       <a:pPr algn="l">
@@ -12076,7 +13116,7 @@
                 </a:tc>
                 <a:tc>
                   <a:txBody>
-                    <a:bodyPr wrap="square"/>
+                    <a:bodyPr/>
                     <a:lstStyle/>
                     <a:p>
                       <a:pPr algn="l">
@@ -12110,7 +13150,7 @@
                 </a:tc>
                 <a:tc>
                   <a:txBody>
-                    <a:bodyPr wrap="square"/>
+                    <a:bodyPr/>
                     <a:lstStyle/>
                     <a:p>
                       <a:pPr algn="l">
@@ -12144,7 +13184,7 @@
                 </a:tc>
                 <a:tc>
                   <a:txBody>
-                    <a:bodyPr wrap="square"/>
+                    <a:bodyPr/>
                     <a:lstStyle/>
                     <a:p>
                       <a:pPr algn="l">
@@ -12176,11 +13216,16 @@
                     </a:solidFill>
                   </a:tcPr>
                 </a:tc>
+                <a:extLst>
+                  <a:ext uri="{0D108BD9-81ED-4DB2-BD59-A6C34878D82A}">
+                    <a16:rowId xmlns:a16="http://schemas.microsoft.com/office/drawing/2014/main" val="10001"/>
+                  </a:ext>
+                </a:extLst>
               </a:tr>
               <a:tr h="439420">
                 <a:tc>
                   <a:txBody>
-                    <a:bodyPr wrap="square"/>
+                    <a:bodyPr/>
                     <a:lstStyle/>
                     <a:p>
                       <a:pPr algn="l">
@@ -12214,7 +13259,7 @@
                 </a:tc>
                 <a:tc>
                   <a:txBody>
-                    <a:bodyPr wrap="square"/>
+                    <a:bodyPr/>
                     <a:lstStyle/>
                     <a:p>
                       <a:pPr algn="l">
@@ -12248,7 +13293,7 @@
                 </a:tc>
                 <a:tc>
                   <a:txBody>
-                    <a:bodyPr wrap="square"/>
+                    <a:bodyPr/>
                     <a:lstStyle/>
                     <a:p>
                       <a:pPr algn="l">
@@ -12282,7 +13327,7 @@
                 </a:tc>
                 <a:tc>
                   <a:txBody>
-                    <a:bodyPr wrap="square"/>
+                    <a:bodyPr/>
                     <a:lstStyle/>
                     <a:p>
                       <a:pPr algn="l">
@@ -12314,11 +13359,16 @@
                     </a:solidFill>
                   </a:tcPr>
                 </a:tc>
+                <a:extLst>
+                  <a:ext uri="{0D108BD9-81ED-4DB2-BD59-A6C34878D82A}">
+                    <a16:rowId xmlns:a16="http://schemas.microsoft.com/office/drawing/2014/main" val="10002"/>
+                  </a:ext>
+                </a:extLst>
               </a:tr>
               <a:tr h="439420">
                 <a:tc>
                   <a:txBody>
-                    <a:bodyPr wrap="square"/>
+                    <a:bodyPr/>
                     <a:lstStyle/>
                     <a:p>
                       <a:pPr algn="l">
@@ -12352,7 +13402,7 @@
                 </a:tc>
                 <a:tc>
                   <a:txBody>
-                    <a:bodyPr wrap="square"/>
+                    <a:bodyPr/>
                     <a:lstStyle/>
                     <a:p>
                       <a:pPr algn="l">
@@ -12386,7 +13436,7 @@
                 </a:tc>
                 <a:tc>
                   <a:txBody>
-                    <a:bodyPr wrap="square"/>
+                    <a:bodyPr/>
                     <a:lstStyle/>
                     <a:p>
                       <a:pPr algn="l">
@@ -12420,7 +13470,7 @@
                 </a:tc>
                 <a:tc>
                   <a:txBody>
-                    <a:bodyPr wrap="square"/>
+                    <a:bodyPr/>
                     <a:lstStyle/>
                     <a:p>
                       <a:pPr algn="l">
@@ -12452,11 +13502,16 @@
                     </a:solidFill>
                   </a:tcPr>
                 </a:tc>
+                <a:extLst>
+                  <a:ext uri="{0D108BD9-81ED-4DB2-BD59-A6C34878D82A}">
+                    <a16:rowId xmlns:a16="http://schemas.microsoft.com/office/drawing/2014/main" val="10003"/>
+                  </a:ext>
+                </a:extLst>
               </a:tr>
               <a:tr h="439420">
                 <a:tc>
                   <a:txBody>
-                    <a:bodyPr wrap="square"/>
+                    <a:bodyPr/>
                     <a:lstStyle/>
                     <a:p>
                       <a:pPr algn="l">
@@ -12490,7 +13545,7 @@
                 </a:tc>
                 <a:tc>
                   <a:txBody>
-                    <a:bodyPr wrap="square"/>
+                    <a:bodyPr/>
                     <a:lstStyle/>
                     <a:p>
                       <a:pPr algn="l">
@@ -12524,7 +13579,7 @@
                 </a:tc>
                 <a:tc>
                   <a:txBody>
-                    <a:bodyPr wrap="square"/>
+                    <a:bodyPr/>
                     <a:lstStyle/>
                     <a:p>
                       <a:pPr algn="l">
@@ -12558,7 +13613,7 @@
                 </a:tc>
                 <a:tc>
                   <a:txBody>
-                    <a:bodyPr wrap="square"/>
+                    <a:bodyPr/>
                     <a:lstStyle/>
                     <a:p>
                       <a:pPr algn="l">
@@ -12590,11 +13645,16 @@
                     </a:solidFill>
                   </a:tcPr>
                 </a:tc>
+                <a:extLst>
+                  <a:ext uri="{0D108BD9-81ED-4DB2-BD59-A6C34878D82A}">
+                    <a16:rowId xmlns:a16="http://schemas.microsoft.com/office/drawing/2014/main" val="10004"/>
+                  </a:ext>
+                </a:extLst>
               </a:tr>
               <a:tr h="439420">
                 <a:tc>
                   <a:txBody>
-                    <a:bodyPr wrap="square"/>
+                    <a:bodyPr/>
                     <a:lstStyle/>
                     <a:p>
                       <a:pPr algn="l">
@@ -12628,7 +13688,7 @@
                 </a:tc>
                 <a:tc>
                   <a:txBody>
-                    <a:bodyPr wrap="square"/>
+                    <a:bodyPr/>
                     <a:lstStyle/>
                     <a:p>
                       <a:pPr algn="l">
@@ -12662,7 +13722,7 @@
                 </a:tc>
                 <a:tc>
                   <a:txBody>
-                    <a:bodyPr wrap="square"/>
+                    <a:bodyPr/>
                     <a:lstStyle/>
                     <a:p>
                       <a:pPr algn="l">
@@ -12696,7 +13756,7 @@
                 </a:tc>
                 <a:tc>
                   <a:txBody>
-                    <a:bodyPr wrap="square"/>
+                    <a:bodyPr/>
                     <a:lstStyle/>
                     <a:p>
                       <a:pPr algn="l">
@@ -12728,11 +13788,16 @@
                     </a:solidFill>
                   </a:tcPr>
                 </a:tc>
+                <a:extLst>
+                  <a:ext uri="{0D108BD9-81ED-4DB2-BD59-A6C34878D82A}">
+                    <a16:rowId xmlns:a16="http://schemas.microsoft.com/office/drawing/2014/main" val="10005"/>
+                  </a:ext>
+                </a:extLst>
               </a:tr>
               <a:tr h="439420">
                 <a:tc>
                   <a:txBody>
-                    <a:bodyPr wrap="square"/>
+                    <a:bodyPr/>
                     <a:lstStyle/>
                     <a:p>
                       <a:pPr algn="l">
@@ -12766,7 +13831,7 @@
                 </a:tc>
                 <a:tc>
                   <a:txBody>
-                    <a:bodyPr wrap="square"/>
+                    <a:bodyPr/>
                     <a:lstStyle/>
                     <a:p>
                       <a:pPr algn="l">
@@ -12800,7 +13865,7 @@
                 </a:tc>
                 <a:tc>
                   <a:txBody>
-                    <a:bodyPr wrap="square"/>
+                    <a:bodyPr/>
                     <a:lstStyle/>
                     <a:p>
                       <a:pPr algn="l">
@@ -12834,7 +13899,7 @@
                 </a:tc>
                 <a:tc>
                   <a:txBody>
-                    <a:bodyPr wrap="square"/>
+                    <a:bodyPr/>
                     <a:lstStyle/>
                     <a:p>
                       <a:pPr algn="l">
@@ -12866,11 +13931,16 @@
                     </a:solidFill>
                   </a:tcPr>
                 </a:tc>
+                <a:extLst>
+                  <a:ext uri="{0D108BD9-81ED-4DB2-BD59-A6C34878D82A}">
+                    <a16:rowId xmlns:a16="http://schemas.microsoft.com/office/drawing/2014/main" val="10006"/>
+                  </a:ext>
+                </a:extLst>
               </a:tr>
               <a:tr h="439420">
                 <a:tc>
                   <a:txBody>
-                    <a:bodyPr wrap="square"/>
+                    <a:bodyPr/>
                     <a:lstStyle/>
                     <a:p>
                       <a:pPr algn="l">
@@ -12904,7 +13974,7 @@
                 </a:tc>
                 <a:tc>
                   <a:txBody>
-                    <a:bodyPr wrap="square"/>
+                    <a:bodyPr/>
                     <a:lstStyle/>
                     <a:p>
                       <a:pPr algn="l">
@@ -12938,7 +14008,7 @@
                 </a:tc>
                 <a:tc>
                   <a:txBody>
-                    <a:bodyPr wrap="square"/>
+                    <a:bodyPr/>
                     <a:lstStyle/>
                     <a:p>
                       <a:pPr algn="l">
@@ -12972,7 +14042,7 @@
                 </a:tc>
                 <a:tc>
                   <a:txBody>
-                    <a:bodyPr wrap="square"/>
+                    <a:bodyPr/>
                     <a:lstStyle/>
                     <a:p>
                       <a:pPr algn="l">
@@ -13004,11 +14074,16 @@
                     </a:solidFill>
                   </a:tcPr>
                 </a:tc>
+                <a:extLst>
+                  <a:ext uri="{0D108BD9-81ED-4DB2-BD59-A6C34878D82A}">
+                    <a16:rowId xmlns:a16="http://schemas.microsoft.com/office/drawing/2014/main" val="10007"/>
+                  </a:ext>
+                </a:extLst>
               </a:tr>
               <a:tr h="439420">
                 <a:tc>
                   <a:txBody>
-                    <a:bodyPr wrap="square"/>
+                    <a:bodyPr/>
                     <a:lstStyle/>
                     <a:p>
                       <a:pPr algn="l">
@@ -13042,7 +14117,7 @@
                 </a:tc>
                 <a:tc>
                   <a:txBody>
-                    <a:bodyPr wrap="square"/>
+                    <a:bodyPr/>
                     <a:lstStyle/>
                     <a:p>
                       <a:pPr algn="l">
@@ -13076,7 +14151,7 @@
                 </a:tc>
                 <a:tc>
                   <a:txBody>
-                    <a:bodyPr wrap="square"/>
+                    <a:bodyPr/>
                     <a:lstStyle/>
                     <a:p>
                       <a:pPr algn="l">
@@ -13110,7 +14185,7 @@
                 </a:tc>
                 <a:tc>
                   <a:txBody>
-                    <a:bodyPr wrap="square"/>
+                    <a:bodyPr/>
                     <a:lstStyle/>
                     <a:p>
                       <a:pPr algn="l">
@@ -13142,6 +14217,11 @@
                     </a:solidFill>
                   </a:tcPr>
                 </a:tc>
+                <a:extLst>
+                  <a:ext uri="{0D108BD9-81ED-4DB2-BD59-A6C34878D82A}">
+                    <a16:rowId xmlns:a16="http://schemas.microsoft.com/office/drawing/2014/main" val="10008"/>
+                  </a:ext>
+                </a:extLst>
               </a:tr>
             </a:tbl>
           </a:graphicData>
@@ -13164,7 +14244,7 @@
           <a:noFill/>
         </p:spPr>
         <p:txBody>
-          <a:bodyPr wrap="square" lIns="0" rIns="0" tIns="0" bIns="0">
+          <a:bodyPr wrap="square" lIns="0" tIns="0" rIns="0" bIns="0">
             <a:noAutofit/>
           </a:bodyPr>
           <a:lstStyle/>
@@ -13207,7 +14287,7 @@
           <a:noFill/>
         </p:spPr>
         <p:txBody>
-          <a:bodyPr wrap="square" lIns="0" rIns="0" tIns="0" bIns="0">
+          <a:bodyPr wrap="square" lIns="0" tIns="0" rIns="0" bIns="0">
             <a:noAutofit/>
           </a:bodyPr>
           <a:lstStyle/>
@@ -13242,7 +14322,7 @@
 </file>
 
 <file path=ppt/slides/slide27.xml><?xml version="1.0" encoding="utf-8"?>
-<p:sld xmlns:a="http://schemas.openxmlformats.org/drawingml/2006/main" xmlns:p="http://schemas.openxmlformats.org/presentationml/2006/main" xmlns:r="http://schemas.openxmlformats.org/officeDocument/2006/relationships">
+<p:sld xmlns:a="http://schemas.openxmlformats.org/drawingml/2006/main" xmlns:r="http://schemas.openxmlformats.org/officeDocument/2006/relationships" xmlns:p="http://schemas.openxmlformats.org/presentationml/2006/main">
   <p:cSld>
     <p:spTree>
       <p:nvGrpSpPr>
@@ -13250,7 +14330,14 @@
         <p:cNvGrpSpPr/>
         <p:nvPr/>
       </p:nvGrpSpPr>
-      <p:grpSpPr/>
+      <p:grpSpPr>
+        <a:xfrm>
+          <a:off x="0" y="0"/>
+          <a:ext cx="0" cy="0"/>
+          <a:chOff x="0" y="0"/>
+          <a:chExt cx="0" cy="0"/>
+        </a:xfrm>
+      </p:grpSpPr>
       <p:sp>
         <p:nvSpPr>
           <p:cNvPr id="2" name="TextBox 1"/>
@@ -13268,7 +14355,7 @@
           <a:noFill/>
         </p:spPr>
         <p:txBody>
-          <a:bodyPr wrap="square" lIns="0" rIns="0" tIns="0" bIns="0">
+          <a:bodyPr wrap="square" lIns="0" tIns="0" rIns="0" bIns="0">
             <a:noAutofit/>
           </a:bodyPr>
           <a:lstStyle/>
@@ -13335,6 +14422,7 @@
           <a:lstStyle/>
           <a:p>
             <a:pPr algn="ctr"/>
+            <a:endParaRPr/>
           </a:p>
         </p:txBody>
       </p:sp>
@@ -13355,7 +14443,7 @@
           <a:noFill/>
         </p:spPr>
         <p:txBody>
-          <a:bodyPr wrap="square" lIns="0" rIns="0" tIns="0" bIns="0">
+          <a:bodyPr wrap="square" lIns="0" tIns="0" rIns="0" bIns="0">
             <a:noAutofit/>
           </a:bodyPr>
           <a:lstStyle/>
@@ -13623,7 +14711,7 @@
           <a:noFill/>
         </p:spPr>
         <p:txBody>
-          <a:bodyPr wrap="square" lIns="0" rIns="0" tIns="0" bIns="0">
+          <a:bodyPr wrap="square" lIns="0" tIns="0" rIns="0" bIns="0">
             <a:noAutofit/>
           </a:bodyPr>
           <a:lstStyle/>
@@ -13666,7 +14754,7 @@
           <a:noFill/>
         </p:spPr>
         <p:txBody>
-          <a:bodyPr wrap="square" lIns="0" rIns="0" tIns="0" bIns="0">
+          <a:bodyPr wrap="square" lIns="0" tIns="0" rIns="0" bIns="0">
             <a:noAutofit/>
           </a:bodyPr>
           <a:lstStyle/>
@@ -13701,7 +14789,7 @@
 </file>
 
 <file path=ppt/slides/slide28.xml><?xml version="1.0" encoding="utf-8"?>
-<p:sld xmlns:a="http://schemas.openxmlformats.org/drawingml/2006/main" xmlns:p="http://schemas.openxmlformats.org/presentationml/2006/main" xmlns:r="http://schemas.openxmlformats.org/officeDocument/2006/relationships">
+<p:sld xmlns:a="http://schemas.openxmlformats.org/drawingml/2006/main" xmlns:r="http://schemas.openxmlformats.org/officeDocument/2006/relationships" xmlns:p="http://schemas.openxmlformats.org/presentationml/2006/main">
   <p:cSld>
     <p:spTree>
       <p:nvGrpSpPr>
@@ -13709,7 +14797,14 @@
         <p:cNvGrpSpPr/>
         <p:nvPr/>
       </p:nvGrpSpPr>
-      <p:grpSpPr/>
+      <p:grpSpPr>
+        <a:xfrm>
+          <a:off x="0" y="0"/>
+          <a:ext cx="0" cy="0"/>
+          <a:chOff x="0" y="0"/>
+          <a:chExt cx="0" cy="0"/>
+        </a:xfrm>
+      </p:grpSpPr>
       <p:sp>
         <p:nvSpPr>
           <p:cNvPr id="2" name="TextBox 1"/>
@@ -13727,7 +14822,7 @@
           <a:noFill/>
         </p:spPr>
         <p:txBody>
-          <a:bodyPr wrap="square" lIns="0" rIns="0" tIns="0" bIns="0">
+          <a:bodyPr wrap="square" lIns="0" tIns="0" rIns="0" bIns="0">
             <a:noAutofit/>
           </a:bodyPr>
           <a:lstStyle/>
@@ -13794,6 +14889,7 @@
           <a:lstStyle/>
           <a:p>
             <a:pPr algn="ctr"/>
+            <a:endParaRPr/>
           </a:p>
         </p:txBody>
       </p:sp>
@@ -13838,6 +14934,7 @@
           <a:lstStyle/>
           <a:p>
             <a:pPr algn="ctr"/>
+            <a:endParaRPr/>
           </a:p>
         </p:txBody>
       </p:sp>
@@ -13882,6 +14979,7 @@
           <a:lstStyle/>
           <a:p>
             <a:pPr algn="ctr"/>
+            <a:endParaRPr/>
           </a:p>
         </p:txBody>
       </p:sp>
@@ -13902,7 +15000,7 @@
           <a:noFill/>
         </p:spPr>
         <p:txBody>
-          <a:bodyPr wrap="square" lIns="0" rIns="0" tIns="0" bIns="0">
+          <a:bodyPr wrap="square" lIns="0" tIns="0" rIns="0" bIns="0">
             <a:noAutofit/>
           </a:bodyPr>
           <a:lstStyle/>
@@ -13948,7 +15046,7 @@
           <a:noFill/>
         </p:spPr>
         <p:txBody>
-          <a:bodyPr wrap="square" lIns="0" rIns="0" tIns="0" bIns="0">
+          <a:bodyPr wrap="square" lIns="0" tIns="0" rIns="0" bIns="0">
             <a:noAutofit/>
           </a:bodyPr>
           <a:lstStyle/>
@@ -13991,7 +15089,7 @@
           <a:noFill/>
         </p:spPr>
         <p:txBody>
-          <a:bodyPr wrap="square" lIns="0" rIns="0" tIns="0" bIns="0">
+          <a:bodyPr wrap="square" lIns="0" tIns="0" rIns="0" bIns="0">
             <a:noAutofit/>
           </a:bodyPr>
           <a:lstStyle/>
@@ -14026,7 +15124,7 @@
 </file>
 
 <file path=ppt/slides/slide3.xml><?xml version="1.0" encoding="utf-8"?>
-<p:sld xmlns:a="http://schemas.openxmlformats.org/drawingml/2006/main" xmlns:p="http://schemas.openxmlformats.org/presentationml/2006/main" xmlns:r="http://schemas.openxmlformats.org/officeDocument/2006/relationships">
+<p:sld xmlns:a="http://schemas.openxmlformats.org/drawingml/2006/main" xmlns:r="http://schemas.openxmlformats.org/officeDocument/2006/relationships" xmlns:p="http://schemas.openxmlformats.org/presentationml/2006/main">
   <p:cSld>
     <p:spTree>
       <p:nvGrpSpPr>
@@ -14034,7 +15132,14 @@
         <p:cNvGrpSpPr/>
         <p:nvPr/>
       </p:nvGrpSpPr>
-      <p:grpSpPr/>
+      <p:grpSpPr>
+        <a:xfrm>
+          <a:off x="0" y="0"/>
+          <a:ext cx="0" cy="0"/>
+          <a:chOff x="0" y="0"/>
+          <a:chExt cx="0" cy="0"/>
+        </a:xfrm>
+      </p:grpSpPr>
       <p:sp>
         <p:nvSpPr>
           <p:cNvPr id="2" name="Rectangle 1"/>
@@ -14076,6 +15181,7 @@
           <a:lstStyle/>
           <a:p>
             <a:pPr algn="ctr"/>
+            <a:endParaRPr/>
           </a:p>
         </p:txBody>
       </p:sp>
@@ -14120,6 +15226,7 @@
           <a:lstStyle/>
           <a:p>
             <a:pPr algn="ctr"/>
+            <a:endParaRPr/>
           </a:p>
         </p:txBody>
       </p:sp>
@@ -14140,7 +15247,7 @@
           <a:noFill/>
         </p:spPr>
         <p:txBody>
-          <a:bodyPr wrap="square" lIns="0" rIns="0" tIns="0" bIns="0">
+          <a:bodyPr wrap="square" lIns="0" tIns="0" rIns="0" bIns="0">
             <a:noAutofit/>
           </a:bodyPr>
           <a:lstStyle/>
@@ -14195,7 +15302,7 @@
 </file>
 
 <file path=ppt/slides/slide4.xml><?xml version="1.0" encoding="utf-8"?>
-<p:sld xmlns:a="http://schemas.openxmlformats.org/drawingml/2006/main" xmlns:p="http://schemas.openxmlformats.org/presentationml/2006/main" xmlns:r="http://schemas.openxmlformats.org/officeDocument/2006/relationships">
+<p:sld xmlns:a="http://schemas.openxmlformats.org/drawingml/2006/main" xmlns:r="http://schemas.openxmlformats.org/officeDocument/2006/relationships" xmlns:p="http://schemas.openxmlformats.org/presentationml/2006/main">
   <p:cSld>
     <p:spTree>
       <p:nvGrpSpPr>
@@ -14203,7 +15310,14 @@
         <p:cNvGrpSpPr/>
         <p:nvPr/>
       </p:nvGrpSpPr>
-      <p:grpSpPr/>
+      <p:grpSpPr>
+        <a:xfrm>
+          <a:off x="0" y="0"/>
+          <a:ext cx="0" cy="0"/>
+          <a:chOff x="0" y="0"/>
+          <a:chExt cx="0" cy="0"/>
+        </a:xfrm>
+      </p:grpSpPr>
       <p:sp>
         <p:nvSpPr>
           <p:cNvPr id="2" name="TextBox 1"/>
@@ -14221,7 +15335,7 @@
           <a:noFill/>
         </p:spPr>
         <p:txBody>
-          <a:bodyPr wrap="square" lIns="0" rIns="0" tIns="0" bIns="0">
+          <a:bodyPr wrap="square" lIns="0" tIns="0" rIns="0" bIns="0">
             <a:noAutofit/>
           </a:bodyPr>
           <a:lstStyle/>
@@ -14288,6 +15402,7 @@
           <a:lstStyle/>
           <a:p>
             <a:pPr algn="ctr"/>
+            <a:endParaRPr/>
           </a:p>
         </p:txBody>
       </p:sp>
@@ -14310,15 +15425,39 @@
                 <a:tableStyleId>{5C22544A-7EE6-4342-B048-85BDC9FD1C3A}</a:tableStyleId>
               </a:tblPr>
               <a:tblGrid>
-                <a:gridCol w="1902809"/>
-                <a:gridCol w="3159382"/>
-                <a:gridCol w="3249137"/>
-                <a:gridCol w="2746508"/>
+                <a:gridCol w="1902809">
+                  <a:extLst>
+                    <a:ext uri="{9D8B030D-6E8A-4147-A177-3AD203B41FA5}">
+                      <a16:colId xmlns:a16="http://schemas.microsoft.com/office/drawing/2014/main" val="20000"/>
+                    </a:ext>
+                  </a:extLst>
+                </a:gridCol>
+                <a:gridCol w="3159382">
+                  <a:extLst>
+                    <a:ext uri="{9D8B030D-6E8A-4147-A177-3AD203B41FA5}">
+                      <a16:colId xmlns:a16="http://schemas.microsoft.com/office/drawing/2014/main" val="20001"/>
+                    </a:ext>
+                  </a:extLst>
+                </a:gridCol>
+                <a:gridCol w="3249137">
+                  <a:extLst>
+                    <a:ext uri="{9D8B030D-6E8A-4147-A177-3AD203B41FA5}">
+                      <a16:colId xmlns:a16="http://schemas.microsoft.com/office/drawing/2014/main" val="20002"/>
+                    </a:ext>
+                  </a:extLst>
+                </a:gridCol>
+                <a:gridCol w="2746508">
+                  <a:extLst>
+                    <a:ext uri="{9D8B030D-6E8A-4147-A177-3AD203B41FA5}">
+                      <a16:colId xmlns:a16="http://schemas.microsoft.com/office/drawing/2014/main" val="20003"/>
+                    </a:ext>
+                  </a:extLst>
+                </a:gridCol>
               </a:tblGrid>
               <a:tr h="439420">
                 <a:tc>
                   <a:txBody>
-                    <a:bodyPr wrap="square"/>
+                    <a:bodyPr/>
                     <a:lstStyle/>
                     <a:p>
                       <a:pPr algn="l">
@@ -14332,6 +15471,7 @@
                           <a:spcPts val="0"/>
                         </a:spcAft>
                       </a:pPr>
+                      <a:endParaRPr/>
                     </a:p>
                   </a:txBody>
                   <a:tcPr marL="100584" marR="100584" marT="27432" marB="27432" anchor="ctr">
@@ -14342,7 +15482,7 @@
                 </a:tc>
                 <a:tc>
                   <a:txBody>
-                    <a:bodyPr wrap="square"/>
+                    <a:bodyPr/>
                     <a:lstStyle/>
                     <a:p>
                       <a:pPr algn="l">
@@ -14376,7 +15516,7 @@
                 </a:tc>
                 <a:tc>
                   <a:txBody>
-                    <a:bodyPr wrap="square"/>
+                    <a:bodyPr/>
                     <a:lstStyle/>
                     <a:p>
                       <a:pPr algn="l">
@@ -14410,7 +15550,7 @@
                 </a:tc>
                 <a:tc>
                   <a:txBody>
-                    <a:bodyPr wrap="square"/>
+                    <a:bodyPr/>
                     <a:lstStyle/>
                     <a:p>
                       <a:pPr algn="l">
@@ -14442,11 +15582,16 @@
                     </a:solidFill>
                   </a:tcPr>
                 </a:tc>
+                <a:extLst>
+                  <a:ext uri="{0D108BD9-81ED-4DB2-BD59-A6C34878D82A}">
+                    <a16:rowId xmlns:a16="http://schemas.microsoft.com/office/drawing/2014/main" val="10000"/>
+                  </a:ext>
+                </a:extLst>
               </a:tr>
               <a:tr h="439420">
                 <a:tc>
                   <a:txBody>
-                    <a:bodyPr wrap="square"/>
+                    <a:bodyPr/>
                     <a:lstStyle/>
                     <a:p>
                       <a:pPr algn="l">
@@ -14480,7 +15625,7 @@
                 </a:tc>
                 <a:tc>
                   <a:txBody>
-                    <a:bodyPr wrap="square"/>
+                    <a:bodyPr/>
                     <a:lstStyle/>
                     <a:p>
                       <a:pPr algn="l">
@@ -14514,7 +15659,7 @@
                 </a:tc>
                 <a:tc>
                   <a:txBody>
-                    <a:bodyPr wrap="square"/>
+                    <a:bodyPr/>
                     <a:lstStyle/>
                     <a:p>
                       <a:pPr algn="l">
@@ -14548,7 +15693,7 @@
                 </a:tc>
                 <a:tc>
                   <a:txBody>
-                    <a:bodyPr wrap="square"/>
+                    <a:bodyPr/>
                     <a:lstStyle/>
                     <a:p>
                       <a:pPr algn="l">
@@ -14580,11 +15725,16 @@
                     </a:solidFill>
                   </a:tcPr>
                 </a:tc>
+                <a:extLst>
+                  <a:ext uri="{0D108BD9-81ED-4DB2-BD59-A6C34878D82A}">
+                    <a16:rowId xmlns:a16="http://schemas.microsoft.com/office/drawing/2014/main" val="10001"/>
+                  </a:ext>
+                </a:extLst>
               </a:tr>
               <a:tr h="439420">
                 <a:tc>
                   <a:txBody>
-                    <a:bodyPr wrap="square"/>
+                    <a:bodyPr/>
                     <a:lstStyle/>
                     <a:p>
                       <a:pPr algn="l">
@@ -14618,7 +15768,7 @@
                 </a:tc>
                 <a:tc>
                   <a:txBody>
-                    <a:bodyPr wrap="square"/>
+                    <a:bodyPr/>
                     <a:lstStyle/>
                     <a:p>
                       <a:pPr algn="l">
@@ -14652,7 +15802,7 @@
                 </a:tc>
                 <a:tc>
                   <a:txBody>
-                    <a:bodyPr wrap="square"/>
+                    <a:bodyPr/>
                     <a:lstStyle/>
                     <a:p>
                       <a:pPr algn="l">
@@ -14686,7 +15836,7 @@
                 </a:tc>
                 <a:tc>
                   <a:txBody>
-                    <a:bodyPr wrap="square"/>
+                    <a:bodyPr/>
                     <a:lstStyle/>
                     <a:p>
                       <a:pPr algn="l">
@@ -14718,11 +15868,16 @@
                     </a:solidFill>
                   </a:tcPr>
                 </a:tc>
+                <a:extLst>
+                  <a:ext uri="{0D108BD9-81ED-4DB2-BD59-A6C34878D82A}">
+                    <a16:rowId xmlns:a16="http://schemas.microsoft.com/office/drawing/2014/main" val="10002"/>
+                  </a:ext>
+                </a:extLst>
               </a:tr>
               <a:tr h="439420">
                 <a:tc>
                   <a:txBody>
-                    <a:bodyPr wrap="square"/>
+                    <a:bodyPr/>
                     <a:lstStyle/>
                     <a:p>
                       <a:pPr algn="l">
@@ -14756,7 +15911,7 @@
                 </a:tc>
                 <a:tc>
                   <a:txBody>
-                    <a:bodyPr wrap="square"/>
+                    <a:bodyPr/>
                     <a:lstStyle/>
                     <a:p>
                       <a:pPr algn="l">
@@ -14790,7 +15945,7 @@
                 </a:tc>
                 <a:tc>
                   <a:txBody>
-                    <a:bodyPr wrap="square"/>
+                    <a:bodyPr/>
                     <a:lstStyle/>
                     <a:p>
                       <a:pPr algn="l">
@@ -14824,7 +15979,7 @@
                 </a:tc>
                 <a:tc>
                   <a:txBody>
-                    <a:bodyPr wrap="square"/>
+                    <a:bodyPr/>
                     <a:lstStyle/>
                     <a:p>
                       <a:pPr algn="l">
@@ -14856,11 +16011,16 @@
                     </a:solidFill>
                   </a:tcPr>
                 </a:tc>
+                <a:extLst>
+                  <a:ext uri="{0D108BD9-81ED-4DB2-BD59-A6C34878D82A}">
+                    <a16:rowId xmlns:a16="http://schemas.microsoft.com/office/drawing/2014/main" val="10003"/>
+                  </a:ext>
+                </a:extLst>
               </a:tr>
               <a:tr h="439420">
                 <a:tc>
                   <a:txBody>
-                    <a:bodyPr wrap="square"/>
+                    <a:bodyPr/>
                     <a:lstStyle/>
                     <a:p>
                       <a:pPr algn="l">
@@ -14894,7 +16054,7 @@
                 </a:tc>
                 <a:tc>
                   <a:txBody>
-                    <a:bodyPr wrap="square"/>
+                    <a:bodyPr/>
                     <a:lstStyle/>
                     <a:p>
                       <a:pPr algn="l">
@@ -14928,7 +16088,7 @@
                 </a:tc>
                 <a:tc>
                   <a:txBody>
-                    <a:bodyPr wrap="square"/>
+                    <a:bodyPr/>
                     <a:lstStyle/>
                     <a:p>
                       <a:pPr algn="l">
@@ -14962,7 +16122,7 @@
                 </a:tc>
                 <a:tc>
                   <a:txBody>
-                    <a:bodyPr wrap="square"/>
+                    <a:bodyPr/>
                     <a:lstStyle/>
                     <a:p>
                       <a:pPr algn="l">
@@ -14994,11 +16154,16 @@
                     </a:solidFill>
                   </a:tcPr>
                 </a:tc>
+                <a:extLst>
+                  <a:ext uri="{0D108BD9-81ED-4DB2-BD59-A6C34878D82A}">
+                    <a16:rowId xmlns:a16="http://schemas.microsoft.com/office/drawing/2014/main" val="10004"/>
+                  </a:ext>
+                </a:extLst>
               </a:tr>
               <a:tr h="439420">
                 <a:tc>
                   <a:txBody>
-                    <a:bodyPr wrap="square"/>
+                    <a:bodyPr/>
                     <a:lstStyle/>
                     <a:p>
                       <a:pPr algn="l">
@@ -15032,7 +16197,7 @@
                 </a:tc>
                 <a:tc>
                   <a:txBody>
-                    <a:bodyPr wrap="square"/>
+                    <a:bodyPr/>
                     <a:lstStyle/>
                     <a:p>
                       <a:pPr algn="l">
@@ -15066,7 +16231,7 @@
                 </a:tc>
                 <a:tc>
                   <a:txBody>
-                    <a:bodyPr wrap="square"/>
+                    <a:bodyPr/>
                     <a:lstStyle/>
                     <a:p>
                       <a:pPr algn="l">
@@ -15100,7 +16265,7 @@
                 </a:tc>
                 <a:tc>
                   <a:txBody>
-                    <a:bodyPr wrap="square"/>
+                    <a:bodyPr/>
                     <a:lstStyle/>
                     <a:p>
                       <a:pPr algn="l">
@@ -15132,11 +16297,16 @@
                     </a:solidFill>
                   </a:tcPr>
                 </a:tc>
+                <a:extLst>
+                  <a:ext uri="{0D108BD9-81ED-4DB2-BD59-A6C34878D82A}">
+                    <a16:rowId xmlns:a16="http://schemas.microsoft.com/office/drawing/2014/main" val="10005"/>
+                  </a:ext>
+                </a:extLst>
               </a:tr>
               <a:tr h="439420">
                 <a:tc>
                   <a:txBody>
-                    <a:bodyPr wrap="square"/>
+                    <a:bodyPr/>
                     <a:lstStyle/>
                     <a:p>
                       <a:pPr algn="l">
@@ -15170,7 +16340,7 @@
                 </a:tc>
                 <a:tc>
                   <a:txBody>
-                    <a:bodyPr wrap="square"/>
+                    <a:bodyPr/>
                     <a:lstStyle/>
                     <a:p>
                       <a:pPr algn="l">
@@ -15204,7 +16374,7 @@
                 </a:tc>
                 <a:tc>
                   <a:txBody>
-                    <a:bodyPr wrap="square"/>
+                    <a:bodyPr/>
                     <a:lstStyle/>
                     <a:p>
                       <a:pPr algn="l">
@@ -15238,7 +16408,7 @@
                 </a:tc>
                 <a:tc>
                   <a:txBody>
-                    <a:bodyPr wrap="square"/>
+                    <a:bodyPr/>
                     <a:lstStyle/>
                     <a:p>
                       <a:pPr algn="l">
@@ -15270,6 +16440,11 @@
                     </a:solidFill>
                   </a:tcPr>
                 </a:tc>
+                <a:extLst>
+                  <a:ext uri="{0D108BD9-81ED-4DB2-BD59-A6C34878D82A}">
+                    <a16:rowId xmlns:a16="http://schemas.microsoft.com/office/drawing/2014/main" val="10006"/>
+                  </a:ext>
+                </a:extLst>
               </a:tr>
             </a:tbl>
           </a:graphicData>
@@ -15292,7 +16467,7 @@
           <a:noFill/>
         </p:spPr>
         <p:txBody>
-          <a:bodyPr wrap="square" lIns="0" rIns="0" tIns="0" bIns="0">
+          <a:bodyPr wrap="square" lIns="0" tIns="0" rIns="0" bIns="0">
             <a:noAutofit/>
           </a:bodyPr>
           <a:lstStyle/>
@@ -15335,7 +16510,7 @@
           <a:noFill/>
         </p:spPr>
         <p:txBody>
-          <a:bodyPr wrap="square" lIns="0" rIns="0" tIns="0" bIns="0">
+          <a:bodyPr wrap="square" lIns="0" tIns="0" rIns="0" bIns="0">
             <a:noAutofit/>
           </a:bodyPr>
           <a:lstStyle/>
@@ -15378,7 +16553,7 @@
           <a:noFill/>
         </p:spPr>
         <p:txBody>
-          <a:bodyPr wrap="square" lIns="0" rIns="0" tIns="0" bIns="0">
+          <a:bodyPr wrap="square" lIns="0" tIns="0" rIns="0" bIns="0">
             <a:noAutofit/>
           </a:bodyPr>
           <a:lstStyle/>
@@ -15413,7 +16588,7 @@
 </file>
 
 <file path=ppt/slides/slide5.xml><?xml version="1.0" encoding="utf-8"?>
-<p:sld xmlns:a="http://schemas.openxmlformats.org/drawingml/2006/main" xmlns:p="http://schemas.openxmlformats.org/presentationml/2006/main" xmlns:r="http://schemas.openxmlformats.org/officeDocument/2006/relationships">
+<p:sld xmlns:a="http://schemas.openxmlformats.org/drawingml/2006/main" xmlns:r="http://schemas.openxmlformats.org/officeDocument/2006/relationships" xmlns:p="http://schemas.openxmlformats.org/presentationml/2006/main">
   <p:cSld>
     <p:spTree>
       <p:nvGrpSpPr>
@@ -15421,7 +16596,14 @@
         <p:cNvGrpSpPr/>
         <p:nvPr/>
       </p:nvGrpSpPr>
-      <p:grpSpPr/>
+      <p:grpSpPr>
+        <a:xfrm>
+          <a:off x="0" y="0"/>
+          <a:ext cx="0" cy="0"/>
+          <a:chOff x="0" y="0"/>
+          <a:chExt cx="0" cy="0"/>
+        </a:xfrm>
+      </p:grpSpPr>
       <p:sp>
         <p:nvSpPr>
           <p:cNvPr id="2" name="TextBox 1"/>
@@ -15439,7 +16621,7 @@
           <a:noFill/>
         </p:spPr>
         <p:txBody>
-          <a:bodyPr wrap="square" lIns="0" rIns="0" tIns="0" bIns="0">
+          <a:bodyPr wrap="square" lIns="0" tIns="0" rIns="0" bIns="0">
             <a:noAutofit/>
           </a:bodyPr>
           <a:lstStyle/>
@@ -15506,6 +16688,7 @@
           <a:lstStyle/>
           <a:p>
             <a:pPr algn="ctr"/>
+            <a:endParaRPr/>
           </a:p>
         </p:txBody>
       </p:sp>
@@ -15526,7 +16709,7 @@
           <a:noFill/>
         </p:spPr>
         <p:txBody>
-          <a:bodyPr wrap="square" lIns="0" rIns="0" tIns="0" bIns="0">
+          <a:bodyPr wrap="square" lIns="0" tIns="0" rIns="0" bIns="0">
             <a:noAutofit/>
           </a:bodyPr>
           <a:lstStyle/>
@@ -15871,7 +17054,7 @@
           <a:noFill/>
         </p:spPr>
         <p:txBody>
-          <a:bodyPr wrap="square" lIns="0" rIns="0" tIns="0" bIns="0">
+          <a:bodyPr wrap="square" lIns="0" tIns="0" rIns="0" bIns="0">
             <a:noAutofit/>
           </a:bodyPr>
           <a:lstStyle/>
@@ -15914,7 +17097,7 @@
           <a:noFill/>
         </p:spPr>
         <p:txBody>
-          <a:bodyPr wrap="square" lIns="0" rIns="0" tIns="0" bIns="0">
+          <a:bodyPr wrap="square" lIns="0" tIns="0" rIns="0" bIns="0">
             <a:noAutofit/>
           </a:bodyPr>
           <a:lstStyle/>
@@ -15957,7 +17140,7 @@
           <a:noFill/>
         </p:spPr>
         <p:txBody>
-          <a:bodyPr wrap="square" lIns="0" rIns="0" tIns="0" bIns="0">
+          <a:bodyPr wrap="square" lIns="0" tIns="0" rIns="0" bIns="0">
             <a:noAutofit/>
           </a:bodyPr>
           <a:lstStyle/>
@@ -15992,7 +17175,7 @@
 </file>
 
 <file path=ppt/slides/slide6.xml><?xml version="1.0" encoding="utf-8"?>
-<p:sld xmlns:a="http://schemas.openxmlformats.org/drawingml/2006/main" xmlns:p="http://schemas.openxmlformats.org/presentationml/2006/main" xmlns:r="http://schemas.openxmlformats.org/officeDocument/2006/relationships">
+<p:sld xmlns:a="http://schemas.openxmlformats.org/drawingml/2006/main" xmlns:r="http://schemas.openxmlformats.org/officeDocument/2006/relationships" xmlns:p="http://schemas.openxmlformats.org/presentationml/2006/main">
   <p:cSld>
     <p:spTree>
       <p:nvGrpSpPr>
@@ -16000,7 +17183,14 @@
         <p:cNvGrpSpPr/>
         <p:nvPr/>
       </p:nvGrpSpPr>
-      <p:grpSpPr/>
+      <p:grpSpPr>
+        <a:xfrm>
+          <a:off x="0" y="0"/>
+          <a:ext cx="0" cy="0"/>
+          <a:chOff x="0" y="0"/>
+          <a:chExt cx="0" cy="0"/>
+        </a:xfrm>
+      </p:grpSpPr>
       <p:sp>
         <p:nvSpPr>
           <p:cNvPr id="2" name="TextBox 1"/>
@@ -16018,7 +17208,7 @@
           <a:noFill/>
         </p:spPr>
         <p:txBody>
-          <a:bodyPr wrap="square" lIns="0" rIns="0" tIns="0" bIns="0">
+          <a:bodyPr wrap="square" lIns="0" tIns="0" rIns="0" bIns="0">
             <a:noAutofit/>
           </a:bodyPr>
           <a:lstStyle/>
@@ -16085,6 +17275,7 @@
           <a:lstStyle/>
           <a:p>
             <a:pPr algn="ctr"/>
+            <a:endParaRPr/>
           </a:p>
         </p:txBody>
       </p:sp>
@@ -16129,6 +17320,7 @@
           <a:lstStyle/>
           <a:p>
             <a:pPr algn="ctr"/>
+            <a:endParaRPr/>
           </a:p>
         </p:txBody>
       </p:sp>
@@ -16149,7 +17341,7 @@
           <a:noFill/>
         </p:spPr>
         <p:txBody>
-          <a:bodyPr wrap="square" lIns="0" rIns="0" tIns="0" bIns="0">
+          <a:bodyPr wrap="square" lIns="0" tIns="0" rIns="0" bIns="0">
             <a:noAutofit/>
           </a:bodyPr>
           <a:lstStyle/>
@@ -16192,7 +17384,7 @@
           <a:noFill/>
         </p:spPr>
         <p:txBody>
-          <a:bodyPr wrap="square" lIns="0" rIns="0" tIns="0" bIns="0">
+          <a:bodyPr wrap="square" lIns="0" tIns="0" rIns="0" bIns="0">
             <a:noAutofit/>
           </a:bodyPr>
           <a:lstStyle/>
@@ -16331,6 +17523,7 @@
           <a:lstStyle/>
           <a:p>
             <a:pPr algn="ctr"/>
+            <a:endParaRPr/>
           </a:p>
         </p:txBody>
       </p:sp>
@@ -16351,7 +17544,7 @@
           <a:noFill/>
         </p:spPr>
         <p:txBody>
-          <a:bodyPr wrap="square" lIns="0" rIns="0" tIns="0" bIns="0">
+          <a:bodyPr wrap="square" lIns="0" tIns="0" rIns="0" bIns="0">
             <a:noAutofit/>
           </a:bodyPr>
           <a:lstStyle/>
@@ -16394,7 +17587,7 @@
           <a:noFill/>
         </p:spPr>
         <p:txBody>
-          <a:bodyPr wrap="square" lIns="0" rIns="0" tIns="0" bIns="0">
+          <a:bodyPr wrap="square" lIns="0" tIns="0" rIns="0" bIns="0">
             <a:noAutofit/>
           </a:bodyPr>
           <a:lstStyle/>
@@ -16509,7 +17702,7 @@
           <a:noFill/>
         </p:spPr>
         <p:txBody>
-          <a:bodyPr wrap="square" lIns="0" rIns="0" tIns="0" bIns="0">
+          <a:bodyPr wrap="square" lIns="0" tIns="0" rIns="0" bIns="0">
             <a:noAutofit/>
           </a:bodyPr>
           <a:lstStyle/>
@@ -16552,7 +17745,7 @@
           <a:noFill/>
         </p:spPr>
         <p:txBody>
-          <a:bodyPr wrap="square" lIns="0" rIns="0" tIns="0" bIns="0">
+          <a:bodyPr wrap="square" lIns="0" tIns="0" rIns="0" bIns="0">
             <a:noAutofit/>
           </a:bodyPr>
           <a:lstStyle/>
@@ -16587,7 +17780,7 @@
 </file>
 
 <file path=ppt/slides/slide7.xml><?xml version="1.0" encoding="utf-8"?>
-<p:sld xmlns:a="http://schemas.openxmlformats.org/drawingml/2006/main" xmlns:p="http://schemas.openxmlformats.org/presentationml/2006/main" xmlns:r="http://schemas.openxmlformats.org/officeDocument/2006/relationships">
+<p:sld xmlns:a="http://schemas.openxmlformats.org/drawingml/2006/main" xmlns:r="http://schemas.openxmlformats.org/officeDocument/2006/relationships" xmlns:p="http://schemas.openxmlformats.org/presentationml/2006/main">
   <p:cSld>
     <p:spTree>
       <p:nvGrpSpPr>
@@ -16595,7 +17788,14 @@
         <p:cNvGrpSpPr/>
         <p:nvPr/>
       </p:nvGrpSpPr>
-      <p:grpSpPr/>
+      <p:grpSpPr>
+        <a:xfrm>
+          <a:off x="0" y="0"/>
+          <a:ext cx="0" cy="0"/>
+          <a:chOff x="0" y="0"/>
+          <a:chExt cx="0" cy="0"/>
+        </a:xfrm>
+      </p:grpSpPr>
       <p:sp>
         <p:nvSpPr>
           <p:cNvPr id="2" name="TextBox 1"/>
@@ -16613,7 +17813,7 @@
           <a:noFill/>
         </p:spPr>
         <p:txBody>
-          <a:bodyPr wrap="square" lIns="0" rIns="0" tIns="0" bIns="0">
+          <a:bodyPr wrap="square" lIns="0" tIns="0" rIns="0" bIns="0">
             <a:noAutofit/>
           </a:bodyPr>
           <a:lstStyle/>
@@ -16680,6 +17880,7 @@
           <a:lstStyle/>
           <a:p>
             <a:pPr algn="ctr"/>
+            <a:endParaRPr/>
           </a:p>
         </p:txBody>
       </p:sp>
@@ -16726,6 +17927,7 @@
           <a:lstStyle/>
           <a:p>
             <a:pPr algn="ctr"/>
+            <a:endParaRPr/>
           </a:p>
         </p:txBody>
       </p:sp>
@@ -16746,7 +17948,7 @@
           <a:noFill/>
         </p:spPr>
         <p:txBody>
-          <a:bodyPr wrap="square" lIns="0" rIns="0" tIns="0" bIns="0">
+          <a:bodyPr wrap="square" lIns="0" tIns="0" rIns="0" bIns="0">
             <a:noAutofit/>
           </a:bodyPr>
           <a:lstStyle/>
@@ -16999,7 +18201,7 @@
           <a:noFill/>
         </p:spPr>
         <p:txBody>
-          <a:bodyPr wrap="square" lIns="0" rIns="0" tIns="0" bIns="0">
+          <a:bodyPr wrap="square" lIns="0" tIns="0" rIns="0" bIns="0">
             <a:noAutofit/>
           </a:bodyPr>
           <a:lstStyle/>
@@ -17042,7 +18244,7 @@
           <a:noFill/>
         </p:spPr>
         <p:txBody>
-          <a:bodyPr wrap="square" lIns="0" rIns="0" tIns="0" bIns="0">
+          <a:bodyPr wrap="square" lIns="0" tIns="0" rIns="0" bIns="0">
             <a:noAutofit/>
           </a:bodyPr>
           <a:lstStyle/>
@@ -17085,7 +18287,7 @@
           <a:noFill/>
         </p:spPr>
         <p:txBody>
-          <a:bodyPr wrap="square" lIns="0" rIns="0" tIns="0" bIns="0">
+          <a:bodyPr wrap="square" lIns="0" tIns="0" rIns="0" bIns="0">
             <a:noAutofit/>
           </a:bodyPr>
           <a:lstStyle/>
@@ -17120,7 +18322,7 @@
 </file>
 
 <file path=ppt/slides/slide8.xml><?xml version="1.0" encoding="utf-8"?>
-<p:sld xmlns:a="http://schemas.openxmlformats.org/drawingml/2006/main" xmlns:p="http://schemas.openxmlformats.org/presentationml/2006/main" xmlns:r="http://schemas.openxmlformats.org/officeDocument/2006/relationships">
+<p:sld xmlns:a="http://schemas.openxmlformats.org/drawingml/2006/main" xmlns:r="http://schemas.openxmlformats.org/officeDocument/2006/relationships" xmlns:p="http://schemas.openxmlformats.org/presentationml/2006/main">
   <p:cSld>
     <p:spTree>
       <p:nvGrpSpPr>
@@ -17128,7 +18330,14 @@
         <p:cNvGrpSpPr/>
         <p:nvPr/>
       </p:nvGrpSpPr>
-      <p:grpSpPr/>
+      <p:grpSpPr>
+        <a:xfrm>
+          <a:off x="0" y="0"/>
+          <a:ext cx="0" cy="0"/>
+          <a:chOff x="0" y="0"/>
+          <a:chExt cx="0" cy="0"/>
+        </a:xfrm>
+      </p:grpSpPr>
       <p:sp>
         <p:nvSpPr>
           <p:cNvPr id="2" name="TextBox 1"/>
@@ -17146,7 +18355,7 @@
           <a:noFill/>
         </p:spPr>
         <p:txBody>
-          <a:bodyPr wrap="square" lIns="0" rIns="0" tIns="0" bIns="0">
+          <a:bodyPr wrap="square" lIns="0" tIns="0" rIns="0" bIns="0">
             <a:noAutofit/>
           </a:bodyPr>
           <a:lstStyle/>
@@ -17213,6 +18422,7 @@
           <a:lstStyle/>
           <a:p>
             <a:pPr algn="ctr"/>
+            <a:endParaRPr/>
           </a:p>
         </p:txBody>
       </p:sp>
@@ -17259,6 +18469,7 @@
           <a:lstStyle/>
           <a:p>
             <a:pPr algn="ctr"/>
+            <a:endParaRPr/>
           </a:p>
         </p:txBody>
       </p:sp>
@@ -17279,7 +18490,7 @@
           <a:noFill/>
         </p:spPr>
         <p:txBody>
-          <a:bodyPr wrap="square" lIns="0" rIns="0" tIns="0" bIns="0">
+          <a:bodyPr wrap="square" lIns="0" tIns="0" rIns="0" bIns="0">
             <a:noAutofit/>
           </a:bodyPr>
           <a:lstStyle/>
@@ -17463,7 +18674,7 @@
           <a:noFill/>
         </p:spPr>
         <p:txBody>
-          <a:bodyPr wrap="square" lIns="0" rIns="0" tIns="0" bIns="0">
+          <a:bodyPr wrap="square" lIns="0" tIns="0" rIns="0" bIns="0">
             <a:noAutofit/>
           </a:bodyPr>
           <a:lstStyle/>
@@ -17506,7 +18717,7 @@
           <a:noFill/>
         </p:spPr>
         <p:txBody>
-          <a:bodyPr wrap="square" lIns="0" rIns="0" tIns="0" bIns="0">
+          <a:bodyPr wrap="square" lIns="0" tIns="0" rIns="0" bIns="0">
             <a:noAutofit/>
           </a:bodyPr>
           <a:lstStyle/>
@@ -17549,7 +18760,7 @@
           <a:noFill/>
         </p:spPr>
         <p:txBody>
-          <a:bodyPr wrap="square" lIns="0" rIns="0" tIns="0" bIns="0">
+          <a:bodyPr wrap="square" lIns="0" tIns="0" rIns="0" bIns="0">
             <a:noAutofit/>
           </a:bodyPr>
           <a:lstStyle/>
@@ -17584,7 +18795,7 @@
 </file>
 
 <file path=ppt/slides/slide9.xml><?xml version="1.0" encoding="utf-8"?>
-<p:sld xmlns:a="http://schemas.openxmlformats.org/drawingml/2006/main" xmlns:p="http://schemas.openxmlformats.org/presentationml/2006/main" xmlns:r="http://schemas.openxmlformats.org/officeDocument/2006/relationships">
+<p:sld xmlns:a="http://schemas.openxmlformats.org/drawingml/2006/main" xmlns:r="http://schemas.openxmlformats.org/officeDocument/2006/relationships" xmlns:p="http://schemas.openxmlformats.org/presentationml/2006/main">
   <p:cSld>
     <p:spTree>
       <p:nvGrpSpPr>
@@ -17592,7 +18803,14 @@
         <p:cNvGrpSpPr/>
         <p:nvPr/>
       </p:nvGrpSpPr>
-      <p:grpSpPr/>
+      <p:grpSpPr>
+        <a:xfrm>
+          <a:off x="0" y="0"/>
+          <a:ext cx="0" cy="0"/>
+          <a:chOff x="0" y="0"/>
+          <a:chExt cx="0" cy="0"/>
+        </a:xfrm>
+      </p:grpSpPr>
       <p:sp>
         <p:nvSpPr>
           <p:cNvPr id="2" name="Rectangle 1"/>
@@ -17634,6 +18852,7 @@
           <a:lstStyle/>
           <a:p>
             <a:pPr algn="ctr"/>
+            <a:endParaRPr/>
           </a:p>
         </p:txBody>
       </p:sp>
@@ -17678,6 +18897,7 @@
           <a:lstStyle/>
           <a:p>
             <a:pPr algn="ctr"/>
+            <a:endParaRPr/>
           </a:p>
         </p:txBody>
       </p:sp>
@@ -17698,7 +18918,7 @@
           <a:noFill/>
         </p:spPr>
         <p:txBody>
-          <a:bodyPr wrap="square" lIns="0" rIns="0" tIns="0" bIns="0">
+          <a:bodyPr wrap="square" lIns="0" tIns="0" rIns="0" bIns="0">
             <a:noAutofit/>
           </a:bodyPr>
           <a:lstStyle/>
@@ -18070,4 +19290,299 @@
   </a:objectDefaults>
   <a:extraClrSchemeLst/>
 </a:theme>
+</file>
+
+<file path=ppt/theme/theme2.xml><?xml version="1.0" encoding="utf-8"?>
+<a:theme xmlns:a="http://schemas.openxmlformats.org/drawingml/2006/main" name="Office Theme">
+  <a:themeElements>
+    <a:clrScheme name="Office">
+      <a:dk1>
+        <a:sysClr val="windowText" lastClr="000000"/>
+      </a:dk1>
+      <a:lt1>
+        <a:sysClr val="window" lastClr="FFFFFF"/>
+      </a:lt1>
+      <a:dk2>
+        <a:srgbClr val="44546A"/>
+      </a:dk2>
+      <a:lt2>
+        <a:srgbClr val="E7E6E6"/>
+      </a:lt2>
+      <a:accent1>
+        <a:srgbClr val="4472C4"/>
+      </a:accent1>
+      <a:accent2>
+        <a:srgbClr val="ED7D31"/>
+      </a:accent2>
+      <a:accent3>
+        <a:srgbClr val="A5A5A5"/>
+      </a:accent3>
+      <a:accent4>
+        <a:srgbClr val="FFC000"/>
+      </a:accent4>
+      <a:accent5>
+        <a:srgbClr val="5B9BD5"/>
+      </a:accent5>
+      <a:accent6>
+        <a:srgbClr val="70AD47"/>
+      </a:accent6>
+      <a:hlink>
+        <a:srgbClr val="0563C1"/>
+      </a:hlink>
+      <a:folHlink>
+        <a:srgbClr val="954F72"/>
+      </a:folHlink>
+    </a:clrScheme>
+    <a:fontScheme name="Office">
+      <a:majorFont>
+        <a:latin typeface="Calibri Light" panose="020F0302020204030204"/>
+        <a:ea typeface=""/>
+        <a:cs typeface=""/>
+        <a:font script="Jpan" typeface="游ゴシック Light"/>
+        <a:font script="Hang" typeface="맑은 고딕"/>
+        <a:font script="Hans" typeface="等线 Light"/>
+        <a:font script="Hant" typeface="新細明體"/>
+        <a:font script="Arab" typeface="Times New Roman"/>
+        <a:font script="Hebr" typeface="Times New Roman"/>
+        <a:font script="Thai" typeface="Angsana New"/>
+        <a:font script="Ethi" typeface="Nyala"/>
+        <a:font script="Beng" typeface="Vrinda"/>
+        <a:font script="Gujr" typeface="Shruti"/>
+        <a:font script="Khmr" typeface="MoolBoran"/>
+        <a:font script="Knda" typeface="Tunga"/>
+        <a:font script="Guru" typeface="Raavi"/>
+        <a:font script="Cans" typeface="Euphemia"/>
+        <a:font script="Cher" typeface="Plantagenet Cherokee"/>
+        <a:font script="Yiii" typeface="Microsoft Yi Baiti"/>
+        <a:font script="Tibt" typeface="Microsoft Himalaya"/>
+        <a:font script="Thaa" typeface="MV Boli"/>
+        <a:font script="Deva" typeface="Mangal"/>
+        <a:font script="Telu" typeface="Gautami"/>
+        <a:font script="Taml" typeface="Latha"/>
+        <a:font script="Syrc" typeface="Estrangelo Edessa"/>
+        <a:font script="Orya" typeface="Kalinga"/>
+        <a:font script="Mlym" typeface="Kartika"/>
+        <a:font script="Laoo" typeface="DokChampa"/>
+        <a:font script="Sinh" typeface="Iskoola Pota"/>
+        <a:font script="Mong" typeface="Mongolian Baiti"/>
+        <a:font script="Viet" typeface="Times New Roman"/>
+        <a:font script="Uigh" typeface="Microsoft Uighur"/>
+        <a:font script="Geor" typeface="Sylfaen"/>
+        <a:font script="Armn" typeface="Arial"/>
+        <a:font script="Bugi" typeface="Leelawadee UI"/>
+        <a:font script="Bopo" typeface="Microsoft JhengHei"/>
+        <a:font script="Java" typeface="Javanese Text"/>
+        <a:font script="Lisu" typeface="Segoe UI"/>
+        <a:font script="Mymr" typeface="Myanmar Text"/>
+        <a:font script="Nkoo" typeface="Ebrima"/>
+        <a:font script="Olck" typeface="Nirmala UI"/>
+        <a:font script="Osma" typeface="Ebrima"/>
+        <a:font script="Phag" typeface="Phagspa"/>
+        <a:font script="Syrn" typeface="Estrangelo Edessa"/>
+        <a:font script="Syrj" typeface="Estrangelo Edessa"/>
+        <a:font script="Syre" typeface="Estrangelo Edessa"/>
+        <a:font script="Sora" typeface="Nirmala UI"/>
+        <a:font script="Tale" typeface="Microsoft Tai Le"/>
+        <a:font script="Talu" typeface="Microsoft New Tai Lue"/>
+        <a:font script="Tfng" typeface="Ebrima"/>
+      </a:majorFont>
+      <a:minorFont>
+        <a:latin typeface="Calibri" panose="020F0502020204030204"/>
+        <a:ea typeface=""/>
+        <a:cs typeface=""/>
+        <a:font script="Jpan" typeface="游ゴシック"/>
+        <a:font script="Hang" typeface="맑은 고딕"/>
+        <a:font script="Hans" typeface="等线"/>
+        <a:font script="Hant" typeface="新細明體"/>
+        <a:font script="Arab" typeface="Arial"/>
+        <a:font script="Hebr" typeface="Arial"/>
+        <a:font script="Thai" typeface="Cordia New"/>
+        <a:font script="Ethi" typeface="Nyala"/>
+        <a:font script="Beng" typeface="Vrinda"/>
+        <a:font script="Gujr" typeface="Shruti"/>
+        <a:font script="Khmr" typeface="DaunPenh"/>
+        <a:font script="Knda" typeface="Tunga"/>
+        <a:font script="Guru" typeface="Raavi"/>
+        <a:font script="Cans" typeface="Euphemia"/>
+        <a:font script="Cher" typeface="Plantagenet Cherokee"/>
+        <a:font script="Yiii" typeface="Microsoft Yi Baiti"/>
+        <a:font script="Tibt" typeface="Microsoft Himalaya"/>
+        <a:font script="Thaa" typeface="MV Boli"/>
+        <a:font script="Deva" typeface="Mangal"/>
+        <a:font script="Telu" typeface="Gautami"/>
+        <a:font script="Taml" typeface="Latha"/>
+        <a:font script="Syrc" typeface="Estrangelo Edessa"/>
+        <a:font script="Orya" typeface="Kalinga"/>
+        <a:font script="Mlym" typeface="Kartika"/>
+        <a:font script="Laoo" typeface="DokChampa"/>
+        <a:font script="Sinh" typeface="Iskoola Pota"/>
+        <a:font script="Mong" typeface="Mongolian Baiti"/>
+        <a:font script="Viet" typeface="Arial"/>
+        <a:font script="Uigh" typeface="Microsoft Uighur"/>
+        <a:font script="Geor" typeface="Sylfaen"/>
+        <a:font script="Armn" typeface="Arial"/>
+        <a:font script="Bugi" typeface="Leelawadee UI"/>
+        <a:font script="Bopo" typeface="Microsoft JhengHei"/>
+        <a:font script="Java" typeface="Javanese Text"/>
+        <a:font script="Lisu" typeface="Segoe UI"/>
+        <a:font script="Mymr" typeface="Myanmar Text"/>
+        <a:font script="Nkoo" typeface="Ebrima"/>
+        <a:font script="Olck" typeface="Nirmala UI"/>
+        <a:font script="Osma" typeface="Ebrima"/>
+        <a:font script="Phag" typeface="Phagspa"/>
+        <a:font script="Syrn" typeface="Estrangelo Edessa"/>
+        <a:font script="Syrj" typeface="Estrangelo Edessa"/>
+        <a:font script="Syre" typeface="Estrangelo Edessa"/>
+        <a:font script="Sora" typeface="Nirmala UI"/>
+        <a:font script="Tale" typeface="Microsoft Tai Le"/>
+        <a:font script="Talu" typeface="Microsoft New Tai Lue"/>
+        <a:font script="Tfng" typeface="Ebrima"/>
+      </a:minorFont>
+    </a:fontScheme>
+    <a:fmtScheme name="Office">
+      <a:fillStyleLst>
+        <a:solidFill>
+          <a:schemeClr val="phClr"/>
+        </a:solidFill>
+        <a:gradFill rotWithShape="1">
+          <a:gsLst>
+            <a:gs pos="0">
+              <a:schemeClr val="phClr">
+                <a:lumMod val="110000"/>
+                <a:satMod val="105000"/>
+                <a:tint val="67000"/>
+              </a:schemeClr>
+            </a:gs>
+            <a:gs pos="50000">
+              <a:schemeClr val="phClr">
+                <a:lumMod val="105000"/>
+                <a:satMod val="103000"/>
+                <a:tint val="73000"/>
+              </a:schemeClr>
+            </a:gs>
+            <a:gs pos="100000">
+              <a:schemeClr val="phClr">
+                <a:lumMod val="105000"/>
+                <a:satMod val="109000"/>
+                <a:tint val="81000"/>
+              </a:schemeClr>
+            </a:gs>
+          </a:gsLst>
+          <a:lin ang="5400000" scaled="0"/>
+        </a:gradFill>
+        <a:gradFill rotWithShape="1">
+          <a:gsLst>
+            <a:gs pos="0">
+              <a:schemeClr val="phClr">
+                <a:satMod val="103000"/>
+                <a:lumMod val="102000"/>
+                <a:tint val="94000"/>
+              </a:schemeClr>
+            </a:gs>
+            <a:gs pos="50000">
+              <a:schemeClr val="phClr">
+                <a:satMod val="110000"/>
+                <a:lumMod val="100000"/>
+                <a:shade val="100000"/>
+              </a:schemeClr>
+            </a:gs>
+            <a:gs pos="100000">
+              <a:schemeClr val="phClr">
+                <a:lumMod val="99000"/>
+                <a:satMod val="120000"/>
+                <a:shade val="78000"/>
+              </a:schemeClr>
+            </a:gs>
+          </a:gsLst>
+          <a:lin ang="5400000" scaled="0"/>
+        </a:gradFill>
+      </a:fillStyleLst>
+      <a:lnStyleLst>
+        <a:ln w="6350" cap="flat" cmpd="sng" algn="ctr">
+          <a:solidFill>
+            <a:schemeClr val="phClr"/>
+          </a:solidFill>
+          <a:prstDash val="solid"/>
+          <a:miter lim="800000"/>
+        </a:ln>
+        <a:ln w="12700" cap="flat" cmpd="sng" algn="ctr">
+          <a:solidFill>
+            <a:schemeClr val="phClr"/>
+          </a:solidFill>
+          <a:prstDash val="solid"/>
+          <a:miter lim="800000"/>
+        </a:ln>
+        <a:ln w="19050" cap="flat" cmpd="sng" algn="ctr">
+          <a:solidFill>
+            <a:schemeClr val="phClr"/>
+          </a:solidFill>
+          <a:prstDash val="solid"/>
+          <a:miter lim="800000"/>
+        </a:ln>
+      </a:lnStyleLst>
+      <a:effectStyleLst>
+        <a:effectStyle>
+          <a:effectLst/>
+        </a:effectStyle>
+        <a:effectStyle>
+          <a:effectLst/>
+        </a:effectStyle>
+        <a:effectStyle>
+          <a:effectLst>
+            <a:outerShdw blurRad="57150" dist="19050" dir="5400000" algn="ctr" rotWithShape="0">
+              <a:srgbClr val="000000">
+                <a:alpha val="63000"/>
+              </a:srgbClr>
+            </a:outerShdw>
+          </a:effectLst>
+        </a:effectStyle>
+      </a:effectStyleLst>
+      <a:bgFillStyleLst>
+        <a:solidFill>
+          <a:schemeClr val="phClr"/>
+        </a:solidFill>
+        <a:solidFill>
+          <a:schemeClr val="phClr">
+            <a:tint val="95000"/>
+            <a:satMod val="170000"/>
+          </a:schemeClr>
+        </a:solidFill>
+        <a:gradFill rotWithShape="1">
+          <a:gsLst>
+            <a:gs pos="0">
+              <a:schemeClr val="phClr">
+                <a:tint val="93000"/>
+                <a:satMod val="150000"/>
+                <a:shade val="98000"/>
+                <a:lumMod val="102000"/>
+              </a:schemeClr>
+            </a:gs>
+            <a:gs pos="50000">
+              <a:schemeClr val="phClr">
+                <a:tint val="98000"/>
+                <a:satMod val="130000"/>
+                <a:shade val="90000"/>
+                <a:lumMod val="103000"/>
+              </a:schemeClr>
+            </a:gs>
+            <a:gs pos="100000">
+              <a:schemeClr val="phClr">
+                <a:shade val="63000"/>
+                <a:satMod val="120000"/>
+              </a:schemeClr>
+            </a:gs>
+          </a:gsLst>
+          <a:lin ang="5400000" scaled="0"/>
+        </a:gradFill>
+      </a:bgFillStyleLst>
+    </a:fmtScheme>
+  </a:themeElements>
+  <a:objectDefaults/>
+  <a:extraClrSchemeLst/>
+  <a:extLst>
+    <a:ext uri="{05A4C25C-085E-4340-85A3-A5531E510DB2}">
+      <thm15:themeFamily xmlns:thm15="http://schemas.microsoft.com/office/thememl/2012/main" name="Office Theme" id="{62F939B6-93AF-4DB8-9C6B-D6C7DFDC589F}" vid="{4A3C46E8-61CC-4603-A589-7422A47A8E4A}"/>
+    </a:ext>
+  </a:extLst>
+</a:theme>
 </file>
--- a/courseware/202609_ADS_W02_VM_Shell_DevEnv.pptx
+++ b/courseware/202609_ADS_W02_VM_Shell_DevEnv.pptx
@@ -8719,7 +8719,17 @@
                 <a:latin typeface="Segoe UI"/>
                 <a:ea typeface="微软雅黑"/>
               </a:rPr>
-              <a:t>窗口直接输入数据并按回车。 </a:t>
+              <a:t>窗口直接输入数据并</a:t>
+            </a:r>
+            <a:r>
+              <a:rPr lang="zh-CN" altLang="en-US" sz="2000">
+                <a:solidFill>
+                  <a:srgbClr val="242A33"/>
+                </a:solidFill>
+                <a:latin typeface="Segoe UI"/>
+                <a:ea typeface="微软雅黑"/>
+              </a:rPr>
+              <a:t>按回车</a:t>
             </a:r>
             <a:endParaRPr lang="en-US" altLang="zh-CN" sz="2000" dirty="0">
               <a:solidFill>
@@ -8776,7 +8786,7 @@
                 <a:latin typeface="Segoe UI"/>
                 <a:ea typeface="微软雅黑"/>
               </a:rPr>
-              <a:t>适合课堂练习和临时测试，无需配置运行参数 。</a:t>
+              <a:t>适合课堂练习和临时测试，无需配置运行参数 </a:t>
             </a:r>
             <a:endParaRPr sz="1639" b="0" i="0" dirty="0">
               <a:solidFill>

--- a/courseware/202609_ADS_W02_VM_Shell_DevEnv.pptx
+++ b/courseware/202609_ADS_W02_VM_Shell_DevEnv.pptx
@@ -4,40 +4,37 @@
   <p:sldMasterIdLst>
     <p:sldMasterId id="2147483648" r:id="rId1"/>
   </p:sldMasterIdLst>
-  <p:notesMasterIdLst>
-    <p:notesMasterId r:id="rId30"/>
-  </p:notesMasterIdLst>
   <p:sldIdLst>
-    <p:sldId id="256" r:id="rId2"/>
-    <p:sldId id="257" r:id="rId3"/>
-    <p:sldId id="258" r:id="rId4"/>
-    <p:sldId id="259" r:id="rId5"/>
-    <p:sldId id="260" r:id="rId6"/>
-    <p:sldId id="261" r:id="rId7"/>
-    <p:sldId id="262" r:id="rId8"/>
-    <p:sldId id="263" r:id="rId9"/>
-    <p:sldId id="264" r:id="rId10"/>
-    <p:sldId id="265" r:id="rId11"/>
-    <p:sldId id="266" r:id="rId12"/>
-    <p:sldId id="267" r:id="rId13"/>
-    <p:sldId id="268" r:id="rId14"/>
-    <p:sldId id="269" r:id="rId15"/>
-    <p:sldId id="270" r:id="rId16"/>
-    <p:sldId id="271" r:id="rId17"/>
-    <p:sldId id="272" r:id="rId18"/>
-    <p:sldId id="273" r:id="rId19"/>
-    <p:sldId id="274" r:id="rId20"/>
-    <p:sldId id="275" r:id="rId21"/>
-    <p:sldId id="276" r:id="rId22"/>
-    <p:sldId id="277" r:id="rId23"/>
-    <p:sldId id="278" r:id="rId24"/>
-    <p:sldId id="279" r:id="rId25"/>
-    <p:sldId id="280" r:id="rId26"/>
-    <p:sldId id="281" r:id="rId27"/>
-    <p:sldId id="282" r:id="rId28"/>
-    <p:sldId id="283" r:id="rId29"/>
+    <p:sldId id="256" r:id="rId7"/>
+    <p:sldId id="257" r:id="rId8"/>
+    <p:sldId id="258" r:id="rId9"/>
+    <p:sldId id="259" r:id="rId10"/>
+    <p:sldId id="260" r:id="rId11"/>
+    <p:sldId id="261" r:id="rId12"/>
+    <p:sldId id="262" r:id="rId13"/>
+    <p:sldId id="263" r:id="rId14"/>
+    <p:sldId id="264" r:id="rId15"/>
+    <p:sldId id="265" r:id="rId16"/>
+    <p:sldId id="266" r:id="rId17"/>
+    <p:sldId id="267" r:id="rId18"/>
+    <p:sldId id="268" r:id="rId19"/>
+    <p:sldId id="269" r:id="rId20"/>
+    <p:sldId id="270" r:id="rId21"/>
+    <p:sldId id="271" r:id="rId22"/>
+    <p:sldId id="272" r:id="rId23"/>
+    <p:sldId id="273" r:id="rId24"/>
+    <p:sldId id="274" r:id="rId25"/>
+    <p:sldId id="275" r:id="rId26"/>
+    <p:sldId id="276" r:id="rId27"/>
+    <p:sldId id="277" r:id="rId28"/>
+    <p:sldId id="278" r:id="rId29"/>
+    <p:sldId id="279" r:id="rId30"/>
+    <p:sldId id="280" r:id="rId31"/>
+    <p:sldId id="281" r:id="rId32"/>
+    <p:sldId id="282" r:id="rId33"/>
+    <p:sldId id="283" r:id="rId34"/>
   </p:sldIdLst>
-  <p:sldSz cx="12192000" cy="6858000"/>
+  <p:sldSz cx="12191695" cy="6858000" type="screen4x3"/>
   <p:notesSz cx="6858000" cy="9144000"/>
   <p:defaultTextStyle>
     <a:defPPr>
@@ -134,457 +131,7 @@
       </a:defRPr>
     </a:lvl9pPr>
   </p:defaultTextStyle>
-  <p:extLst>
-    <p:ext uri="{EFAFB233-063F-42B5-8137-9DF3F51BA10A}">
-      <p15:sldGuideLst xmlns:p15="http://schemas.microsoft.com/office/powerpoint/2012/main">
-        <p15:guide id="1" orient="horz" pos="2160">
-          <p15:clr>
-            <a:srgbClr val="A4A3A4"/>
-          </p15:clr>
-        </p15:guide>
-        <p15:guide id="2" pos="2880">
-          <p15:clr>
-            <a:srgbClr val="A4A3A4"/>
-          </p15:clr>
-        </p15:guide>
-      </p15:sldGuideLst>
-    </p:ext>
-  </p:extLst>
 </p:presentation>
-</file>
-
-<file path=ppt/notesMasters/notesMaster1.xml><?xml version="1.0" encoding="utf-8"?>
-<p:notesMaster xmlns:a="http://schemas.openxmlformats.org/drawingml/2006/main" xmlns:r="http://schemas.openxmlformats.org/officeDocument/2006/relationships" xmlns:p="http://schemas.openxmlformats.org/presentationml/2006/main">
-  <p:cSld>
-    <p:bg>
-      <p:bgRef idx="1001">
-        <a:schemeClr val="bg1"/>
-      </p:bgRef>
-    </p:bg>
-    <p:spTree>
-      <p:nvGrpSpPr>
-        <p:cNvPr id="1" name=""/>
-        <p:cNvGrpSpPr/>
-        <p:nvPr/>
-      </p:nvGrpSpPr>
-      <p:grpSpPr>
-        <a:xfrm>
-          <a:off x="0" y="0"/>
-          <a:ext cx="0" cy="0"/>
-          <a:chOff x="0" y="0"/>
-          <a:chExt cx="0" cy="0"/>
-        </a:xfrm>
-      </p:grpSpPr>
-      <p:sp>
-        <p:nvSpPr>
-          <p:cNvPr id="2" name="Header Placeholder 1"/>
-          <p:cNvSpPr>
-            <a:spLocks noGrp="1"/>
-          </p:cNvSpPr>
-          <p:nvPr>
-            <p:ph type="hdr" sz="quarter"/>
-          </p:nvPr>
-        </p:nvSpPr>
-        <p:spPr>
-          <a:xfrm>
-            <a:off x="0" y="0"/>
-            <a:ext cx="2971800" cy="458788"/>
-          </a:xfrm>
-          <a:prstGeom prst="rect">
-            <a:avLst/>
-          </a:prstGeom>
-        </p:spPr>
-        <p:txBody>
-          <a:bodyPr vert="horz" lIns="91440" tIns="45720" rIns="91440" bIns="45720" rtlCol="0"/>
-          <a:lstStyle>
-            <a:lvl1pPr algn="l">
-              <a:defRPr sz="1200"/>
-            </a:lvl1pPr>
-          </a:lstStyle>
-          <a:p>
-            <a:endParaRPr lang="en-CN"/>
-          </a:p>
-        </p:txBody>
-      </p:sp>
-      <p:sp>
-        <p:nvSpPr>
-          <p:cNvPr id="3" name="Date Placeholder 2"/>
-          <p:cNvSpPr>
-            <a:spLocks noGrp="1"/>
-          </p:cNvSpPr>
-          <p:nvPr>
-            <p:ph type="dt" idx="1"/>
-          </p:nvPr>
-        </p:nvSpPr>
-        <p:spPr>
-          <a:xfrm>
-            <a:off x="3884613" y="0"/>
-            <a:ext cx="2971800" cy="458788"/>
-          </a:xfrm>
-          <a:prstGeom prst="rect">
-            <a:avLst/>
-          </a:prstGeom>
-        </p:spPr>
-        <p:txBody>
-          <a:bodyPr vert="horz" lIns="91440" tIns="45720" rIns="91440" bIns="45720" rtlCol="0"/>
-          <a:lstStyle>
-            <a:lvl1pPr algn="r">
-              <a:defRPr sz="1200"/>
-            </a:lvl1pPr>
-          </a:lstStyle>
-          <a:p>
-            <a:fld id="{D839DCA1-B525-A448-A440-A84F477510AF}" type="datetimeFigureOut">
-              <a:rPr lang="en-CN" smtClean="0"/>
-              <a:t>2026/9/1</a:t>
-            </a:fld>
-            <a:endParaRPr lang="en-CN"/>
-          </a:p>
-        </p:txBody>
-      </p:sp>
-      <p:sp>
-        <p:nvSpPr>
-          <p:cNvPr id="4" name="Slide Image Placeholder 3"/>
-          <p:cNvSpPr>
-            <a:spLocks noGrp="1" noRot="1" noChangeAspect="1"/>
-          </p:cNvSpPr>
-          <p:nvPr>
-            <p:ph type="sldImg" idx="2"/>
-          </p:nvPr>
-        </p:nvSpPr>
-        <p:spPr>
-          <a:xfrm>
-            <a:off x="685800" y="1143000"/>
-            <a:ext cx="5486400" cy="3086100"/>
-          </a:xfrm>
-          <a:prstGeom prst="rect">
-            <a:avLst/>
-          </a:prstGeom>
-          <a:noFill/>
-          <a:ln w="12700">
-            <a:solidFill>
-              <a:prstClr val="black"/>
-            </a:solidFill>
-          </a:ln>
-        </p:spPr>
-        <p:txBody>
-          <a:bodyPr vert="horz" lIns="91440" tIns="45720" rIns="91440" bIns="45720" rtlCol="0" anchor="ctr"/>
-          <a:lstStyle/>
-          <a:p>
-            <a:endParaRPr lang="en-CN"/>
-          </a:p>
-        </p:txBody>
-      </p:sp>
-      <p:sp>
-        <p:nvSpPr>
-          <p:cNvPr id="5" name="Notes Placeholder 4"/>
-          <p:cNvSpPr>
-            <a:spLocks noGrp="1"/>
-          </p:cNvSpPr>
-          <p:nvPr>
-            <p:ph type="body" sz="quarter" idx="3"/>
-          </p:nvPr>
-        </p:nvSpPr>
-        <p:spPr>
-          <a:xfrm>
-            <a:off x="685800" y="4400550"/>
-            <a:ext cx="5486400" cy="3600450"/>
-          </a:xfrm>
-          <a:prstGeom prst="rect">
-            <a:avLst/>
-          </a:prstGeom>
-        </p:spPr>
-        <p:txBody>
-          <a:bodyPr vert="horz" lIns="91440" tIns="45720" rIns="91440" bIns="45720" rtlCol="0"/>
-          <a:lstStyle/>
-          <a:p>
-            <a:pPr lvl="0"/>
-            <a:r>
-              <a:rPr lang="en-US"/>
-              <a:t>Click to edit Master text styles</a:t>
-            </a:r>
-          </a:p>
-          <a:p>
-            <a:pPr lvl="1"/>
-            <a:r>
-              <a:rPr lang="en-US"/>
-              <a:t>Second level</a:t>
-            </a:r>
-          </a:p>
-          <a:p>
-            <a:pPr lvl="2"/>
-            <a:r>
-              <a:rPr lang="en-US"/>
-              <a:t>Third level</a:t>
-            </a:r>
-          </a:p>
-          <a:p>
-            <a:pPr lvl="3"/>
-            <a:r>
-              <a:rPr lang="en-US"/>
-              <a:t>Fourth level</a:t>
-            </a:r>
-          </a:p>
-          <a:p>
-            <a:pPr lvl="4"/>
-            <a:r>
-              <a:rPr lang="en-US"/>
-              <a:t>Fifth level</a:t>
-            </a:r>
-            <a:endParaRPr lang="en-CN"/>
-          </a:p>
-        </p:txBody>
-      </p:sp>
-      <p:sp>
-        <p:nvSpPr>
-          <p:cNvPr id="6" name="Footer Placeholder 5"/>
-          <p:cNvSpPr>
-            <a:spLocks noGrp="1"/>
-          </p:cNvSpPr>
-          <p:nvPr>
-            <p:ph type="ftr" sz="quarter" idx="4"/>
-          </p:nvPr>
-        </p:nvSpPr>
-        <p:spPr>
-          <a:xfrm>
-            <a:off x="0" y="8685213"/>
-            <a:ext cx="2971800" cy="458787"/>
-          </a:xfrm>
-          <a:prstGeom prst="rect">
-            <a:avLst/>
-          </a:prstGeom>
-        </p:spPr>
-        <p:txBody>
-          <a:bodyPr vert="horz" lIns="91440" tIns="45720" rIns="91440" bIns="45720" rtlCol="0" anchor="b"/>
-          <a:lstStyle>
-            <a:lvl1pPr algn="l">
-              <a:defRPr sz="1200"/>
-            </a:lvl1pPr>
-          </a:lstStyle>
-          <a:p>
-            <a:endParaRPr lang="en-CN"/>
-          </a:p>
-        </p:txBody>
-      </p:sp>
-      <p:sp>
-        <p:nvSpPr>
-          <p:cNvPr id="7" name="Slide Number Placeholder 6"/>
-          <p:cNvSpPr>
-            <a:spLocks noGrp="1"/>
-          </p:cNvSpPr>
-          <p:nvPr>
-            <p:ph type="sldNum" sz="quarter" idx="5"/>
-          </p:nvPr>
-        </p:nvSpPr>
-        <p:spPr>
-          <a:xfrm>
-            <a:off x="3884613" y="8685213"/>
-            <a:ext cx="2971800" cy="458787"/>
-          </a:xfrm>
-          <a:prstGeom prst="rect">
-            <a:avLst/>
-          </a:prstGeom>
-        </p:spPr>
-        <p:txBody>
-          <a:bodyPr vert="horz" lIns="91440" tIns="45720" rIns="91440" bIns="45720" rtlCol="0" anchor="b"/>
-          <a:lstStyle>
-            <a:lvl1pPr algn="r">
-              <a:defRPr sz="1200"/>
-            </a:lvl1pPr>
-          </a:lstStyle>
-          <a:p>
-            <a:fld id="{4464E671-522B-C74D-9CE6-E69A55A85D6F}" type="slidenum">
-              <a:rPr lang="en-CN" smtClean="0"/>
-              <a:t>‹#›</a:t>
-            </a:fld>
-            <a:endParaRPr lang="en-CN"/>
-          </a:p>
-        </p:txBody>
-      </p:sp>
-    </p:spTree>
-    <p:extLst>
-      <p:ext uri="{BB962C8B-B14F-4D97-AF65-F5344CB8AC3E}">
-        <p14:creationId xmlns:p14="http://schemas.microsoft.com/office/powerpoint/2010/main" val="1215036054"/>
-      </p:ext>
-    </p:extLst>
-  </p:cSld>
-  <p:clrMap bg1="lt1" tx1="dk1" bg2="lt2" tx2="dk2" accent1="accent1" accent2="accent2" accent3="accent3" accent4="accent4" accent5="accent5" accent6="accent6" hlink="hlink" folHlink="folHlink"/>
-  <p:notesStyle>
-    <a:lvl1pPr marL="0" algn="l" defTabSz="914400" rtl="0" eaLnBrk="1" latinLnBrk="0" hangingPunct="1">
-      <a:defRPr sz="1200" kern="1200">
-        <a:solidFill>
-          <a:schemeClr val="tx1"/>
-        </a:solidFill>
-        <a:latin typeface="+mn-lt"/>
-        <a:ea typeface="+mn-ea"/>
-        <a:cs typeface="+mn-cs"/>
-      </a:defRPr>
-    </a:lvl1pPr>
-    <a:lvl2pPr marL="457200" algn="l" defTabSz="914400" rtl="0" eaLnBrk="1" latinLnBrk="0" hangingPunct="1">
-      <a:defRPr sz="1200" kern="1200">
-        <a:solidFill>
-          <a:schemeClr val="tx1"/>
-        </a:solidFill>
-        <a:latin typeface="+mn-lt"/>
-        <a:ea typeface="+mn-ea"/>
-        <a:cs typeface="+mn-cs"/>
-      </a:defRPr>
-    </a:lvl2pPr>
-    <a:lvl3pPr marL="914400" algn="l" defTabSz="914400" rtl="0" eaLnBrk="1" latinLnBrk="0" hangingPunct="1">
-      <a:defRPr sz="1200" kern="1200">
-        <a:solidFill>
-          <a:schemeClr val="tx1"/>
-        </a:solidFill>
-        <a:latin typeface="+mn-lt"/>
-        <a:ea typeface="+mn-ea"/>
-        <a:cs typeface="+mn-cs"/>
-      </a:defRPr>
-    </a:lvl3pPr>
-    <a:lvl4pPr marL="1371600" algn="l" defTabSz="914400" rtl="0" eaLnBrk="1" latinLnBrk="0" hangingPunct="1">
-      <a:defRPr sz="1200" kern="1200">
-        <a:solidFill>
-          <a:schemeClr val="tx1"/>
-        </a:solidFill>
-        <a:latin typeface="+mn-lt"/>
-        <a:ea typeface="+mn-ea"/>
-        <a:cs typeface="+mn-cs"/>
-      </a:defRPr>
-    </a:lvl4pPr>
-    <a:lvl5pPr marL="1828800" algn="l" defTabSz="914400" rtl="0" eaLnBrk="1" latinLnBrk="0" hangingPunct="1">
-      <a:defRPr sz="1200" kern="1200">
-        <a:solidFill>
-          <a:schemeClr val="tx1"/>
-        </a:solidFill>
-        <a:latin typeface="+mn-lt"/>
-        <a:ea typeface="+mn-ea"/>
-        <a:cs typeface="+mn-cs"/>
-      </a:defRPr>
-    </a:lvl5pPr>
-    <a:lvl6pPr marL="2286000" algn="l" defTabSz="914400" rtl="0" eaLnBrk="1" latinLnBrk="0" hangingPunct="1">
-      <a:defRPr sz="1200" kern="1200">
-        <a:solidFill>
-          <a:schemeClr val="tx1"/>
-        </a:solidFill>
-        <a:latin typeface="+mn-lt"/>
-        <a:ea typeface="+mn-ea"/>
-        <a:cs typeface="+mn-cs"/>
-      </a:defRPr>
-    </a:lvl6pPr>
-    <a:lvl7pPr marL="2743200" algn="l" defTabSz="914400" rtl="0" eaLnBrk="1" latinLnBrk="0" hangingPunct="1">
-      <a:defRPr sz="1200" kern="1200">
-        <a:solidFill>
-          <a:schemeClr val="tx1"/>
-        </a:solidFill>
-        <a:latin typeface="+mn-lt"/>
-        <a:ea typeface="+mn-ea"/>
-        <a:cs typeface="+mn-cs"/>
-      </a:defRPr>
-    </a:lvl7pPr>
-    <a:lvl8pPr marL="3200400" algn="l" defTabSz="914400" rtl="0" eaLnBrk="1" latinLnBrk="0" hangingPunct="1">
-      <a:defRPr sz="1200" kern="1200">
-        <a:solidFill>
-          <a:schemeClr val="tx1"/>
-        </a:solidFill>
-        <a:latin typeface="+mn-lt"/>
-        <a:ea typeface="+mn-ea"/>
-        <a:cs typeface="+mn-cs"/>
-      </a:defRPr>
-    </a:lvl8pPr>
-    <a:lvl9pPr marL="3657600" algn="l" defTabSz="914400" rtl="0" eaLnBrk="1" latinLnBrk="0" hangingPunct="1">
-      <a:defRPr sz="1200" kern="1200">
-        <a:solidFill>
-          <a:schemeClr val="tx1"/>
-        </a:solidFill>
-        <a:latin typeface="+mn-lt"/>
-        <a:ea typeface="+mn-ea"/>
-        <a:cs typeface="+mn-cs"/>
-      </a:defRPr>
-    </a:lvl9pPr>
-  </p:notesStyle>
-</p:notesMaster>
-</file>
-
-<file path=ppt/notesSlides/notesSlide1.xml><?xml version="1.0" encoding="utf-8"?>
-<p:notes xmlns:a="http://schemas.openxmlformats.org/drawingml/2006/main" xmlns:r="http://schemas.openxmlformats.org/officeDocument/2006/relationships" xmlns:p="http://schemas.openxmlformats.org/presentationml/2006/main">
-  <p:cSld>
-    <p:spTree>
-      <p:nvGrpSpPr>
-        <p:cNvPr id="1" name=""/>
-        <p:cNvGrpSpPr/>
-        <p:nvPr/>
-      </p:nvGrpSpPr>
-      <p:grpSpPr>
-        <a:xfrm>
-          <a:off x="0" y="0"/>
-          <a:ext cx="0" cy="0"/>
-          <a:chOff x="0" y="0"/>
-          <a:chExt cx="0" cy="0"/>
-        </a:xfrm>
-      </p:grpSpPr>
-      <p:sp>
-        <p:nvSpPr>
-          <p:cNvPr id="2" name="Slide Image Placeholder 1"/>
-          <p:cNvSpPr>
-            <a:spLocks noGrp="1" noRot="1" noChangeAspect="1"/>
-          </p:cNvSpPr>
-          <p:nvPr>
-            <p:ph type="sldImg"/>
-          </p:nvPr>
-        </p:nvSpPr>
-        <p:spPr/>
-      </p:sp>
-      <p:sp>
-        <p:nvSpPr>
-          <p:cNvPr id="3" name="Notes Placeholder 2"/>
-          <p:cNvSpPr>
-            <a:spLocks noGrp="1"/>
-          </p:cNvSpPr>
-          <p:nvPr>
-            <p:ph type="body" idx="1"/>
-          </p:nvPr>
-        </p:nvSpPr>
-        <p:spPr/>
-        <p:txBody>
-          <a:bodyPr/>
-          <a:lstStyle/>
-          <a:p>
-            <a:endParaRPr lang="en-CN" dirty="0"/>
-          </a:p>
-        </p:txBody>
-      </p:sp>
-      <p:sp>
-        <p:nvSpPr>
-          <p:cNvPr id="4" name="Slide Number Placeholder 3"/>
-          <p:cNvSpPr>
-            <a:spLocks noGrp="1"/>
-          </p:cNvSpPr>
-          <p:nvPr>
-            <p:ph type="sldNum" sz="quarter" idx="5"/>
-          </p:nvPr>
-        </p:nvSpPr>
-        <p:spPr/>
-        <p:txBody>
-          <a:bodyPr/>
-          <a:lstStyle/>
-          <a:p>
-            <a:fld id="{4464E671-522B-C74D-9CE6-E69A55A85D6F}" type="slidenum">
-              <a:rPr lang="en-CN" smtClean="0"/>
-              <a:t>18</a:t>
-            </a:fld>
-            <a:endParaRPr lang="en-CN"/>
-          </a:p>
-        </p:txBody>
-      </p:sp>
-    </p:spTree>
-    <p:extLst>
-      <p:ext uri="{BB962C8B-B14F-4D97-AF65-F5344CB8AC3E}">
-        <p14:creationId xmlns:p14="http://schemas.microsoft.com/office/powerpoint/2010/main" val="89398029"/>
-      </p:ext>
-    </p:extLst>
-  </p:cSld>
-  <p:clrMapOvr>
-    <a:masterClrMapping/>
-  </p:clrMapOvr>
-</p:notes>
 </file>
 
 <file path=ppt/slideLayouts/slideLayout1.xml><?xml version="1.0" encoding="utf-8"?>
@@ -625,9 +172,10 @@
           <a:lstStyle/>
           <a:p>
             <a:r>
-              <a:rPr lang="en-US"/>
+              <a:rPr lang="en-US" smtClean="0"/>
               <a:t>Click to edit Master title style</a:t>
             </a:r>
+            <a:endParaRPr lang="en-US"/>
           </a:p>
         </p:txBody>
       </p:sp>
@@ -743,9 +291,10 @@
           </a:lstStyle>
           <a:p>
             <a:r>
-              <a:rPr lang="en-US"/>
+              <a:rPr lang="en-US" smtClean="0"/>
               <a:t>Click to edit Master subtitle style</a:t>
             </a:r>
+            <a:endParaRPr lang="en-US"/>
           </a:p>
         </p:txBody>
       </p:sp>
@@ -766,7 +315,7 @@
           <a:p>
             <a:fld id="{5BCAD085-E8A6-8845-BD4E-CB4CCA059FC4}" type="datetimeFigureOut">
               <a:rPr lang="en-US" smtClean="0"/>
-              <a:t>9/1/26</a:t>
+              <a:t>1/27/13</a:t>
             </a:fld>
             <a:endParaRPr lang="en-US"/>
           </a:p>
@@ -860,9 +409,10 @@
           <a:lstStyle/>
           <a:p>
             <a:r>
-              <a:rPr lang="en-US"/>
+              <a:rPr lang="en-US" smtClean="0"/>
               <a:t>Click to edit Master title style</a:t>
             </a:r>
+            <a:endParaRPr lang="en-US"/>
           </a:p>
         </p:txBody>
       </p:sp>
@@ -883,37 +433,38 @@
           <a:p>
             <a:pPr lvl="0"/>
             <a:r>
-              <a:rPr lang="en-US"/>
+              <a:rPr lang="en-US" smtClean="0"/>
               <a:t>Click to edit Master text styles</a:t>
             </a:r>
           </a:p>
           <a:p>
             <a:pPr lvl="1"/>
             <a:r>
-              <a:rPr lang="en-US"/>
+              <a:rPr lang="en-US" smtClean="0"/>
               <a:t>Second level</a:t>
             </a:r>
           </a:p>
           <a:p>
             <a:pPr lvl="2"/>
             <a:r>
-              <a:rPr lang="en-US"/>
+              <a:rPr lang="en-US" smtClean="0"/>
               <a:t>Third level</a:t>
             </a:r>
           </a:p>
           <a:p>
             <a:pPr lvl="3"/>
             <a:r>
-              <a:rPr lang="en-US"/>
+              <a:rPr lang="en-US" smtClean="0"/>
               <a:t>Fourth level</a:t>
             </a:r>
           </a:p>
           <a:p>
             <a:pPr lvl="4"/>
             <a:r>
-              <a:rPr lang="en-US"/>
+              <a:rPr lang="en-US" smtClean="0"/>
               <a:t>Fifth level</a:t>
             </a:r>
+            <a:endParaRPr lang="en-US"/>
           </a:p>
         </p:txBody>
       </p:sp>
@@ -934,7 +485,7 @@
           <a:p>
             <a:fld id="{5BCAD085-E8A6-8845-BD4E-CB4CCA059FC4}" type="datetimeFigureOut">
               <a:rPr lang="en-US" smtClean="0"/>
-              <a:t>9/1/26</a:t>
+              <a:t>1/27/13</a:t>
             </a:fld>
             <a:endParaRPr lang="en-US"/>
           </a:p>
@@ -1033,9 +584,10 @@
           <a:lstStyle/>
           <a:p>
             <a:r>
-              <a:rPr lang="en-US"/>
+              <a:rPr lang="en-US" smtClean="0"/>
               <a:t>Click to edit Master title style</a:t>
             </a:r>
+            <a:endParaRPr lang="en-US"/>
           </a:p>
         </p:txBody>
       </p:sp>
@@ -1061,37 +613,38 @@
           <a:p>
             <a:pPr lvl="0"/>
             <a:r>
-              <a:rPr lang="en-US"/>
+              <a:rPr lang="en-US" smtClean="0"/>
               <a:t>Click to edit Master text styles</a:t>
             </a:r>
           </a:p>
           <a:p>
             <a:pPr lvl="1"/>
             <a:r>
-              <a:rPr lang="en-US"/>
+              <a:rPr lang="en-US" smtClean="0"/>
               <a:t>Second level</a:t>
             </a:r>
           </a:p>
           <a:p>
             <a:pPr lvl="2"/>
             <a:r>
-              <a:rPr lang="en-US"/>
+              <a:rPr lang="en-US" smtClean="0"/>
               <a:t>Third level</a:t>
             </a:r>
           </a:p>
           <a:p>
             <a:pPr lvl="3"/>
             <a:r>
-              <a:rPr lang="en-US"/>
+              <a:rPr lang="en-US" smtClean="0"/>
               <a:t>Fourth level</a:t>
             </a:r>
           </a:p>
           <a:p>
             <a:pPr lvl="4"/>
             <a:r>
-              <a:rPr lang="en-US"/>
+              <a:rPr lang="en-US" smtClean="0"/>
               <a:t>Fifth level</a:t>
             </a:r>
+            <a:endParaRPr lang="en-US"/>
           </a:p>
         </p:txBody>
       </p:sp>
@@ -1112,7 +665,7 @@
           <a:p>
             <a:fld id="{5BCAD085-E8A6-8845-BD4E-CB4CCA059FC4}" type="datetimeFigureOut">
               <a:rPr lang="en-US" smtClean="0"/>
-              <a:t>9/1/26</a:t>
+              <a:t>1/27/13</a:t>
             </a:fld>
             <a:endParaRPr lang="en-US"/>
           </a:p>
@@ -1206,9 +759,10 @@
           <a:lstStyle/>
           <a:p>
             <a:r>
-              <a:rPr lang="en-US"/>
+              <a:rPr lang="en-US" smtClean="0"/>
               <a:t>Click to edit Master title style</a:t>
             </a:r>
+            <a:endParaRPr lang="en-US"/>
           </a:p>
         </p:txBody>
       </p:sp>
@@ -1229,37 +783,38 @@
           <a:p>
             <a:pPr lvl="0"/>
             <a:r>
-              <a:rPr lang="en-US"/>
+              <a:rPr lang="en-US" smtClean="0"/>
               <a:t>Click to edit Master text styles</a:t>
             </a:r>
           </a:p>
           <a:p>
             <a:pPr lvl="1"/>
             <a:r>
-              <a:rPr lang="en-US"/>
+              <a:rPr lang="en-US" smtClean="0"/>
               <a:t>Second level</a:t>
             </a:r>
           </a:p>
           <a:p>
             <a:pPr lvl="2"/>
             <a:r>
-              <a:rPr lang="en-US"/>
+              <a:rPr lang="en-US" smtClean="0"/>
               <a:t>Third level</a:t>
             </a:r>
           </a:p>
           <a:p>
             <a:pPr lvl="3"/>
             <a:r>
-              <a:rPr lang="en-US"/>
+              <a:rPr lang="en-US" smtClean="0"/>
               <a:t>Fourth level</a:t>
             </a:r>
           </a:p>
           <a:p>
             <a:pPr lvl="4"/>
             <a:r>
-              <a:rPr lang="en-US"/>
+              <a:rPr lang="en-US" smtClean="0"/>
               <a:t>Fifth level</a:t>
             </a:r>
+            <a:endParaRPr lang="en-US"/>
           </a:p>
         </p:txBody>
       </p:sp>
@@ -1280,7 +835,7 @@
           <a:p>
             <a:fld id="{5BCAD085-E8A6-8845-BD4E-CB4CCA059FC4}" type="datetimeFigureOut">
               <a:rPr lang="en-US" smtClean="0"/>
-              <a:t>9/1/26</a:t>
+              <a:t>1/27/13</a:t>
             </a:fld>
             <a:endParaRPr lang="en-US"/>
           </a:p>
@@ -1383,9 +938,10 @@
           </a:lstStyle>
           <a:p>
             <a:r>
-              <a:rPr lang="en-US"/>
+              <a:rPr lang="en-US" smtClean="0"/>
               <a:t>Click to edit Master title style</a:t>
             </a:r>
+            <a:endParaRPr lang="en-US"/>
           </a:p>
         </p:txBody>
       </p:sp>
@@ -1502,7 +1058,7 @@
           <a:p>
             <a:pPr lvl="0"/>
             <a:r>
-              <a:rPr lang="en-US"/>
+              <a:rPr lang="en-US" smtClean="0"/>
               <a:t>Click to edit Master text styles</a:t>
             </a:r>
           </a:p>
@@ -1525,7 +1081,7 @@
           <a:p>
             <a:fld id="{5BCAD085-E8A6-8845-BD4E-CB4CCA059FC4}" type="datetimeFigureOut">
               <a:rPr lang="en-US" smtClean="0"/>
-              <a:t>9/1/26</a:t>
+              <a:t>1/27/13</a:t>
             </a:fld>
             <a:endParaRPr lang="en-US"/>
           </a:p>
@@ -1619,9 +1175,10 @@
           <a:lstStyle/>
           <a:p>
             <a:r>
-              <a:rPr lang="en-US"/>
+              <a:rPr lang="en-US" smtClean="0"/>
               <a:t>Click to edit Master title style</a:t>
             </a:r>
+            <a:endParaRPr lang="en-US"/>
           </a:p>
         </p:txBody>
       </p:sp>
@@ -1675,37 +1232,38 @@
           <a:p>
             <a:pPr lvl="0"/>
             <a:r>
-              <a:rPr lang="en-US"/>
+              <a:rPr lang="en-US" smtClean="0"/>
               <a:t>Click to edit Master text styles</a:t>
             </a:r>
           </a:p>
           <a:p>
             <a:pPr lvl="1"/>
             <a:r>
-              <a:rPr lang="en-US"/>
+              <a:rPr lang="en-US" smtClean="0"/>
               <a:t>Second level</a:t>
             </a:r>
           </a:p>
           <a:p>
             <a:pPr lvl="2"/>
             <a:r>
-              <a:rPr lang="en-US"/>
+              <a:rPr lang="en-US" smtClean="0"/>
               <a:t>Third level</a:t>
             </a:r>
           </a:p>
           <a:p>
             <a:pPr lvl="3"/>
             <a:r>
-              <a:rPr lang="en-US"/>
+              <a:rPr lang="en-US" smtClean="0"/>
               <a:t>Fourth level</a:t>
             </a:r>
           </a:p>
           <a:p>
             <a:pPr lvl="4"/>
             <a:r>
-              <a:rPr lang="en-US"/>
+              <a:rPr lang="en-US" smtClean="0"/>
               <a:t>Fifth level</a:t>
             </a:r>
+            <a:endParaRPr lang="en-US"/>
           </a:p>
         </p:txBody>
       </p:sp>
@@ -1759,37 +1317,38 @@
           <a:p>
             <a:pPr lvl="0"/>
             <a:r>
-              <a:rPr lang="en-US"/>
+              <a:rPr lang="en-US" smtClean="0"/>
               <a:t>Click to edit Master text styles</a:t>
             </a:r>
           </a:p>
           <a:p>
             <a:pPr lvl="1"/>
             <a:r>
-              <a:rPr lang="en-US"/>
+              <a:rPr lang="en-US" smtClean="0"/>
               <a:t>Second level</a:t>
             </a:r>
           </a:p>
           <a:p>
             <a:pPr lvl="2"/>
             <a:r>
-              <a:rPr lang="en-US"/>
+              <a:rPr lang="en-US" smtClean="0"/>
               <a:t>Third level</a:t>
             </a:r>
           </a:p>
           <a:p>
             <a:pPr lvl="3"/>
             <a:r>
-              <a:rPr lang="en-US"/>
+              <a:rPr lang="en-US" smtClean="0"/>
               <a:t>Fourth level</a:t>
             </a:r>
           </a:p>
           <a:p>
             <a:pPr lvl="4"/>
             <a:r>
-              <a:rPr lang="en-US"/>
+              <a:rPr lang="en-US" smtClean="0"/>
               <a:t>Fifth level</a:t>
             </a:r>
+            <a:endParaRPr lang="en-US"/>
           </a:p>
         </p:txBody>
       </p:sp>
@@ -1810,7 +1369,7 @@
           <a:p>
             <a:fld id="{5BCAD085-E8A6-8845-BD4E-CB4CCA059FC4}" type="datetimeFigureOut">
               <a:rPr lang="en-US" smtClean="0"/>
-              <a:t>9/1/26</a:t>
+              <a:t>1/27/13</a:t>
             </a:fld>
             <a:endParaRPr lang="en-US"/>
           </a:p>
@@ -1908,9 +1467,10 @@
           </a:lstStyle>
           <a:p>
             <a:r>
-              <a:rPr lang="en-US"/>
+              <a:rPr lang="en-US" smtClean="0"/>
               <a:t>Click to edit Master title style</a:t>
             </a:r>
+            <a:endParaRPr lang="en-US"/>
           </a:p>
         </p:txBody>
       </p:sp>
@@ -1973,7 +1533,7 @@
           <a:p>
             <a:pPr lvl="0"/>
             <a:r>
-              <a:rPr lang="en-US"/>
+              <a:rPr lang="en-US" smtClean="0"/>
               <a:t>Click to edit Master text styles</a:t>
             </a:r>
           </a:p>
@@ -2029,37 +1589,38 @@
           <a:p>
             <a:pPr lvl="0"/>
             <a:r>
-              <a:rPr lang="en-US"/>
+              <a:rPr lang="en-US" smtClean="0"/>
               <a:t>Click to edit Master text styles</a:t>
             </a:r>
           </a:p>
           <a:p>
             <a:pPr lvl="1"/>
             <a:r>
-              <a:rPr lang="en-US"/>
+              <a:rPr lang="en-US" smtClean="0"/>
               <a:t>Second level</a:t>
             </a:r>
           </a:p>
           <a:p>
             <a:pPr lvl="2"/>
             <a:r>
-              <a:rPr lang="en-US"/>
+              <a:rPr lang="en-US" smtClean="0"/>
               <a:t>Third level</a:t>
             </a:r>
           </a:p>
           <a:p>
             <a:pPr lvl="3"/>
             <a:r>
-              <a:rPr lang="en-US"/>
+              <a:rPr lang="en-US" smtClean="0"/>
               <a:t>Fourth level</a:t>
             </a:r>
           </a:p>
           <a:p>
             <a:pPr lvl="4"/>
             <a:r>
-              <a:rPr lang="en-US"/>
+              <a:rPr lang="en-US" smtClean="0"/>
               <a:t>Fifth level</a:t>
             </a:r>
+            <a:endParaRPr lang="en-US"/>
           </a:p>
         </p:txBody>
       </p:sp>
@@ -2122,7 +1683,7 @@
           <a:p>
             <a:pPr lvl="0"/>
             <a:r>
-              <a:rPr lang="en-US"/>
+              <a:rPr lang="en-US" smtClean="0"/>
               <a:t>Click to edit Master text styles</a:t>
             </a:r>
           </a:p>
@@ -2178,37 +1739,38 @@
           <a:p>
             <a:pPr lvl="0"/>
             <a:r>
-              <a:rPr lang="en-US"/>
+              <a:rPr lang="en-US" smtClean="0"/>
               <a:t>Click to edit Master text styles</a:t>
             </a:r>
           </a:p>
           <a:p>
             <a:pPr lvl="1"/>
             <a:r>
-              <a:rPr lang="en-US"/>
+              <a:rPr lang="en-US" smtClean="0"/>
               <a:t>Second level</a:t>
             </a:r>
           </a:p>
           <a:p>
             <a:pPr lvl="2"/>
             <a:r>
-              <a:rPr lang="en-US"/>
+              <a:rPr lang="en-US" smtClean="0"/>
               <a:t>Third level</a:t>
             </a:r>
           </a:p>
           <a:p>
             <a:pPr lvl="3"/>
             <a:r>
-              <a:rPr lang="en-US"/>
+              <a:rPr lang="en-US" smtClean="0"/>
               <a:t>Fourth level</a:t>
             </a:r>
           </a:p>
           <a:p>
             <a:pPr lvl="4"/>
             <a:r>
-              <a:rPr lang="en-US"/>
+              <a:rPr lang="en-US" smtClean="0"/>
               <a:t>Fifth level</a:t>
             </a:r>
+            <a:endParaRPr lang="en-US"/>
           </a:p>
         </p:txBody>
       </p:sp>
@@ -2229,7 +1791,7 @@
           <a:p>
             <a:fld id="{5BCAD085-E8A6-8845-BD4E-CB4CCA059FC4}" type="datetimeFigureOut">
               <a:rPr lang="en-US" smtClean="0"/>
-              <a:t>9/1/26</a:t>
+              <a:t>1/27/13</a:t>
             </a:fld>
             <a:endParaRPr lang="en-US"/>
           </a:p>
@@ -2323,9 +1885,10 @@
           <a:lstStyle/>
           <a:p>
             <a:r>
-              <a:rPr lang="en-US"/>
+              <a:rPr lang="en-US" smtClean="0"/>
               <a:t>Click to edit Master title style</a:t>
             </a:r>
+            <a:endParaRPr lang="en-US"/>
           </a:p>
         </p:txBody>
       </p:sp>
@@ -2346,7 +1909,7 @@
           <a:p>
             <a:fld id="{5BCAD085-E8A6-8845-BD4E-CB4CCA059FC4}" type="datetimeFigureOut">
               <a:rPr lang="en-US" smtClean="0"/>
-              <a:t>9/1/26</a:t>
+              <a:t>1/27/13</a:t>
             </a:fld>
             <a:endParaRPr lang="en-US"/>
           </a:p>
@@ -2441,7 +2004,7 @@
           <a:p>
             <a:fld id="{5BCAD085-E8A6-8845-BD4E-CB4CCA059FC4}" type="datetimeFigureOut">
               <a:rPr lang="en-US" smtClean="0"/>
-              <a:t>9/1/26</a:t>
+              <a:t>1/27/13</a:t>
             </a:fld>
             <a:endParaRPr lang="en-US"/>
           </a:p>
@@ -2544,9 +2107,10 @@
           </a:lstStyle>
           <a:p>
             <a:r>
-              <a:rPr lang="en-US"/>
+              <a:rPr lang="en-US" smtClean="0"/>
               <a:t>Click to edit Master title style</a:t>
             </a:r>
+            <a:endParaRPr lang="en-US"/>
           </a:p>
         </p:txBody>
       </p:sp>
@@ -2600,37 +2164,38 @@
           <a:p>
             <a:pPr lvl="0"/>
             <a:r>
-              <a:rPr lang="en-US"/>
+              <a:rPr lang="en-US" smtClean="0"/>
               <a:t>Click to edit Master text styles</a:t>
             </a:r>
           </a:p>
           <a:p>
             <a:pPr lvl="1"/>
             <a:r>
-              <a:rPr lang="en-US"/>
+              <a:rPr lang="en-US" smtClean="0"/>
               <a:t>Second level</a:t>
             </a:r>
           </a:p>
           <a:p>
             <a:pPr lvl="2"/>
             <a:r>
-              <a:rPr lang="en-US"/>
+              <a:rPr lang="en-US" smtClean="0"/>
               <a:t>Third level</a:t>
             </a:r>
           </a:p>
           <a:p>
             <a:pPr lvl="3"/>
             <a:r>
-              <a:rPr lang="en-US"/>
+              <a:rPr lang="en-US" smtClean="0"/>
               <a:t>Fourth level</a:t>
             </a:r>
           </a:p>
           <a:p>
             <a:pPr lvl="4"/>
             <a:r>
-              <a:rPr lang="en-US"/>
+              <a:rPr lang="en-US" smtClean="0"/>
               <a:t>Fifth level</a:t>
             </a:r>
+            <a:endParaRPr lang="en-US"/>
           </a:p>
         </p:txBody>
       </p:sp>
@@ -2693,7 +2258,7 @@
           <a:p>
             <a:pPr lvl="0"/>
             <a:r>
-              <a:rPr lang="en-US"/>
+              <a:rPr lang="en-US" smtClean="0"/>
               <a:t>Click to edit Master text styles</a:t>
             </a:r>
           </a:p>
@@ -2716,7 +2281,7 @@
           <a:p>
             <a:fld id="{5BCAD085-E8A6-8845-BD4E-CB4CCA059FC4}" type="datetimeFigureOut">
               <a:rPr lang="en-US" smtClean="0"/>
-              <a:t>9/1/26</a:t>
+              <a:t>1/27/13</a:t>
             </a:fld>
             <a:endParaRPr lang="en-US"/>
           </a:p>
@@ -2819,9 +2384,10 @@
           </a:lstStyle>
           <a:p>
             <a:r>
-              <a:rPr lang="en-US"/>
+              <a:rPr lang="en-US" smtClean="0"/>
               <a:t>Click to edit Master title style</a:t>
             </a:r>
+            <a:endParaRPr lang="en-US"/>
           </a:p>
         </p:txBody>
       </p:sp>
@@ -2945,7 +2511,7 @@
           <a:p>
             <a:pPr lvl="0"/>
             <a:r>
-              <a:rPr lang="en-US"/>
+              <a:rPr lang="en-US" smtClean="0"/>
               <a:t>Click to edit Master text styles</a:t>
             </a:r>
           </a:p>
@@ -2968,7 +2534,7 @@
           <a:p>
             <a:fld id="{5BCAD085-E8A6-8845-BD4E-CB4CCA059FC4}" type="datetimeFigureOut">
               <a:rPr lang="en-US" smtClean="0"/>
-              <a:t>9/1/26</a:t>
+              <a:t>1/27/13</a:t>
             </a:fld>
             <a:endParaRPr lang="en-US"/>
           </a:p>
@@ -3077,9 +2643,10 @@
           <a:lstStyle/>
           <a:p>
             <a:r>
-              <a:rPr lang="en-US"/>
+              <a:rPr lang="en-US" smtClean="0"/>
               <a:t>Click to edit Master title style</a:t>
             </a:r>
+            <a:endParaRPr lang="en-US"/>
           </a:p>
         </p:txBody>
       </p:sp>
@@ -3110,37 +2677,38 @@
           <a:p>
             <a:pPr lvl="0"/>
             <a:r>
-              <a:rPr lang="en-US"/>
+              <a:rPr lang="en-US" smtClean="0"/>
               <a:t>Click to edit Master text styles</a:t>
             </a:r>
           </a:p>
           <a:p>
             <a:pPr lvl="1"/>
             <a:r>
-              <a:rPr lang="en-US"/>
+              <a:rPr lang="en-US" smtClean="0"/>
               <a:t>Second level</a:t>
             </a:r>
           </a:p>
           <a:p>
             <a:pPr lvl="2"/>
             <a:r>
-              <a:rPr lang="en-US"/>
+              <a:rPr lang="en-US" smtClean="0"/>
               <a:t>Third level</a:t>
             </a:r>
           </a:p>
           <a:p>
             <a:pPr lvl="3"/>
             <a:r>
-              <a:rPr lang="en-US"/>
+              <a:rPr lang="en-US" smtClean="0"/>
               <a:t>Fourth level</a:t>
             </a:r>
           </a:p>
           <a:p>
             <a:pPr lvl="4"/>
             <a:r>
-              <a:rPr lang="en-US"/>
+              <a:rPr lang="en-US" smtClean="0"/>
               <a:t>Fifth level</a:t>
             </a:r>
+            <a:endParaRPr lang="en-US"/>
           </a:p>
         </p:txBody>
       </p:sp>
@@ -3179,7 +2747,7 @@
           <a:p>
             <a:fld id="{5BCAD085-E8A6-8845-BD4E-CB4CCA059FC4}" type="datetimeFigureOut">
               <a:rPr lang="en-US" smtClean="0"/>
-              <a:t>9/1/26</a:t>
+              <a:t>1/27/13</a:t>
             </a:fld>
             <a:endParaRPr lang="en-US"/>
           </a:p>
@@ -3538,7 +3106,7 @@
 </file>
 
 <file path=ppt/slides/slide1.xml><?xml version="1.0" encoding="utf-8"?>
-<p:sld xmlns:a="http://schemas.openxmlformats.org/drawingml/2006/main" xmlns:r="http://schemas.openxmlformats.org/officeDocument/2006/relationships" xmlns:p="http://schemas.openxmlformats.org/presentationml/2006/main">
+<p:sld xmlns:a="http://schemas.openxmlformats.org/drawingml/2006/main" xmlns:p="http://schemas.openxmlformats.org/presentationml/2006/main" xmlns:r="http://schemas.openxmlformats.org/officeDocument/2006/relationships">
   <p:cSld>
     <p:spTree>
       <p:nvGrpSpPr>
@@ -3546,14 +3114,7 @@
         <p:cNvGrpSpPr/>
         <p:nvPr/>
       </p:nvGrpSpPr>
-      <p:grpSpPr>
-        <a:xfrm>
-          <a:off x="0" y="0"/>
-          <a:ext cx="0" cy="0"/>
-          <a:chOff x="0" y="0"/>
-          <a:chExt cx="0" cy="0"/>
-        </a:xfrm>
-      </p:grpSpPr>
+      <p:grpSpPr/>
       <p:sp>
         <p:nvSpPr>
           <p:cNvPr id="2" name="Rectangle 1"/>
@@ -3595,7 +3156,6 @@
           <a:lstStyle/>
           <a:p>
             <a:pPr algn="ctr"/>
-            <a:endParaRPr/>
           </a:p>
         </p:txBody>
       </p:sp>
@@ -3640,7 +3200,6 @@
           <a:lstStyle/>
           <a:p>
             <a:pPr algn="ctr"/>
-            <a:endParaRPr/>
           </a:p>
         </p:txBody>
       </p:sp>
@@ -3661,7 +3220,7 @@
           <a:noFill/>
         </p:spPr>
         <p:txBody>
-          <a:bodyPr wrap="square" lIns="0" tIns="0" rIns="0" bIns="0">
+          <a:bodyPr wrap="square" lIns="0" rIns="0" tIns="0" bIns="0">
             <a:noAutofit/>
           </a:bodyPr>
           <a:lstStyle/>
@@ -3724,7 +3283,7 @@
           <a:noFill/>
         </p:spPr>
         <p:txBody>
-          <a:bodyPr wrap="square" lIns="0" tIns="0" rIns="0" bIns="0">
+          <a:bodyPr wrap="square" lIns="0" rIns="0" tIns="0" bIns="0">
             <a:noAutofit/>
           </a:bodyPr>
           <a:lstStyle/>
@@ -3779,7 +3338,7 @@
 </file>
 
 <file path=ppt/slides/slide10.xml><?xml version="1.0" encoding="utf-8"?>
-<p:sld xmlns:a="http://schemas.openxmlformats.org/drawingml/2006/main" xmlns:r="http://schemas.openxmlformats.org/officeDocument/2006/relationships" xmlns:p="http://schemas.openxmlformats.org/presentationml/2006/main">
+<p:sld xmlns:a="http://schemas.openxmlformats.org/drawingml/2006/main" xmlns:p="http://schemas.openxmlformats.org/presentationml/2006/main" xmlns:r="http://schemas.openxmlformats.org/officeDocument/2006/relationships">
   <p:cSld>
     <p:spTree>
       <p:nvGrpSpPr>
@@ -3787,14 +3346,7 @@
         <p:cNvGrpSpPr/>
         <p:nvPr/>
       </p:nvGrpSpPr>
-      <p:grpSpPr>
-        <a:xfrm>
-          <a:off x="0" y="0"/>
-          <a:ext cx="0" cy="0"/>
-          <a:chOff x="0" y="0"/>
-          <a:chExt cx="0" cy="0"/>
-        </a:xfrm>
-      </p:grpSpPr>
+      <p:grpSpPr/>
       <p:sp>
         <p:nvSpPr>
           <p:cNvPr id="2" name="TextBox 1"/>
@@ -3812,7 +3364,7 @@
           <a:noFill/>
         </p:spPr>
         <p:txBody>
-          <a:bodyPr wrap="square" lIns="0" tIns="0" rIns="0" bIns="0">
+          <a:bodyPr wrap="square" lIns="0" rIns="0" tIns="0" bIns="0">
             <a:noAutofit/>
           </a:bodyPr>
           <a:lstStyle/>
@@ -3879,7 +3431,6 @@
           <a:lstStyle/>
           <a:p>
             <a:pPr algn="ctr"/>
-            <a:endParaRPr/>
           </a:p>
         </p:txBody>
       </p:sp>
@@ -3900,7 +3451,7 @@
           <a:noFill/>
         </p:spPr>
         <p:txBody>
-          <a:bodyPr wrap="square" lIns="0" tIns="0" rIns="0" bIns="0">
+          <a:bodyPr wrap="square" lIns="0" rIns="0" tIns="0" bIns="0">
             <a:noAutofit/>
           </a:bodyPr>
           <a:lstStyle/>
@@ -4130,7 +3681,7 @@
           <a:noFill/>
         </p:spPr>
         <p:txBody>
-          <a:bodyPr wrap="square" lIns="0" tIns="0" rIns="0" bIns="0">
+          <a:bodyPr wrap="square" lIns="0" rIns="0" tIns="0" bIns="0">
             <a:noAutofit/>
           </a:bodyPr>
           <a:lstStyle/>
@@ -4173,7 +3724,7 @@
           <a:noFill/>
         </p:spPr>
         <p:txBody>
-          <a:bodyPr wrap="square" lIns="0" tIns="0" rIns="0" bIns="0">
+          <a:bodyPr wrap="square" lIns="0" rIns="0" tIns="0" bIns="0">
             <a:noAutofit/>
           </a:bodyPr>
           <a:lstStyle/>
@@ -4208,7 +3759,7 @@
 </file>
 
 <file path=ppt/slides/slide11.xml><?xml version="1.0" encoding="utf-8"?>
-<p:sld xmlns:a="http://schemas.openxmlformats.org/drawingml/2006/main" xmlns:r="http://schemas.openxmlformats.org/officeDocument/2006/relationships" xmlns:p="http://schemas.openxmlformats.org/presentationml/2006/main">
+<p:sld xmlns:a="http://schemas.openxmlformats.org/drawingml/2006/main" xmlns:p="http://schemas.openxmlformats.org/presentationml/2006/main" xmlns:r="http://schemas.openxmlformats.org/officeDocument/2006/relationships">
   <p:cSld>
     <p:spTree>
       <p:nvGrpSpPr>
@@ -4216,14 +3767,7 @@
         <p:cNvGrpSpPr/>
         <p:nvPr/>
       </p:nvGrpSpPr>
-      <p:grpSpPr>
-        <a:xfrm>
-          <a:off x="0" y="0"/>
-          <a:ext cx="0" cy="0"/>
-          <a:chOff x="0" y="0"/>
-          <a:chExt cx="0" cy="0"/>
-        </a:xfrm>
-      </p:grpSpPr>
+      <p:grpSpPr/>
       <p:sp>
         <p:nvSpPr>
           <p:cNvPr id="2" name="TextBox 1"/>
@@ -4241,7 +3785,7 @@
           <a:noFill/>
         </p:spPr>
         <p:txBody>
-          <a:bodyPr wrap="square" lIns="0" tIns="0" rIns="0" bIns="0">
+          <a:bodyPr wrap="square" lIns="0" rIns="0" tIns="0" bIns="0">
             <a:noAutofit/>
           </a:bodyPr>
           <a:lstStyle/>
@@ -4308,7 +3852,6 @@
           <a:lstStyle/>
           <a:p>
             <a:pPr algn="ctr"/>
-            <a:endParaRPr/>
           </a:p>
         </p:txBody>
       </p:sp>
@@ -4331,32 +3874,14 @@
                 <a:tableStyleId>{5C22544A-7EE6-4342-B048-85BDC9FD1C3A}</a:tableStyleId>
               </a:tblPr>
               <a:tblGrid>
-                <a:gridCol w="2975809">
-                  <a:extLst>
-                    <a:ext uri="{9D8B030D-6E8A-4147-A177-3AD203B41FA5}">
-                      <a16:colId xmlns:a16="http://schemas.microsoft.com/office/drawing/2014/main" val="20000"/>
-                    </a:ext>
-                  </a:extLst>
-                </a:gridCol>
-                <a:gridCol w="2772913">
-                  <a:extLst>
-                    <a:ext uri="{9D8B030D-6E8A-4147-A177-3AD203B41FA5}">
-                      <a16:colId xmlns:a16="http://schemas.microsoft.com/office/drawing/2014/main" val="20001"/>
-                    </a:ext>
-                  </a:extLst>
-                </a:gridCol>
-                <a:gridCol w="5309115">
-                  <a:extLst>
-                    <a:ext uri="{9D8B030D-6E8A-4147-A177-3AD203B41FA5}">
-                      <a16:colId xmlns:a16="http://schemas.microsoft.com/office/drawing/2014/main" val="20002"/>
-                    </a:ext>
-                  </a:extLst>
-                </a:gridCol>
+                <a:gridCol w="2975809"/>
+                <a:gridCol w="2772913"/>
+                <a:gridCol w="5309115"/>
               </a:tblGrid>
               <a:tr h="439420">
                 <a:tc>
                   <a:txBody>
-                    <a:bodyPr/>
+                    <a:bodyPr wrap="square"/>
                     <a:lstStyle/>
                     <a:p>
                       <a:pPr algn="l">
@@ -4390,7 +3915,7 @@
                 </a:tc>
                 <a:tc>
                   <a:txBody>
-                    <a:bodyPr/>
+                    <a:bodyPr wrap="square"/>
                     <a:lstStyle/>
                     <a:p>
                       <a:pPr algn="l">
@@ -4424,7 +3949,7 @@
                 </a:tc>
                 <a:tc>
                   <a:txBody>
-                    <a:bodyPr/>
+                    <a:bodyPr wrap="square"/>
                     <a:lstStyle/>
                     <a:p>
                       <a:pPr algn="l">
@@ -4456,16 +3981,11 @@
                     </a:solidFill>
                   </a:tcPr>
                 </a:tc>
-                <a:extLst>
-                  <a:ext uri="{0D108BD9-81ED-4DB2-BD59-A6C34878D82A}">
-                    <a16:rowId xmlns:a16="http://schemas.microsoft.com/office/drawing/2014/main" val="10000"/>
-                  </a:ext>
-                </a:extLst>
               </a:tr>
               <a:tr h="713740">
                 <a:tc>
                   <a:txBody>
-                    <a:bodyPr/>
+                    <a:bodyPr wrap="square"/>
                     <a:lstStyle/>
                     <a:p>
                       <a:pPr algn="l">
@@ -4499,7 +4019,7 @@
                 </a:tc>
                 <a:tc>
                   <a:txBody>
-                    <a:bodyPr/>
+                    <a:bodyPr wrap="square"/>
                     <a:lstStyle/>
                     <a:p>
                       <a:pPr algn="l">
@@ -4533,7 +4053,7 @@
                 </a:tc>
                 <a:tc>
                   <a:txBody>
-                    <a:bodyPr/>
+                    <a:bodyPr wrap="square"/>
                     <a:lstStyle/>
                     <a:p>
                       <a:pPr algn="l">
@@ -4565,16 +4085,11 @@
                     </a:solidFill>
                   </a:tcPr>
                 </a:tc>
-                <a:extLst>
-                  <a:ext uri="{0D108BD9-81ED-4DB2-BD59-A6C34878D82A}">
-                    <a16:rowId xmlns:a16="http://schemas.microsoft.com/office/drawing/2014/main" val="10001"/>
-                  </a:ext>
-                </a:extLst>
               </a:tr>
               <a:tr h="439420">
                 <a:tc>
                   <a:txBody>
-                    <a:bodyPr/>
+                    <a:bodyPr wrap="square"/>
                     <a:lstStyle/>
                     <a:p>
                       <a:pPr algn="l">
@@ -4608,7 +4123,7 @@
                 </a:tc>
                 <a:tc>
                   <a:txBody>
-                    <a:bodyPr/>
+                    <a:bodyPr wrap="square"/>
                     <a:lstStyle/>
                     <a:p>
                       <a:pPr algn="l">
@@ -4642,7 +4157,7 @@
                 </a:tc>
                 <a:tc>
                   <a:txBody>
-                    <a:bodyPr/>
+                    <a:bodyPr wrap="square"/>
                     <a:lstStyle/>
                     <a:p>
                       <a:pPr algn="l">
@@ -4674,16 +4189,11 @@
                     </a:solidFill>
                   </a:tcPr>
                 </a:tc>
-                <a:extLst>
-                  <a:ext uri="{0D108BD9-81ED-4DB2-BD59-A6C34878D82A}">
-                    <a16:rowId xmlns:a16="http://schemas.microsoft.com/office/drawing/2014/main" val="10002"/>
-                  </a:ext>
-                </a:extLst>
               </a:tr>
               <a:tr h="439420">
                 <a:tc>
                   <a:txBody>
-                    <a:bodyPr/>
+                    <a:bodyPr wrap="square"/>
                     <a:lstStyle/>
                     <a:p>
                       <a:pPr algn="l">
@@ -4717,7 +4227,7 @@
                 </a:tc>
                 <a:tc>
                   <a:txBody>
-                    <a:bodyPr/>
+                    <a:bodyPr wrap="square"/>
                     <a:lstStyle/>
                     <a:p>
                       <a:pPr algn="l">
@@ -4751,7 +4261,7 @@
                 </a:tc>
                 <a:tc>
                   <a:txBody>
-                    <a:bodyPr/>
+                    <a:bodyPr wrap="square"/>
                     <a:lstStyle/>
                     <a:p>
                       <a:pPr algn="l">
@@ -4783,16 +4293,11 @@
                     </a:solidFill>
                   </a:tcPr>
                 </a:tc>
-                <a:extLst>
-                  <a:ext uri="{0D108BD9-81ED-4DB2-BD59-A6C34878D82A}">
-                    <a16:rowId xmlns:a16="http://schemas.microsoft.com/office/drawing/2014/main" val="10003"/>
-                  </a:ext>
-                </a:extLst>
               </a:tr>
               <a:tr h="713740">
                 <a:tc>
                   <a:txBody>
-                    <a:bodyPr/>
+                    <a:bodyPr wrap="square"/>
                     <a:lstStyle/>
                     <a:p>
                       <a:pPr algn="l">
@@ -4826,7 +4331,7 @@
                 </a:tc>
                 <a:tc>
                   <a:txBody>
-                    <a:bodyPr/>
+                    <a:bodyPr wrap="square"/>
                     <a:lstStyle/>
                     <a:p>
                       <a:pPr algn="l">
@@ -4860,7 +4365,7 @@
                 </a:tc>
                 <a:tc>
                   <a:txBody>
-                    <a:bodyPr/>
+                    <a:bodyPr wrap="square"/>
                     <a:lstStyle/>
                     <a:p>
                       <a:pPr algn="l">
@@ -4892,16 +4397,11 @@
                     </a:solidFill>
                   </a:tcPr>
                 </a:tc>
-                <a:extLst>
-                  <a:ext uri="{0D108BD9-81ED-4DB2-BD59-A6C34878D82A}">
-                    <a16:rowId xmlns:a16="http://schemas.microsoft.com/office/drawing/2014/main" val="10004"/>
-                  </a:ext>
-                </a:extLst>
               </a:tr>
               <a:tr h="439420">
                 <a:tc>
                   <a:txBody>
-                    <a:bodyPr/>
+                    <a:bodyPr wrap="square"/>
                     <a:lstStyle/>
                     <a:p>
                       <a:pPr algn="l">
@@ -4935,7 +4435,7 @@
                 </a:tc>
                 <a:tc>
                   <a:txBody>
-                    <a:bodyPr/>
+                    <a:bodyPr wrap="square"/>
                     <a:lstStyle/>
                     <a:p>
                       <a:pPr algn="l">
@@ -4969,7 +4469,7 @@
                 </a:tc>
                 <a:tc>
                   <a:txBody>
-                    <a:bodyPr/>
+                    <a:bodyPr wrap="square"/>
                     <a:lstStyle/>
                     <a:p>
                       <a:pPr algn="l">
@@ -5001,11 +4501,6 @@
                     </a:solidFill>
                   </a:tcPr>
                 </a:tc>
-                <a:extLst>
-                  <a:ext uri="{0D108BD9-81ED-4DB2-BD59-A6C34878D82A}">
-                    <a16:rowId xmlns:a16="http://schemas.microsoft.com/office/drawing/2014/main" val="10005"/>
-                  </a:ext>
-                </a:extLst>
               </a:tr>
             </a:tbl>
           </a:graphicData>
@@ -5028,7 +4523,7 @@
           <a:noFill/>
         </p:spPr>
         <p:txBody>
-          <a:bodyPr wrap="square" lIns="0" tIns="0" rIns="0" bIns="0">
+          <a:bodyPr wrap="square" lIns="0" rIns="0" tIns="0" bIns="0">
             <a:noAutofit/>
           </a:bodyPr>
           <a:lstStyle/>
@@ -5071,7 +4566,7 @@
           <a:noFill/>
         </p:spPr>
         <p:txBody>
-          <a:bodyPr wrap="square" lIns="0" tIns="0" rIns="0" bIns="0">
+          <a:bodyPr wrap="square" lIns="0" rIns="0" tIns="0" bIns="0">
             <a:noAutofit/>
           </a:bodyPr>
           <a:lstStyle/>
@@ -5106,7 +4601,7 @@
 </file>
 
 <file path=ppt/slides/slide12.xml><?xml version="1.0" encoding="utf-8"?>
-<p:sld xmlns:a="http://schemas.openxmlformats.org/drawingml/2006/main" xmlns:r="http://schemas.openxmlformats.org/officeDocument/2006/relationships" xmlns:p="http://schemas.openxmlformats.org/presentationml/2006/main">
+<p:sld xmlns:a="http://schemas.openxmlformats.org/drawingml/2006/main" xmlns:p="http://schemas.openxmlformats.org/presentationml/2006/main" xmlns:r="http://schemas.openxmlformats.org/officeDocument/2006/relationships">
   <p:cSld>
     <p:spTree>
       <p:nvGrpSpPr>
@@ -5114,14 +4609,7 @@
         <p:cNvGrpSpPr/>
         <p:nvPr/>
       </p:nvGrpSpPr>
-      <p:grpSpPr>
-        <a:xfrm>
-          <a:off x="0" y="0"/>
-          <a:ext cx="0" cy="0"/>
-          <a:chOff x="0" y="0"/>
-          <a:chExt cx="0" cy="0"/>
-        </a:xfrm>
-      </p:grpSpPr>
+      <p:grpSpPr/>
       <p:sp>
         <p:nvSpPr>
           <p:cNvPr id="2" name="TextBox 1"/>
@@ -5139,7 +4627,7 @@
           <a:noFill/>
         </p:spPr>
         <p:txBody>
-          <a:bodyPr wrap="square" lIns="0" tIns="0" rIns="0" bIns="0">
+          <a:bodyPr wrap="square" lIns="0" rIns="0" tIns="0" bIns="0">
             <a:noAutofit/>
           </a:bodyPr>
           <a:lstStyle/>
@@ -5206,7 +4694,6 @@
           <a:lstStyle/>
           <a:p>
             <a:pPr algn="ctr"/>
-            <a:endParaRPr/>
           </a:p>
         </p:txBody>
       </p:sp>
@@ -5229,32 +4716,14 @@
                 <a:tableStyleId>{5C22544A-7EE6-4342-B048-85BDC9FD1C3A}</a:tableStyleId>
               </a:tblPr>
               <a:tblGrid>
-                <a:gridCol w="2507963">
-                  <a:extLst>
-                    <a:ext uri="{9D8B030D-6E8A-4147-A177-3AD203B41FA5}">
-                      <a16:colId xmlns:a16="http://schemas.microsoft.com/office/drawing/2014/main" val="20000"/>
-                    </a:ext>
-                  </a:extLst>
-                </a:gridCol>
-                <a:gridCol w="2279966">
-                  <a:extLst>
-                    <a:ext uri="{9D8B030D-6E8A-4147-A177-3AD203B41FA5}">
-                      <a16:colId xmlns:a16="http://schemas.microsoft.com/office/drawing/2014/main" val="20001"/>
-                    </a:ext>
-                  </a:extLst>
-                </a:gridCol>
-                <a:gridCol w="6269908">
-                  <a:extLst>
-                    <a:ext uri="{9D8B030D-6E8A-4147-A177-3AD203B41FA5}">
-                      <a16:colId xmlns:a16="http://schemas.microsoft.com/office/drawing/2014/main" val="20002"/>
-                    </a:ext>
-                  </a:extLst>
-                </a:gridCol>
+                <a:gridCol w="2507963"/>
+                <a:gridCol w="2279966"/>
+                <a:gridCol w="6269908"/>
               </a:tblGrid>
               <a:tr h="439420">
                 <a:tc>
                   <a:txBody>
-                    <a:bodyPr/>
+                    <a:bodyPr wrap="square"/>
                     <a:lstStyle/>
                     <a:p>
                       <a:pPr algn="l">
@@ -5288,7 +4757,7 @@
                 </a:tc>
                 <a:tc>
                   <a:txBody>
-                    <a:bodyPr/>
+                    <a:bodyPr wrap="square"/>
                     <a:lstStyle/>
                     <a:p>
                       <a:pPr algn="l">
@@ -5322,7 +4791,7 @@
                 </a:tc>
                 <a:tc>
                   <a:txBody>
-                    <a:bodyPr/>
+                    <a:bodyPr wrap="square"/>
                     <a:lstStyle/>
                     <a:p>
                       <a:pPr algn="l">
@@ -5354,16 +4823,11 @@
                     </a:solidFill>
                   </a:tcPr>
                 </a:tc>
-                <a:extLst>
-                  <a:ext uri="{0D108BD9-81ED-4DB2-BD59-A6C34878D82A}">
-                    <a16:rowId xmlns:a16="http://schemas.microsoft.com/office/drawing/2014/main" val="10000"/>
-                  </a:ext>
-                </a:extLst>
               </a:tr>
               <a:tr h="439420">
                 <a:tc>
                   <a:txBody>
-                    <a:bodyPr/>
+                    <a:bodyPr wrap="square"/>
                     <a:lstStyle/>
                     <a:p>
                       <a:pPr algn="l">
@@ -5397,7 +4861,7 @@
                 </a:tc>
                 <a:tc>
                   <a:txBody>
-                    <a:bodyPr/>
+                    <a:bodyPr wrap="square"/>
                     <a:lstStyle/>
                     <a:p>
                       <a:pPr algn="l">
@@ -5431,7 +4895,7 @@
                 </a:tc>
                 <a:tc>
                   <a:txBody>
-                    <a:bodyPr/>
+                    <a:bodyPr wrap="square"/>
                     <a:lstStyle/>
                     <a:p>
                       <a:pPr algn="l">
@@ -5463,16 +4927,11 @@
                     </a:solidFill>
                   </a:tcPr>
                 </a:tc>
-                <a:extLst>
-                  <a:ext uri="{0D108BD9-81ED-4DB2-BD59-A6C34878D82A}">
-                    <a16:rowId xmlns:a16="http://schemas.microsoft.com/office/drawing/2014/main" val="10001"/>
-                  </a:ext>
-                </a:extLst>
               </a:tr>
               <a:tr h="439420">
                 <a:tc>
                   <a:txBody>
-                    <a:bodyPr/>
+                    <a:bodyPr wrap="square"/>
                     <a:lstStyle/>
                     <a:p>
                       <a:pPr algn="l">
@@ -5506,7 +4965,7 @@
                 </a:tc>
                 <a:tc>
                   <a:txBody>
-                    <a:bodyPr/>
+                    <a:bodyPr wrap="square"/>
                     <a:lstStyle/>
                     <a:p>
                       <a:pPr algn="l">
@@ -5540,7 +4999,7 @@
                 </a:tc>
                 <a:tc>
                   <a:txBody>
-                    <a:bodyPr/>
+                    <a:bodyPr wrap="square"/>
                     <a:lstStyle/>
                     <a:p>
                       <a:pPr algn="l">
@@ -5572,16 +5031,11 @@
                     </a:solidFill>
                   </a:tcPr>
                 </a:tc>
-                <a:extLst>
-                  <a:ext uri="{0D108BD9-81ED-4DB2-BD59-A6C34878D82A}">
-                    <a16:rowId xmlns:a16="http://schemas.microsoft.com/office/drawing/2014/main" val="10002"/>
-                  </a:ext>
-                </a:extLst>
               </a:tr>
               <a:tr h="439420">
                 <a:tc>
                   <a:txBody>
-                    <a:bodyPr/>
+                    <a:bodyPr wrap="square"/>
                     <a:lstStyle/>
                     <a:p>
                       <a:pPr algn="l">
@@ -5615,7 +5069,7 @@
                 </a:tc>
                 <a:tc>
                   <a:txBody>
-                    <a:bodyPr/>
+                    <a:bodyPr wrap="square"/>
                     <a:lstStyle/>
                     <a:p>
                       <a:pPr algn="l">
@@ -5649,7 +5103,7 @@
                 </a:tc>
                 <a:tc>
                   <a:txBody>
-                    <a:bodyPr/>
+                    <a:bodyPr wrap="square"/>
                     <a:lstStyle/>
                     <a:p>
                       <a:pPr algn="l">
@@ -5681,16 +5135,11 @@
                     </a:solidFill>
                   </a:tcPr>
                 </a:tc>
-                <a:extLst>
-                  <a:ext uri="{0D108BD9-81ED-4DB2-BD59-A6C34878D82A}">
-                    <a16:rowId xmlns:a16="http://schemas.microsoft.com/office/drawing/2014/main" val="10003"/>
-                  </a:ext>
-                </a:extLst>
               </a:tr>
               <a:tr h="439420">
                 <a:tc>
                   <a:txBody>
-                    <a:bodyPr/>
+                    <a:bodyPr wrap="square"/>
                     <a:lstStyle/>
                     <a:p>
                       <a:pPr algn="l">
@@ -5724,7 +5173,7 @@
                 </a:tc>
                 <a:tc>
                   <a:txBody>
-                    <a:bodyPr/>
+                    <a:bodyPr wrap="square"/>
                     <a:lstStyle/>
                     <a:p>
                       <a:pPr algn="l">
@@ -5758,7 +5207,7 @@
                 </a:tc>
                 <a:tc>
                   <a:txBody>
-                    <a:bodyPr/>
+                    <a:bodyPr wrap="square"/>
                     <a:lstStyle/>
                     <a:p>
                       <a:pPr algn="l">
@@ -5790,16 +5239,11 @@
                     </a:solidFill>
                   </a:tcPr>
                 </a:tc>
-                <a:extLst>
-                  <a:ext uri="{0D108BD9-81ED-4DB2-BD59-A6C34878D82A}">
-                    <a16:rowId xmlns:a16="http://schemas.microsoft.com/office/drawing/2014/main" val="10004"/>
-                  </a:ext>
-                </a:extLst>
               </a:tr>
               <a:tr h="439420">
                 <a:tc>
                   <a:txBody>
-                    <a:bodyPr/>
+                    <a:bodyPr wrap="square"/>
                     <a:lstStyle/>
                     <a:p>
                       <a:pPr algn="l">
@@ -5833,7 +5277,7 @@
                 </a:tc>
                 <a:tc>
                   <a:txBody>
-                    <a:bodyPr/>
+                    <a:bodyPr wrap="square"/>
                     <a:lstStyle/>
                     <a:p>
                       <a:pPr algn="l">
@@ -5867,7 +5311,7 @@
                 </a:tc>
                 <a:tc>
                   <a:txBody>
-                    <a:bodyPr/>
+                    <a:bodyPr wrap="square"/>
                     <a:lstStyle/>
                     <a:p>
                       <a:pPr algn="l">
@@ -5899,11 +5343,6 @@
                     </a:solidFill>
                   </a:tcPr>
                 </a:tc>
-                <a:extLst>
-                  <a:ext uri="{0D108BD9-81ED-4DB2-BD59-A6C34878D82A}">
-                    <a16:rowId xmlns:a16="http://schemas.microsoft.com/office/drawing/2014/main" val="10005"/>
-                  </a:ext>
-                </a:extLst>
               </a:tr>
             </a:tbl>
           </a:graphicData>
@@ -5926,7 +5365,7 @@
           <a:noFill/>
         </p:spPr>
         <p:txBody>
-          <a:bodyPr wrap="square" lIns="0" tIns="0" rIns="0" bIns="0">
+          <a:bodyPr wrap="square" lIns="0" rIns="0" tIns="0" bIns="0">
             <a:noAutofit/>
           </a:bodyPr>
           <a:lstStyle/>
@@ -5969,7 +5408,7 @@
           <a:noFill/>
         </p:spPr>
         <p:txBody>
-          <a:bodyPr wrap="square" lIns="0" tIns="0" rIns="0" bIns="0">
+          <a:bodyPr wrap="square" lIns="0" rIns="0" tIns="0" bIns="0">
             <a:noAutofit/>
           </a:bodyPr>
           <a:lstStyle/>
@@ -6012,7 +5451,7 @@
           <a:noFill/>
         </p:spPr>
         <p:txBody>
-          <a:bodyPr wrap="square" lIns="0" tIns="0" rIns="0" bIns="0">
+          <a:bodyPr wrap="square" lIns="0" rIns="0" tIns="0" bIns="0">
             <a:noAutofit/>
           </a:bodyPr>
           <a:lstStyle/>
@@ -6047,7 +5486,7 @@
 </file>
 
 <file path=ppt/slides/slide13.xml><?xml version="1.0" encoding="utf-8"?>
-<p:sld xmlns:a="http://schemas.openxmlformats.org/drawingml/2006/main" xmlns:r="http://schemas.openxmlformats.org/officeDocument/2006/relationships" xmlns:p="http://schemas.openxmlformats.org/presentationml/2006/main">
+<p:sld xmlns:a="http://schemas.openxmlformats.org/drawingml/2006/main" xmlns:p="http://schemas.openxmlformats.org/presentationml/2006/main" xmlns:r="http://schemas.openxmlformats.org/officeDocument/2006/relationships">
   <p:cSld>
     <p:spTree>
       <p:nvGrpSpPr>
@@ -6055,14 +5494,7 @@
         <p:cNvGrpSpPr/>
         <p:nvPr/>
       </p:nvGrpSpPr>
-      <p:grpSpPr>
-        <a:xfrm>
-          <a:off x="0" y="0"/>
-          <a:ext cx="0" cy="0"/>
-          <a:chOff x="0" y="0"/>
-          <a:chExt cx="0" cy="0"/>
-        </a:xfrm>
-      </p:grpSpPr>
+      <p:grpSpPr/>
       <p:sp>
         <p:nvSpPr>
           <p:cNvPr id="2" name="TextBox 1"/>
@@ -6080,7 +5512,7 @@
           <a:noFill/>
         </p:spPr>
         <p:txBody>
-          <a:bodyPr wrap="square" lIns="0" tIns="0" rIns="0" bIns="0">
+          <a:bodyPr wrap="square" lIns="0" rIns="0" tIns="0" bIns="0">
             <a:noAutofit/>
           </a:bodyPr>
           <a:lstStyle/>
@@ -6147,7 +5579,6 @@
           <a:lstStyle/>
           <a:p>
             <a:pPr algn="ctr"/>
-            <a:endParaRPr/>
           </a:p>
         </p:txBody>
       </p:sp>
@@ -6168,7 +5599,7 @@
           <a:noFill/>
         </p:spPr>
         <p:txBody>
-          <a:bodyPr wrap="square" lIns="0" tIns="0" rIns="0" bIns="0">
+          <a:bodyPr wrap="square" lIns="0" rIns="0" tIns="0" bIns="0">
             <a:noAutofit/>
           </a:bodyPr>
           <a:lstStyle/>
@@ -6398,7 +5829,7 @@
           <a:noFill/>
         </p:spPr>
         <p:txBody>
-          <a:bodyPr wrap="square" lIns="0" tIns="0" rIns="0" bIns="0">
+          <a:bodyPr wrap="square" lIns="0" rIns="0" tIns="0" bIns="0">
             <a:noAutofit/>
           </a:bodyPr>
           <a:lstStyle/>
@@ -6441,7 +5872,7 @@
           <a:noFill/>
         </p:spPr>
         <p:txBody>
-          <a:bodyPr wrap="square" lIns="0" tIns="0" rIns="0" bIns="0">
+          <a:bodyPr wrap="square" lIns="0" rIns="0" tIns="0" bIns="0">
             <a:noAutofit/>
           </a:bodyPr>
           <a:lstStyle/>
@@ -6476,7 +5907,7 @@
 </file>
 
 <file path=ppt/slides/slide14.xml><?xml version="1.0" encoding="utf-8"?>
-<p:sld xmlns:a="http://schemas.openxmlformats.org/drawingml/2006/main" xmlns:r="http://schemas.openxmlformats.org/officeDocument/2006/relationships" xmlns:p="http://schemas.openxmlformats.org/presentationml/2006/main">
+<p:sld xmlns:a="http://schemas.openxmlformats.org/drawingml/2006/main" xmlns:p="http://schemas.openxmlformats.org/presentationml/2006/main" xmlns:r="http://schemas.openxmlformats.org/officeDocument/2006/relationships">
   <p:cSld>
     <p:spTree>
       <p:nvGrpSpPr>
@@ -6484,14 +5915,7 @@
         <p:cNvGrpSpPr/>
         <p:nvPr/>
       </p:nvGrpSpPr>
-      <p:grpSpPr>
-        <a:xfrm>
-          <a:off x="0" y="0"/>
-          <a:ext cx="0" cy="0"/>
-          <a:chOff x="0" y="0"/>
-          <a:chExt cx="0" cy="0"/>
-        </a:xfrm>
-      </p:grpSpPr>
+      <p:grpSpPr/>
       <p:sp>
         <p:nvSpPr>
           <p:cNvPr id="2" name="TextBox 1"/>
@@ -6509,7 +5933,7 @@
           <a:noFill/>
         </p:spPr>
         <p:txBody>
-          <a:bodyPr wrap="square" lIns="0" tIns="0" rIns="0" bIns="0">
+          <a:bodyPr wrap="square" lIns="0" rIns="0" tIns="0" bIns="0">
             <a:noAutofit/>
           </a:bodyPr>
           <a:lstStyle/>
@@ -6576,7 +6000,6 @@
           <a:lstStyle/>
           <a:p>
             <a:pPr algn="ctr"/>
-            <a:endParaRPr/>
           </a:p>
         </p:txBody>
       </p:sp>
@@ -6623,7 +6046,6 @@
           <a:lstStyle/>
           <a:p>
             <a:pPr algn="ctr"/>
-            <a:endParaRPr/>
           </a:p>
         </p:txBody>
       </p:sp>
@@ -6644,7 +6066,7 @@
           <a:noFill/>
         </p:spPr>
         <p:txBody>
-          <a:bodyPr wrap="square" lIns="0" tIns="0" rIns="0" bIns="0">
+          <a:bodyPr wrap="square" lIns="0" rIns="0" tIns="0" bIns="0">
             <a:noAutofit/>
           </a:bodyPr>
           <a:lstStyle/>
@@ -6782,7 +6204,7 @@
           <a:noFill/>
         </p:spPr>
         <p:txBody>
-          <a:bodyPr wrap="square" lIns="0" tIns="0" rIns="0" bIns="0">
+          <a:bodyPr wrap="square" lIns="0" rIns="0" tIns="0" bIns="0">
             <a:noAutofit/>
           </a:bodyPr>
           <a:lstStyle/>
@@ -6825,7 +6247,7 @@
           <a:noFill/>
         </p:spPr>
         <p:txBody>
-          <a:bodyPr wrap="square" lIns="0" tIns="0" rIns="0" bIns="0">
+          <a:bodyPr wrap="square" lIns="0" rIns="0" tIns="0" bIns="0">
             <a:noAutofit/>
           </a:bodyPr>
           <a:lstStyle/>
@@ -6868,7 +6290,7 @@
           <a:noFill/>
         </p:spPr>
         <p:txBody>
-          <a:bodyPr wrap="square" lIns="0" tIns="0" rIns="0" bIns="0">
+          <a:bodyPr wrap="square" lIns="0" rIns="0" tIns="0" bIns="0">
             <a:noAutofit/>
           </a:bodyPr>
           <a:lstStyle/>
@@ -6903,7 +6325,7 @@
 </file>
 
 <file path=ppt/slides/slide15.xml><?xml version="1.0" encoding="utf-8"?>
-<p:sld xmlns:a="http://schemas.openxmlformats.org/drawingml/2006/main" xmlns:r="http://schemas.openxmlformats.org/officeDocument/2006/relationships" xmlns:p="http://schemas.openxmlformats.org/presentationml/2006/main">
+<p:sld xmlns:a="http://schemas.openxmlformats.org/drawingml/2006/main" xmlns:p="http://schemas.openxmlformats.org/presentationml/2006/main" xmlns:r="http://schemas.openxmlformats.org/officeDocument/2006/relationships">
   <p:cSld>
     <p:spTree>
       <p:nvGrpSpPr>
@@ -6911,14 +6333,7 @@
         <p:cNvGrpSpPr/>
         <p:nvPr/>
       </p:nvGrpSpPr>
-      <p:grpSpPr>
-        <a:xfrm>
-          <a:off x="0" y="0"/>
-          <a:ext cx="0" cy="0"/>
-          <a:chOff x="0" y="0"/>
-          <a:chExt cx="0" cy="0"/>
-        </a:xfrm>
-      </p:grpSpPr>
+      <p:grpSpPr/>
       <p:sp>
         <p:nvSpPr>
           <p:cNvPr id="2" name="TextBox 1"/>
@@ -6936,7 +6351,7 @@
           <a:noFill/>
         </p:spPr>
         <p:txBody>
-          <a:bodyPr wrap="square" lIns="0" tIns="0" rIns="0" bIns="0">
+          <a:bodyPr wrap="square" lIns="0" rIns="0" tIns="0" bIns="0">
             <a:noAutofit/>
           </a:bodyPr>
           <a:lstStyle/>
@@ -7003,7 +6418,6 @@
           <a:lstStyle/>
           <a:p>
             <a:pPr algn="ctr"/>
-            <a:endParaRPr/>
           </a:p>
         </p:txBody>
       </p:sp>
@@ -7026,25 +6440,13 @@
                 <a:tableStyleId>{5C22544A-7EE6-4342-B048-85BDC9FD1C3A}</a:tableStyleId>
               </a:tblPr>
               <a:tblGrid>
-                <a:gridCol w="2986159">
-                  <a:extLst>
-                    <a:ext uri="{9D8B030D-6E8A-4147-A177-3AD203B41FA5}">
-                      <a16:colId xmlns:a16="http://schemas.microsoft.com/office/drawing/2014/main" val="20000"/>
-                    </a:ext>
-                  </a:extLst>
-                </a:gridCol>
-                <a:gridCol w="8071679">
-                  <a:extLst>
-                    <a:ext uri="{9D8B030D-6E8A-4147-A177-3AD203B41FA5}">
-                      <a16:colId xmlns:a16="http://schemas.microsoft.com/office/drawing/2014/main" val="20001"/>
-                    </a:ext>
-                  </a:extLst>
-                </a:gridCol>
+                <a:gridCol w="2986159"/>
+                <a:gridCol w="8071679"/>
               </a:tblGrid>
               <a:tr h="439420">
                 <a:tc>
                   <a:txBody>
-                    <a:bodyPr/>
+                    <a:bodyPr wrap="square"/>
                     <a:lstStyle/>
                     <a:p>
                       <a:pPr algn="l">
@@ -7078,7 +6480,7 @@
                 </a:tc>
                 <a:tc>
                   <a:txBody>
-                    <a:bodyPr/>
+                    <a:bodyPr wrap="square"/>
                     <a:lstStyle/>
                     <a:p>
                       <a:pPr algn="l">
@@ -7110,16 +6512,11 @@
                     </a:solidFill>
                   </a:tcPr>
                 </a:tc>
-                <a:extLst>
-                  <a:ext uri="{0D108BD9-81ED-4DB2-BD59-A6C34878D82A}">
-                    <a16:rowId xmlns:a16="http://schemas.microsoft.com/office/drawing/2014/main" val="10000"/>
-                  </a:ext>
-                </a:extLst>
               </a:tr>
               <a:tr h="439420">
                 <a:tc>
                   <a:txBody>
-                    <a:bodyPr/>
+                    <a:bodyPr wrap="square"/>
                     <a:lstStyle/>
                     <a:p>
                       <a:pPr algn="l">
@@ -7153,7 +6550,7 @@
                 </a:tc>
                 <a:tc>
                   <a:txBody>
-                    <a:bodyPr/>
+                    <a:bodyPr wrap="square"/>
                     <a:lstStyle/>
                     <a:p>
                       <a:pPr algn="l">
@@ -7185,16 +6582,11 @@
                     </a:solidFill>
                   </a:tcPr>
                 </a:tc>
-                <a:extLst>
-                  <a:ext uri="{0D108BD9-81ED-4DB2-BD59-A6C34878D82A}">
-                    <a16:rowId xmlns:a16="http://schemas.microsoft.com/office/drawing/2014/main" val="10001"/>
-                  </a:ext>
-                </a:extLst>
               </a:tr>
               <a:tr h="439420">
                 <a:tc>
                   <a:txBody>
-                    <a:bodyPr/>
+                    <a:bodyPr wrap="square"/>
                     <a:lstStyle/>
                     <a:p>
                       <a:pPr algn="l">
@@ -7228,7 +6620,7 @@
                 </a:tc>
                 <a:tc>
                   <a:txBody>
-                    <a:bodyPr/>
+                    <a:bodyPr wrap="square"/>
                     <a:lstStyle/>
                     <a:p>
                       <a:pPr algn="l">
@@ -7260,16 +6652,11 @@
                     </a:solidFill>
                   </a:tcPr>
                 </a:tc>
-                <a:extLst>
-                  <a:ext uri="{0D108BD9-81ED-4DB2-BD59-A6C34878D82A}">
-                    <a16:rowId xmlns:a16="http://schemas.microsoft.com/office/drawing/2014/main" val="10002"/>
-                  </a:ext>
-                </a:extLst>
               </a:tr>
               <a:tr h="439420">
                 <a:tc>
                   <a:txBody>
-                    <a:bodyPr/>
+                    <a:bodyPr wrap="square"/>
                     <a:lstStyle/>
                     <a:p>
                       <a:pPr algn="l">
@@ -7303,7 +6690,7 @@
                 </a:tc>
                 <a:tc>
                   <a:txBody>
-                    <a:bodyPr/>
+                    <a:bodyPr wrap="square"/>
                     <a:lstStyle/>
                     <a:p>
                       <a:pPr algn="l">
@@ -7335,16 +6722,11 @@
                     </a:solidFill>
                   </a:tcPr>
                 </a:tc>
-                <a:extLst>
-                  <a:ext uri="{0D108BD9-81ED-4DB2-BD59-A6C34878D82A}">
-                    <a16:rowId xmlns:a16="http://schemas.microsoft.com/office/drawing/2014/main" val="10003"/>
-                  </a:ext>
-                </a:extLst>
               </a:tr>
               <a:tr h="439420">
                 <a:tc>
                   <a:txBody>
-                    <a:bodyPr/>
+                    <a:bodyPr wrap="square"/>
                     <a:lstStyle/>
                     <a:p>
                       <a:pPr algn="l">
@@ -7378,7 +6760,7 @@
                 </a:tc>
                 <a:tc>
                   <a:txBody>
-                    <a:bodyPr/>
+                    <a:bodyPr wrap="square"/>
                     <a:lstStyle/>
                     <a:p>
                       <a:pPr algn="l">
@@ -7410,16 +6792,11 @@
                     </a:solidFill>
                   </a:tcPr>
                 </a:tc>
-                <a:extLst>
-                  <a:ext uri="{0D108BD9-81ED-4DB2-BD59-A6C34878D82A}">
-                    <a16:rowId xmlns:a16="http://schemas.microsoft.com/office/drawing/2014/main" val="10004"/>
-                  </a:ext>
-                </a:extLst>
               </a:tr>
               <a:tr h="439420">
                 <a:tc>
                   <a:txBody>
-                    <a:bodyPr/>
+                    <a:bodyPr wrap="square"/>
                     <a:lstStyle/>
                     <a:p>
                       <a:pPr algn="l">
@@ -7453,7 +6830,7 @@
                 </a:tc>
                 <a:tc>
                   <a:txBody>
-                    <a:bodyPr/>
+                    <a:bodyPr wrap="square"/>
                     <a:lstStyle/>
                     <a:p>
                       <a:pPr algn="l">
@@ -7485,11 +6862,6 @@
                     </a:solidFill>
                   </a:tcPr>
                 </a:tc>
-                <a:extLst>
-                  <a:ext uri="{0D108BD9-81ED-4DB2-BD59-A6C34878D82A}">
-                    <a16:rowId xmlns:a16="http://schemas.microsoft.com/office/drawing/2014/main" val="10005"/>
-                  </a:ext>
-                </a:extLst>
               </a:tr>
             </a:tbl>
           </a:graphicData>
@@ -7512,7 +6884,7 @@
           <a:noFill/>
         </p:spPr>
         <p:txBody>
-          <a:bodyPr wrap="square" lIns="0" tIns="0" rIns="0" bIns="0">
+          <a:bodyPr wrap="square" lIns="0" rIns="0" tIns="0" bIns="0">
             <a:noAutofit/>
           </a:bodyPr>
           <a:lstStyle/>
@@ -7555,7 +6927,7 @@
           <a:noFill/>
         </p:spPr>
         <p:txBody>
-          <a:bodyPr wrap="square" lIns="0" tIns="0" rIns="0" bIns="0">
+          <a:bodyPr wrap="square" lIns="0" rIns="0" tIns="0" bIns="0">
             <a:noAutofit/>
           </a:bodyPr>
           <a:lstStyle/>
@@ -7590,7 +6962,7 @@
 </file>
 
 <file path=ppt/slides/slide16.xml><?xml version="1.0" encoding="utf-8"?>
-<p:sld xmlns:a="http://schemas.openxmlformats.org/drawingml/2006/main" xmlns:r="http://schemas.openxmlformats.org/officeDocument/2006/relationships" xmlns:p="http://schemas.openxmlformats.org/presentationml/2006/main">
+<p:sld xmlns:a="http://schemas.openxmlformats.org/drawingml/2006/main" xmlns:p="http://schemas.openxmlformats.org/presentationml/2006/main" xmlns:r="http://schemas.openxmlformats.org/officeDocument/2006/relationships">
   <p:cSld>
     <p:spTree>
       <p:nvGrpSpPr>
@@ -7598,14 +6970,7 @@
         <p:cNvGrpSpPr/>
         <p:nvPr/>
       </p:nvGrpSpPr>
-      <p:grpSpPr>
-        <a:xfrm>
-          <a:off x="0" y="0"/>
-          <a:ext cx="0" cy="0"/>
-          <a:chOff x="0" y="0"/>
-          <a:chExt cx="0" cy="0"/>
-        </a:xfrm>
-      </p:grpSpPr>
+      <p:grpSpPr/>
       <p:sp>
         <p:nvSpPr>
           <p:cNvPr id="2" name="Rectangle 1"/>
@@ -7647,7 +7012,6 @@
           <a:lstStyle/>
           <a:p>
             <a:pPr algn="ctr"/>
-            <a:endParaRPr/>
           </a:p>
         </p:txBody>
       </p:sp>
@@ -7692,7 +7056,6 @@
           <a:lstStyle/>
           <a:p>
             <a:pPr algn="ctr"/>
-            <a:endParaRPr/>
           </a:p>
         </p:txBody>
       </p:sp>
@@ -7713,7 +7076,7 @@
           <a:noFill/>
         </p:spPr>
         <p:txBody>
-          <a:bodyPr wrap="square" lIns="0" tIns="0" rIns="0" bIns="0">
+          <a:bodyPr wrap="square" lIns="0" rIns="0" tIns="0" bIns="0">
             <a:noAutofit/>
           </a:bodyPr>
           <a:lstStyle/>
@@ -7768,7 +7131,7 @@
 </file>
 
 <file path=ppt/slides/slide17.xml><?xml version="1.0" encoding="utf-8"?>
-<p:sld xmlns:a="http://schemas.openxmlformats.org/drawingml/2006/main" xmlns:r="http://schemas.openxmlformats.org/officeDocument/2006/relationships" xmlns:p="http://schemas.openxmlformats.org/presentationml/2006/main">
+<p:sld xmlns:a="http://schemas.openxmlformats.org/drawingml/2006/main" xmlns:p="http://schemas.openxmlformats.org/presentationml/2006/main" xmlns:r="http://schemas.openxmlformats.org/officeDocument/2006/relationships">
   <p:cSld>
     <p:spTree>
       <p:nvGrpSpPr>
@@ -7776,14 +7139,7 @@
         <p:cNvGrpSpPr/>
         <p:nvPr/>
       </p:nvGrpSpPr>
-      <p:grpSpPr>
-        <a:xfrm>
-          <a:off x="0" y="0"/>
-          <a:ext cx="0" cy="0"/>
-          <a:chOff x="0" y="0"/>
-          <a:chExt cx="0" cy="0"/>
-        </a:xfrm>
-      </p:grpSpPr>
+      <p:grpSpPr/>
       <p:sp>
         <p:nvSpPr>
           <p:cNvPr id="2" name="TextBox 1"/>
@@ -7801,7 +7157,7 @@
           <a:noFill/>
         </p:spPr>
         <p:txBody>
-          <a:bodyPr wrap="square" lIns="0" tIns="0" rIns="0" bIns="0">
+          <a:bodyPr wrap="square" lIns="0" rIns="0" tIns="0" bIns="0">
             <a:noAutofit/>
           </a:bodyPr>
           <a:lstStyle/>
@@ -7868,7 +7224,6 @@
           <a:lstStyle/>
           <a:p>
             <a:pPr algn="ctr"/>
-            <a:endParaRPr/>
           </a:p>
         </p:txBody>
       </p:sp>
@@ -7915,7 +7270,6 @@
           <a:lstStyle/>
           <a:p>
             <a:pPr algn="ctr"/>
-            <a:endParaRPr/>
           </a:p>
         </p:txBody>
       </p:sp>
@@ -7936,7 +7290,7 @@
           <a:noFill/>
         </p:spPr>
         <p:txBody>
-          <a:bodyPr wrap="square" lIns="0" tIns="0" rIns="0" bIns="0">
+          <a:bodyPr wrap="square" lIns="0" rIns="0" tIns="0" bIns="0">
             <a:noAutofit/>
           </a:bodyPr>
           <a:lstStyle/>
@@ -8166,7 +7520,7 @@
           <a:noFill/>
         </p:spPr>
         <p:txBody>
-          <a:bodyPr wrap="square" lIns="0" tIns="0" rIns="0" bIns="0">
+          <a:bodyPr wrap="square" lIns="0" rIns="0" tIns="0" bIns="0">
             <a:noAutofit/>
           </a:bodyPr>
           <a:lstStyle/>
@@ -8209,7 +7563,7 @@
           <a:noFill/>
         </p:spPr>
         <p:txBody>
-          <a:bodyPr wrap="square" lIns="0" tIns="0" rIns="0" bIns="0">
+          <a:bodyPr wrap="square" lIns="0" rIns="0" tIns="0" bIns="0">
             <a:noAutofit/>
           </a:bodyPr>
           <a:lstStyle/>
@@ -8252,7 +7606,7 @@
           <a:noFill/>
         </p:spPr>
         <p:txBody>
-          <a:bodyPr wrap="square" lIns="0" tIns="0" rIns="0" bIns="0">
+          <a:bodyPr wrap="square" lIns="0" rIns="0" tIns="0" bIns="0">
             <a:noAutofit/>
           </a:bodyPr>
           <a:lstStyle/>
@@ -8287,7 +7641,7 @@
 </file>
 
 <file path=ppt/slides/slide18.xml><?xml version="1.0" encoding="utf-8"?>
-<p:sld xmlns:a="http://schemas.openxmlformats.org/drawingml/2006/main" xmlns:r="http://schemas.openxmlformats.org/officeDocument/2006/relationships" xmlns:p="http://schemas.openxmlformats.org/presentationml/2006/main">
+<p:sld xmlns:a="http://schemas.openxmlformats.org/drawingml/2006/main" xmlns:p="http://schemas.openxmlformats.org/presentationml/2006/main" xmlns:r="http://schemas.openxmlformats.org/officeDocument/2006/relationships">
   <p:cSld>
     <p:spTree>
       <p:nvGrpSpPr>
@@ -8295,14 +7649,7 @@
         <p:cNvGrpSpPr/>
         <p:nvPr/>
       </p:nvGrpSpPr>
-      <p:grpSpPr>
-        <a:xfrm>
-          <a:off x="0" y="0"/>
-          <a:ext cx="0" cy="0"/>
-          <a:chOff x="0" y="0"/>
-          <a:chExt cx="0" cy="0"/>
-        </a:xfrm>
-      </p:grpSpPr>
+      <p:grpSpPr/>
       <p:sp>
         <p:nvSpPr>
           <p:cNvPr id="2" name="TextBox 1"/>
@@ -8320,7 +7667,7 @@
           <a:noFill/>
         </p:spPr>
         <p:txBody>
-          <a:bodyPr wrap="square" lIns="0" tIns="0" rIns="0" bIns="0">
+          <a:bodyPr wrap="square" lIns="0" rIns="0" tIns="0" bIns="0">
             <a:noAutofit/>
           </a:bodyPr>
           <a:lstStyle/>
@@ -8387,7 +7734,6 @@
           <a:lstStyle/>
           <a:p>
             <a:pPr algn="ctr"/>
-            <a:endParaRPr/>
           </a:p>
         </p:txBody>
       </p:sp>
@@ -8408,7 +7754,7 @@
           <a:noFill/>
         </p:spPr>
         <p:txBody>
-          <a:bodyPr wrap="square" lIns="0" tIns="0" rIns="0" bIns="0">
+          <a:bodyPr wrap="square" lIns="0" rIns="0" tIns="0" bIns="0">
             <a:noAutofit/>
           </a:bodyPr>
           <a:lstStyle/>
@@ -8425,7 +7771,7 @@
               </a:spcAft>
             </a:pPr>
             <a:r>
-              <a:rPr sz="2000" b="0" i="0" dirty="0">
+              <a:rPr sz="2000" b="0" i="0">
                 <a:solidFill>
                   <a:srgbClr val="242A33"/>
                 </a:solidFill>
@@ -8435,7 +7781,7 @@
               <a:t>•  </a:t>
             </a:r>
             <a:r>
-              <a:rPr sz="2000" b="1" i="0" dirty="0" err="1">
+              <a:rPr sz="2000" b="1" i="0">
                 <a:solidFill>
                   <a:srgbClr val="12395B"/>
                 </a:solidFill>
@@ -8445,85 +7791,18 @@
               <a:t>调试器</a:t>
             </a:r>
             <a:r>
-              <a:rPr sz="2000" b="0" i="0" dirty="0" err="1">
+              <a:rPr sz="2000" b="0" i="0">
                 <a:solidFill>
                   <a:srgbClr val="242A33"/>
                 </a:solidFill>
                 <a:latin typeface="Segoe UI"/>
                 <a:ea typeface="微软雅黑"/>
               </a:rPr>
-              <a:t>：行号左侧打断点</a:t>
-            </a:r>
-            <a:r>
-              <a:rPr sz="2000" b="0" i="0" dirty="0">
-                <a:solidFill>
-                  <a:srgbClr val="242A33"/>
-                </a:solidFill>
-                <a:latin typeface="Segoe UI"/>
-                <a:ea typeface="微软雅黑"/>
-              </a:rPr>
-              <a:t> → Debug → </a:t>
-            </a:r>
-            <a:r>
-              <a:rPr sz="2000" b="0" i="0" dirty="0" err="1">
-                <a:solidFill>
-                  <a:srgbClr val="242A33"/>
-                </a:solidFill>
-                <a:latin typeface="Segoe UI"/>
-                <a:ea typeface="微软雅黑"/>
-              </a:rPr>
-              <a:t>单步</a:t>
-            </a:r>
-            <a:r>
-              <a:rPr sz="2000" b="0" i="0" dirty="0">
-                <a:solidFill>
-                  <a:srgbClr val="242A33"/>
-                </a:solidFill>
-                <a:latin typeface="Segoe UI"/>
-                <a:ea typeface="微软雅黑"/>
-              </a:rPr>
-              <a:t> F8 / </a:t>
-            </a:r>
-            <a:r>
-              <a:rPr sz="2000" b="0" i="0" dirty="0" err="1">
-                <a:solidFill>
-                  <a:srgbClr val="242A33"/>
-                </a:solidFill>
-                <a:latin typeface="Segoe UI"/>
-                <a:ea typeface="微软雅黑"/>
-              </a:rPr>
-              <a:t>步入</a:t>
-            </a:r>
-            <a:r>
-              <a:rPr sz="2000" b="0" i="0" dirty="0">
-                <a:solidFill>
-                  <a:srgbClr val="242A33"/>
-                </a:solidFill>
-                <a:latin typeface="Segoe UI"/>
-                <a:ea typeface="微软雅黑"/>
-              </a:rPr>
-              <a:t> F7 / </a:t>
-            </a:r>
-            <a:r>
-              <a:rPr sz="2000" b="0" i="0" dirty="0" err="1">
-                <a:solidFill>
-                  <a:srgbClr val="242A33"/>
-                </a:solidFill>
-                <a:latin typeface="Segoe UI"/>
-                <a:ea typeface="微软雅黑"/>
-              </a:rPr>
-              <a:t>看变量</a:t>
-            </a:r>
-            <a:endParaRPr sz="2000" b="0" i="0" dirty="0">
-              <a:solidFill>
-                <a:srgbClr val="242A33"/>
-              </a:solidFill>
-              <a:latin typeface="Segoe UI"/>
-              <a:ea typeface="微软雅黑"/>
-            </a:endParaRPr>
-          </a:p>
-          <a:p>
-            <a:pPr lvl="1" algn="l">
+              <a:t>：行号左侧打断点 → Debug → 单步 F8 / 步入 F7 / 看变量</a:t>
+            </a:r>
+          </a:p>
+          <a:p>
+            <a:pPr algn="l" lvl="1">
               <a:lnSpc>
                 <a:spcPct val="130000"/>
               </a:lnSpc>
@@ -8535,84 +7814,50 @@
               </a:spcAft>
             </a:pPr>
             <a:r>
-              <a:rPr sz="1639" b="0" i="0" dirty="0">
+              <a:rPr sz="1639" b="0" i="0">
                 <a:solidFill>
                   <a:srgbClr val="6B7582"/>
                 </a:solidFill>
                 <a:latin typeface="Segoe UI"/>
                 <a:ea typeface="微软雅黑"/>
               </a:rPr>
-              <a:t>·  </a:t>
-            </a:r>
-            <a:r>
-              <a:rPr sz="1639" b="0" i="0" dirty="0" err="1">
+              <a:t>·  不会用调试器就只能靠 </a:t>
+            </a:r>
+            <a:r>
+              <a:rPr sz="1541" b="0" i="0">
+                <a:solidFill>
+                  <a:srgbClr val="6B7582"/>
+                </a:solidFill>
+                <a:latin typeface="Consolas"/>
+                <a:ea typeface="Consolas"/>
+              </a:rPr>
+              <a:t>print</a:t>
+            </a:r>
+            <a:r>
+              <a:rPr sz="1639" b="0" i="0">
                 <a:solidFill>
                   <a:srgbClr val="6B7582"/>
                 </a:solidFill>
                 <a:latin typeface="Segoe UI"/>
                 <a:ea typeface="微软雅黑"/>
               </a:rPr>
-              <a:t>不会用调试器就只能靠</a:t>
-            </a:r>
-            <a:r>
-              <a:rPr sz="1639" b="0" i="0" dirty="0">
-                <a:solidFill>
-                  <a:srgbClr val="6B7582"/>
-                </a:solidFill>
-                <a:latin typeface="Segoe UI"/>
-                <a:ea typeface="微软雅黑"/>
-              </a:rPr>
-              <a:t> </a:t>
-            </a:r>
-            <a:r>
-              <a:rPr sz="1541" b="0" i="0" dirty="0">
-                <a:solidFill>
-                  <a:srgbClr val="6B7582"/>
-                </a:solidFill>
-                <a:latin typeface="Consolas"/>
-                <a:ea typeface="Consolas"/>
-              </a:rPr>
-              <a:t>print</a:t>
-            </a:r>
-            <a:r>
-              <a:rPr sz="1639" b="0" i="0" dirty="0">
-                <a:solidFill>
-                  <a:srgbClr val="6B7582"/>
-                </a:solidFill>
-                <a:latin typeface="Segoe UI"/>
-                <a:ea typeface="微软雅黑"/>
-              </a:rPr>
-              <a:t> </a:t>
-            </a:r>
-            <a:r>
-              <a:rPr sz="1639" b="0" i="0" dirty="0" err="1">
-                <a:solidFill>
-                  <a:srgbClr val="6B7582"/>
-                </a:solidFill>
-                <a:latin typeface="Segoe UI"/>
-                <a:ea typeface="微软雅黑"/>
-              </a:rPr>
-              <a:t>猜，效率差一个数量级</a:t>
-            </a:r>
-            <a:endParaRPr sz="1639" b="0" i="0" dirty="0">
-              <a:solidFill>
-                <a:srgbClr val="6B7582"/>
-              </a:solidFill>
-              <a:latin typeface="Segoe UI"/>
-              <a:ea typeface="微软雅黑"/>
-            </a:endParaRPr>
-          </a:p>
-          <a:p>
-            <a:pPr>
+              <a:t> 猜，效率差一个数量级</a:t>
+            </a:r>
+          </a:p>
+          <a:p>
+            <a:pPr algn="l">
               <a:lnSpc>
                 <a:spcPct val="132000"/>
               </a:lnSpc>
+              <a:spcBef>
+                <a:spcPts val="0"/>
+              </a:spcBef>
               <a:spcAft>
                 <a:spcPts val="1240"/>
               </a:spcAft>
             </a:pPr>
             <a:r>
-              <a:rPr sz="2000" b="0" i="0" dirty="0">
+              <a:rPr sz="2000" b="0" i="0">
                 <a:solidFill>
                   <a:srgbClr val="242A33"/>
                 </a:solidFill>
@@ -8622,279 +7867,91 @@
               <a:t>•  </a:t>
             </a:r>
             <a:r>
-              <a:rPr lang="en-CN" sz="2000" b="1" dirty="0">
+              <a:rPr sz="2000" b="1" i="0">
                 <a:solidFill>
                   <a:srgbClr val="12395B"/>
                 </a:solidFill>
                 <a:latin typeface="Segoe UI"/>
                 <a:ea typeface="微软雅黑"/>
               </a:rPr>
-              <a:t>直接</a:t>
-            </a:r>
-            <a:r>
-              <a:rPr sz="2000" b="1" i="0" dirty="0" err="1">
-                <a:solidFill>
-                  <a:srgbClr val="12395B"/>
+              <a:t>直接输入</a:t>
+            </a:r>
+            <a:r>
+              <a:rPr sz="2000" b="0" i="0">
+                <a:solidFill>
+                  <a:srgbClr val="242A33"/>
                 </a:solidFill>
                 <a:latin typeface="Segoe UI"/>
                 <a:ea typeface="微软雅黑"/>
               </a:rPr>
-              <a:t>输入</a:t>
-            </a:r>
-            <a:r>
-              <a:rPr sz="2000" b="0" i="0" dirty="0">
-                <a:solidFill>
-                  <a:srgbClr val="242A33"/>
+              <a:t>：右上角选择 Current File，点击运行 ▶；程序执行到 input() 时，在下方 Run 窗口直接输入数据并按回车</a:t>
+            </a:r>
+          </a:p>
+          <a:p>
+            <a:pPr algn="l" lvl="1">
+              <a:lnSpc>
+                <a:spcPct val="130000"/>
+              </a:lnSpc>
+              <a:spcBef>
+                <a:spcPts val="0"/>
+              </a:spcBef>
+              <a:spcAft>
+                <a:spcPts val="892"/>
+              </a:spcAft>
+            </a:pPr>
+            <a:r>
+              <a:rPr sz="1639" b="0" i="0">
+                <a:solidFill>
+                  <a:srgbClr val="6B7582"/>
                 </a:solidFill>
                 <a:latin typeface="Segoe UI"/>
                 <a:ea typeface="微软雅黑"/>
               </a:rPr>
-              <a:t>：</a:t>
-            </a:r>
-            <a:r>
-              <a:rPr lang="zh-CN" altLang="en-US" sz="2000" dirty="0">
-                <a:solidFill>
-                  <a:srgbClr val="242A33"/>
-                </a:solidFill>
-                <a:latin typeface="Segoe UI"/>
-                <a:ea typeface="微软雅黑"/>
-              </a:rPr>
-              <a:t> 右上角选择 </a:t>
-            </a:r>
-            <a:r>
-              <a:rPr lang="en-US" sz="2000" dirty="0">
-                <a:solidFill>
-                  <a:srgbClr val="242A33"/>
-                </a:solidFill>
-                <a:latin typeface="Segoe UI"/>
-                <a:ea typeface="微软雅黑"/>
-              </a:rPr>
-              <a:t>Current File，</a:t>
-            </a:r>
-            <a:r>
-              <a:rPr lang="zh-CN" altLang="en-US" sz="2000" dirty="0">
-                <a:solidFill>
-                  <a:srgbClr val="242A33"/>
-                </a:solidFill>
-                <a:latin typeface="Segoe UI"/>
-                <a:ea typeface="微软雅黑"/>
-              </a:rPr>
-              <a:t>点击运行 ▶；程序执行到 </a:t>
-            </a:r>
-            <a:r>
-              <a:rPr lang="en-US" sz="2000" dirty="0">
-                <a:solidFill>
-                  <a:srgbClr val="242A33"/>
-                </a:solidFill>
-                <a:latin typeface="Segoe UI"/>
-                <a:ea typeface="微软雅黑"/>
-              </a:rPr>
-              <a:t>input() </a:t>
-            </a:r>
-            <a:r>
-              <a:rPr lang="zh-CN" altLang="en-US" sz="2000" dirty="0">
-                <a:solidFill>
-                  <a:srgbClr val="242A33"/>
-                </a:solidFill>
-                <a:latin typeface="Segoe UI"/>
-                <a:ea typeface="微软雅黑"/>
-              </a:rPr>
-              <a:t>时，在下方 </a:t>
-            </a:r>
-            <a:r>
-              <a:rPr lang="en-US" sz="2000" dirty="0">
-                <a:solidFill>
-                  <a:srgbClr val="242A33"/>
-                </a:solidFill>
-                <a:latin typeface="Segoe UI"/>
-                <a:ea typeface="微软雅黑"/>
-              </a:rPr>
-              <a:t>Run </a:t>
-            </a:r>
-            <a:r>
-              <a:rPr lang="zh-CN" altLang="en-US" sz="2000" dirty="0">
-                <a:solidFill>
-                  <a:srgbClr val="242A33"/>
-                </a:solidFill>
-                <a:latin typeface="Segoe UI"/>
-                <a:ea typeface="微软雅黑"/>
-              </a:rPr>
-              <a:t>窗口直接输入数据并</a:t>
-            </a:r>
-            <a:r>
-              <a:rPr lang="zh-CN" altLang="en-US" sz="2000">
-                <a:solidFill>
-                  <a:srgbClr val="242A33"/>
-                </a:solidFill>
-                <a:latin typeface="Segoe UI"/>
-                <a:ea typeface="微软雅黑"/>
-              </a:rPr>
-              <a:t>按回车</a:t>
-            </a:r>
-            <a:endParaRPr lang="en-US" altLang="zh-CN" sz="2000" dirty="0">
-              <a:solidFill>
-                <a:srgbClr val="242A33"/>
-              </a:solidFill>
-              <a:latin typeface="Segoe UI"/>
-              <a:ea typeface="微软雅黑"/>
-            </a:endParaRPr>
-          </a:p>
-          <a:p>
-            <a:pPr>
+              <a:t>·  适合课堂练习和临时测试，无需配置运行参数</a:t>
+            </a:r>
+          </a:p>
+          <a:p>
+            <a:pPr algn="l">
               <a:lnSpc>
                 <a:spcPct val="132000"/>
               </a:lnSpc>
+              <a:spcBef>
+                <a:spcPts val="0"/>
+              </a:spcBef>
               <a:spcAft>
                 <a:spcPts val="1240"/>
               </a:spcAft>
             </a:pPr>
             <a:r>
-              <a:rPr lang="en-US" sz="2000" b="0" i="0" dirty="0">
+              <a:rPr sz="2000" b="0" i="0">
                 <a:solidFill>
                   <a:srgbClr val="242A33"/>
                 </a:solidFill>
                 <a:latin typeface="Segoe UI"/>
                 <a:ea typeface="微软雅黑"/>
               </a:rPr>
-              <a:t>	</a:t>
-            </a:r>
-            <a:r>
-              <a:rPr sz="1639" b="0" i="0" dirty="0">
-                <a:solidFill>
-                  <a:srgbClr val="6B7582"/>
+              <a:t>•  在线可视化 </a:t>
+            </a:r>
+            <a:r>
+              <a:rPr sz="2000" b="1" i="0">
+                <a:solidFill>
+                  <a:srgbClr val="12395B"/>
                 </a:solidFill>
                 <a:latin typeface="Segoe UI"/>
                 <a:ea typeface="微软雅黑"/>
               </a:rPr>
-              <a:t>· </a:t>
-            </a:r>
-            <a:r>
-              <a:rPr lang="zh-CN" altLang="en-US" sz="1639" b="0" i="0" dirty="0">
-                <a:solidFill>
-                  <a:srgbClr val="6B7582"/>
+              <a:t>pythontutor.com</a:t>
+            </a:r>
+            <a:r>
+              <a:rPr sz="2000" b="0" i="0">
+                <a:solidFill>
+                  <a:srgbClr val="242A33"/>
                 </a:solidFill>
                 <a:latin typeface="Segoe UI"/>
                 <a:ea typeface="微软雅黑"/>
               </a:rPr>
-              <a:t> </a:t>
-            </a:r>
-            <a:r>
-              <a:rPr lang="zh-CN" altLang="en-US" sz="1639" dirty="0">
-                <a:solidFill>
-                  <a:srgbClr val="6B7582"/>
-                </a:solidFill>
-                <a:latin typeface="Segoe UI"/>
-                <a:ea typeface="微软雅黑"/>
-              </a:rPr>
-              <a:t>适合课堂练习和临时测试，无需配置运行参数 </a:t>
-            </a:r>
-            <a:endParaRPr sz="1639" b="0" i="0" dirty="0">
-              <a:solidFill>
-                <a:srgbClr val="6B7582"/>
-              </a:solidFill>
-              <a:latin typeface="Segoe UI"/>
-              <a:ea typeface="微软雅黑"/>
-            </a:endParaRPr>
-          </a:p>
-          <a:p>
-            <a:pPr algn="l">
-              <a:lnSpc>
-                <a:spcPct val="132000"/>
-              </a:lnSpc>
-              <a:spcBef>
-                <a:spcPts val="0"/>
-              </a:spcBef>
-              <a:spcAft>
-                <a:spcPts val="1240"/>
-              </a:spcAft>
-            </a:pPr>
-            <a:r>
-              <a:rPr sz="2000" b="0" i="0" dirty="0">
-                <a:solidFill>
-                  <a:srgbClr val="242A33"/>
-                </a:solidFill>
-                <a:latin typeface="Segoe UI"/>
-                <a:ea typeface="微软雅黑"/>
-              </a:rPr>
-              <a:t>•  </a:t>
-            </a:r>
-            <a:r>
-              <a:rPr sz="2000" b="0" i="0" dirty="0" err="1">
-                <a:solidFill>
-                  <a:srgbClr val="242A33"/>
-                </a:solidFill>
-                <a:latin typeface="Segoe UI"/>
-                <a:ea typeface="微软雅黑"/>
-              </a:rPr>
-              <a:t>在线可视化</a:t>
-            </a:r>
-            <a:r>
-              <a:rPr sz="2000" b="0" i="0" dirty="0">
-                <a:solidFill>
-                  <a:srgbClr val="242A33"/>
-                </a:solidFill>
-                <a:latin typeface="Segoe UI"/>
-                <a:ea typeface="微软雅黑"/>
-              </a:rPr>
-              <a:t> </a:t>
-            </a:r>
-            <a:r>
-              <a:rPr sz="2000" b="1" i="0" dirty="0" err="1">
-                <a:solidFill>
-                  <a:srgbClr val="12395B"/>
-                </a:solidFill>
-                <a:latin typeface="Segoe UI"/>
-                <a:ea typeface="微软雅黑"/>
-              </a:rPr>
-              <a:t>pythontutor.com</a:t>
-            </a:r>
-            <a:r>
-              <a:rPr sz="2000" b="0" i="0" dirty="0">
-                <a:solidFill>
-                  <a:srgbClr val="242A33"/>
-                </a:solidFill>
-                <a:latin typeface="Segoe UI"/>
-                <a:ea typeface="微软雅黑"/>
-              </a:rPr>
-              <a:t> —— </a:t>
-            </a:r>
-            <a:r>
-              <a:rPr sz="2000" b="0" i="0" dirty="0" err="1">
-                <a:solidFill>
-                  <a:srgbClr val="242A33"/>
-                </a:solidFill>
-                <a:latin typeface="Segoe UI"/>
-                <a:ea typeface="微软雅黑"/>
-              </a:rPr>
-              <a:t>第</a:t>
-            </a:r>
-            <a:r>
-              <a:rPr sz="2000" b="0" i="0" dirty="0">
-                <a:solidFill>
-                  <a:srgbClr val="242A33"/>
-                </a:solidFill>
-                <a:latin typeface="Segoe UI"/>
-                <a:ea typeface="微软雅黑"/>
-              </a:rPr>
-              <a:t> 8 </a:t>
-            </a:r>
-            <a:r>
-              <a:rPr sz="2000" b="0" i="0" dirty="0" err="1">
-                <a:solidFill>
-                  <a:srgbClr val="242A33"/>
-                </a:solidFill>
-                <a:latin typeface="Segoe UI"/>
-                <a:ea typeface="微软雅黑"/>
-              </a:rPr>
-              <a:t>周讲递归时理解栈帧最快的工具</a:t>
-            </a:r>
-            <a:endParaRPr sz="2000" b="0" i="0" dirty="0">
-              <a:solidFill>
-                <a:srgbClr val="242A33"/>
-              </a:solidFill>
-              <a:latin typeface="Segoe UI"/>
-              <a:ea typeface="微软雅黑"/>
-            </a:endParaRPr>
+              <a:t> —— 第 8 周讲递归时理解栈帧最快的工具</a:t>
+            </a:r>
           </a:p>
         </p:txBody>
       </p:sp>
@@ -8915,7 +7972,7 @@
           <a:noFill/>
         </p:spPr>
         <p:txBody>
-          <a:bodyPr wrap="square" lIns="0" tIns="0" rIns="0" bIns="0">
+          <a:bodyPr wrap="square" lIns="0" rIns="0" tIns="0" bIns="0">
             <a:noAutofit/>
           </a:bodyPr>
           <a:lstStyle/>
@@ -8958,7 +8015,7 @@
           <a:noFill/>
         </p:spPr>
         <p:txBody>
-          <a:bodyPr wrap="square" lIns="0" tIns="0" rIns="0" bIns="0">
+          <a:bodyPr wrap="square" lIns="0" rIns="0" tIns="0" bIns="0">
             <a:noAutofit/>
           </a:bodyPr>
           <a:lstStyle/>
@@ -8993,7 +8050,7 @@
 </file>
 
 <file path=ppt/slides/slide19.xml><?xml version="1.0" encoding="utf-8"?>
-<p:sld xmlns:a="http://schemas.openxmlformats.org/drawingml/2006/main" xmlns:r="http://schemas.openxmlformats.org/officeDocument/2006/relationships" xmlns:p="http://schemas.openxmlformats.org/presentationml/2006/main">
+<p:sld xmlns:a="http://schemas.openxmlformats.org/drawingml/2006/main" xmlns:p="http://schemas.openxmlformats.org/presentationml/2006/main" xmlns:r="http://schemas.openxmlformats.org/officeDocument/2006/relationships">
   <p:cSld>
     <p:spTree>
       <p:nvGrpSpPr>
@@ -9001,14 +8058,7 @@
         <p:cNvGrpSpPr/>
         <p:nvPr/>
       </p:nvGrpSpPr>
-      <p:grpSpPr>
-        <a:xfrm>
-          <a:off x="0" y="0"/>
-          <a:ext cx="0" cy="0"/>
-          <a:chOff x="0" y="0"/>
-          <a:chExt cx="0" cy="0"/>
-        </a:xfrm>
-      </p:grpSpPr>
+      <p:grpSpPr/>
       <p:sp>
         <p:nvSpPr>
           <p:cNvPr id="2" name="Rectangle 1"/>
@@ -9050,7 +8100,6 @@
           <a:lstStyle/>
           <a:p>
             <a:pPr algn="ctr"/>
-            <a:endParaRPr/>
           </a:p>
         </p:txBody>
       </p:sp>
@@ -9095,7 +8144,6 @@
           <a:lstStyle/>
           <a:p>
             <a:pPr algn="ctr"/>
-            <a:endParaRPr/>
           </a:p>
         </p:txBody>
       </p:sp>
@@ -9116,7 +8164,7 @@
           <a:noFill/>
         </p:spPr>
         <p:txBody>
-          <a:bodyPr wrap="square" lIns="0" tIns="0" rIns="0" bIns="0">
+          <a:bodyPr wrap="square" lIns="0" rIns="0" tIns="0" bIns="0">
             <a:noAutofit/>
           </a:bodyPr>
           <a:lstStyle/>
@@ -9171,7 +8219,7 @@
 </file>
 
 <file path=ppt/slides/slide2.xml><?xml version="1.0" encoding="utf-8"?>
-<p:sld xmlns:a="http://schemas.openxmlformats.org/drawingml/2006/main" xmlns:r="http://schemas.openxmlformats.org/officeDocument/2006/relationships" xmlns:p="http://schemas.openxmlformats.org/presentationml/2006/main">
+<p:sld xmlns:a="http://schemas.openxmlformats.org/drawingml/2006/main" xmlns:p="http://schemas.openxmlformats.org/presentationml/2006/main" xmlns:r="http://schemas.openxmlformats.org/officeDocument/2006/relationships">
   <p:cSld>
     <p:spTree>
       <p:nvGrpSpPr>
@@ -9179,14 +8227,7 @@
         <p:cNvGrpSpPr/>
         <p:nvPr/>
       </p:nvGrpSpPr>
-      <p:grpSpPr>
-        <a:xfrm>
-          <a:off x="0" y="0"/>
-          <a:ext cx="0" cy="0"/>
-          <a:chOff x="0" y="0"/>
-          <a:chExt cx="0" cy="0"/>
-        </a:xfrm>
-      </p:grpSpPr>
+      <p:grpSpPr/>
       <p:sp>
         <p:nvSpPr>
           <p:cNvPr id="2" name="TextBox 1"/>
@@ -9204,7 +8245,7 @@
           <a:noFill/>
         </p:spPr>
         <p:txBody>
-          <a:bodyPr wrap="square" lIns="0" tIns="0" rIns="0" bIns="0">
+          <a:bodyPr wrap="square" lIns="0" rIns="0" tIns="0" bIns="0">
             <a:noAutofit/>
           </a:bodyPr>
           <a:lstStyle/>
@@ -9271,7 +8312,6 @@
           <a:lstStyle/>
           <a:p>
             <a:pPr algn="ctr"/>
-            <a:endParaRPr/>
           </a:p>
         </p:txBody>
       </p:sp>
@@ -9292,7 +8332,7 @@
           <a:noFill/>
         </p:spPr>
         <p:txBody>
-          <a:bodyPr wrap="square" lIns="0" tIns="0" rIns="0" bIns="0">
+          <a:bodyPr wrap="square" lIns="0" rIns="0" tIns="0" bIns="0">
             <a:noAutofit/>
           </a:bodyPr>
           <a:lstStyle/>
@@ -9444,7 +8484,7 @@
           <a:noFill/>
         </p:spPr>
         <p:txBody>
-          <a:bodyPr wrap="square" lIns="0" tIns="0" rIns="0" bIns="0">
+          <a:bodyPr wrap="square" lIns="0" rIns="0" tIns="0" bIns="0">
             <a:noAutofit/>
           </a:bodyPr>
           <a:lstStyle/>
@@ -9487,7 +8527,7 @@
           <a:noFill/>
         </p:spPr>
         <p:txBody>
-          <a:bodyPr wrap="square" lIns="0" tIns="0" rIns="0" bIns="0">
+          <a:bodyPr wrap="square" lIns="0" rIns="0" tIns="0" bIns="0">
             <a:noAutofit/>
           </a:bodyPr>
           <a:lstStyle/>
@@ -9522,7 +8562,7 @@
 </file>
 
 <file path=ppt/slides/slide20.xml><?xml version="1.0" encoding="utf-8"?>
-<p:sld xmlns:a="http://schemas.openxmlformats.org/drawingml/2006/main" xmlns:r="http://schemas.openxmlformats.org/officeDocument/2006/relationships" xmlns:p="http://schemas.openxmlformats.org/presentationml/2006/main">
+<p:sld xmlns:a="http://schemas.openxmlformats.org/drawingml/2006/main" xmlns:p="http://schemas.openxmlformats.org/presentationml/2006/main" xmlns:r="http://schemas.openxmlformats.org/officeDocument/2006/relationships">
   <p:cSld>
     <p:spTree>
       <p:nvGrpSpPr>
@@ -9530,14 +8570,7 @@
         <p:cNvGrpSpPr/>
         <p:nvPr/>
       </p:nvGrpSpPr>
-      <p:grpSpPr>
-        <a:xfrm>
-          <a:off x="0" y="0"/>
-          <a:ext cx="0" cy="0"/>
-          <a:chOff x="0" y="0"/>
-          <a:chExt cx="0" cy="0"/>
-        </a:xfrm>
-      </p:grpSpPr>
+      <p:grpSpPr/>
       <p:sp>
         <p:nvSpPr>
           <p:cNvPr id="2" name="TextBox 1"/>
@@ -9555,7 +8588,7 @@
           <a:noFill/>
         </p:spPr>
         <p:txBody>
-          <a:bodyPr wrap="square" lIns="0" tIns="0" rIns="0" bIns="0">
+          <a:bodyPr wrap="square" lIns="0" rIns="0" tIns="0" bIns="0">
             <a:noAutofit/>
           </a:bodyPr>
           <a:lstStyle/>
@@ -9622,7 +8655,6 @@
           <a:lstStyle/>
           <a:p>
             <a:pPr algn="ctr"/>
-            <a:endParaRPr/>
           </a:p>
         </p:txBody>
       </p:sp>
@@ -9669,7 +8701,6 @@
           <a:lstStyle/>
           <a:p>
             <a:pPr algn="ctr"/>
-            <a:endParaRPr/>
           </a:p>
         </p:txBody>
       </p:sp>
@@ -9690,7 +8721,7 @@
           <a:noFill/>
         </p:spPr>
         <p:txBody>
-          <a:bodyPr wrap="square" lIns="0" tIns="0" rIns="0" bIns="0">
+          <a:bodyPr wrap="square" lIns="0" rIns="0" tIns="0" bIns="0">
             <a:noAutofit/>
           </a:bodyPr>
           <a:lstStyle/>
@@ -9897,7 +8928,7 @@
           <a:noFill/>
         </p:spPr>
         <p:txBody>
-          <a:bodyPr wrap="square" lIns="0" tIns="0" rIns="0" bIns="0">
+          <a:bodyPr wrap="square" lIns="0" rIns="0" tIns="0" bIns="0">
             <a:noAutofit/>
           </a:bodyPr>
           <a:lstStyle/>
@@ -9940,7 +8971,7 @@
           <a:noFill/>
         </p:spPr>
         <p:txBody>
-          <a:bodyPr wrap="square" lIns="0" tIns="0" rIns="0" bIns="0">
+          <a:bodyPr wrap="square" lIns="0" rIns="0" tIns="0" bIns="0">
             <a:noAutofit/>
           </a:bodyPr>
           <a:lstStyle/>
@@ -9975,7 +9006,7 @@
 </file>
 
 <file path=ppt/slides/slide21.xml><?xml version="1.0" encoding="utf-8"?>
-<p:sld xmlns:a="http://schemas.openxmlformats.org/drawingml/2006/main" xmlns:r="http://schemas.openxmlformats.org/officeDocument/2006/relationships" xmlns:p="http://schemas.openxmlformats.org/presentationml/2006/main">
+<p:sld xmlns:a="http://schemas.openxmlformats.org/drawingml/2006/main" xmlns:p="http://schemas.openxmlformats.org/presentationml/2006/main" xmlns:r="http://schemas.openxmlformats.org/officeDocument/2006/relationships">
   <p:cSld>
     <p:spTree>
       <p:nvGrpSpPr>
@@ -9983,14 +9014,7 @@
         <p:cNvGrpSpPr/>
         <p:nvPr/>
       </p:nvGrpSpPr>
-      <p:grpSpPr>
-        <a:xfrm>
-          <a:off x="0" y="0"/>
-          <a:ext cx="0" cy="0"/>
-          <a:chOff x="0" y="0"/>
-          <a:chExt cx="0" cy="0"/>
-        </a:xfrm>
-      </p:grpSpPr>
+      <p:grpSpPr/>
       <p:sp>
         <p:nvSpPr>
           <p:cNvPr id="2" name="TextBox 1"/>
@@ -10008,7 +9032,7 @@
           <a:noFill/>
         </p:spPr>
         <p:txBody>
-          <a:bodyPr wrap="square" lIns="0" tIns="0" rIns="0" bIns="0">
+          <a:bodyPr wrap="square" lIns="0" rIns="0" tIns="0" bIns="0">
             <a:noAutofit/>
           </a:bodyPr>
           <a:lstStyle/>
@@ -10075,7 +9099,6 @@
           <a:lstStyle/>
           <a:p>
             <a:pPr algn="ctr"/>
-            <a:endParaRPr/>
           </a:p>
         </p:txBody>
       </p:sp>
@@ -10122,7 +9145,6 @@
           <a:lstStyle/>
           <a:p>
             <a:pPr algn="ctr"/>
-            <a:endParaRPr/>
           </a:p>
         </p:txBody>
       </p:sp>
@@ -10143,7 +9165,7 @@
           <a:noFill/>
         </p:spPr>
         <p:txBody>
-          <a:bodyPr wrap="square" lIns="0" tIns="0" rIns="0" bIns="0">
+          <a:bodyPr wrap="square" lIns="0" rIns="0" tIns="0" bIns="0">
             <a:noAutofit/>
           </a:bodyPr>
           <a:lstStyle/>
@@ -10465,7 +9487,7 @@
           <a:noFill/>
         </p:spPr>
         <p:txBody>
-          <a:bodyPr wrap="square" lIns="0" tIns="0" rIns="0" bIns="0">
+          <a:bodyPr wrap="square" lIns="0" rIns="0" tIns="0" bIns="0">
             <a:noAutofit/>
           </a:bodyPr>
           <a:lstStyle/>
@@ -10508,7 +9530,7 @@
           <a:noFill/>
         </p:spPr>
         <p:txBody>
-          <a:bodyPr wrap="square" lIns="0" tIns="0" rIns="0" bIns="0">
+          <a:bodyPr wrap="square" lIns="0" rIns="0" tIns="0" bIns="0">
             <a:noAutofit/>
           </a:bodyPr>
           <a:lstStyle/>
@@ -10551,7 +9573,7 @@
           <a:noFill/>
         </p:spPr>
         <p:txBody>
-          <a:bodyPr wrap="square" lIns="0" tIns="0" rIns="0" bIns="0">
+          <a:bodyPr wrap="square" lIns="0" rIns="0" tIns="0" bIns="0">
             <a:noAutofit/>
           </a:bodyPr>
           <a:lstStyle/>
@@ -10586,7 +9608,7 @@
 </file>
 
 <file path=ppt/slides/slide22.xml><?xml version="1.0" encoding="utf-8"?>
-<p:sld xmlns:a="http://schemas.openxmlformats.org/drawingml/2006/main" xmlns:r="http://schemas.openxmlformats.org/officeDocument/2006/relationships" xmlns:p="http://schemas.openxmlformats.org/presentationml/2006/main">
+<p:sld xmlns:a="http://schemas.openxmlformats.org/drawingml/2006/main" xmlns:p="http://schemas.openxmlformats.org/presentationml/2006/main" xmlns:r="http://schemas.openxmlformats.org/officeDocument/2006/relationships">
   <p:cSld>
     <p:spTree>
       <p:nvGrpSpPr>
@@ -10594,14 +9616,7 @@
         <p:cNvGrpSpPr/>
         <p:nvPr/>
       </p:nvGrpSpPr>
-      <p:grpSpPr>
-        <a:xfrm>
-          <a:off x="0" y="0"/>
-          <a:ext cx="0" cy="0"/>
-          <a:chOff x="0" y="0"/>
-          <a:chExt cx="0" cy="0"/>
-        </a:xfrm>
-      </p:grpSpPr>
+      <p:grpSpPr/>
       <p:sp>
         <p:nvSpPr>
           <p:cNvPr id="2" name="TextBox 1"/>
@@ -10619,7 +9634,7 @@
           <a:noFill/>
         </p:spPr>
         <p:txBody>
-          <a:bodyPr wrap="square" lIns="0" tIns="0" rIns="0" bIns="0">
+          <a:bodyPr wrap="square" lIns="0" rIns="0" tIns="0" bIns="0">
             <a:noAutofit/>
           </a:bodyPr>
           <a:lstStyle/>
@@ -10686,7 +9701,6 @@
           <a:lstStyle/>
           <a:p>
             <a:pPr algn="ctr"/>
-            <a:endParaRPr/>
           </a:p>
         </p:txBody>
       </p:sp>
@@ -10733,7 +9747,6 @@
           <a:lstStyle/>
           <a:p>
             <a:pPr algn="ctr"/>
-            <a:endParaRPr/>
           </a:p>
         </p:txBody>
       </p:sp>
@@ -10754,7 +9767,7 @@
           <a:noFill/>
         </p:spPr>
         <p:txBody>
-          <a:bodyPr wrap="square" lIns="0" tIns="0" rIns="0" bIns="0">
+          <a:bodyPr wrap="square" lIns="0" rIns="0" tIns="0" bIns="0">
             <a:noAutofit/>
           </a:bodyPr>
           <a:lstStyle/>
@@ -10915,7 +9928,7 @@
           <a:noFill/>
         </p:spPr>
         <p:txBody>
-          <a:bodyPr wrap="square" lIns="0" tIns="0" rIns="0" bIns="0">
+          <a:bodyPr wrap="square" lIns="0" rIns="0" tIns="0" bIns="0">
             <a:noAutofit/>
           </a:bodyPr>
           <a:lstStyle/>
@@ -10958,7 +9971,7 @@
           <a:noFill/>
         </p:spPr>
         <p:txBody>
-          <a:bodyPr wrap="square" lIns="0" tIns="0" rIns="0" bIns="0">
+          <a:bodyPr wrap="square" lIns="0" rIns="0" tIns="0" bIns="0">
             <a:noAutofit/>
           </a:bodyPr>
           <a:lstStyle/>
@@ -11001,7 +10014,7 @@
           <a:noFill/>
         </p:spPr>
         <p:txBody>
-          <a:bodyPr wrap="square" lIns="0" tIns="0" rIns="0" bIns="0">
+          <a:bodyPr wrap="square" lIns="0" rIns="0" tIns="0" bIns="0">
             <a:noAutofit/>
           </a:bodyPr>
           <a:lstStyle/>
@@ -11036,7 +10049,7 @@
 </file>
 
 <file path=ppt/slides/slide23.xml><?xml version="1.0" encoding="utf-8"?>
-<p:sld xmlns:a="http://schemas.openxmlformats.org/drawingml/2006/main" xmlns:r="http://schemas.openxmlformats.org/officeDocument/2006/relationships" xmlns:p="http://schemas.openxmlformats.org/presentationml/2006/main">
+<p:sld xmlns:a="http://schemas.openxmlformats.org/drawingml/2006/main" xmlns:p="http://schemas.openxmlformats.org/presentationml/2006/main" xmlns:r="http://schemas.openxmlformats.org/officeDocument/2006/relationships">
   <p:cSld>
     <p:spTree>
       <p:nvGrpSpPr>
@@ -11044,14 +10057,7 @@
         <p:cNvGrpSpPr/>
         <p:nvPr/>
       </p:nvGrpSpPr>
-      <p:grpSpPr>
-        <a:xfrm>
-          <a:off x="0" y="0"/>
-          <a:ext cx="0" cy="0"/>
-          <a:chOff x="0" y="0"/>
-          <a:chExt cx="0" cy="0"/>
-        </a:xfrm>
-      </p:grpSpPr>
+      <p:grpSpPr/>
       <p:sp>
         <p:nvSpPr>
           <p:cNvPr id="2" name="TextBox 1"/>
@@ -11069,7 +10075,7 @@
           <a:noFill/>
         </p:spPr>
         <p:txBody>
-          <a:bodyPr wrap="square" lIns="0" tIns="0" rIns="0" bIns="0">
+          <a:bodyPr wrap="square" lIns="0" rIns="0" tIns="0" bIns="0">
             <a:noAutofit/>
           </a:bodyPr>
           <a:lstStyle/>
@@ -11136,7 +10142,6 @@
           <a:lstStyle/>
           <a:p>
             <a:pPr algn="ctr"/>
-            <a:endParaRPr/>
           </a:p>
         </p:txBody>
       </p:sp>
@@ -11183,7 +10188,6 @@
           <a:lstStyle/>
           <a:p>
             <a:pPr algn="ctr"/>
-            <a:endParaRPr/>
           </a:p>
         </p:txBody>
       </p:sp>
@@ -11204,7 +10208,7 @@
           <a:noFill/>
         </p:spPr>
         <p:txBody>
-          <a:bodyPr wrap="square" lIns="0" tIns="0" rIns="0" bIns="0">
+          <a:bodyPr wrap="square" lIns="0" rIns="0" tIns="0" bIns="0">
             <a:noAutofit/>
           </a:bodyPr>
           <a:lstStyle/>
@@ -11480,7 +10484,7 @@
           <a:noFill/>
         </p:spPr>
         <p:txBody>
-          <a:bodyPr wrap="square" lIns="0" tIns="0" rIns="0" bIns="0">
+          <a:bodyPr wrap="square" lIns="0" rIns="0" tIns="0" bIns="0">
             <a:noAutofit/>
           </a:bodyPr>
           <a:lstStyle/>
@@ -11523,7 +10527,7 @@
           <a:noFill/>
         </p:spPr>
         <p:txBody>
-          <a:bodyPr wrap="square" lIns="0" tIns="0" rIns="0" bIns="0">
+          <a:bodyPr wrap="square" lIns="0" rIns="0" tIns="0" bIns="0">
             <a:noAutofit/>
           </a:bodyPr>
           <a:lstStyle/>
@@ -11566,7 +10570,7 @@
           <a:noFill/>
         </p:spPr>
         <p:txBody>
-          <a:bodyPr wrap="square" lIns="0" tIns="0" rIns="0" bIns="0">
+          <a:bodyPr wrap="square" lIns="0" rIns="0" tIns="0" bIns="0">
             <a:noAutofit/>
           </a:bodyPr>
           <a:lstStyle/>
@@ -11601,7 +10605,7 @@
 </file>
 
 <file path=ppt/slides/slide24.xml><?xml version="1.0" encoding="utf-8"?>
-<p:sld xmlns:a="http://schemas.openxmlformats.org/drawingml/2006/main" xmlns:r="http://schemas.openxmlformats.org/officeDocument/2006/relationships" xmlns:p="http://schemas.openxmlformats.org/presentationml/2006/main">
+<p:sld xmlns:a="http://schemas.openxmlformats.org/drawingml/2006/main" xmlns:p="http://schemas.openxmlformats.org/presentationml/2006/main" xmlns:r="http://schemas.openxmlformats.org/officeDocument/2006/relationships">
   <p:cSld>
     <p:spTree>
       <p:nvGrpSpPr>
@@ -11609,14 +10613,7 @@
         <p:cNvGrpSpPr/>
         <p:nvPr/>
       </p:nvGrpSpPr>
-      <p:grpSpPr>
-        <a:xfrm>
-          <a:off x="0" y="0"/>
-          <a:ext cx="0" cy="0"/>
-          <a:chOff x="0" y="0"/>
-          <a:chExt cx="0" cy="0"/>
-        </a:xfrm>
-      </p:grpSpPr>
+      <p:grpSpPr/>
       <p:sp>
         <p:nvSpPr>
           <p:cNvPr id="2" name="TextBox 1"/>
@@ -11634,7 +10631,7 @@
           <a:noFill/>
         </p:spPr>
         <p:txBody>
-          <a:bodyPr wrap="square" lIns="0" tIns="0" rIns="0" bIns="0">
+          <a:bodyPr wrap="square" lIns="0" rIns="0" tIns="0" bIns="0">
             <a:noAutofit/>
           </a:bodyPr>
           <a:lstStyle/>
@@ -11701,7 +10698,6 @@
           <a:lstStyle/>
           <a:p>
             <a:pPr algn="ctr"/>
-            <a:endParaRPr/>
           </a:p>
         </p:txBody>
       </p:sp>
@@ -11748,7 +10744,6 @@
           <a:lstStyle/>
           <a:p>
             <a:pPr algn="ctr"/>
-            <a:endParaRPr/>
           </a:p>
         </p:txBody>
       </p:sp>
@@ -11769,7 +10764,7 @@
           <a:noFill/>
         </p:spPr>
         <p:txBody>
-          <a:bodyPr wrap="square" lIns="0" tIns="0" rIns="0" bIns="0">
+          <a:bodyPr wrap="square" lIns="0" rIns="0" tIns="0" bIns="0">
             <a:noAutofit/>
           </a:bodyPr>
           <a:lstStyle/>
@@ -12206,7 +11201,7 @@
           <a:noFill/>
         </p:spPr>
         <p:txBody>
-          <a:bodyPr wrap="square" lIns="0" tIns="0" rIns="0" bIns="0">
+          <a:bodyPr wrap="square" lIns="0" rIns="0" tIns="0" bIns="0">
             <a:noAutofit/>
           </a:bodyPr>
           <a:lstStyle/>
@@ -12249,7 +11244,7 @@
           <a:noFill/>
         </p:spPr>
         <p:txBody>
-          <a:bodyPr wrap="square" lIns="0" tIns="0" rIns="0" bIns="0">
+          <a:bodyPr wrap="square" lIns="0" rIns="0" tIns="0" bIns="0">
             <a:noAutofit/>
           </a:bodyPr>
           <a:lstStyle/>
@@ -12292,7 +11287,7 @@
           <a:noFill/>
         </p:spPr>
         <p:txBody>
-          <a:bodyPr wrap="square" lIns="0" tIns="0" rIns="0" bIns="0">
+          <a:bodyPr wrap="square" lIns="0" rIns="0" tIns="0" bIns="0">
             <a:noAutofit/>
           </a:bodyPr>
           <a:lstStyle/>
@@ -12327,7 +11322,7 @@
 </file>
 
 <file path=ppt/slides/slide25.xml><?xml version="1.0" encoding="utf-8"?>
-<p:sld xmlns:a="http://schemas.openxmlformats.org/drawingml/2006/main" xmlns:r="http://schemas.openxmlformats.org/officeDocument/2006/relationships" xmlns:p="http://schemas.openxmlformats.org/presentationml/2006/main">
+<p:sld xmlns:a="http://schemas.openxmlformats.org/drawingml/2006/main" xmlns:p="http://schemas.openxmlformats.org/presentationml/2006/main" xmlns:r="http://schemas.openxmlformats.org/officeDocument/2006/relationships">
   <p:cSld>
     <p:spTree>
       <p:nvGrpSpPr>
@@ -12335,14 +11330,7 @@
         <p:cNvGrpSpPr/>
         <p:nvPr/>
       </p:nvGrpSpPr>
-      <p:grpSpPr>
-        <a:xfrm>
-          <a:off x="0" y="0"/>
-          <a:ext cx="0" cy="0"/>
-          <a:chOff x="0" y="0"/>
-          <a:chExt cx="0" cy="0"/>
-        </a:xfrm>
-      </p:grpSpPr>
+      <p:grpSpPr/>
       <p:sp>
         <p:nvSpPr>
           <p:cNvPr id="2" name="TextBox 1"/>
@@ -12360,7 +11348,7 @@
           <a:noFill/>
         </p:spPr>
         <p:txBody>
-          <a:bodyPr wrap="square" lIns="0" tIns="0" rIns="0" bIns="0">
+          <a:bodyPr wrap="square" lIns="0" rIns="0" tIns="0" bIns="0">
             <a:noAutofit/>
           </a:bodyPr>
           <a:lstStyle/>
@@ -12427,7 +11415,6 @@
           <a:lstStyle/>
           <a:p>
             <a:pPr algn="ctr"/>
-            <a:endParaRPr/>
           </a:p>
         </p:txBody>
       </p:sp>
@@ -12448,7 +11435,7 @@
           <a:noFill/>
         </p:spPr>
         <p:txBody>
-          <a:bodyPr wrap="square" lIns="0" tIns="0" rIns="0" bIns="0">
+          <a:bodyPr wrap="square" lIns="0" rIns="0" tIns="0" bIns="0">
             <a:noAutofit/>
           </a:bodyPr>
           <a:lstStyle/>
@@ -12716,7 +11703,7 @@
           <a:noFill/>
         </p:spPr>
         <p:txBody>
-          <a:bodyPr wrap="square" lIns="0" tIns="0" rIns="0" bIns="0">
+          <a:bodyPr wrap="square" lIns="0" rIns="0" tIns="0" bIns="0">
             <a:noAutofit/>
           </a:bodyPr>
           <a:lstStyle/>
@@ -12759,7 +11746,7 @@
           <a:noFill/>
         </p:spPr>
         <p:txBody>
-          <a:bodyPr wrap="square" lIns="0" tIns="0" rIns="0" bIns="0">
+          <a:bodyPr wrap="square" lIns="0" rIns="0" tIns="0" bIns="0">
             <a:noAutofit/>
           </a:bodyPr>
           <a:lstStyle/>
@@ -12794,7 +11781,7 @@
 </file>
 
 <file path=ppt/slides/slide26.xml><?xml version="1.0" encoding="utf-8"?>
-<p:sld xmlns:a="http://schemas.openxmlformats.org/drawingml/2006/main" xmlns:r="http://schemas.openxmlformats.org/officeDocument/2006/relationships" xmlns:p="http://schemas.openxmlformats.org/presentationml/2006/main">
+<p:sld xmlns:a="http://schemas.openxmlformats.org/drawingml/2006/main" xmlns:p="http://schemas.openxmlformats.org/presentationml/2006/main" xmlns:r="http://schemas.openxmlformats.org/officeDocument/2006/relationships">
   <p:cSld>
     <p:spTree>
       <p:nvGrpSpPr>
@@ -12802,14 +11789,7 @@
         <p:cNvGrpSpPr/>
         <p:nvPr/>
       </p:nvGrpSpPr>
-      <p:grpSpPr>
-        <a:xfrm>
-          <a:off x="0" y="0"/>
-          <a:ext cx="0" cy="0"/>
-          <a:chOff x="0" y="0"/>
-          <a:chExt cx="0" cy="0"/>
-        </a:xfrm>
-      </p:grpSpPr>
+      <p:grpSpPr/>
       <p:sp>
         <p:nvSpPr>
           <p:cNvPr id="2" name="TextBox 1"/>
@@ -12827,7 +11807,7 @@
           <a:noFill/>
         </p:spPr>
         <p:txBody>
-          <a:bodyPr wrap="square" lIns="0" tIns="0" rIns="0" bIns="0">
+          <a:bodyPr wrap="square" lIns="0" rIns="0" tIns="0" bIns="0">
             <a:noAutofit/>
           </a:bodyPr>
           <a:lstStyle/>
@@ -12894,7 +11874,6 @@
           <a:lstStyle/>
           <a:p>
             <a:pPr algn="ctr"/>
-            <a:endParaRPr/>
           </a:p>
         </p:txBody>
       </p:sp>
@@ -12917,39 +11896,15 @@
                 <a:tableStyleId>{5C22544A-7EE6-4342-B048-85BDC9FD1C3A}</a:tableStyleId>
               </a:tblPr>
               <a:tblGrid>
-                <a:gridCol w="1988662">
-                  <a:extLst>
-                    <a:ext uri="{9D8B030D-6E8A-4147-A177-3AD203B41FA5}">
-                      <a16:colId xmlns:a16="http://schemas.microsoft.com/office/drawing/2014/main" val="20000"/>
-                    </a:ext>
-                  </a:extLst>
-                </a:gridCol>
-                <a:gridCol w="3977325">
-                  <a:extLst>
-                    <a:ext uri="{9D8B030D-6E8A-4147-A177-3AD203B41FA5}">
-                      <a16:colId xmlns:a16="http://schemas.microsoft.com/office/drawing/2014/main" val="20001"/>
-                    </a:ext>
-                  </a:extLst>
-                </a:gridCol>
-                <a:gridCol w="1748274">
-                  <a:extLst>
-                    <a:ext uri="{9D8B030D-6E8A-4147-A177-3AD203B41FA5}">
-                      <a16:colId xmlns:a16="http://schemas.microsoft.com/office/drawing/2014/main" val="20002"/>
-                    </a:ext>
-                  </a:extLst>
-                </a:gridCol>
-                <a:gridCol w="3343575">
-                  <a:extLst>
-                    <a:ext uri="{9D8B030D-6E8A-4147-A177-3AD203B41FA5}">
-                      <a16:colId xmlns:a16="http://schemas.microsoft.com/office/drawing/2014/main" val="20003"/>
-                    </a:ext>
-                  </a:extLst>
-                </a:gridCol>
+                <a:gridCol w="1988662"/>
+                <a:gridCol w="3977325"/>
+                <a:gridCol w="1748274"/>
+                <a:gridCol w="3343575"/>
               </a:tblGrid>
               <a:tr h="439420">
                 <a:tc>
                   <a:txBody>
-                    <a:bodyPr/>
+                    <a:bodyPr wrap="square"/>
                     <a:lstStyle/>
                     <a:p>
                       <a:pPr algn="l">
@@ -12983,7 +11938,7 @@
                 </a:tc>
                 <a:tc>
                   <a:txBody>
-                    <a:bodyPr/>
+                    <a:bodyPr wrap="square"/>
                     <a:lstStyle/>
                     <a:p>
                       <a:pPr algn="l">
@@ -13017,7 +11972,7 @@
                 </a:tc>
                 <a:tc>
                   <a:txBody>
-                    <a:bodyPr/>
+                    <a:bodyPr wrap="square"/>
                     <a:lstStyle/>
                     <a:p>
                       <a:pPr algn="l">
@@ -13051,7 +12006,7 @@
                 </a:tc>
                 <a:tc>
                   <a:txBody>
-                    <a:bodyPr/>
+                    <a:bodyPr wrap="square"/>
                     <a:lstStyle/>
                     <a:p>
                       <a:pPr algn="l">
@@ -13083,16 +12038,11 @@
                     </a:solidFill>
                   </a:tcPr>
                 </a:tc>
-                <a:extLst>
-                  <a:ext uri="{0D108BD9-81ED-4DB2-BD59-A6C34878D82A}">
-                    <a16:rowId xmlns:a16="http://schemas.microsoft.com/office/drawing/2014/main" val="10000"/>
-                  </a:ext>
-                </a:extLst>
               </a:tr>
               <a:tr h="439420">
                 <a:tc>
                   <a:txBody>
-                    <a:bodyPr/>
+                    <a:bodyPr wrap="square"/>
                     <a:lstStyle/>
                     <a:p>
                       <a:pPr algn="l">
@@ -13126,7 +12076,7 @@
                 </a:tc>
                 <a:tc>
                   <a:txBody>
-                    <a:bodyPr/>
+                    <a:bodyPr wrap="square"/>
                     <a:lstStyle/>
                     <a:p>
                       <a:pPr algn="l">
@@ -13160,7 +12110,7 @@
                 </a:tc>
                 <a:tc>
                   <a:txBody>
-                    <a:bodyPr/>
+                    <a:bodyPr wrap="square"/>
                     <a:lstStyle/>
                     <a:p>
                       <a:pPr algn="l">
@@ -13194,7 +12144,7 @@
                 </a:tc>
                 <a:tc>
                   <a:txBody>
-                    <a:bodyPr/>
+                    <a:bodyPr wrap="square"/>
                     <a:lstStyle/>
                     <a:p>
                       <a:pPr algn="l">
@@ -13226,16 +12176,11 @@
                     </a:solidFill>
                   </a:tcPr>
                 </a:tc>
-                <a:extLst>
-                  <a:ext uri="{0D108BD9-81ED-4DB2-BD59-A6C34878D82A}">
-                    <a16:rowId xmlns:a16="http://schemas.microsoft.com/office/drawing/2014/main" val="10001"/>
-                  </a:ext>
-                </a:extLst>
               </a:tr>
               <a:tr h="439420">
                 <a:tc>
                   <a:txBody>
-                    <a:bodyPr/>
+                    <a:bodyPr wrap="square"/>
                     <a:lstStyle/>
                     <a:p>
                       <a:pPr algn="l">
@@ -13269,7 +12214,7 @@
                 </a:tc>
                 <a:tc>
                   <a:txBody>
-                    <a:bodyPr/>
+                    <a:bodyPr wrap="square"/>
                     <a:lstStyle/>
                     <a:p>
                       <a:pPr algn="l">
@@ -13303,7 +12248,7 @@
                 </a:tc>
                 <a:tc>
                   <a:txBody>
-                    <a:bodyPr/>
+                    <a:bodyPr wrap="square"/>
                     <a:lstStyle/>
                     <a:p>
                       <a:pPr algn="l">
@@ -13337,7 +12282,7 @@
                 </a:tc>
                 <a:tc>
                   <a:txBody>
-                    <a:bodyPr/>
+                    <a:bodyPr wrap="square"/>
                     <a:lstStyle/>
                     <a:p>
                       <a:pPr algn="l">
@@ -13369,16 +12314,11 @@
                     </a:solidFill>
                   </a:tcPr>
                 </a:tc>
-                <a:extLst>
-                  <a:ext uri="{0D108BD9-81ED-4DB2-BD59-A6C34878D82A}">
-                    <a16:rowId xmlns:a16="http://schemas.microsoft.com/office/drawing/2014/main" val="10002"/>
-                  </a:ext>
-                </a:extLst>
               </a:tr>
               <a:tr h="439420">
                 <a:tc>
                   <a:txBody>
-                    <a:bodyPr/>
+                    <a:bodyPr wrap="square"/>
                     <a:lstStyle/>
                     <a:p>
                       <a:pPr algn="l">
@@ -13412,7 +12352,7 @@
                 </a:tc>
                 <a:tc>
                   <a:txBody>
-                    <a:bodyPr/>
+                    <a:bodyPr wrap="square"/>
                     <a:lstStyle/>
                     <a:p>
                       <a:pPr algn="l">
@@ -13446,7 +12386,7 @@
                 </a:tc>
                 <a:tc>
                   <a:txBody>
-                    <a:bodyPr/>
+                    <a:bodyPr wrap="square"/>
                     <a:lstStyle/>
                     <a:p>
                       <a:pPr algn="l">
@@ -13480,7 +12420,7 @@
                 </a:tc>
                 <a:tc>
                   <a:txBody>
-                    <a:bodyPr/>
+                    <a:bodyPr wrap="square"/>
                     <a:lstStyle/>
                     <a:p>
                       <a:pPr algn="l">
@@ -13512,16 +12452,11 @@
                     </a:solidFill>
                   </a:tcPr>
                 </a:tc>
-                <a:extLst>
-                  <a:ext uri="{0D108BD9-81ED-4DB2-BD59-A6C34878D82A}">
-                    <a16:rowId xmlns:a16="http://schemas.microsoft.com/office/drawing/2014/main" val="10003"/>
-                  </a:ext>
-                </a:extLst>
               </a:tr>
               <a:tr h="439420">
                 <a:tc>
                   <a:txBody>
-                    <a:bodyPr/>
+                    <a:bodyPr wrap="square"/>
                     <a:lstStyle/>
                     <a:p>
                       <a:pPr algn="l">
@@ -13555,7 +12490,7 @@
                 </a:tc>
                 <a:tc>
                   <a:txBody>
-                    <a:bodyPr/>
+                    <a:bodyPr wrap="square"/>
                     <a:lstStyle/>
                     <a:p>
                       <a:pPr algn="l">
@@ -13589,7 +12524,7 @@
                 </a:tc>
                 <a:tc>
                   <a:txBody>
-                    <a:bodyPr/>
+                    <a:bodyPr wrap="square"/>
                     <a:lstStyle/>
                     <a:p>
                       <a:pPr algn="l">
@@ -13623,7 +12558,7 @@
                 </a:tc>
                 <a:tc>
                   <a:txBody>
-                    <a:bodyPr/>
+                    <a:bodyPr wrap="square"/>
                     <a:lstStyle/>
                     <a:p>
                       <a:pPr algn="l">
@@ -13655,16 +12590,11 @@
                     </a:solidFill>
                   </a:tcPr>
                 </a:tc>
-                <a:extLst>
-                  <a:ext uri="{0D108BD9-81ED-4DB2-BD59-A6C34878D82A}">
-                    <a16:rowId xmlns:a16="http://schemas.microsoft.com/office/drawing/2014/main" val="10004"/>
-                  </a:ext>
-                </a:extLst>
               </a:tr>
               <a:tr h="439420">
                 <a:tc>
                   <a:txBody>
-                    <a:bodyPr/>
+                    <a:bodyPr wrap="square"/>
                     <a:lstStyle/>
                     <a:p>
                       <a:pPr algn="l">
@@ -13698,7 +12628,7 @@
                 </a:tc>
                 <a:tc>
                   <a:txBody>
-                    <a:bodyPr/>
+                    <a:bodyPr wrap="square"/>
                     <a:lstStyle/>
                     <a:p>
                       <a:pPr algn="l">
@@ -13732,7 +12662,7 @@
                 </a:tc>
                 <a:tc>
                   <a:txBody>
-                    <a:bodyPr/>
+                    <a:bodyPr wrap="square"/>
                     <a:lstStyle/>
                     <a:p>
                       <a:pPr algn="l">
@@ -13766,7 +12696,7 @@
                 </a:tc>
                 <a:tc>
                   <a:txBody>
-                    <a:bodyPr/>
+                    <a:bodyPr wrap="square"/>
                     <a:lstStyle/>
                     <a:p>
                       <a:pPr algn="l">
@@ -13798,16 +12728,11 @@
                     </a:solidFill>
                   </a:tcPr>
                 </a:tc>
-                <a:extLst>
-                  <a:ext uri="{0D108BD9-81ED-4DB2-BD59-A6C34878D82A}">
-                    <a16:rowId xmlns:a16="http://schemas.microsoft.com/office/drawing/2014/main" val="10005"/>
-                  </a:ext>
-                </a:extLst>
               </a:tr>
               <a:tr h="439420">
                 <a:tc>
                   <a:txBody>
-                    <a:bodyPr/>
+                    <a:bodyPr wrap="square"/>
                     <a:lstStyle/>
                     <a:p>
                       <a:pPr algn="l">
@@ -13841,7 +12766,7 @@
                 </a:tc>
                 <a:tc>
                   <a:txBody>
-                    <a:bodyPr/>
+                    <a:bodyPr wrap="square"/>
                     <a:lstStyle/>
                     <a:p>
                       <a:pPr algn="l">
@@ -13875,7 +12800,7 @@
                 </a:tc>
                 <a:tc>
                   <a:txBody>
-                    <a:bodyPr/>
+                    <a:bodyPr wrap="square"/>
                     <a:lstStyle/>
                     <a:p>
                       <a:pPr algn="l">
@@ -13909,7 +12834,7 @@
                 </a:tc>
                 <a:tc>
                   <a:txBody>
-                    <a:bodyPr/>
+                    <a:bodyPr wrap="square"/>
                     <a:lstStyle/>
                     <a:p>
                       <a:pPr algn="l">
@@ -13941,16 +12866,11 @@
                     </a:solidFill>
                   </a:tcPr>
                 </a:tc>
-                <a:extLst>
-                  <a:ext uri="{0D108BD9-81ED-4DB2-BD59-A6C34878D82A}">
-                    <a16:rowId xmlns:a16="http://schemas.microsoft.com/office/drawing/2014/main" val="10006"/>
-                  </a:ext>
-                </a:extLst>
               </a:tr>
               <a:tr h="439420">
                 <a:tc>
                   <a:txBody>
-                    <a:bodyPr/>
+                    <a:bodyPr wrap="square"/>
                     <a:lstStyle/>
                     <a:p>
                       <a:pPr algn="l">
@@ -13984,7 +12904,7 @@
                 </a:tc>
                 <a:tc>
                   <a:txBody>
-                    <a:bodyPr/>
+                    <a:bodyPr wrap="square"/>
                     <a:lstStyle/>
                     <a:p>
                       <a:pPr algn="l">
@@ -14018,7 +12938,7 @@
                 </a:tc>
                 <a:tc>
                   <a:txBody>
-                    <a:bodyPr/>
+                    <a:bodyPr wrap="square"/>
                     <a:lstStyle/>
                     <a:p>
                       <a:pPr algn="l">
@@ -14052,7 +12972,7 @@
                 </a:tc>
                 <a:tc>
                   <a:txBody>
-                    <a:bodyPr/>
+                    <a:bodyPr wrap="square"/>
                     <a:lstStyle/>
                     <a:p>
                       <a:pPr algn="l">
@@ -14084,16 +13004,11 @@
                     </a:solidFill>
                   </a:tcPr>
                 </a:tc>
-                <a:extLst>
-                  <a:ext uri="{0D108BD9-81ED-4DB2-BD59-A6C34878D82A}">
-                    <a16:rowId xmlns:a16="http://schemas.microsoft.com/office/drawing/2014/main" val="10007"/>
-                  </a:ext>
-                </a:extLst>
               </a:tr>
               <a:tr h="439420">
                 <a:tc>
                   <a:txBody>
-                    <a:bodyPr/>
+                    <a:bodyPr wrap="square"/>
                     <a:lstStyle/>
                     <a:p>
                       <a:pPr algn="l">
@@ -14127,7 +13042,7 @@
                 </a:tc>
                 <a:tc>
                   <a:txBody>
-                    <a:bodyPr/>
+                    <a:bodyPr wrap="square"/>
                     <a:lstStyle/>
                     <a:p>
                       <a:pPr algn="l">
@@ -14161,7 +13076,7 @@
                 </a:tc>
                 <a:tc>
                   <a:txBody>
-                    <a:bodyPr/>
+                    <a:bodyPr wrap="square"/>
                     <a:lstStyle/>
                     <a:p>
                       <a:pPr algn="l">
@@ -14195,7 +13110,7 @@
                 </a:tc>
                 <a:tc>
                   <a:txBody>
-                    <a:bodyPr/>
+                    <a:bodyPr wrap="square"/>
                     <a:lstStyle/>
                     <a:p>
                       <a:pPr algn="l">
@@ -14227,11 +13142,6 @@
                     </a:solidFill>
                   </a:tcPr>
                 </a:tc>
-                <a:extLst>
-                  <a:ext uri="{0D108BD9-81ED-4DB2-BD59-A6C34878D82A}">
-                    <a16:rowId xmlns:a16="http://schemas.microsoft.com/office/drawing/2014/main" val="10008"/>
-                  </a:ext>
-                </a:extLst>
               </a:tr>
             </a:tbl>
           </a:graphicData>
@@ -14254,7 +13164,7 @@
           <a:noFill/>
         </p:spPr>
         <p:txBody>
-          <a:bodyPr wrap="square" lIns="0" tIns="0" rIns="0" bIns="0">
+          <a:bodyPr wrap="square" lIns="0" rIns="0" tIns="0" bIns="0">
             <a:noAutofit/>
           </a:bodyPr>
           <a:lstStyle/>
@@ -14297,7 +13207,7 @@
           <a:noFill/>
         </p:spPr>
         <p:txBody>
-          <a:bodyPr wrap="square" lIns="0" tIns="0" rIns="0" bIns="0">
+          <a:bodyPr wrap="square" lIns="0" rIns="0" tIns="0" bIns="0">
             <a:noAutofit/>
           </a:bodyPr>
           <a:lstStyle/>
@@ -14332,7 +13242,7 @@
 </file>
 
 <file path=ppt/slides/slide27.xml><?xml version="1.0" encoding="utf-8"?>
-<p:sld xmlns:a="http://schemas.openxmlformats.org/drawingml/2006/main" xmlns:r="http://schemas.openxmlformats.org/officeDocument/2006/relationships" xmlns:p="http://schemas.openxmlformats.org/presentationml/2006/main">
+<p:sld xmlns:a="http://schemas.openxmlformats.org/drawingml/2006/main" xmlns:p="http://schemas.openxmlformats.org/presentationml/2006/main" xmlns:r="http://schemas.openxmlformats.org/officeDocument/2006/relationships">
   <p:cSld>
     <p:spTree>
       <p:nvGrpSpPr>
@@ -14340,14 +13250,7 @@
         <p:cNvGrpSpPr/>
         <p:nvPr/>
       </p:nvGrpSpPr>
-      <p:grpSpPr>
-        <a:xfrm>
-          <a:off x="0" y="0"/>
-          <a:ext cx="0" cy="0"/>
-          <a:chOff x="0" y="0"/>
-          <a:chExt cx="0" cy="0"/>
-        </a:xfrm>
-      </p:grpSpPr>
+      <p:grpSpPr/>
       <p:sp>
         <p:nvSpPr>
           <p:cNvPr id="2" name="TextBox 1"/>
@@ -14365,7 +13268,7 @@
           <a:noFill/>
         </p:spPr>
         <p:txBody>
-          <a:bodyPr wrap="square" lIns="0" tIns="0" rIns="0" bIns="0">
+          <a:bodyPr wrap="square" lIns="0" rIns="0" tIns="0" bIns="0">
             <a:noAutofit/>
           </a:bodyPr>
           <a:lstStyle/>
@@ -14432,7 +13335,6 @@
           <a:lstStyle/>
           <a:p>
             <a:pPr algn="ctr"/>
-            <a:endParaRPr/>
           </a:p>
         </p:txBody>
       </p:sp>
@@ -14453,7 +13355,7 @@
           <a:noFill/>
         </p:spPr>
         <p:txBody>
-          <a:bodyPr wrap="square" lIns="0" tIns="0" rIns="0" bIns="0">
+          <a:bodyPr wrap="square" lIns="0" rIns="0" tIns="0" bIns="0">
             <a:noAutofit/>
           </a:bodyPr>
           <a:lstStyle/>
@@ -14721,7 +13623,7 @@
           <a:noFill/>
         </p:spPr>
         <p:txBody>
-          <a:bodyPr wrap="square" lIns="0" tIns="0" rIns="0" bIns="0">
+          <a:bodyPr wrap="square" lIns="0" rIns="0" tIns="0" bIns="0">
             <a:noAutofit/>
           </a:bodyPr>
           <a:lstStyle/>
@@ -14764,7 +13666,7 @@
           <a:noFill/>
         </p:spPr>
         <p:txBody>
-          <a:bodyPr wrap="square" lIns="0" tIns="0" rIns="0" bIns="0">
+          <a:bodyPr wrap="square" lIns="0" rIns="0" tIns="0" bIns="0">
             <a:noAutofit/>
           </a:bodyPr>
           <a:lstStyle/>
@@ -14799,7 +13701,7 @@
 </file>
 
 <file path=ppt/slides/slide28.xml><?xml version="1.0" encoding="utf-8"?>
-<p:sld xmlns:a="http://schemas.openxmlformats.org/drawingml/2006/main" xmlns:r="http://schemas.openxmlformats.org/officeDocument/2006/relationships" xmlns:p="http://schemas.openxmlformats.org/presentationml/2006/main">
+<p:sld xmlns:a="http://schemas.openxmlformats.org/drawingml/2006/main" xmlns:p="http://schemas.openxmlformats.org/presentationml/2006/main" xmlns:r="http://schemas.openxmlformats.org/officeDocument/2006/relationships">
   <p:cSld>
     <p:spTree>
       <p:nvGrpSpPr>
@@ -14807,14 +13709,7 @@
         <p:cNvGrpSpPr/>
         <p:nvPr/>
       </p:nvGrpSpPr>
-      <p:grpSpPr>
-        <a:xfrm>
-          <a:off x="0" y="0"/>
-          <a:ext cx="0" cy="0"/>
-          <a:chOff x="0" y="0"/>
-          <a:chExt cx="0" cy="0"/>
-        </a:xfrm>
-      </p:grpSpPr>
+      <p:grpSpPr/>
       <p:sp>
         <p:nvSpPr>
           <p:cNvPr id="2" name="TextBox 1"/>
@@ -14832,7 +13727,7 @@
           <a:noFill/>
         </p:spPr>
         <p:txBody>
-          <a:bodyPr wrap="square" lIns="0" tIns="0" rIns="0" bIns="0">
+          <a:bodyPr wrap="square" lIns="0" rIns="0" tIns="0" bIns="0">
             <a:noAutofit/>
           </a:bodyPr>
           <a:lstStyle/>
@@ -14899,7 +13794,6 @@
           <a:lstStyle/>
           <a:p>
             <a:pPr algn="ctr"/>
-            <a:endParaRPr/>
           </a:p>
         </p:txBody>
       </p:sp>
@@ -14944,7 +13838,6 @@
           <a:lstStyle/>
           <a:p>
             <a:pPr algn="ctr"/>
-            <a:endParaRPr/>
           </a:p>
         </p:txBody>
       </p:sp>
@@ -14989,7 +13882,6 @@
           <a:lstStyle/>
           <a:p>
             <a:pPr algn="ctr"/>
-            <a:endParaRPr/>
           </a:p>
         </p:txBody>
       </p:sp>
@@ -15010,7 +13902,7 @@
           <a:noFill/>
         </p:spPr>
         <p:txBody>
-          <a:bodyPr wrap="square" lIns="0" tIns="0" rIns="0" bIns="0">
+          <a:bodyPr wrap="square" lIns="0" rIns="0" tIns="0" bIns="0">
             <a:noAutofit/>
           </a:bodyPr>
           <a:lstStyle/>
@@ -15056,7 +13948,7 @@
           <a:noFill/>
         </p:spPr>
         <p:txBody>
-          <a:bodyPr wrap="square" lIns="0" tIns="0" rIns="0" bIns="0">
+          <a:bodyPr wrap="square" lIns="0" rIns="0" tIns="0" bIns="0">
             <a:noAutofit/>
           </a:bodyPr>
           <a:lstStyle/>
@@ -15099,7 +13991,7 @@
           <a:noFill/>
         </p:spPr>
         <p:txBody>
-          <a:bodyPr wrap="square" lIns="0" tIns="0" rIns="0" bIns="0">
+          <a:bodyPr wrap="square" lIns="0" rIns="0" tIns="0" bIns="0">
             <a:noAutofit/>
           </a:bodyPr>
           <a:lstStyle/>
@@ -15134,7 +14026,7 @@
 </file>
 
 <file path=ppt/slides/slide3.xml><?xml version="1.0" encoding="utf-8"?>
-<p:sld xmlns:a="http://schemas.openxmlformats.org/drawingml/2006/main" xmlns:r="http://schemas.openxmlformats.org/officeDocument/2006/relationships" xmlns:p="http://schemas.openxmlformats.org/presentationml/2006/main">
+<p:sld xmlns:a="http://schemas.openxmlformats.org/drawingml/2006/main" xmlns:p="http://schemas.openxmlformats.org/presentationml/2006/main" xmlns:r="http://schemas.openxmlformats.org/officeDocument/2006/relationships">
   <p:cSld>
     <p:spTree>
       <p:nvGrpSpPr>
@@ -15142,14 +14034,7 @@
         <p:cNvGrpSpPr/>
         <p:nvPr/>
       </p:nvGrpSpPr>
-      <p:grpSpPr>
-        <a:xfrm>
-          <a:off x="0" y="0"/>
-          <a:ext cx="0" cy="0"/>
-          <a:chOff x="0" y="0"/>
-          <a:chExt cx="0" cy="0"/>
-        </a:xfrm>
-      </p:grpSpPr>
+      <p:grpSpPr/>
       <p:sp>
         <p:nvSpPr>
           <p:cNvPr id="2" name="Rectangle 1"/>
@@ -15191,7 +14076,6 @@
           <a:lstStyle/>
           <a:p>
             <a:pPr algn="ctr"/>
-            <a:endParaRPr/>
           </a:p>
         </p:txBody>
       </p:sp>
@@ -15236,7 +14120,6 @@
           <a:lstStyle/>
           <a:p>
             <a:pPr algn="ctr"/>
-            <a:endParaRPr/>
           </a:p>
         </p:txBody>
       </p:sp>
@@ -15257,7 +14140,7 @@
           <a:noFill/>
         </p:spPr>
         <p:txBody>
-          <a:bodyPr wrap="square" lIns="0" tIns="0" rIns="0" bIns="0">
+          <a:bodyPr wrap="square" lIns="0" rIns="0" tIns="0" bIns="0">
             <a:noAutofit/>
           </a:bodyPr>
           <a:lstStyle/>
@@ -15312,7 +14195,7 @@
 </file>
 
 <file path=ppt/slides/slide4.xml><?xml version="1.0" encoding="utf-8"?>
-<p:sld xmlns:a="http://schemas.openxmlformats.org/drawingml/2006/main" xmlns:r="http://schemas.openxmlformats.org/officeDocument/2006/relationships" xmlns:p="http://schemas.openxmlformats.org/presentationml/2006/main">
+<p:sld xmlns:a="http://schemas.openxmlformats.org/drawingml/2006/main" xmlns:p="http://schemas.openxmlformats.org/presentationml/2006/main" xmlns:r="http://schemas.openxmlformats.org/officeDocument/2006/relationships">
   <p:cSld>
     <p:spTree>
       <p:nvGrpSpPr>
@@ -15320,14 +14203,7 @@
         <p:cNvGrpSpPr/>
         <p:nvPr/>
       </p:nvGrpSpPr>
-      <p:grpSpPr>
-        <a:xfrm>
-          <a:off x="0" y="0"/>
-          <a:ext cx="0" cy="0"/>
-          <a:chOff x="0" y="0"/>
-          <a:chExt cx="0" cy="0"/>
-        </a:xfrm>
-      </p:grpSpPr>
+      <p:grpSpPr/>
       <p:sp>
         <p:nvSpPr>
           <p:cNvPr id="2" name="TextBox 1"/>
@@ -15345,7 +14221,7 @@
           <a:noFill/>
         </p:spPr>
         <p:txBody>
-          <a:bodyPr wrap="square" lIns="0" tIns="0" rIns="0" bIns="0">
+          <a:bodyPr wrap="square" lIns="0" rIns="0" tIns="0" bIns="0">
             <a:noAutofit/>
           </a:bodyPr>
           <a:lstStyle/>
@@ -15412,7 +14288,6 @@
           <a:lstStyle/>
           <a:p>
             <a:pPr algn="ctr"/>
-            <a:endParaRPr/>
           </a:p>
         </p:txBody>
       </p:sp>
@@ -15435,39 +14310,15 @@
                 <a:tableStyleId>{5C22544A-7EE6-4342-B048-85BDC9FD1C3A}</a:tableStyleId>
               </a:tblPr>
               <a:tblGrid>
-                <a:gridCol w="1902809">
-                  <a:extLst>
-                    <a:ext uri="{9D8B030D-6E8A-4147-A177-3AD203B41FA5}">
-                      <a16:colId xmlns:a16="http://schemas.microsoft.com/office/drawing/2014/main" val="20000"/>
-                    </a:ext>
-                  </a:extLst>
-                </a:gridCol>
-                <a:gridCol w="3159382">
-                  <a:extLst>
-                    <a:ext uri="{9D8B030D-6E8A-4147-A177-3AD203B41FA5}">
-                      <a16:colId xmlns:a16="http://schemas.microsoft.com/office/drawing/2014/main" val="20001"/>
-                    </a:ext>
-                  </a:extLst>
-                </a:gridCol>
-                <a:gridCol w="3249137">
-                  <a:extLst>
-                    <a:ext uri="{9D8B030D-6E8A-4147-A177-3AD203B41FA5}">
-                      <a16:colId xmlns:a16="http://schemas.microsoft.com/office/drawing/2014/main" val="20002"/>
-                    </a:ext>
-                  </a:extLst>
-                </a:gridCol>
-                <a:gridCol w="2746508">
-                  <a:extLst>
-                    <a:ext uri="{9D8B030D-6E8A-4147-A177-3AD203B41FA5}">
-                      <a16:colId xmlns:a16="http://schemas.microsoft.com/office/drawing/2014/main" val="20003"/>
-                    </a:ext>
-                  </a:extLst>
-                </a:gridCol>
+                <a:gridCol w="1902809"/>
+                <a:gridCol w="3159382"/>
+                <a:gridCol w="3249137"/>
+                <a:gridCol w="2746508"/>
               </a:tblGrid>
               <a:tr h="439420">
                 <a:tc>
                   <a:txBody>
-                    <a:bodyPr/>
+                    <a:bodyPr wrap="square"/>
                     <a:lstStyle/>
                     <a:p>
                       <a:pPr algn="l">
@@ -15481,7 +14332,6 @@
                           <a:spcPts val="0"/>
                         </a:spcAft>
                       </a:pPr>
-                      <a:endParaRPr/>
                     </a:p>
                   </a:txBody>
                   <a:tcPr marL="100584" marR="100584" marT="27432" marB="27432" anchor="ctr">
@@ -15492,7 +14342,7 @@
                 </a:tc>
                 <a:tc>
                   <a:txBody>
-                    <a:bodyPr/>
+                    <a:bodyPr wrap="square"/>
                     <a:lstStyle/>
                     <a:p>
                       <a:pPr algn="l">
@@ -15526,7 +14376,7 @@
                 </a:tc>
                 <a:tc>
                   <a:txBody>
-                    <a:bodyPr/>
+                    <a:bodyPr wrap="square"/>
                     <a:lstStyle/>
                     <a:p>
                       <a:pPr algn="l">
@@ -15560,7 +14410,7 @@
                 </a:tc>
                 <a:tc>
                   <a:txBody>
-                    <a:bodyPr/>
+                    <a:bodyPr wrap="square"/>
                     <a:lstStyle/>
                     <a:p>
                       <a:pPr algn="l">
@@ -15592,16 +14442,11 @@
                     </a:solidFill>
                   </a:tcPr>
                 </a:tc>
-                <a:extLst>
-                  <a:ext uri="{0D108BD9-81ED-4DB2-BD59-A6C34878D82A}">
-                    <a16:rowId xmlns:a16="http://schemas.microsoft.com/office/drawing/2014/main" val="10000"/>
-                  </a:ext>
-                </a:extLst>
               </a:tr>
               <a:tr h="439420">
                 <a:tc>
                   <a:txBody>
-                    <a:bodyPr/>
+                    <a:bodyPr wrap="square"/>
                     <a:lstStyle/>
                     <a:p>
                       <a:pPr algn="l">
@@ -15635,7 +14480,7 @@
                 </a:tc>
                 <a:tc>
                   <a:txBody>
-                    <a:bodyPr/>
+                    <a:bodyPr wrap="square"/>
                     <a:lstStyle/>
                     <a:p>
                       <a:pPr algn="l">
@@ -15669,7 +14514,7 @@
                 </a:tc>
                 <a:tc>
                   <a:txBody>
-                    <a:bodyPr/>
+                    <a:bodyPr wrap="square"/>
                     <a:lstStyle/>
                     <a:p>
                       <a:pPr algn="l">
@@ -15703,7 +14548,7 @@
                 </a:tc>
                 <a:tc>
                   <a:txBody>
-                    <a:bodyPr/>
+                    <a:bodyPr wrap="square"/>
                     <a:lstStyle/>
                     <a:p>
                       <a:pPr algn="l">
@@ -15735,16 +14580,11 @@
                     </a:solidFill>
                   </a:tcPr>
                 </a:tc>
-                <a:extLst>
-                  <a:ext uri="{0D108BD9-81ED-4DB2-BD59-A6C34878D82A}">
-                    <a16:rowId xmlns:a16="http://schemas.microsoft.com/office/drawing/2014/main" val="10001"/>
-                  </a:ext>
-                </a:extLst>
               </a:tr>
               <a:tr h="439420">
                 <a:tc>
                   <a:txBody>
-                    <a:bodyPr/>
+                    <a:bodyPr wrap="square"/>
                     <a:lstStyle/>
                     <a:p>
                       <a:pPr algn="l">
@@ -15778,7 +14618,7 @@
                 </a:tc>
                 <a:tc>
                   <a:txBody>
-                    <a:bodyPr/>
+                    <a:bodyPr wrap="square"/>
                     <a:lstStyle/>
                     <a:p>
                       <a:pPr algn="l">
@@ -15812,7 +14652,7 @@
                 </a:tc>
                 <a:tc>
                   <a:txBody>
-                    <a:bodyPr/>
+                    <a:bodyPr wrap="square"/>
                     <a:lstStyle/>
                     <a:p>
                       <a:pPr algn="l">
@@ -15846,7 +14686,7 @@
                 </a:tc>
                 <a:tc>
                   <a:txBody>
-                    <a:bodyPr/>
+                    <a:bodyPr wrap="square"/>
                     <a:lstStyle/>
                     <a:p>
                       <a:pPr algn="l">
@@ -15878,16 +14718,11 @@
                     </a:solidFill>
                   </a:tcPr>
                 </a:tc>
-                <a:extLst>
-                  <a:ext uri="{0D108BD9-81ED-4DB2-BD59-A6C34878D82A}">
-                    <a16:rowId xmlns:a16="http://schemas.microsoft.com/office/drawing/2014/main" val="10002"/>
-                  </a:ext>
-                </a:extLst>
               </a:tr>
               <a:tr h="439420">
                 <a:tc>
                   <a:txBody>
-                    <a:bodyPr/>
+                    <a:bodyPr wrap="square"/>
                     <a:lstStyle/>
                     <a:p>
                       <a:pPr algn="l">
@@ -15921,7 +14756,7 @@
                 </a:tc>
                 <a:tc>
                   <a:txBody>
-                    <a:bodyPr/>
+                    <a:bodyPr wrap="square"/>
                     <a:lstStyle/>
                     <a:p>
                       <a:pPr algn="l">
@@ -15955,7 +14790,7 @@
                 </a:tc>
                 <a:tc>
                   <a:txBody>
-                    <a:bodyPr/>
+                    <a:bodyPr wrap="square"/>
                     <a:lstStyle/>
                     <a:p>
                       <a:pPr algn="l">
@@ -15989,7 +14824,7 @@
                 </a:tc>
                 <a:tc>
                   <a:txBody>
-                    <a:bodyPr/>
+                    <a:bodyPr wrap="square"/>
                     <a:lstStyle/>
                     <a:p>
                       <a:pPr algn="l">
@@ -16021,16 +14856,11 @@
                     </a:solidFill>
                   </a:tcPr>
                 </a:tc>
-                <a:extLst>
-                  <a:ext uri="{0D108BD9-81ED-4DB2-BD59-A6C34878D82A}">
-                    <a16:rowId xmlns:a16="http://schemas.microsoft.com/office/drawing/2014/main" val="10003"/>
-                  </a:ext>
-                </a:extLst>
               </a:tr>
               <a:tr h="439420">
                 <a:tc>
                   <a:txBody>
-                    <a:bodyPr/>
+                    <a:bodyPr wrap="square"/>
                     <a:lstStyle/>
                     <a:p>
                       <a:pPr algn="l">
@@ -16064,7 +14894,7 @@
                 </a:tc>
                 <a:tc>
                   <a:txBody>
-                    <a:bodyPr/>
+                    <a:bodyPr wrap="square"/>
                     <a:lstStyle/>
                     <a:p>
                       <a:pPr algn="l">
@@ -16098,7 +14928,7 @@
                 </a:tc>
                 <a:tc>
                   <a:txBody>
-                    <a:bodyPr/>
+                    <a:bodyPr wrap="square"/>
                     <a:lstStyle/>
                     <a:p>
                       <a:pPr algn="l">
@@ -16132,7 +14962,7 @@
                 </a:tc>
                 <a:tc>
                   <a:txBody>
-                    <a:bodyPr/>
+                    <a:bodyPr wrap="square"/>
                     <a:lstStyle/>
                     <a:p>
                       <a:pPr algn="l">
@@ -16164,16 +14994,11 @@
                     </a:solidFill>
                   </a:tcPr>
                 </a:tc>
-                <a:extLst>
-                  <a:ext uri="{0D108BD9-81ED-4DB2-BD59-A6C34878D82A}">
-                    <a16:rowId xmlns:a16="http://schemas.microsoft.com/office/drawing/2014/main" val="10004"/>
-                  </a:ext>
-                </a:extLst>
               </a:tr>
               <a:tr h="439420">
                 <a:tc>
                   <a:txBody>
-                    <a:bodyPr/>
+                    <a:bodyPr wrap="square"/>
                     <a:lstStyle/>
                     <a:p>
                       <a:pPr algn="l">
@@ -16207,7 +15032,7 @@
                 </a:tc>
                 <a:tc>
                   <a:txBody>
-                    <a:bodyPr/>
+                    <a:bodyPr wrap="square"/>
                     <a:lstStyle/>
                     <a:p>
                       <a:pPr algn="l">
@@ -16241,7 +15066,7 @@
                 </a:tc>
                 <a:tc>
                   <a:txBody>
-                    <a:bodyPr/>
+                    <a:bodyPr wrap="square"/>
                     <a:lstStyle/>
                     <a:p>
                       <a:pPr algn="l">
@@ -16275,7 +15100,7 @@
                 </a:tc>
                 <a:tc>
                   <a:txBody>
-                    <a:bodyPr/>
+                    <a:bodyPr wrap="square"/>
                     <a:lstStyle/>
                     <a:p>
                       <a:pPr algn="l">
@@ -16307,16 +15132,11 @@
                     </a:solidFill>
                   </a:tcPr>
                 </a:tc>
-                <a:extLst>
-                  <a:ext uri="{0D108BD9-81ED-4DB2-BD59-A6C34878D82A}">
-                    <a16:rowId xmlns:a16="http://schemas.microsoft.com/office/drawing/2014/main" val="10005"/>
-                  </a:ext>
-                </a:extLst>
               </a:tr>
               <a:tr h="439420">
                 <a:tc>
                   <a:txBody>
-                    <a:bodyPr/>
+                    <a:bodyPr wrap="square"/>
                     <a:lstStyle/>
                     <a:p>
                       <a:pPr algn="l">
@@ -16350,7 +15170,7 @@
                 </a:tc>
                 <a:tc>
                   <a:txBody>
-                    <a:bodyPr/>
+                    <a:bodyPr wrap="square"/>
                     <a:lstStyle/>
                     <a:p>
                       <a:pPr algn="l">
@@ -16384,7 +15204,7 @@
                 </a:tc>
                 <a:tc>
                   <a:txBody>
-                    <a:bodyPr/>
+                    <a:bodyPr wrap="square"/>
                     <a:lstStyle/>
                     <a:p>
                       <a:pPr algn="l">
@@ -16418,7 +15238,7 @@
                 </a:tc>
                 <a:tc>
                   <a:txBody>
-                    <a:bodyPr/>
+                    <a:bodyPr wrap="square"/>
                     <a:lstStyle/>
                     <a:p>
                       <a:pPr algn="l">
@@ -16450,11 +15270,6 @@
                     </a:solidFill>
                   </a:tcPr>
                 </a:tc>
-                <a:extLst>
-                  <a:ext uri="{0D108BD9-81ED-4DB2-BD59-A6C34878D82A}">
-                    <a16:rowId xmlns:a16="http://schemas.microsoft.com/office/drawing/2014/main" val="10006"/>
-                  </a:ext>
-                </a:extLst>
               </a:tr>
             </a:tbl>
           </a:graphicData>
@@ -16477,7 +15292,7 @@
           <a:noFill/>
         </p:spPr>
         <p:txBody>
-          <a:bodyPr wrap="square" lIns="0" tIns="0" rIns="0" bIns="0">
+          <a:bodyPr wrap="square" lIns="0" rIns="0" tIns="0" bIns="0">
             <a:noAutofit/>
           </a:bodyPr>
           <a:lstStyle/>
@@ -16520,7 +15335,7 @@
           <a:noFill/>
         </p:spPr>
         <p:txBody>
-          <a:bodyPr wrap="square" lIns="0" tIns="0" rIns="0" bIns="0">
+          <a:bodyPr wrap="square" lIns="0" rIns="0" tIns="0" bIns="0">
             <a:noAutofit/>
           </a:bodyPr>
           <a:lstStyle/>
@@ -16563,7 +15378,7 @@
           <a:noFill/>
         </p:spPr>
         <p:txBody>
-          <a:bodyPr wrap="square" lIns="0" tIns="0" rIns="0" bIns="0">
+          <a:bodyPr wrap="square" lIns="0" rIns="0" tIns="0" bIns="0">
             <a:noAutofit/>
           </a:bodyPr>
           <a:lstStyle/>
@@ -16598,7 +15413,7 @@
 </file>
 
 <file path=ppt/slides/slide5.xml><?xml version="1.0" encoding="utf-8"?>
-<p:sld xmlns:a="http://schemas.openxmlformats.org/drawingml/2006/main" xmlns:r="http://schemas.openxmlformats.org/officeDocument/2006/relationships" xmlns:p="http://schemas.openxmlformats.org/presentationml/2006/main">
+<p:sld xmlns:a="http://schemas.openxmlformats.org/drawingml/2006/main" xmlns:p="http://schemas.openxmlformats.org/presentationml/2006/main" xmlns:r="http://schemas.openxmlformats.org/officeDocument/2006/relationships">
   <p:cSld>
     <p:spTree>
       <p:nvGrpSpPr>
@@ -16606,14 +15421,7 @@
         <p:cNvGrpSpPr/>
         <p:nvPr/>
       </p:nvGrpSpPr>
-      <p:grpSpPr>
-        <a:xfrm>
-          <a:off x="0" y="0"/>
-          <a:ext cx="0" cy="0"/>
-          <a:chOff x="0" y="0"/>
-          <a:chExt cx="0" cy="0"/>
-        </a:xfrm>
-      </p:grpSpPr>
+      <p:grpSpPr/>
       <p:sp>
         <p:nvSpPr>
           <p:cNvPr id="2" name="TextBox 1"/>
@@ -16631,7 +15439,7 @@
           <a:noFill/>
         </p:spPr>
         <p:txBody>
-          <a:bodyPr wrap="square" lIns="0" tIns="0" rIns="0" bIns="0">
+          <a:bodyPr wrap="square" lIns="0" rIns="0" tIns="0" bIns="0">
             <a:noAutofit/>
           </a:bodyPr>
           <a:lstStyle/>
@@ -16698,7 +15506,6 @@
           <a:lstStyle/>
           <a:p>
             <a:pPr algn="ctr"/>
-            <a:endParaRPr/>
           </a:p>
         </p:txBody>
       </p:sp>
@@ -16719,7 +15526,7 @@
           <a:noFill/>
         </p:spPr>
         <p:txBody>
-          <a:bodyPr wrap="square" lIns="0" tIns="0" rIns="0" bIns="0">
+          <a:bodyPr wrap="square" lIns="0" rIns="0" tIns="0" bIns="0">
             <a:noAutofit/>
           </a:bodyPr>
           <a:lstStyle/>
@@ -17064,7 +15871,7 @@
           <a:noFill/>
         </p:spPr>
         <p:txBody>
-          <a:bodyPr wrap="square" lIns="0" tIns="0" rIns="0" bIns="0">
+          <a:bodyPr wrap="square" lIns="0" rIns="0" tIns="0" bIns="0">
             <a:noAutofit/>
           </a:bodyPr>
           <a:lstStyle/>
@@ -17107,7 +15914,7 @@
           <a:noFill/>
         </p:spPr>
         <p:txBody>
-          <a:bodyPr wrap="square" lIns="0" tIns="0" rIns="0" bIns="0">
+          <a:bodyPr wrap="square" lIns="0" rIns="0" tIns="0" bIns="0">
             <a:noAutofit/>
           </a:bodyPr>
           <a:lstStyle/>
@@ -17150,7 +15957,7 @@
           <a:noFill/>
         </p:spPr>
         <p:txBody>
-          <a:bodyPr wrap="square" lIns="0" tIns="0" rIns="0" bIns="0">
+          <a:bodyPr wrap="square" lIns="0" rIns="0" tIns="0" bIns="0">
             <a:noAutofit/>
           </a:bodyPr>
           <a:lstStyle/>
@@ -17185,7 +15992,7 @@
 </file>
 
 <file path=ppt/slides/slide6.xml><?xml version="1.0" encoding="utf-8"?>
-<p:sld xmlns:a="http://schemas.openxmlformats.org/drawingml/2006/main" xmlns:r="http://schemas.openxmlformats.org/officeDocument/2006/relationships" xmlns:p="http://schemas.openxmlformats.org/presentationml/2006/main">
+<p:sld xmlns:a="http://schemas.openxmlformats.org/drawingml/2006/main" xmlns:p="http://schemas.openxmlformats.org/presentationml/2006/main" xmlns:r="http://schemas.openxmlformats.org/officeDocument/2006/relationships">
   <p:cSld>
     <p:spTree>
       <p:nvGrpSpPr>
@@ -17193,14 +16000,7 @@
         <p:cNvGrpSpPr/>
         <p:nvPr/>
       </p:nvGrpSpPr>
-      <p:grpSpPr>
-        <a:xfrm>
-          <a:off x="0" y="0"/>
-          <a:ext cx="0" cy="0"/>
-          <a:chOff x="0" y="0"/>
-          <a:chExt cx="0" cy="0"/>
-        </a:xfrm>
-      </p:grpSpPr>
+      <p:grpSpPr/>
       <p:sp>
         <p:nvSpPr>
           <p:cNvPr id="2" name="TextBox 1"/>
@@ -17218,7 +16018,7 @@
           <a:noFill/>
         </p:spPr>
         <p:txBody>
-          <a:bodyPr wrap="square" lIns="0" tIns="0" rIns="0" bIns="0">
+          <a:bodyPr wrap="square" lIns="0" rIns="0" tIns="0" bIns="0">
             <a:noAutofit/>
           </a:bodyPr>
           <a:lstStyle/>
@@ -17285,7 +16085,6 @@
           <a:lstStyle/>
           <a:p>
             <a:pPr algn="ctr"/>
-            <a:endParaRPr/>
           </a:p>
         </p:txBody>
       </p:sp>
@@ -17330,7 +16129,6 @@
           <a:lstStyle/>
           <a:p>
             <a:pPr algn="ctr"/>
-            <a:endParaRPr/>
           </a:p>
         </p:txBody>
       </p:sp>
@@ -17351,7 +16149,7 @@
           <a:noFill/>
         </p:spPr>
         <p:txBody>
-          <a:bodyPr wrap="square" lIns="0" tIns="0" rIns="0" bIns="0">
+          <a:bodyPr wrap="square" lIns="0" rIns="0" tIns="0" bIns="0">
             <a:noAutofit/>
           </a:bodyPr>
           <a:lstStyle/>
@@ -17394,7 +16192,7 @@
           <a:noFill/>
         </p:spPr>
         <p:txBody>
-          <a:bodyPr wrap="square" lIns="0" tIns="0" rIns="0" bIns="0">
+          <a:bodyPr wrap="square" lIns="0" rIns="0" tIns="0" bIns="0">
             <a:noAutofit/>
           </a:bodyPr>
           <a:lstStyle/>
@@ -17533,7 +16331,6 @@
           <a:lstStyle/>
           <a:p>
             <a:pPr algn="ctr"/>
-            <a:endParaRPr/>
           </a:p>
         </p:txBody>
       </p:sp>
@@ -17554,7 +16351,7 @@
           <a:noFill/>
         </p:spPr>
         <p:txBody>
-          <a:bodyPr wrap="square" lIns="0" tIns="0" rIns="0" bIns="0">
+          <a:bodyPr wrap="square" lIns="0" rIns="0" tIns="0" bIns="0">
             <a:noAutofit/>
           </a:bodyPr>
           <a:lstStyle/>
@@ -17597,7 +16394,7 @@
           <a:noFill/>
         </p:spPr>
         <p:txBody>
-          <a:bodyPr wrap="square" lIns="0" tIns="0" rIns="0" bIns="0">
+          <a:bodyPr wrap="square" lIns="0" rIns="0" tIns="0" bIns="0">
             <a:noAutofit/>
           </a:bodyPr>
           <a:lstStyle/>
@@ -17712,7 +16509,7 @@
           <a:noFill/>
         </p:spPr>
         <p:txBody>
-          <a:bodyPr wrap="square" lIns="0" tIns="0" rIns="0" bIns="0">
+          <a:bodyPr wrap="square" lIns="0" rIns="0" tIns="0" bIns="0">
             <a:noAutofit/>
           </a:bodyPr>
           <a:lstStyle/>
@@ -17755,7 +16552,7 @@
           <a:noFill/>
         </p:spPr>
         <p:txBody>
-          <a:bodyPr wrap="square" lIns="0" tIns="0" rIns="0" bIns="0">
+          <a:bodyPr wrap="square" lIns="0" rIns="0" tIns="0" bIns="0">
             <a:noAutofit/>
           </a:bodyPr>
           <a:lstStyle/>
@@ -17790,7 +16587,7 @@
 </file>
 
 <file path=ppt/slides/slide7.xml><?xml version="1.0" encoding="utf-8"?>
-<p:sld xmlns:a="http://schemas.openxmlformats.org/drawingml/2006/main" xmlns:r="http://schemas.openxmlformats.org/officeDocument/2006/relationships" xmlns:p="http://schemas.openxmlformats.org/presentationml/2006/main">
+<p:sld xmlns:a="http://schemas.openxmlformats.org/drawingml/2006/main" xmlns:p="http://schemas.openxmlformats.org/presentationml/2006/main" xmlns:r="http://schemas.openxmlformats.org/officeDocument/2006/relationships">
   <p:cSld>
     <p:spTree>
       <p:nvGrpSpPr>
@@ -17798,14 +16595,7 @@
         <p:cNvGrpSpPr/>
         <p:nvPr/>
       </p:nvGrpSpPr>
-      <p:grpSpPr>
-        <a:xfrm>
-          <a:off x="0" y="0"/>
-          <a:ext cx="0" cy="0"/>
-          <a:chOff x="0" y="0"/>
-          <a:chExt cx="0" cy="0"/>
-        </a:xfrm>
-      </p:grpSpPr>
+      <p:grpSpPr/>
       <p:sp>
         <p:nvSpPr>
           <p:cNvPr id="2" name="TextBox 1"/>
@@ -17823,7 +16613,7 @@
           <a:noFill/>
         </p:spPr>
         <p:txBody>
-          <a:bodyPr wrap="square" lIns="0" tIns="0" rIns="0" bIns="0">
+          <a:bodyPr wrap="square" lIns="0" rIns="0" tIns="0" bIns="0">
             <a:noAutofit/>
           </a:bodyPr>
           <a:lstStyle/>
@@ -17890,7 +16680,6 @@
           <a:lstStyle/>
           <a:p>
             <a:pPr algn="ctr"/>
-            <a:endParaRPr/>
           </a:p>
         </p:txBody>
       </p:sp>
@@ -17937,7 +16726,6 @@
           <a:lstStyle/>
           <a:p>
             <a:pPr algn="ctr"/>
-            <a:endParaRPr/>
           </a:p>
         </p:txBody>
       </p:sp>
@@ -17958,7 +16746,7 @@
           <a:noFill/>
         </p:spPr>
         <p:txBody>
-          <a:bodyPr wrap="square" lIns="0" tIns="0" rIns="0" bIns="0">
+          <a:bodyPr wrap="square" lIns="0" rIns="0" tIns="0" bIns="0">
             <a:noAutofit/>
           </a:bodyPr>
           <a:lstStyle/>
@@ -18211,7 +16999,7 @@
           <a:noFill/>
         </p:spPr>
         <p:txBody>
-          <a:bodyPr wrap="square" lIns="0" tIns="0" rIns="0" bIns="0">
+          <a:bodyPr wrap="square" lIns="0" rIns="0" tIns="0" bIns="0">
             <a:noAutofit/>
           </a:bodyPr>
           <a:lstStyle/>
@@ -18254,7 +17042,7 @@
           <a:noFill/>
         </p:spPr>
         <p:txBody>
-          <a:bodyPr wrap="square" lIns="0" tIns="0" rIns="0" bIns="0">
+          <a:bodyPr wrap="square" lIns="0" rIns="0" tIns="0" bIns="0">
             <a:noAutofit/>
           </a:bodyPr>
           <a:lstStyle/>
@@ -18297,7 +17085,7 @@
           <a:noFill/>
         </p:spPr>
         <p:txBody>
-          <a:bodyPr wrap="square" lIns="0" tIns="0" rIns="0" bIns="0">
+          <a:bodyPr wrap="square" lIns="0" rIns="0" tIns="0" bIns="0">
             <a:noAutofit/>
           </a:bodyPr>
           <a:lstStyle/>
@@ -18332,7 +17120,7 @@
 </file>
 
 <file path=ppt/slides/slide8.xml><?xml version="1.0" encoding="utf-8"?>
-<p:sld xmlns:a="http://schemas.openxmlformats.org/drawingml/2006/main" xmlns:r="http://schemas.openxmlformats.org/officeDocument/2006/relationships" xmlns:p="http://schemas.openxmlformats.org/presentationml/2006/main">
+<p:sld xmlns:a="http://schemas.openxmlformats.org/drawingml/2006/main" xmlns:p="http://schemas.openxmlformats.org/presentationml/2006/main" xmlns:r="http://schemas.openxmlformats.org/officeDocument/2006/relationships">
   <p:cSld>
     <p:spTree>
       <p:nvGrpSpPr>
@@ -18340,14 +17128,7 @@
         <p:cNvGrpSpPr/>
         <p:nvPr/>
       </p:nvGrpSpPr>
-      <p:grpSpPr>
-        <a:xfrm>
-          <a:off x="0" y="0"/>
-          <a:ext cx="0" cy="0"/>
-          <a:chOff x="0" y="0"/>
-          <a:chExt cx="0" cy="0"/>
-        </a:xfrm>
-      </p:grpSpPr>
+      <p:grpSpPr/>
       <p:sp>
         <p:nvSpPr>
           <p:cNvPr id="2" name="TextBox 1"/>
@@ -18365,7 +17146,7 @@
           <a:noFill/>
         </p:spPr>
         <p:txBody>
-          <a:bodyPr wrap="square" lIns="0" tIns="0" rIns="0" bIns="0">
+          <a:bodyPr wrap="square" lIns="0" rIns="0" tIns="0" bIns="0">
             <a:noAutofit/>
           </a:bodyPr>
           <a:lstStyle/>
@@ -18432,7 +17213,6 @@
           <a:lstStyle/>
           <a:p>
             <a:pPr algn="ctr"/>
-            <a:endParaRPr/>
           </a:p>
         </p:txBody>
       </p:sp>
@@ -18479,7 +17259,6 @@
           <a:lstStyle/>
           <a:p>
             <a:pPr algn="ctr"/>
-            <a:endParaRPr/>
           </a:p>
         </p:txBody>
       </p:sp>
@@ -18500,7 +17279,7 @@
           <a:noFill/>
         </p:spPr>
         <p:txBody>
-          <a:bodyPr wrap="square" lIns="0" tIns="0" rIns="0" bIns="0">
+          <a:bodyPr wrap="square" lIns="0" rIns="0" tIns="0" bIns="0">
             <a:noAutofit/>
           </a:bodyPr>
           <a:lstStyle/>
@@ -18684,7 +17463,7 @@
           <a:noFill/>
         </p:spPr>
         <p:txBody>
-          <a:bodyPr wrap="square" lIns="0" tIns="0" rIns="0" bIns="0">
+          <a:bodyPr wrap="square" lIns="0" rIns="0" tIns="0" bIns="0">
             <a:noAutofit/>
           </a:bodyPr>
           <a:lstStyle/>
@@ -18727,7 +17506,7 @@
           <a:noFill/>
         </p:spPr>
         <p:txBody>
-          <a:bodyPr wrap="square" lIns="0" tIns="0" rIns="0" bIns="0">
+          <a:bodyPr wrap="square" lIns="0" rIns="0" tIns="0" bIns="0">
             <a:noAutofit/>
           </a:bodyPr>
           <a:lstStyle/>
@@ -18770,7 +17549,7 @@
           <a:noFill/>
         </p:spPr>
         <p:txBody>
-          <a:bodyPr wrap="square" lIns="0" tIns="0" rIns="0" bIns="0">
+          <a:bodyPr wrap="square" lIns="0" rIns="0" tIns="0" bIns="0">
             <a:noAutofit/>
           </a:bodyPr>
           <a:lstStyle/>
@@ -18805,7 +17584,7 @@
 </file>
 
 <file path=ppt/slides/slide9.xml><?xml version="1.0" encoding="utf-8"?>
-<p:sld xmlns:a="http://schemas.openxmlformats.org/drawingml/2006/main" xmlns:r="http://schemas.openxmlformats.org/officeDocument/2006/relationships" xmlns:p="http://schemas.openxmlformats.org/presentationml/2006/main">
+<p:sld xmlns:a="http://schemas.openxmlformats.org/drawingml/2006/main" xmlns:p="http://schemas.openxmlformats.org/presentationml/2006/main" xmlns:r="http://schemas.openxmlformats.org/officeDocument/2006/relationships">
   <p:cSld>
     <p:spTree>
       <p:nvGrpSpPr>
@@ -18813,14 +17592,7 @@
         <p:cNvGrpSpPr/>
         <p:nvPr/>
       </p:nvGrpSpPr>
-      <p:grpSpPr>
-        <a:xfrm>
-          <a:off x="0" y="0"/>
-          <a:ext cx="0" cy="0"/>
-          <a:chOff x="0" y="0"/>
-          <a:chExt cx="0" cy="0"/>
-        </a:xfrm>
-      </p:grpSpPr>
+      <p:grpSpPr/>
       <p:sp>
         <p:nvSpPr>
           <p:cNvPr id="2" name="Rectangle 1"/>
@@ -18862,7 +17634,6 @@
           <a:lstStyle/>
           <a:p>
             <a:pPr algn="ctr"/>
-            <a:endParaRPr/>
           </a:p>
         </p:txBody>
       </p:sp>
@@ -18907,7 +17678,6 @@
           <a:lstStyle/>
           <a:p>
             <a:pPr algn="ctr"/>
-            <a:endParaRPr/>
           </a:p>
         </p:txBody>
       </p:sp>
@@ -18928,7 +17698,7 @@
           <a:noFill/>
         </p:spPr>
         <p:txBody>
-          <a:bodyPr wrap="square" lIns="0" tIns="0" rIns="0" bIns="0">
+          <a:bodyPr wrap="square" lIns="0" rIns="0" tIns="0" bIns="0">
             <a:noAutofit/>
           </a:bodyPr>
           <a:lstStyle/>
@@ -19300,299 +18070,4 @@
   </a:objectDefaults>
   <a:extraClrSchemeLst/>
 </a:theme>
-</file>
-
-<file path=ppt/theme/theme2.xml><?xml version="1.0" encoding="utf-8"?>
-<a:theme xmlns:a="http://schemas.openxmlformats.org/drawingml/2006/main" name="Office Theme">
-  <a:themeElements>
-    <a:clrScheme name="Office">
-      <a:dk1>
-        <a:sysClr val="windowText" lastClr="000000"/>
-      </a:dk1>
-      <a:lt1>
-        <a:sysClr val="window" lastClr="FFFFFF"/>
-      </a:lt1>
-      <a:dk2>
-        <a:srgbClr val="44546A"/>
-      </a:dk2>
-      <a:lt2>
-        <a:srgbClr val="E7E6E6"/>
-      </a:lt2>
-      <a:accent1>
-        <a:srgbClr val="4472C4"/>
-      </a:accent1>
-      <a:accent2>
-        <a:srgbClr val="ED7D31"/>
-      </a:accent2>
-      <a:accent3>
-        <a:srgbClr val="A5A5A5"/>
-      </a:accent3>
-      <a:accent4>
-        <a:srgbClr val="FFC000"/>
-      </a:accent4>
-      <a:accent5>
-        <a:srgbClr val="5B9BD5"/>
-      </a:accent5>
-      <a:accent6>
-        <a:srgbClr val="70AD47"/>
-      </a:accent6>
-      <a:hlink>
-        <a:srgbClr val="0563C1"/>
-      </a:hlink>
-      <a:folHlink>
-        <a:srgbClr val="954F72"/>
-      </a:folHlink>
-    </a:clrScheme>
-    <a:fontScheme name="Office">
-      <a:majorFont>
-        <a:latin typeface="Calibri Light" panose="020F0302020204030204"/>
-        <a:ea typeface=""/>
-        <a:cs typeface=""/>
-        <a:font script="Jpan" typeface="游ゴシック Light"/>
-        <a:font script="Hang" typeface="맑은 고딕"/>
-        <a:font script="Hans" typeface="等线 Light"/>
-        <a:font script="Hant" typeface="新細明體"/>
-        <a:font script="Arab" typeface="Times New Roman"/>
-        <a:font script="Hebr" typeface="Times New Roman"/>
-        <a:font script="Thai" typeface="Angsana New"/>
-        <a:font script="Ethi" typeface="Nyala"/>
-        <a:font script="Beng" typeface="Vrinda"/>
-        <a:font script="Gujr" typeface="Shruti"/>
-        <a:font script="Khmr" typeface="MoolBoran"/>
-        <a:font script="Knda" typeface="Tunga"/>
-        <a:font script="Guru" typeface="Raavi"/>
-        <a:font script="Cans" typeface="Euphemia"/>
-        <a:font script="Cher" typeface="Plantagenet Cherokee"/>
-        <a:font script="Yiii" typeface="Microsoft Yi Baiti"/>
-        <a:font script="Tibt" typeface="Microsoft Himalaya"/>
-        <a:font script="Thaa" typeface="MV Boli"/>
-        <a:font script="Deva" typeface="Mangal"/>
-        <a:font script="Telu" typeface="Gautami"/>
-        <a:font script="Taml" typeface="Latha"/>
-        <a:font script="Syrc" typeface="Estrangelo Edessa"/>
-        <a:font script="Orya" typeface="Kalinga"/>
-        <a:font script="Mlym" typeface="Kartika"/>
-        <a:font script="Laoo" typeface="DokChampa"/>
-        <a:font script="Sinh" typeface="Iskoola Pota"/>
-        <a:font script="Mong" typeface="Mongolian Baiti"/>
-        <a:font script="Viet" typeface="Times New Roman"/>
-        <a:font script="Uigh" typeface="Microsoft Uighur"/>
-        <a:font script="Geor" typeface="Sylfaen"/>
-        <a:font script="Armn" typeface="Arial"/>
-        <a:font script="Bugi" typeface="Leelawadee UI"/>
-        <a:font script="Bopo" typeface="Microsoft JhengHei"/>
-        <a:font script="Java" typeface="Javanese Text"/>
-        <a:font script="Lisu" typeface="Segoe UI"/>
-        <a:font script="Mymr" typeface="Myanmar Text"/>
-        <a:font script="Nkoo" typeface="Ebrima"/>
-        <a:font script="Olck" typeface="Nirmala UI"/>
-        <a:font script="Osma" typeface="Ebrima"/>
-        <a:font script="Phag" typeface="Phagspa"/>
-        <a:font script="Syrn" typeface="Estrangelo Edessa"/>
-        <a:font script="Syrj" typeface="Estrangelo Edessa"/>
-        <a:font script="Syre" typeface="Estrangelo Edessa"/>
-        <a:font script="Sora" typeface="Nirmala UI"/>
-        <a:font script="Tale" typeface="Microsoft Tai Le"/>
-        <a:font script="Talu" typeface="Microsoft New Tai Lue"/>
-        <a:font script="Tfng" typeface="Ebrima"/>
-      </a:majorFont>
-      <a:minorFont>
-        <a:latin typeface="Calibri" panose="020F0502020204030204"/>
-        <a:ea typeface=""/>
-        <a:cs typeface=""/>
-        <a:font script="Jpan" typeface="游ゴシック"/>
-        <a:font script="Hang" typeface="맑은 고딕"/>
-        <a:font script="Hans" typeface="等线"/>
-        <a:font script="Hant" typeface="新細明體"/>
-        <a:font script="Arab" typeface="Arial"/>
-        <a:font script="Hebr" typeface="Arial"/>
-        <a:font script="Thai" typeface="Cordia New"/>
-        <a:font script="Ethi" typeface="Nyala"/>
-        <a:font script="Beng" typeface="Vrinda"/>
-        <a:font script="Gujr" typeface="Shruti"/>
-        <a:font script="Khmr" typeface="DaunPenh"/>
-        <a:font script="Knda" typeface="Tunga"/>
-        <a:font script="Guru" typeface="Raavi"/>
-        <a:font script="Cans" typeface="Euphemia"/>
-        <a:font script="Cher" typeface="Plantagenet Cherokee"/>
-        <a:font script="Yiii" typeface="Microsoft Yi Baiti"/>
-        <a:font script="Tibt" typeface="Microsoft Himalaya"/>
-        <a:font script="Thaa" typeface="MV Boli"/>
-        <a:font script="Deva" typeface="Mangal"/>
-        <a:font script="Telu" typeface="Gautami"/>
-        <a:font script="Taml" typeface="Latha"/>
-        <a:font script="Syrc" typeface="Estrangelo Edessa"/>
-        <a:font script="Orya" typeface="Kalinga"/>
-        <a:font script="Mlym" typeface="Kartika"/>
-        <a:font script="Laoo" typeface="DokChampa"/>
-        <a:font script="Sinh" typeface="Iskoola Pota"/>
-        <a:font script="Mong" typeface="Mongolian Baiti"/>
-        <a:font script="Viet" typeface="Arial"/>
-        <a:font script="Uigh" typeface="Microsoft Uighur"/>
-        <a:font script="Geor" typeface="Sylfaen"/>
-        <a:font script="Armn" typeface="Arial"/>
-        <a:font script="Bugi" typeface="Leelawadee UI"/>
-        <a:font script="Bopo" typeface="Microsoft JhengHei"/>
-        <a:font script="Java" typeface="Javanese Text"/>
-        <a:font script="Lisu" typeface="Segoe UI"/>
-        <a:font script="Mymr" typeface="Myanmar Text"/>
-        <a:font script="Nkoo" typeface="Ebrima"/>
-        <a:font script="Olck" typeface="Nirmala UI"/>
-        <a:font script="Osma" typeface="Ebrima"/>
-        <a:font script="Phag" typeface="Phagspa"/>
-        <a:font script="Syrn" typeface="Estrangelo Edessa"/>
-        <a:font script="Syrj" typeface="Estrangelo Edessa"/>
-        <a:font script="Syre" typeface="Estrangelo Edessa"/>
-        <a:font script="Sora" typeface="Nirmala UI"/>
-        <a:font script="Tale" typeface="Microsoft Tai Le"/>
-        <a:font script="Talu" typeface="Microsoft New Tai Lue"/>
-        <a:font script="Tfng" typeface="Ebrima"/>
-      </a:minorFont>
-    </a:fontScheme>
-    <a:fmtScheme name="Office">
-      <a:fillStyleLst>
-        <a:solidFill>
-          <a:schemeClr val="phClr"/>
-        </a:solidFill>
-        <a:gradFill rotWithShape="1">
-          <a:gsLst>
-            <a:gs pos="0">
-              <a:schemeClr val="phClr">
-                <a:lumMod val="110000"/>
-                <a:satMod val="105000"/>
-                <a:tint val="67000"/>
-              </a:schemeClr>
-            </a:gs>
-            <a:gs pos="50000">
-              <a:schemeClr val="phClr">
-                <a:lumMod val="105000"/>
-                <a:satMod val="103000"/>
-                <a:tint val="73000"/>
-              </a:schemeClr>
-            </a:gs>
-            <a:gs pos="100000">
-              <a:schemeClr val="phClr">
-                <a:lumMod val="105000"/>
-                <a:satMod val="109000"/>
-                <a:tint val="81000"/>
-              </a:schemeClr>
-            </a:gs>
-          </a:gsLst>
-          <a:lin ang="5400000" scaled="0"/>
-        </a:gradFill>
-        <a:gradFill rotWithShape="1">
-          <a:gsLst>
-            <a:gs pos="0">
-              <a:schemeClr val="phClr">
-                <a:satMod val="103000"/>
-                <a:lumMod val="102000"/>
-                <a:tint val="94000"/>
-              </a:schemeClr>
-            </a:gs>
-            <a:gs pos="50000">
-              <a:schemeClr val="phClr">
-                <a:satMod val="110000"/>
-                <a:lumMod val="100000"/>
-                <a:shade val="100000"/>
-              </a:schemeClr>
-            </a:gs>
-            <a:gs pos="100000">
-              <a:schemeClr val="phClr">
-                <a:lumMod val="99000"/>
-                <a:satMod val="120000"/>
-                <a:shade val="78000"/>
-              </a:schemeClr>
-            </a:gs>
-          </a:gsLst>
-          <a:lin ang="5400000" scaled="0"/>
-        </a:gradFill>
-      </a:fillStyleLst>
-      <a:lnStyleLst>
-        <a:ln w="6350" cap="flat" cmpd="sng" algn="ctr">
-          <a:solidFill>
-            <a:schemeClr val="phClr"/>
-          </a:solidFill>
-          <a:prstDash val="solid"/>
-          <a:miter lim="800000"/>
-        </a:ln>
-        <a:ln w="12700" cap="flat" cmpd="sng" algn="ctr">
-          <a:solidFill>
-            <a:schemeClr val="phClr"/>
-          </a:solidFill>
-          <a:prstDash val="solid"/>
-          <a:miter lim="800000"/>
-        </a:ln>
-        <a:ln w="19050" cap="flat" cmpd="sng" algn="ctr">
-          <a:solidFill>
-            <a:schemeClr val="phClr"/>
-          </a:solidFill>
-          <a:prstDash val="solid"/>
-          <a:miter lim="800000"/>
-        </a:ln>
-      </a:lnStyleLst>
-      <a:effectStyleLst>
-        <a:effectStyle>
-          <a:effectLst/>
-        </a:effectStyle>
-        <a:effectStyle>
-          <a:effectLst/>
-        </a:effectStyle>
-        <a:effectStyle>
-          <a:effectLst>
-            <a:outerShdw blurRad="57150" dist="19050" dir="5400000" algn="ctr" rotWithShape="0">
-              <a:srgbClr val="000000">
-                <a:alpha val="63000"/>
-              </a:srgbClr>
-            </a:outerShdw>
-          </a:effectLst>
-        </a:effectStyle>
-      </a:effectStyleLst>
-      <a:bgFillStyleLst>
-        <a:solidFill>
-          <a:schemeClr val="phClr"/>
-        </a:solidFill>
-        <a:solidFill>
-          <a:schemeClr val="phClr">
-            <a:tint val="95000"/>
-            <a:satMod val="170000"/>
-          </a:schemeClr>
-        </a:solidFill>
-        <a:gradFill rotWithShape="1">
-          <a:gsLst>
-            <a:gs pos="0">
-              <a:schemeClr val="phClr">
-                <a:tint val="93000"/>
-                <a:satMod val="150000"/>
-                <a:shade val="98000"/>
-                <a:lumMod val="102000"/>
-              </a:schemeClr>
-            </a:gs>
-            <a:gs pos="50000">
-              <a:schemeClr val="phClr">
-                <a:tint val="98000"/>
-                <a:satMod val="130000"/>
-                <a:shade val="90000"/>
-                <a:lumMod val="103000"/>
-              </a:schemeClr>
-            </a:gs>
-            <a:gs pos="100000">
-              <a:schemeClr val="phClr">
-                <a:shade val="63000"/>
-                <a:satMod val="120000"/>
-              </a:schemeClr>
-            </a:gs>
-          </a:gsLst>
-          <a:lin ang="5400000" scaled="0"/>
-        </a:gradFill>
-      </a:bgFillStyleLst>
-    </a:fmtScheme>
-  </a:themeElements>
-  <a:objectDefaults/>
-  <a:extraClrSchemeLst/>
-  <a:extLst>
-    <a:ext uri="{05A4C25C-085E-4340-85A3-A5531E510DB2}">
-      <thm15:themeFamily xmlns:thm15="http://schemas.microsoft.com/office/thememl/2012/main" name="Office Theme" id="{62F939B6-93AF-4DB8-9C6B-D6C7DFDC589F}" vid="{4A3C46E8-61CC-4603-A589-7422A47A8E4A}"/>
-    </a:ext>
-  </a:extLst>
-</a:theme>
 </file>
--- a/courseware/202609_ADS_W02_VM_Shell_DevEnv.pptx
+++ b/courseware/202609_ADS_W02_VM_Shell_DevEnv.pptx
@@ -13518,7 +13518,17 @@
                 <a:latin typeface="Segoe UI"/>
                 <a:ea typeface="微软雅黑"/>
               </a:rPr>
-              <a:t>忘 `int()`</a:t>
+              <a:t>忘 </a:t>
+            </a:r>
+            <a:r>
+              <a:rPr sz="1879" b="1" i="0">
+                <a:solidFill>
+                  <a:srgbClr val="12395B"/>
+                </a:solidFill>
+                <a:latin typeface="Consolas"/>
+                <a:ea typeface="Consolas"/>
+              </a:rPr>
+              <a:t>int()</a:t>
             </a:r>
             <a:r>
               <a:rPr sz="2000" b="0" i="0">
@@ -13548,12 +13558,12 @@
                 <a:latin typeface="Segoe UI"/>
                 <a:ea typeface="微软雅黑"/>
               </a:rPr>
-              <a:t>、**</a:t>
-            </a:r>
-            <a:r>
-              <a:rPr sz="1879" b="0" i="0">
-                <a:solidFill>
-                  <a:srgbClr val="242A33"/>
+              <a:t>、</a:t>
+            </a:r>
+            <a:r>
+              <a:rPr sz="1879" b="1" i="0">
+                <a:solidFill>
+                  <a:srgbClr val="12395B"/>
                 </a:solidFill>
                 <a:latin typeface="Consolas"/>
                 <a:ea typeface="Consolas"/>
@@ -13561,14 +13571,14 @@
               <a:t>[[0]*n]*m</a:t>
             </a:r>
             <a:r>
-              <a:rPr sz="2000" b="0" i="0">
-                <a:solidFill>
-                  <a:srgbClr val="242A33"/>
+              <a:rPr sz="2000" b="1" i="0">
+                <a:solidFill>
+                  <a:srgbClr val="12395B"/>
                 </a:solidFill>
                 <a:latin typeface="Segoe UI"/>
                 <a:ea typeface="微软雅黑"/>
               </a:rPr>
-              <a:t> 别名陷阱**</a:t>
+              <a:t> 别名陷阱</a:t>
             </a:r>
           </a:p>
           <a:p>
